--- a/docs/Conventional_Commits_and_Release_Please.pptx
+++ b/docs/Conventional_Commits_and_Release_Please.pptx
@@ -18,22 +18,24 @@
     <p:sldId id="266" r:id="rId12"/>
     <p:sldId id="267" r:id="rId13"/>
     <p:sldId id="268" r:id="rId14"/>
+    <p:sldId id="269" r:id="rId15"/>
+    <p:sldId id="270" r:id="rId16"/>
   </p:sldIdLst>
   <p:notesMasterIdLst>
-    <p:notesMasterId r:id="rId15"/>
+    <p:notesMasterId r:id="rId17"/>
   </p:notesMasterIdLst>
   <p:sldSz cx="12192000" cy="6858000"/>
   <p:notesSz cx="6858000" cy="12192000"/>
   <p:embeddedFontLst>
     <p:embeddedFont>
       <p:font typeface="Space Grotesk" pitchFamily="34" charset="0"/>
-      <p:regular r:id="rId20"/>
-      <p:bold r:id="rId21"/>
+      <p:regular r:id="rId22"/>
+      <p:bold r:id="rId23"/>
     </p:embeddedFont>
     <p:embeddedFont>
       <p:font typeface="JetBrains Mono" panose="02000009000000000000" pitchFamily="49" charset="0"/>
-      <p:regular r:id="rId22"/>
-      <p:bold r:id="rId23"/>
+      <p:regular r:id="rId24"/>
+      <p:bold r:id="rId25"/>
     </p:embeddedFont>
   </p:embeddedFontLst>
   <p:defaultTextStyle>
@@ -614,7 +616,7 @@
           <a:p>
             <a:r>
               <a:rPr lang="en-US" dirty="0"/>
-              <a:t>Point out that the changelog on the left is the same text as our commit messages from the before and after slide. Nobody wrote release notes by hand. If a message is wrong, you can fix it before merging the release PR.</a:t>
+              <a:t>The key mental model: Release Please keeps one open pull request that always represents "the next release." Every time something merges to main, it recalculates the version and rewrites the changelog in that PR. Nothing is published until a person merges it. After merging, it creates the tag and the GitHub Release, and the workflow can trigger follow-up steps like publishing a package or deploying.</a:t>
             </a:r>
             <a:endParaRPr lang="en-US" dirty="0"/>
           </a:p>
@@ -702,7 +704,7 @@
           <a:p>
             <a:r>
               <a:rPr lang="en-US" dirty="0"/>
-              <a:t>This is the minimal setup for a single-package repo. Swap release-type for your language: simple just uses a version.txt file and works for anything. For repos with multiple packages, Release Please supports a release-please-config.json and a .release-please-manifest.json. Check the action's README for current inputs and outputs before adopting, since the action evolves.</a:t>
+              <a:t>Point out that the changelog on the left is the same text as our commit messages from the before and after slide. Nobody wrote release notes by hand. If a message is wrong, you can fix it before merging the release PR.</a:t>
             </a:r>
             <a:endParaRPr lang="en-US" dirty="0"/>
           </a:p>
@@ -790,7 +792,7 @@
           <a:p>
             <a:r>
               <a:rPr lang="en-US" dirty="0"/>
-              <a:t>The convention only works if it is followed, so automate the enforcement. Squash merging is the biggest win: contributors can commit however they like on their branch, and only the PR title has to follow the format. The gotcha at the bottom trips up almost every team the first time: GitHub deliberately does not trigger workflows from events created by the default token, so your tests will not run on the release PR unless you use a separate token.</a:t>
+              <a:t>This is the minimal setup for a single-package repo. Swap release-type for your language: simple just uses a version.txt file and works for anything. For repos with multiple packages, Release Please supports a release-please-config.json and a .release-please-manifest.json. Check the action's README for current inputs and outputs before adopting, since the action evolves.</a:t>
             </a:r>
             <a:endParaRPr lang="en-US" dirty="0"/>
           </a:p>
@@ -878,7 +880,7 @@
           <a:p>
             <a:r>
               <a:rPr lang="en-US" dirty="0"/>
-              <a:t>Close by repeating the three habits. Then open it up for questions. Good follow-ups: which repo should pilot this first, and who will add the PR title check.</a:t>
+              <a:t>Release Please only ever reads commits on the main branch. It never looks at PR titles directly. Squash merging is what connects the two: GitHub turns the whole PR into one commit, and with the right setting that commit's message is the PR title. That is why we lint PR titles instead of every commit. With merge commits or rebase merges, every branch commit lands on main as-is, so every single one has to follow the convention, and anything that does not is silently skipped. The setting to change is under the repo's Settings, General, Pull Requests: allow squash merging, and set the default commit message to Pull request title. Without it, GitHub's default uses the commit message when a PR has only one commit, which bypasses the title check.</a:t>
             </a:r>
             <a:endParaRPr lang="en-US" dirty="0"/>
           </a:p>
@@ -902,6 +904,182 @@
             <a:fld id="{F7021451-1387-4CA6-816F-3879F97B5CBC}" type="slidenum">
               <a:rPr lang="en-US"/>
               <a:t>13</a:t>
+            </a:fld>
+            <a:endParaRPr lang="en-US"/>
+          </a:p>
+        </p:txBody>
+      </p:sp>
+    </p:spTree>
+    <p:extLst>
+      <p:ext uri="{BB962C8B-B14F-4D97-AF65-F5344CB8AC3E}">
+        <p14:creationId xmlns:p14="http://schemas.microsoft.com/office/powerpoint/2010/main" val="1024086991"/>
+      </p:ext>
+    </p:extLst>
+  </p:cSld>
+  <p:clrMapOvr>
+    <a:masterClrMapping/>
+  </p:clrMapOvr>
+</p:notes>
+</file>
+
+<file path=ppt/notesSlides/notesSlide14.xml><?xml version="1.0" encoding="utf-8"?>
+<p:notes xmlns:a="http://schemas.openxmlformats.org/drawingml/2006/main" xmlns:r="http://schemas.openxmlformats.org/officeDocument/2006/relationships" xmlns:p="http://schemas.openxmlformats.org/presentationml/2006/main">
+  <p:cSld>
+    <p:spTree>
+      <p:nvGrpSpPr>
+        <p:cNvPr id="1" name=""/>
+        <p:cNvGrpSpPr/>
+        <p:nvPr/>
+      </p:nvGrpSpPr>
+      <p:grpSpPr>
+        <a:xfrm>
+          <a:off x="0" y="0"/>
+          <a:ext cx="0" cy="0"/>
+          <a:chOff x="0" y="0"/>
+          <a:chExt cx="0" cy="0"/>
+        </a:xfrm>
+      </p:grpSpPr>
+      <p:sp>
+        <p:nvSpPr>
+          <p:cNvPr id="2" name="Slide Image Placeholder 1"/>
+          <p:cNvSpPr>
+            <a:spLocks noGrp="1" noRot="1" noChangeAspect="1"/>
+          </p:cNvSpPr>
+          <p:nvPr>
+            <p:ph type="sldImg"/>
+          </p:nvPr>
+        </p:nvSpPr>
+        <p:spPr/>
+      </p:sp>
+      <p:sp>
+        <p:nvSpPr>
+          <p:cNvPr id="3" name="Notes Placeholder 2"/>
+          <p:cNvSpPr>
+            <a:spLocks noGrp="1"/>
+          </p:cNvSpPr>
+          <p:nvPr>
+            <p:ph type="body" idx="1"/>
+          </p:nvPr>
+        </p:nvSpPr>
+        <p:spPr/>
+        <p:txBody>
+          <a:bodyPr/>
+          <a:lstStyle/>
+          <a:p>
+            <a:r>
+              <a:rPr lang="en-US" dirty="0"/>
+              <a:t>The convention only works if it is followed, so automate the enforcement. Squash merging is the biggest win: contributors can commit however they like on their branch, and only the PR title has to follow the format. The gotcha at the bottom trips up almost every team the first time: GitHub deliberately does not trigger workflows from events created by the default token, so your tests will not run on the release PR unless you use a separate token.</a:t>
+            </a:r>
+            <a:endParaRPr lang="en-US" dirty="0"/>
+          </a:p>
+        </p:txBody>
+      </p:sp>
+      <p:sp>
+        <p:nvSpPr>
+          <p:cNvPr id="4" name="Slide Number Placeholder 3"/>
+          <p:cNvSpPr>
+            <a:spLocks noGrp="1"/>
+          </p:cNvSpPr>
+          <p:nvPr>
+            <p:ph type="sldNum" sz="quarter" idx="10"/>
+          </p:nvPr>
+        </p:nvSpPr>
+        <p:spPr/>
+        <p:txBody>
+          <a:bodyPr/>
+          <a:lstStyle/>
+          <a:p>
+            <a:fld id="{F7021451-1387-4CA6-816F-3879F97B5CBC}" type="slidenum">
+              <a:rPr lang="en-US"/>
+              <a:t>14</a:t>
+            </a:fld>
+            <a:endParaRPr lang="en-US"/>
+          </a:p>
+        </p:txBody>
+      </p:sp>
+    </p:spTree>
+    <p:extLst>
+      <p:ext uri="{BB962C8B-B14F-4D97-AF65-F5344CB8AC3E}">
+        <p14:creationId xmlns:p14="http://schemas.microsoft.com/office/powerpoint/2010/main" val="1024086991"/>
+      </p:ext>
+    </p:extLst>
+  </p:cSld>
+  <p:clrMapOvr>
+    <a:masterClrMapping/>
+  </p:clrMapOvr>
+</p:notes>
+</file>
+
+<file path=ppt/notesSlides/notesSlide15.xml><?xml version="1.0" encoding="utf-8"?>
+<p:notes xmlns:a="http://schemas.openxmlformats.org/drawingml/2006/main" xmlns:r="http://schemas.openxmlformats.org/officeDocument/2006/relationships" xmlns:p="http://schemas.openxmlformats.org/presentationml/2006/main">
+  <p:cSld>
+    <p:spTree>
+      <p:nvGrpSpPr>
+        <p:cNvPr id="1" name=""/>
+        <p:cNvGrpSpPr/>
+        <p:nvPr/>
+      </p:nvGrpSpPr>
+      <p:grpSpPr>
+        <a:xfrm>
+          <a:off x="0" y="0"/>
+          <a:ext cx="0" cy="0"/>
+          <a:chOff x="0" y="0"/>
+          <a:chExt cx="0" cy="0"/>
+        </a:xfrm>
+      </p:grpSpPr>
+      <p:sp>
+        <p:nvSpPr>
+          <p:cNvPr id="2" name="Slide Image Placeholder 1"/>
+          <p:cNvSpPr>
+            <a:spLocks noGrp="1" noRot="1" noChangeAspect="1"/>
+          </p:cNvSpPr>
+          <p:nvPr>
+            <p:ph type="sldImg"/>
+          </p:nvPr>
+        </p:nvSpPr>
+        <p:spPr/>
+      </p:sp>
+      <p:sp>
+        <p:nvSpPr>
+          <p:cNvPr id="3" name="Notes Placeholder 2"/>
+          <p:cNvSpPr>
+            <a:spLocks noGrp="1"/>
+          </p:cNvSpPr>
+          <p:nvPr>
+            <p:ph type="body" idx="1"/>
+          </p:nvPr>
+        </p:nvSpPr>
+        <p:spPr/>
+        <p:txBody>
+          <a:bodyPr/>
+          <a:lstStyle/>
+          <a:p>
+            <a:r>
+              <a:rPr lang="en-US" dirty="0"/>
+              <a:t>Close by repeating the three habits. Then open it up for questions. Good follow-ups: which repo should pilot this first, and who will add the PR title check.</a:t>
+            </a:r>
+            <a:endParaRPr lang="en-US" dirty="0"/>
+          </a:p>
+        </p:txBody>
+      </p:sp>
+      <p:sp>
+        <p:nvSpPr>
+          <p:cNvPr id="4" name="Slide Number Placeholder 3"/>
+          <p:cNvSpPr>
+            <a:spLocks noGrp="1"/>
+          </p:cNvSpPr>
+          <p:nvPr>
+            <p:ph type="sldNum" sz="quarter" idx="10"/>
+          </p:nvPr>
+        </p:nvSpPr>
+        <p:spPr/>
+        <p:txBody>
+          <a:bodyPr/>
+          <a:lstStyle/>
+          <a:p>
+            <a:fld id="{F7021451-1387-4CA6-816F-3879F97B5CBC}" type="slidenum">
+              <a:rPr lang="en-US"/>
+              <a:t>15</a:t>
             </a:fld>
             <a:endParaRPr lang="en-US"/>
           </a:p>
@@ -1406,7 +1584,7 @@
           <a:p>
             <a:r>
               <a:rPr lang="en-US" dirty="0"/>
-              <a:t>Notice the "after" column reads like release notes already. That is the point: the changelog is written one commit at a time, by the person who knows the change best, at the moment they know it best.</a:t>
+              <a:t>Chore is the catch-all for maintenance: dependency bumps, config tweaks, renaming files, cleaning up scripts. It is still recorded in git history, so nothing is lost, but it does not trigger a release and Release Please leaves it out of the changelog by default. Fun detail: Release Please's own release PR uses a chore commit, chore(main): release 2.5.0, because cutting a release is housekeeping too. One judgment call: if a dependency upgrade fixes a bug users would notice, write it as fix(deps) so it ships and shows up in the notes.</a:t>
             </a:r>
             <a:endParaRPr lang="en-US" dirty="0"/>
           </a:p>
@@ -1494,7 +1672,7 @@
           <a:p>
             <a:r>
               <a:rPr lang="en-US" dirty="0"/>
-              <a:t>Now that our commits carry meaning, we need something to read them. Release Please is an open source GitHub Action maintained by Google. It never pushes a release on its own. It proposes one, and a human approves it.</a:t>
+              <a:t>Notice the "after" column reads like release notes already. That is the point: the changelog is written one commit at a time, by the person who knows the change best, at the moment they know it best.</a:t>
             </a:r>
             <a:endParaRPr lang="en-US" dirty="0"/>
           </a:p>
@@ -1582,7 +1760,7 @@
           <a:p>
             <a:r>
               <a:rPr lang="en-US" dirty="0"/>
-              <a:t>The key mental model: Release Please keeps one open pull request that always represents "the next release." Every time something merges to main, it recalculates the version and rewrites the changelog in that PR. Nothing is published until a person merges it. After merging, it creates the tag and the GitHub Release, and the workflow can trigger follow-up steps like publishing a package or deploying.</a:t>
+              <a:t>Now that our commits carry meaning, we need something to read them. Release Please is an open source GitHub Action maintained by Google. It never pushes a release on its own. It proposes one, and a human approves it.</a:t>
             </a:r>
             <a:endParaRPr lang="en-US" dirty="0"/>
           </a:p>
@@ -2399,6 +2577,905 @@
     <p:bg>
       <p:bgPr>
         <a:solidFill>
+          <a:srgbClr val="F6F3EC"/>
+        </a:solidFill>
+      </p:bgPr>
+    </p:bg>
+    <p:spTree>
+      <p:nvGrpSpPr>
+        <p:cNvPr id="1" name=""/>
+        <p:cNvGrpSpPr/>
+        <p:nvPr/>
+      </p:nvGrpSpPr>
+      <p:grpSpPr>
+        <a:xfrm>
+          <a:off x="0" y="0"/>
+          <a:ext cx="0" cy="0"/>
+          <a:chOff x="0" y="0"/>
+          <a:chExt cx="0" cy="0"/>
+        </a:xfrm>
+      </p:grpSpPr>
+      <p:sp>
+        <p:nvSpPr>
+          <p:cNvPr id="2" name="Text 0"/>
+          <p:cNvSpPr/>
+          <p:nvPr>
+            <p:ph type="title"/>
+          </p:nvPr>
+        </p:nvSpPr>
+        <p:spPr>
+          <a:xfrm>
+            <a:off x="812800" y="812800"/>
+            <a:ext cx="11379200" cy="603741"/>
+          </a:xfrm>
+          <a:prstGeom prst="rect">
+            <a:avLst/>
+          </a:prstGeom>
+          <a:noFill/>
+          <a:ln/>
+        </p:spPr>
+        <p:txBody>
+          <a:bodyPr wrap="square" lIns="0" tIns="0" rIns="0" bIns="0" rtlCol="0" anchor="t">
+            <a:normAutofit/>
+          </a:bodyPr>
+          <a:lstStyle/>
+          <a:p>
+            <a:pPr algn="l" indent="0" marL="0">
+              <a:lnSpc>
+                <a:spcPts val="3960"/>
+              </a:lnSpc>
+              <a:buNone/>
+            </a:pPr>
+            <a:r>
+              <a:rPr lang="en-US" sz="3600" b="1" i="0" spc="-50" kern="0" dirty="0">
+                <a:solidFill>
+                  <a:srgbClr val="1B1E26"/>
+                </a:solidFill>
+                <a:latin typeface="Space Grotesk" pitchFamily="34" charset="0"/>
+                <a:ea typeface="Space Grotesk" pitchFamily="34" charset="-122"/>
+                <a:cs typeface="Space Grotesk" pitchFamily="34" charset="-120"/>
+              </a:rPr>
+              <a:t>How it works: one PR that grows with you</a:t>
+            </a:r>
+            <a:endParaRPr lang="en-US" sz="3600" dirty="0"/>
+          </a:p>
+        </p:txBody>
+      </p:sp>
+      <p:sp>
+        <p:nvSpPr>
+          <p:cNvPr id="3" name="Shape 1"/>
+          <p:cNvSpPr/>
+          <p:nvPr/>
+        </p:nvSpPr>
+        <p:spPr>
+          <a:xfrm>
+            <a:off x="819150" y="2017030"/>
+            <a:ext cx="2253948" cy="2453973"/>
+          </a:xfrm>
+          <a:prstGeom prst="roundRect">
+            <a:avLst>
+              <a:gd name="adj" fmla="val 5353"/>
+            </a:avLst>
+          </a:prstGeom>
+          <a:solidFill>
+            <a:srgbClr val="FFFDF8"/>
+          </a:solidFill>
+          <a:ln w="12700">
+            <a:solidFill>
+              <a:srgbClr val="E2DDD2"/>
+            </a:solidFill>
+            <a:prstDash val="solid"/>
+          </a:ln>
+        </p:spPr>
+      </p:sp>
+      <p:sp>
+        <p:nvSpPr>
+          <p:cNvPr id="4" name="Text 2"/>
+          <p:cNvSpPr/>
+          <p:nvPr/>
+        </p:nvSpPr>
+        <p:spPr>
+          <a:xfrm>
+            <a:off x="1028095" y="2225979"/>
+            <a:ext cx="1891139" cy="434332"/>
+          </a:xfrm>
+          <a:prstGeom prst="rect">
+            <a:avLst/>
+          </a:prstGeom>
+          <a:noFill/>
+          <a:ln/>
+        </p:spPr>
+        <p:txBody>
+          <a:bodyPr wrap="square" lIns="0" tIns="0" rIns="0" bIns="0" rtlCol="0" anchor="t">
+            <a:normAutofit/>
+          </a:bodyPr>
+          <a:lstStyle/>
+          <a:p>
+            <a:pPr algn="l" indent="0" marL="0">
+              <a:lnSpc>
+                <a:spcPts val="2800"/>
+              </a:lnSpc>
+              <a:buNone/>
+            </a:pPr>
+            <a:r>
+              <a:rPr lang="en-US" sz="2000" b="1" dirty="0">
+                <a:solidFill>
+                  <a:srgbClr val="B8441B"/>
+                </a:solidFill>
+                <a:latin typeface="JetBrains Mono" pitchFamily="49" charset="0"/>
+                <a:ea typeface="JetBrains Mono" pitchFamily="49" charset="-122"/>
+                <a:cs typeface="JetBrains Mono" pitchFamily="49" charset="-120"/>
+              </a:rPr>
+              <a:t>01</a:t>
+            </a:r>
+            <a:endParaRPr lang="en-US" sz="2000" dirty="0"/>
+          </a:p>
+        </p:txBody>
+      </p:sp>
+      <p:sp>
+        <p:nvSpPr>
+          <p:cNvPr id="5" name="Text 3"/>
+          <p:cNvSpPr/>
+          <p:nvPr/>
+        </p:nvSpPr>
+        <p:spPr>
+          <a:xfrm>
+            <a:off x="1028095" y="2736509"/>
+            <a:ext cx="1891139" cy="621242"/>
+          </a:xfrm>
+          <a:prstGeom prst="rect">
+            <a:avLst/>
+          </a:prstGeom>
+          <a:noFill/>
+          <a:ln/>
+        </p:spPr>
+        <p:txBody>
+          <a:bodyPr wrap="square" lIns="0" tIns="0" rIns="0" bIns="0" rtlCol="0" anchor="t">
+            <a:normAutofit/>
+          </a:bodyPr>
+          <a:lstStyle/>
+          <a:p>
+            <a:pPr algn="l" indent="0" marL="0">
+              <a:lnSpc>
+                <a:spcPts val="2040"/>
+              </a:lnSpc>
+              <a:buNone/>
+            </a:pPr>
+            <a:r>
+              <a:rPr lang="en-US" sz="1700" b="1" dirty="0">
+                <a:solidFill>
+                  <a:srgbClr val="1B1E26"/>
+                </a:solidFill>
+                <a:latin typeface="Space Grotesk" pitchFamily="34" charset="0"/>
+                <a:ea typeface="Space Grotesk" pitchFamily="34" charset="-122"/>
+                <a:cs typeface="Space Grotesk" pitchFamily="34" charset="-120"/>
+              </a:rPr>
+              <a:t>You merge to main</a:t>
+            </a:r>
+            <a:endParaRPr lang="en-US" sz="1700" dirty="0"/>
+          </a:p>
+        </p:txBody>
+      </p:sp>
+      <p:sp>
+        <p:nvSpPr>
+          <p:cNvPr id="6" name="Text 4"/>
+          <p:cNvSpPr/>
+          <p:nvPr/>
+        </p:nvSpPr>
+        <p:spPr>
+          <a:xfrm>
+            <a:off x="1028095" y="3433955"/>
+            <a:ext cx="1891139" cy="853508"/>
+          </a:xfrm>
+          <a:prstGeom prst="rect">
+            <a:avLst/>
+          </a:prstGeom>
+          <a:noFill/>
+          <a:ln/>
+        </p:spPr>
+        <p:txBody>
+          <a:bodyPr wrap="square" lIns="0" tIns="0" rIns="0" bIns="0" rtlCol="0" anchor="t">
+            <a:normAutofit/>
+          </a:bodyPr>
+          <a:lstStyle/>
+          <a:p>
+            <a:pPr algn="l" indent="0" marL="0">
+              <a:lnSpc>
+                <a:spcPts val="1890"/>
+              </a:lnSpc>
+              <a:buNone/>
+            </a:pPr>
+            <a:r>
+              <a:rPr lang="en-US" sz="1400" dirty="0">
+                <a:solidFill>
+                  <a:srgbClr val="5D6270"/>
+                </a:solidFill>
+                <a:latin typeface="Space Grotesk" pitchFamily="34" charset="0"/>
+                <a:ea typeface="Space Grotesk" pitchFamily="34" charset="-122"/>
+                <a:cs typeface="Space Grotesk" pitchFamily="34" charset="-120"/>
+              </a:rPr>
+              <a:t>Normal PRs, with conventional commit messages.</a:t>
+            </a:r>
+            <a:endParaRPr lang="en-US" sz="1400" dirty="0"/>
+          </a:p>
+        </p:txBody>
+      </p:sp>
+      <p:pic>
+        <p:nvPicPr>
+          <p:cNvPr id="7" name="Image 0" descr="arrow-right">    </p:cNvPr>
+          <p:cNvPicPr>
+            <a:picLocks noChangeAspect="1"/>
+          </p:cNvPicPr>
+          <p:nvPr/>
+        </p:nvPicPr>
+        <p:blipFill>
+          <a:blip r:embed="rId1"/>
+          <a:srcRect l="0" r="0" t="0" b="0"/>
+          <a:stretch/>
+        </p:blipFill>
+        <p:spPr>
+          <a:xfrm>
+            <a:off x="3181048" y="3155119"/>
+            <a:ext cx="304800" cy="177800"/>
+          </a:xfrm>
+          <a:prstGeom prst="rect">
+            <a:avLst/>
+          </a:prstGeom>
+        </p:spPr>
+      </p:pic>
+      <p:sp>
+        <p:nvSpPr>
+          <p:cNvPr id="8" name="Shape 5"/>
+          <p:cNvSpPr/>
+          <p:nvPr/>
+        </p:nvSpPr>
+        <p:spPr>
+          <a:xfrm>
+            <a:off x="3593798" y="1878998"/>
+            <a:ext cx="2253948" cy="2730009"/>
+          </a:xfrm>
+          <a:prstGeom prst="roundRect">
+            <a:avLst>
+              <a:gd name="adj" fmla="val 5353"/>
+            </a:avLst>
+          </a:prstGeom>
+          <a:solidFill>
+            <a:srgbClr val="FFFDF8"/>
+          </a:solidFill>
+          <a:ln w="12700">
+            <a:solidFill>
+              <a:srgbClr val="E2DDD2"/>
+            </a:solidFill>
+            <a:prstDash val="solid"/>
+          </a:ln>
+        </p:spPr>
+      </p:sp>
+      <p:sp>
+        <p:nvSpPr>
+          <p:cNvPr id="9" name="Text 6"/>
+          <p:cNvSpPr/>
+          <p:nvPr/>
+        </p:nvSpPr>
+        <p:spPr>
+          <a:xfrm>
+            <a:off x="3802743" y="2087941"/>
+            <a:ext cx="1891139" cy="434332"/>
+          </a:xfrm>
+          <a:prstGeom prst="rect">
+            <a:avLst/>
+          </a:prstGeom>
+          <a:noFill/>
+          <a:ln/>
+        </p:spPr>
+        <p:txBody>
+          <a:bodyPr wrap="square" lIns="0" tIns="0" rIns="0" bIns="0" rtlCol="0" anchor="t">
+            <a:normAutofit/>
+          </a:bodyPr>
+          <a:lstStyle/>
+          <a:p>
+            <a:pPr algn="l" indent="0" marL="0">
+              <a:lnSpc>
+                <a:spcPts val="2800"/>
+              </a:lnSpc>
+              <a:buNone/>
+            </a:pPr>
+            <a:r>
+              <a:rPr lang="en-US" sz="2000" b="1" dirty="0">
+                <a:solidFill>
+                  <a:srgbClr val="B8441B"/>
+                </a:solidFill>
+                <a:latin typeface="JetBrains Mono" pitchFamily="49" charset="0"/>
+                <a:ea typeface="JetBrains Mono" pitchFamily="49" charset="-122"/>
+                <a:cs typeface="JetBrains Mono" pitchFamily="49" charset="-120"/>
+              </a:rPr>
+              <a:t>02</a:t>
+            </a:r>
+            <a:endParaRPr lang="en-US" sz="2000" dirty="0"/>
+          </a:p>
+        </p:txBody>
+      </p:sp>
+      <p:sp>
+        <p:nvSpPr>
+          <p:cNvPr id="10" name="Text 7"/>
+          <p:cNvSpPr/>
+          <p:nvPr/>
+        </p:nvSpPr>
+        <p:spPr>
+          <a:xfrm>
+            <a:off x="3802743" y="2598477"/>
+            <a:ext cx="1891139" cy="621242"/>
+          </a:xfrm>
+          <a:prstGeom prst="rect">
+            <a:avLst/>
+          </a:prstGeom>
+          <a:noFill/>
+          <a:ln/>
+        </p:spPr>
+        <p:txBody>
+          <a:bodyPr wrap="square" lIns="0" tIns="0" rIns="0" bIns="0" rtlCol="0" anchor="t">
+            <a:normAutofit/>
+          </a:bodyPr>
+          <a:lstStyle/>
+          <a:p>
+            <a:pPr algn="l" indent="0" marL="0">
+              <a:lnSpc>
+                <a:spcPts val="2040"/>
+              </a:lnSpc>
+              <a:buNone/>
+            </a:pPr>
+            <a:r>
+              <a:rPr lang="en-US" sz="1700" b="1" dirty="0">
+                <a:solidFill>
+                  <a:srgbClr val="1B1E26"/>
+                </a:solidFill>
+                <a:latin typeface="Space Grotesk" pitchFamily="34" charset="0"/>
+                <a:ea typeface="Space Grotesk" pitchFamily="34" charset="-122"/>
+                <a:cs typeface="Space Grotesk" pitchFamily="34" charset="-120"/>
+              </a:rPr>
+              <a:t>A release PR appears</a:t>
+            </a:r>
+            <a:endParaRPr lang="en-US" sz="1700" dirty="0"/>
+          </a:p>
+        </p:txBody>
+      </p:sp>
+      <p:sp>
+        <p:nvSpPr>
+          <p:cNvPr id="11" name="Text 8"/>
+          <p:cNvSpPr/>
+          <p:nvPr/>
+        </p:nvSpPr>
+        <p:spPr>
+          <a:xfrm>
+            <a:off x="3802743" y="3295917"/>
+            <a:ext cx="1891139" cy="1129544"/>
+          </a:xfrm>
+          <a:prstGeom prst="rect">
+            <a:avLst/>
+          </a:prstGeom>
+          <a:noFill/>
+          <a:ln/>
+        </p:spPr>
+        <p:txBody>
+          <a:bodyPr wrap="square" lIns="0" tIns="0" rIns="0" bIns="0" rtlCol="0" anchor="t">
+            <a:normAutofit/>
+          </a:bodyPr>
+          <a:lstStyle/>
+          <a:p>
+            <a:pPr algn="l" indent="0" marL="0">
+              <a:lnSpc>
+                <a:spcPts val="1890"/>
+              </a:lnSpc>
+              <a:buNone/>
+            </a:pPr>
+            <a:r>
+              <a:rPr lang="en-US" sz="1400" dirty="0">
+                <a:solidFill>
+                  <a:srgbClr val="5D6270"/>
+                </a:solidFill>
+                <a:latin typeface="Space Grotesk" pitchFamily="34" charset="0"/>
+                <a:ea typeface="Space Grotesk" pitchFamily="34" charset="-122"/>
+                <a:cs typeface="Space Grotesk" pitchFamily="34" charset="-120"/>
+              </a:rPr>
+              <a:t>Next version and changelog. It updates on every merge.</a:t>
+            </a:r>
+            <a:endParaRPr lang="en-US" sz="1400" dirty="0"/>
+          </a:p>
+        </p:txBody>
+      </p:sp>
+      <p:pic>
+        <p:nvPicPr>
+          <p:cNvPr id="12" name="Image 1" descr="arrow-right">    </p:cNvPr>
+          <p:cNvPicPr>
+            <a:picLocks noChangeAspect="1"/>
+          </p:cNvPicPr>
+          <p:nvPr/>
+        </p:nvPicPr>
+        <p:blipFill>
+          <a:blip r:embed="rId2"/>
+          <a:srcRect l="0" r="0" t="0" b="0"/>
+          <a:stretch/>
+        </p:blipFill>
+        <p:spPr>
+          <a:xfrm>
+            <a:off x="5955695" y="3155119"/>
+            <a:ext cx="304800" cy="177800"/>
+          </a:xfrm>
+          <a:prstGeom prst="rect">
+            <a:avLst/>
+          </a:prstGeom>
+        </p:spPr>
+      </p:pic>
+      <p:sp>
+        <p:nvSpPr>
+          <p:cNvPr id="13" name="Shape 9"/>
+          <p:cNvSpPr/>
+          <p:nvPr/>
+        </p:nvSpPr>
+        <p:spPr>
+          <a:xfrm>
+            <a:off x="6368445" y="1878998"/>
+            <a:ext cx="2253948" cy="2730009"/>
+          </a:xfrm>
+          <a:prstGeom prst="roundRect">
+            <a:avLst>
+              <a:gd name="adj" fmla="val 5353"/>
+            </a:avLst>
+          </a:prstGeom>
+          <a:solidFill>
+            <a:srgbClr val="FFFDF8"/>
+          </a:solidFill>
+          <a:ln w="12700">
+            <a:solidFill>
+              <a:srgbClr val="E2DDD2"/>
+            </a:solidFill>
+            <a:prstDash val="solid"/>
+          </a:ln>
+        </p:spPr>
+      </p:sp>
+      <p:sp>
+        <p:nvSpPr>
+          <p:cNvPr id="14" name="Text 10"/>
+          <p:cNvSpPr/>
+          <p:nvPr/>
+        </p:nvSpPr>
+        <p:spPr>
+          <a:xfrm>
+            <a:off x="6577391" y="2087941"/>
+            <a:ext cx="1891139" cy="434332"/>
+          </a:xfrm>
+          <a:prstGeom prst="rect">
+            <a:avLst/>
+          </a:prstGeom>
+          <a:noFill/>
+          <a:ln/>
+        </p:spPr>
+        <p:txBody>
+          <a:bodyPr wrap="square" lIns="0" tIns="0" rIns="0" bIns="0" rtlCol="0" anchor="t">
+            <a:normAutofit/>
+          </a:bodyPr>
+          <a:lstStyle/>
+          <a:p>
+            <a:pPr algn="l" indent="0" marL="0">
+              <a:lnSpc>
+                <a:spcPts val="2800"/>
+              </a:lnSpc>
+              <a:buNone/>
+            </a:pPr>
+            <a:r>
+              <a:rPr lang="en-US" sz="2000" b="1" dirty="0">
+                <a:solidFill>
+                  <a:srgbClr val="B8441B"/>
+                </a:solidFill>
+                <a:latin typeface="JetBrains Mono" pitchFamily="49" charset="0"/>
+                <a:ea typeface="JetBrains Mono" pitchFamily="49" charset="-122"/>
+                <a:cs typeface="JetBrains Mono" pitchFamily="49" charset="-120"/>
+              </a:rPr>
+              <a:t>03</a:t>
+            </a:r>
+            <a:endParaRPr lang="en-US" sz="2000" dirty="0"/>
+          </a:p>
+        </p:txBody>
+      </p:sp>
+      <p:sp>
+        <p:nvSpPr>
+          <p:cNvPr id="15" name="Text 11"/>
+          <p:cNvSpPr/>
+          <p:nvPr/>
+        </p:nvSpPr>
+        <p:spPr>
+          <a:xfrm>
+            <a:off x="6577391" y="2598477"/>
+            <a:ext cx="1891139" cy="621242"/>
+          </a:xfrm>
+          <a:prstGeom prst="rect">
+            <a:avLst/>
+          </a:prstGeom>
+          <a:noFill/>
+          <a:ln/>
+        </p:spPr>
+        <p:txBody>
+          <a:bodyPr wrap="square" lIns="0" tIns="0" rIns="0" bIns="0" rtlCol="0" anchor="t">
+            <a:normAutofit/>
+          </a:bodyPr>
+          <a:lstStyle/>
+          <a:p>
+            <a:pPr algn="l" indent="0" marL="0">
+              <a:lnSpc>
+                <a:spcPts val="2040"/>
+              </a:lnSpc>
+              <a:buNone/>
+            </a:pPr>
+            <a:r>
+              <a:rPr lang="en-US" sz="1700" b="1" dirty="0">
+                <a:solidFill>
+                  <a:srgbClr val="1B1E26"/>
+                </a:solidFill>
+                <a:latin typeface="Space Grotesk" pitchFamily="34" charset="0"/>
+                <a:ea typeface="Space Grotesk" pitchFamily="34" charset="-122"/>
+                <a:cs typeface="Space Grotesk" pitchFamily="34" charset="-120"/>
+              </a:rPr>
+              <a:t>You merge the release PR</a:t>
+            </a:r>
+            <a:endParaRPr lang="en-US" sz="1700" dirty="0"/>
+          </a:p>
+        </p:txBody>
+      </p:sp>
+      <p:sp>
+        <p:nvSpPr>
+          <p:cNvPr id="16" name="Text 12"/>
+          <p:cNvSpPr/>
+          <p:nvPr/>
+        </p:nvSpPr>
+        <p:spPr>
+          <a:xfrm>
+            <a:off x="6577391" y="3295917"/>
+            <a:ext cx="1891139" cy="1129544"/>
+          </a:xfrm>
+          <a:prstGeom prst="rect">
+            <a:avLst/>
+          </a:prstGeom>
+          <a:noFill/>
+          <a:ln/>
+        </p:spPr>
+        <p:txBody>
+          <a:bodyPr wrap="square" lIns="0" tIns="0" rIns="0" bIns="0" rtlCol="0" anchor="t">
+            <a:normAutofit/>
+          </a:bodyPr>
+          <a:lstStyle/>
+          <a:p>
+            <a:pPr algn="l" indent="0" marL="0">
+              <a:lnSpc>
+                <a:spcPts val="1890"/>
+              </a:lnSpc>
+              <a:buNone/>
+            </a:pPr>
+            <a:r>
+              <a:rPr lang="en-US" sz="1400" dirty="0">
+                <a:solidFill>
+                  <a:srgbClr val="5D6270"/>
+                </a:solidFill>
+                <a:latin typeface="Space Grotesk" pitchFamily="34" charset="0"/>
+                <a:ea typeface="Space Grotesk" pitchFamily="34" charset="-122"/>
+                <a:cs typeface="Space Grotesk" pitchFamily="34" charset="-120"/>
+              </a:rPr>
+              <a:t>Whenever you are ready to ship. That is the only button.</a:t>
+            </a:r>
+            <a:endParaRPr lang="en-US" sz="1400" dirty="0"/>
+          </a:p>
+        </p:txBody>
+      </p:sp>
+      <p:pic>
+        <p:nvPicPr>
+          <p:cNvPr id="17" name="Image 2" descr="arrow-right">    </p:cNvPr>
+          <p:cNvPicPr>
+            <a:picLocks noChangeAspect="1"/>
+          </p:cNvPicPr>
+          <p:nvPr/>
+        </p:nvPicPr>
+        <p:blipFill>
+          <a:blip r:embed="rId3"/>
+          <a:srcRect l="0" r="0" t="0" b="0"/>
+          <a:stretch/>
+        </p:blipFill>
+        <p:spPr>
+          <a:xfrm>
+            <a:off x="8730343" y="3155119"/>
+            <a:ext cx="304800" cy="177800"/>
+          </a:xfrm>
+          <a:prstGeom prst="rect">
+            <a:avLst/>
+          </a:prstGeom>
+        </p:spPr>
+      </p:pic>
+      <p:sp>
+        <p:nvSpPr>
+          <p:cNvPr id="18" name="Shape 13"/>
+          <p:cNvSpPr/>
+          <p:nvPr/>
+        </p:nvSpPr>
+        <p:spPr>
+          <a:xfrm>
+            <a:off x="9136743" y="1746740"/>
+            <a:ext cx="2242457" cy="2994554"/>
+          </a:xfrm>
+          <a:prstGeom prst="roundRect">
+            <a:avLst>
+              <a:gd name="adj" fmla="val 5663"/>
+            </a:avLst>
+          </a:prstGeom>
+          <a:solidFill>
+            <a:srgbClr val="15181F"/>
+          </a:solidFill>
+          <a:ln/>
+        </p:spPr>
+      </p:sp>
+      <p:sp>
+        <p:nvSpPr>
+          <p:cNvPr id="19" name="Text 14"/>
+          <p:cNvSpPr/>
+          <p:nvPr/>
+        </p:nvSpPr>
+        <p:spPr>
+          <a:xfrm>
+            <a:off x="9339943" y="1949940"/>
+            <a:ext cx="1891139" cy="434332"/>
+          </a:xfrm>
+          <a:prstGeom prst="rect">
+            <a:avLst/>
+          </a:prstGeom>
+          <a:noFill/>
+          <a:ln/>
+        </p:spPr>
+        <p:txBody>
+          <a:bodyPr wrap="square" lIns="0" tIns="0" rIns="0" bIns="0" rtlCol="0" anchor="t">
+            <a:normAutofit/>
+          </a:bodyPr>
+          <a:lstStyle/>
+          <a:p>
+            <a:pPr algn="l" indent="0" marL="0">
+              <a:lnSpc>
+                <a:spcPts val="2800"/>
+              </a:lnSpc>
+              <a:buNone/>
+            </a:pPr>
+            <a:r>
+              <a:rPr lang="en-US" sz="2000" b="1" dirty="0">
+                <a:solidFill>
+                  <a:srgbClr val="FF8A5C"/>
+                </a:solidFill>
+                <a:latin typeface="JetBrains Mono" pitchFamily="49" charset="0"/>
+                <a:ea typeface="JetBrains Mono" pitchFamily="49" charset="-122"/>
+                <a:cs typeface="JetBrains Mono" pitchFamily="49" charset="-120"/>
+              </a:rPr>
+              <a:t>04</a:t>
+            </a:r>
+            <a:endParaRPr lang="en-US" sz="2000" dirty="0"/>
+          </a:p>
+        </p:txBody>
+      </p:sp>
+      <p:sp>
+        <p:nvSpPr>
+          <p:cNvPr id="20" name="Text 15"/>
+          <p:cNvSpPr/>
+          <p:nvPr/>
+        </p:nvSpPr>
+        <p:spPr>
+          <a:xfrm>
+            <a:off x="9339943" y="2460476"/>
+            <a:ext cx="1891139" cy="621242"/>
+          </a:xfrm>
+          <a:prstGeom prst="rect">
+            <a:avLst/>
+          </a:prstGeom>
+          <a:noFill/>
+          <a:ln/>
+        </p:spPr>
+        <p:txBody>
+          <a:bodyPr wrap="square" lIns="0" tIns="0" rIns="0" bIns="0" rtlCol="0" anchor="t">
+            <a:normAutofit/>
+          </a:bodyPr>
+          <a:lstStyle/>
+          <a:p>
+            <a:pPr algn="l" indent="0" marL="0">
+              <a:lnSpc>
+                <a:spcPts val="2040"/>
+              </a:lnSpc>
+              <a:buNone/>
+            </a:pPr>
+            <a:r>
+              <a:rPr lang="en-US" sz="1700" b="1" dirty="0">
+                <a:solidFill>
+                  <a:srgbClr val="F6F3EC"/>
+                </a:solidFill>
+                <a:latin typeface="Space Grotesk" pitchFamily="34" charset="0"/>
+                <a:ea typeface="Space Grotesk" pitchFamily="34" charset="-122"/>
+                <a:cs typeface="Space Grotesk" pitchFamily="34" charset="-120"/>
+              </a:rPr>
+              <a:t>The release is created</a:t>
+            </a:r>
+            <a:endParaRPr lang="en-US" sz="1700" dirty="0"/>
+          </a:p>
+        </p:txBody>
+      </p:sp>
+      <p:sp>
+        <p:nvSpPr>
+          <p:cNvPr id="21" name="Text 16"/>
+          <p:cNvSpPr/>
+          <p:nvPr/>
+        </p:nvSpPr>
+        <p:spPr>
+          <a:xfrm>
+            <a:off x="9339943" y="3157916"/>
+            <a:ext cx="1891139" cy="1405580"/>
+          </a:xfrm>
+          <a:prstGeom prst="rect">
+            <a:avLst/>
+          </a:prstGeom>
+          <a:noFill/>
+          <a:ln/>
+        </p:spPr>
+        <p:txBody>
+          <a:bodyPr wrap="square" lIns="0" tIns="0" rIns="0" bIns="0" rtlCol="0" anchor="t">
+            <a:normAutofit/>
+          </a:bodyPr>
+          <a:lstStyle/>
+          <a:p>
+            <a:pPr algn="l" indent="0" marL="0">
+              <a:lnSpc>
+                <a:spcPts val="1890"/>
+              </a:lnSpc>
+              <a:buNone/>
+            </a:pPr>
+            <a:r>
+              <a:rPr lang="en-US" sz="1400" dirty="0">
+                <a:solidFill>
+                  <a:srgbClr val="A3A9B6"/>
+                </a:solidFill>
+                <a:latin typeface="Space Grotesk" pitchFamily="34" charset="0"/>
+                <a:ea typeface="Space Grotesk" pitchFamily="34" charset="-122"/>
+                <a:cs typeface="Space Grotesk" pitchFamily="34" charset="-120"/>
+              </a:rPr>
+              <a:t>Git tag plus GitHub Release with notes. Publish jobs can run next.</a:t>
+            </a:r>
+            <a:endParaRPr lang="en-US" sz="1400" dirty="0"/>
+          </a:p>
+        </p:txBody>
+      </p:sp>
+      <p:sp>
+        <p:nvSpPr>
+          <p:cNvPr id="22" name="Text 17"/>
+          <p:cNvSpPr/>
+          <p:nvPr/>
+        </p:nvSpPr>
+        <p:spPr>
+          <a:xfrm>
+            <a:off x="812800" y="5096898"/>
+            <a:ext cx="10883392" cy="380282"/>
+          </a:xfrm>
+          <a:prstGeom prst="rect">
+            <a:avLst/>
+          </a:prstGeom>
+          <a:noFill/>
+          <a:ln/>
+        </p:spPr>
+        <p:txBody>
+          <a:bodyPr wrap="square" lIns="0" tIns="0" rIns="0" bIns="0" rtlCol="0" anchor="t">
+            <a:normAutofit/>
+          </a:bodyPr>
+          <a:lstStyle/>
+          <a:p>
+            <a:pPr algn="l" indent="0" marL="0">
+              <a:lnSpc>
+                <a:spcPts val="2430"/>
+              </a:lnSpc>
+              <a:buNone/>
+            </a:pPr>
+            <a:r>
+              <a:rPr lang="en-US" sz="1800" b="1" dirty="0">
+                <a:solidFill>
+                  <a:srgbClr val="1B1E26"/>
+                </a:solidFill>
+                <a:latin typeface="Space Grotesk" pitchFamily="34" charset="0"/>
+                <a:ea typeface="Space Grotesk" pitchFamily="34" charset="-122"/>
+                <a:cs typeface="Space Grotesk" pitchFamily="34" charset="-120"/>
+              </a:rPr>
+              <a:t>You</a:t>
+            </a:r>
+            <a:r>
+              <a:rPr lang="en-US" sz="1800" dirty="0">
+                <a:solidFill>
+                  <a:srgbClr val="1B1E26"/>
+                </a:solidFill>
+                <a:latin typeface="Space Grotesk" pitchFamily="34" charset="0"/>
+                <a:ea typeface="Space Grotesk" pitchFamily="34" charset="-122"/>
+                <a:cs typeface="Space Grotesk" pitchFamily="34" charset="-120"/>
+              </a:rPr>
+              <a:t> decide </a:t>
+            </a:r>
+            <a:r>
+              <a:rPr lang="en-US" sz="1800" i="1" dirty="0">
+                <a:solidFill>
+                  <a:srgbClr val="1B1E26"/>
+                </a:solidFill>
+                <a:latin typeface="Space Grotesk" pitchFamily="34" charset="0"/>
+                <a:ea typeface="Space Grotesk" pitchFamily="34" charset="-122"/>
+                <a:cs typeface="Space Grotesk" pitchFamily="34" charset="-120"/>
+              </a:rPr>
+              <a:t>when</a:t>
+            </a:r>
+            <a:r>
+              <a:rPr lang="en-US" sz="1800" dirty="0">
+                <a:solidFill>
+                  <a:srgbClr val="1B1E26"/>
+                </a:solidFill>
+                <a:latin typeface="Space Grotesk" pitchFamily="34" charset="0"/>
+                <a:ea typeface="Space Grotesk" pitchFamily="34" charset="-122"/>
+                <a:cs typeface="Space Grotesk" pitchFamily="34" charset="-120"/>
+              </a:rPr>
+              <a:t> to release. </a:t>
+            </a:r>
+            <a:r>
+              <a:rPr lang="en-US" sz="1800" b="1" dirty="0">
+                <a:solidFill>
+                  <a:srgbClr val="1B1E26"/>
+                </a:solidFill>
+                <a:latin typeface="Space Grotesk" pitchFamily="34" charset="0"/>
+                <a:ea typeface="Space Grotesk" pitchFamily="34" charset="-122"/>
+                <a:cs typeface="Space Grotesk" pitchFamily="34" charset="-120"/>
+              </a:rPr>
+              <a:t>Release Please</a:t>
+            </a:r>
+            <a:r>
+              <a:rPr lang="en-US" sz="1800" dirty="0">
+                <a:solidFill>
+                  <a:srgbClr val="1B1E26"/>
+                </a:solidFill>
+                <a:latin typeface="Space Grotesk" pitchFamily="34" charset="0"/>
+                <a:ea typeface="Space Grotesk" pitchFamily="34" charset="-122"/>
+                <a:cs typeface="Space Grotesk" pitchFamily="34" charset="-120"/>
+              </a:rPr>
+              <a:t> decides </a:t>
+            </a:r>
+            <a:r>
+              <a:rPr lang="en-US" sz="1800" i="1" dirty="0">
+                <a:solidFill>
+                  <a:srgbClr val="1B1E26"/>
+                </a:solidFill>
+                <a:latin typeface="Space Grotesk" pitchFamily="34" charset="0"/>
+                <a:ea typeface="Space Grotesk" pitchFamily="34" charset="-122"/>
+                <a:cs typeface="Space Grotesk" pitchFamily="34" charset="-120"/>
+              </a:rPr>
+              <a:t>what</a:t>
+            </a:r>
+            <a:r>
+              <a:rPr lang="en-US" sz="1800" dirty="0">
+                <a:solidFill>
+                  <a:srgbClr val="1B1E26"/>
+                </a:solidFill>
+                <a:latin typeface="Space Grotesk" pitchFamily="34" charset="0"/>
+                <a:ea typeface="Space Grotesk" pitchFamily="34" charset="-122"/>
+                <a:cs typeface="Space Grotesk" pitchFamily="34" charset="-120"/>
+              </a:rPr>
+              <a:t> the version is.</a:t>
+            </a:r>
+            <a:endParaRPr lang="en-US" sz="1800" dirty="0"/>
+          </a:p>
+        </p:txBody>
+      </p:sp>
+    </p:spTree>
+  </p:cSld>
+  <p:clrMapOvr>
+    <a:masterClrMapping/>
+  </p:clrMapOvr>
+</p:sld>
+</file>
+
+<file path=ppt/slides/slide11.xml><?xml version="1.0" encoding="utf-8"?>
+<p:sld xmlns:a="http://schemas.openxmlformats.org/drawingml/2006/main" xmlns:r="http://schemas.openxmlformats.org/officeDocument/2006/relationships" xmlns:p="http://schemas.openxmlformats.org/presentationml/2006/main">
+  <p:cSld name="Slide 11">
+    <p:bg>
+      <p:bgPr>
+        <a:solidFill>
           <a:srgbClr val="ECE7DC"/>
         </a:solidFill>
       </p:bgPr>
@@ -3062,9 +4139,9 @@
 </p:sld>
 </file>
 
-<file path=ppt/slides/slide11.xml><?xml version="1.0" encoding="utf-8"?>
+<file path=ppt/slides/slide12.xml><?xml version="1.0" encoding="utf-8"?>
 <p:sld xmlns:a="http://schemas.openxmlformats.org/drawingml/2006/main" xmlns:r="http://schemas.openxmlformats.org/officeDocument/2006/relationships" xmlns:p="http://schemas.openxmlformats.org/presentationml/2006/main">
-  <p:cSld name="Slide 11">
+  <p:cSld name="Slide 12">
     <p:bg>
       <p:bgPr>
         <a:solidFill>
@@ -3981,9 +5058,9 @@
 </p:sld>
 </file>
 
-<file path=ppt/slides/slide12.xml><?xml version="1.0" encoding="utf-8"?>
+<file path=ppt/slides/slide13.xml><?xml version="1.0" encoding="utf-8"?>
 <p:sld xmlns:a="http://schemas.openxmlformats.org/drawingml/2006/main" xmlns:r="http://schemas.openxmlformats.org/officeDocument/2006/relationships" xmlns:p="http://schemas.openxmlformats.org/presentationml/2006/main">
-  <p:cSld name="Slide 12">
+  <p:cSld name="Slide 13">
     <p:bg>
       <p:bgPr>
         <a:solidFill>
@@ -4016,28 +5093,28 @@
         <p:spPr>
           <a:xfrm>
             <a:off x="812800" y="812800"/>
-            <a:ext cx="10883392" cy="603741"/>
-          </a:xfrm>
-          <a:prstGeom prst="rect">
-            <a:avLst/>
-          </a:prstGeom>
-          <a:noFill/>
-          <a:ln/>
-        </p:spPr>
-        <p:txBody>
-          <a:bodyPr wrap="square" lIns="0" tIns="0" rIns="0" bIns="0" rtlCol="0" anchor="t">
-            <a:normAutofit/>
-          </a:bodyPr>
-          <a:lstStyle/>
-          <a:p>
-            <a:pPr algn="l" indent="0" marL="0">
-              <a:lnSpc>
-                <a:spcPts val="3960"/>
-              </a:lnSpc>
-              <a:buNone/>
-            </a:pPr>
-            <a:r>
-              <a:rPr lang="en-US" sz="3600" b="1" i="0" spc="-50" kern="0" dirty="0">
+            <a:ext cx="10883392" cy="521985"/>
+          </a:xfrm>
+          <a:prstGeom prst="rect">
+            <a:avLst/>
+          </a:prstGeom>
+          <a:noFill/>
+          <a:ln/>
+        </p:spPr>
+        <p:txBody>
+          <a:bodyPr wrap="square" lIns="0" tIns="0" rIns="0" bIns="0" rtlCol="0" anchor="t">
+            <a:normAutofit/>
+          </a:bodyPr>
+          <a:lstStyle/>
+          <a:p>
+            <a:pPr algn="l" indent="0" marL="0">
+              <a:lnSpc>
+                <a:spcPts val="3403"/>
+              </a:lnSpc>
+              <a:buNone/>
+            </a:pPr>
+            <a:r>
+              <a:rPr lang="en-US" sz="3094" b="1" i="0" spc="-50" kern="0" dirty="0">
                 <a:solidFill>
                   <a:srgbClr val="1B1E26"/>
                 </a:solidFill>
@@ -4045,9 +5122,9 @@
                 <a:ea typeface="Space Grotesk" pitchFamily="34" charset="-122"/>
                 <a:cs typeface="Space Grotesk" pitchFamily="34" charset="-120"/>
               </a:rPr>
-              <a:t>Keep it honest: three guardrails</a:t>
-            </a:r>
-            <a:endParaRPr lang="en-US" sz="3600" dirty="0"/>
+              <a:t>PR titles vs. commits: what lands on main</a:t>
+            </a:r>
+            <a:endParaRPr lang="en-US" sz="3094" dirty="0"/>
           </a:p>
         </p:txBody>
       </p:sp>
@@ -4059,12 +5136,12 @@
         </p:nvSpPr>
         <p:spPr>
           <a:xfrm>
-            <a:off x="819150" y="1702290"/>
-            <a:ext cx="3407833" cy="2556404"/>
+            <a:off x="819150" y="1569734"/>
+            <a:ext cx="5118100" cy="3418719"/>
           </a:xfrm>
           <a:prstGeom prst="roundRect">
             <a:avLst>
-              <a:gd name="adj" fmla="val 4720"/>
+              <a:gd name="adj" fmla="val 2786"/>
             </a:avLst>
           </a:prstGeom>
           <a:solidFill>
@@ -4078,60 +5155,37 @@
           </a:ln>
         </p:spPr>
       </p:sp>
-      <p:pic>
-        <p:nvPicPr>
-          <p:cNvPr id="4" name="Image 0" descr="Check">    </p:cNvPr>
-          <p:cNvPicPr>
-            <a:picLocks noChangeAspect="1"/>
-          </p:cNvPicPr>
-          <p:nvPr/>
-        </p:nvPicPr>
-        <p:blipFill>
-          <a:blip r:embed="rId1"/>
-          <a:srcRect l="0" r="0" t="0" b="0"/>
-          <a:stretch/>
-        </p:blipFill>
-        <p:spPr>
-          <a:xfrm>
-            <a:off x="1078895" y="1962038"/>
-            <a:ext cx="355600" cy="355600"/>
-          </a:xfrm>
-          <a:prstGeom prst="rect">
-            <a:avLst/>
-          </a:prstGeom>
-        </p:spPr>
-      </p:pic>
-      <p:sp>
-        <p:nvSpPr>
-          <p:cNvPr id="5" name="Text 2"/>
-          <p:cNvSpPr/>
-          <p:nvPr/>
-        </p:nvSpPr>
-        <p:spPr>
-          <a:xfrm>
-            <a:off x="1078895" y="2419238"/>
-            <a:ext cx="2974993" cy="358397"/>
-          </a:xfrm>
-          <a:prstGeom prst="rect">
-            <a:avLst/>
-          </a:prstGeom>
-          <a:noFill/>
-          <a:ln/>
-        </p:spPr>
-        <p:txBody>
-          <a:bodyPr wrap="square" lIns="0" tIns="0" rIns="0" bIns="0" rtlCol="0" anchor="t">
-            <a:normAutofit/>
-          </a:bodyPr>
-          <a:lstStyle/>
-          <a:p>
-            <a:pPr algn="l" indent="0" marL="0">
-              <a:lnSpc>
-                <a:spcPts val="2280"/>
-              </a:lnSpc>
-              <a:buNone/>
-            </a:pPr>
-            <a:r>
-              <a:rPr lang="en-US" sz="1900" b="1" dirty="0">
+      <p:sp>
+        <p:nvSpPr>
+          <p:cNvPr id="4" name="Text 2"/>
+          <p:cNvSpPr/>
+          <p:nvPr/>
+        </p:nvSpPr>
+        <p:spPr>
+          <a:xfrm>
+            <a:off x="1028095" y="1778682"/>
+            <a:ext cx="4841216" cy="308882"/>
+          </a:xfrm>
+          <a:prstGeom prst="rect">
+            <a:avLst/>
+          </a:prstGeom>
+          <a:noFill/>
+          <a:ln/>
+        </p:spPr>
+        <p:txBody>
+          <a:bodyPr wrap="square" lIns="0" tIns="0" rIns="0" bIns="0" rtlCol="0" anchor="t">
+            <a:normAutofit/>
+          </a:bodyPr>
+          <a:lstStyle/>
+          <a:p>
+            <a:pPr algn="l" indent="0" marL="0">
+              <a:lnSpc>
+                <a:spcPts val="1973"/>
+              </a:lnSpc>
+              <a:buNone/>
+            </a:pPr>
+            <a:r>
+              <a:rPr lang="en-US" sz="1644" b="1" dirty="0">
                 <a:solidFill>
                   <a:srgbClr val="1B1E26"/>
                 </a:solidFill>
@@ -4139,70 +5193,389 @@
                 <a:ea typeface="Space Grotesk" pitchFamily="34" charset="-122"/>
                 <a:cs typeface="Space Grotesk" pitchFamily="34" charset="-120"/>
               </a:rPr>
-              <a:t>Squash merge</a:t>
-            </a:r>
-            <a:endParaRPr lang="en-US" sz="1900" dirty="0"/>
-          </a:p>
-        </p:txBody>
-      </p:sp>
-      <p:sp>
-        <p:nvSpPr>
-          <p:cNvPr id="6" name="Text 3"/>
-          <p:cNvSpPr/>
-          <p:nvPr/>
-        </p:nvSpPr>
-        <p:spPr>
-          <a:xfrm>
-            <a:off x="1078895" y="2853835"/>
-            <a:ext cx="2974993" cy="1170517"/>
-          </a:xfrm>
-          <a:prstGeom prst="rect">
-            <a:avLst/>
-          </a:prstGeom>
-          <a:noFill/>
-          <a:ln/>
-        </p:spPr>
-        <p:txBody>
-          <a:bodyPr wrap="square" lIns="0" tIns="0" rIns="0" bIns="0" rtlCol="0" anchor="t">
-            <a:normAutofit/>
-          </a:bodyPr>
-          <a:lstStyle/>
-          <a:p>
-            <a:pPr algn="l" indent="0" marL="0">
-              <a:lnSpc>
-                <a:spcPts val="1960"/>
-              </a:lnSpc>
-              <a:buNone/>
-            </a:pPr>
-            <a:r>
-              <a:rPr lang="en-US" sz="1400" dirty="0">
-                <a:solidFill>
-                  <a:srgbClr val="5D6270"/>
+              <a:t>Squash merge </a:t>
+            </a:r>
+            <a:r>
+              <a:rPr lang="en-US" sz="1644" b="1" dirty="0">
+                <a:solidFill>
+                  <a:srgbClr val="B8441B"/>
                 </a:solidFill>
                 <a:latin typeface="Space Grotesk" pitchFamily="34" charset="0"/>
                 <a:ea typeface="Space Grotesk" pitchFamily="34" charset="-122"/>
                 <a:cs typeface="Space Grotesk" pitchFamily="34" charset="-120"/>
               </a:rPr>
-              <a:t>Use the PR title as the commit message. One clean commit per PR, so only titles need to be right.</a:t>
-            </a:r>
-            <a:endParaRPr lang="en-US" sz="1400" dirty="0"/>
-          </a:p>
-        </p:txBody>
-      </p:sp>
-      <p:sp>
-        <p:nvSpPr>
-          <p:cNvPr id="7" name="Shape 4"/>
-          <p:cNvSpPr/>
-          <p:nvPr/>
-        </p:nvSpPr>
-        <p:spPr>
-          <a:xfrm>
-            <a:off x="4392083" y="1702290"/>
-            <a:ext cx="3407833" cy="2556404"/>
+              <a:t>(recommended)</a:t>
+            </a:r>
+            <a:endParaRPr lang="en-US" sz="1644" dirty="0"/>
+          </a:p>
+        </p:txBody>
+      </p:sp>
+      <p:sp>
+        <p:nvSpPr>
+          <p:cNvPr id="5" name="Text 3"/>
+          <p:cNvSpPr/>
+          <p:nvPr/>
+        </p:nvSpPr>
+        <p:spPr>
+          <a:xfrm>
+            <a:off x="1028095" y="2163763"/>
+            <a:ext cx="4841216" cy="256910"/>
+          </a:xfrm>
+          <a:prstGeom prst="rect">
+            <a:avLst/>
+          </a:prstGeom>
+          <a:noFill/>
+          <a:ln/>
+        </p:spPr>
+        <p:txBody>
+          <a:bodyPr wrap="square" lIns="0" tIns="0" rIns="0" bIns="0" rtlCol="0" anchor="t">
+            <a:normAutofit/>
+          </a:bodyPr>
+          <a:lstStyle/>
+          <a:p>
+            <a:pPr algn="l" indent="0" marL="0">
+              <a:lnSpc>
+                <a:spcPts val="1586"/>
+              </a:lnSpc>
+              <a:buNone/>
+            </a:pPr>
+            <a:r>
+              <a:rPr lang="en-US" sz="1133" b="1" dirty="0">
+                <a:solidFill>
+                  <a:srgbClr val="5D6270"/>
+                </a:solidFill>
+                <a:latin typeface="Space Grotesk" pitchFamily="34" charset="0"/>
+                <a:ea typeface="Space Grotesk" pitchFamily="34" charset="-122"/>
+                <a:cs typeface="Space Grotesk" pitchFamily="34" charset="-120"/>
+              </a:rPr>
+              <a:t>Only the PR title matters</a:t>
+            </a:r>
+            <a:endParaRPr lang="en-US" sz="1133" dirty="0"/>
+          </a:p>
+        </p:txBody>
+      </p:sp>
+      <p:sp>
+        <p:nvSpPr>
+          <p:cNvPr id="6" name="Shape 4"/>
+          <p:cNvSpPr/>
+          <p:nvPr/>
+        </p:nvSpPr>
+        <p:spPr>
+          <a:xfrm>
+            <a:off x="1028095" y="2496877"/>
+            <a:ext cx="4700210" cy="1486354"/>
           </a:xfrm>
           <a:prstGeom prst="roundRect">
             <a:avLst>
-              <a:gd name="adj" fmla="val 4720"/>
+              <a:gd name="adj" fmla="val 5127"/>
+            </a:avLst>
+          </a:prstGeom>
+          <a:solidFill>
+            <a:srgbClr val="15181F"/>
+          </a:solidFill>
+          <a:ln/>
+        </p:spPr>
+      </p:sp>
+      <p:sp>
+        <p:nvSpPr>
+          <p:cNvPr id="7" name="Text 5"/>
+          <p:cNvSpPr/>
+          <p:nvPr/>
+        </p:nvSpPr>
+        <p:spPr>
+          <a:xfrm>
+            <a:off x="1231295" y="2649277"/>
+            <a:ext cx="4422624" cy="234459"/>
+          </a:xfrm>
+          <a:prstGeom prst="rect">
+            <a:avLst/>
+          </a:prstGeom>
+          <a:noFill/>
+          <a:ln/>
+        </p:spPr>
+        <p:txBody>
+          <a:bodyPr wrap="square" lIns="0" tIns="0" rIns="0" bIns="0" rtlCol="0" anchor="t">
+            <a:normAutofit/>
+          </a:bodyPr>
+          <a:lstStyle/>
+          <a:p>
+            <a:pPr algn="l" indent="0" marL="0">
+              <a:lnSpc>
+                <a:spcPts val="1456"/>
+              </a:lnSpc>
+              <a:buNone/>
+            </a:pPr>
+            <a:r>
+              <a:rPr lang="en-US" sz="1040" strike="sngStrike" dirty="0">
+                <a:solidFill>
+                  <a:srgbClr val="8A909C"/>
+                </a:solidFill>
+                <a:latin typeface="JetBrains Mono" pitchFamily="49" charset="0"/>
+                <a:ea typeface="JetBrains Mono" pitchFamily="49" charset="-122"/>
+                <a:cs typeface="JetBrains Mono" pitchFamily="49" charset="-120"/>
+              </a:rPr>
+              <a:t>wip</a:t>
+            </a:r>
+            <a:endParaRPr lang="en-US" sz="1040" dirty="0"/>
+          </a:p>
+        </p:txBody>
+      </p:sp>
+      <p:sp>
+        <p:nvSpPr>
+          <p:cNvPr id="8" name="Text 6"/>
+          <p:cNvSpPr/>
+          <p:nvPr/>
+        </p:nvSpPr>
+        <p:spPr>
+          <a:xfrm>
+            <a:off x="1231295" y="2896431"/>
+            <a:ext cx="4422624" cy="234421"/>
+          </a:xfrm>
+          <a:prstGeom prst="rect">
+            <a:avLst/>
+          </a:prstGeom>
+          <a:noFill/>
+          <a:ln/>
+        </p:spPr>
+        <p:txBody>
+          <a:bodyPr wrap="square" lIns="0" tIns="0" rIns="0" bIns="0" rtlCol="0" anchor="t">
+            <a:normAutofit/>
+          </a:bodyPr>
+          <a:lstStyle/>
+          <a:p>
+            <a:pPr algn="l" indent="0" marL="0">
+              <a:lnSpc>
+                <a:spcPts val="1456"/>
+              </a:lnSpc>
+              <a:buNone/>
+            </a:pPr>
+            <a:r>
+              <a:rPr lang="en-US" sz="1040" strike="sngStrike" dirty="0">
+                <a:solidFill>
+                  <a:srgbClr val="8A909C"/>
+                </a:solidFill>
+                <a:latin typeface="JetBrains Mono" pitchFamily="49" charset="0"/>
+                <a:ea typeface="JetBrains Mono" pitchFamily="49" charset="-122"/>
+                <a:cs typeface="JetBrains Mono" pitchFamily="49" charset="-120"/>
+              </a:rPr>
+              <a:t>fix typo</a:t>
+            </a:r>
+            <a:endParaRPr lang="en-US" sz="1040" dirty="0"/>
+          </a:p>
+        </p:txBody>
+      </p:sp>
+      <p:sp>
+        <p:nvSpPr>
+          <p:cNvPr id="9" name="Text 7"/>
+          <p:cNvSpPr/>
+          <p:nvPr/>
+        </p:nvSpPr>
+        <p:spPr>
+          <a:xfrm>
+            <a:off x="1231295" y="3143554"/>
+            <a:ext cx="4422624" cy="234459"/>
+          </a:xfrm>
+          <a:prstGeom prst="rect">
+            <a:avLst/>
+          </a:prstGeom>
+          <a:noFill/>
+          <a:ln/>
+        </p:spPr>
+        <p:txBody>
+          <a:bodyPr wrap="square" lIns="0" tIns="0" rIns="0" bIns="0" rtlCol="0" anchor="t">
+            <a:normAutofit/>
+          </a:bodyPr>
+          <a:lstStyle/>
+          <a:p>
+            <a:pPr algn="l" indent="0" marL="0">
+              <a:lnSpc>
+                <a:spcPts val="1456"/>
+              </a:lnSpc>
+              <a:buNone/>
+            </a:pPr>
+            <a:r>
+              <a:rPr lang="en-US" sz="1040" strike="sngStrike" dirty="0">
+                <a:solidFill>
+                  <a:srgbClr val="8A909C"/>
+                </a:solidFill>
+                <a:latin typeface="JetBrains Mono" pitchFamily="49" charset="0"/>
+                <a:ea typeface="JetBrains Mono" pitchFamily="49" charset="-122"/>
+                <a:cs typeface="JetBrains Mono" pitchFamily="49" charset="-120"/>
+              </a:rPr>
+              <a:t>try again</a:t>
+            </a:r>
+            <a:endParaRPr lang="en-US" sz="1040" dirty="0"/>
+          </a:p>
+        </p:txBody>
+      </p:sp>
+      <p:sp>
+        <p:nvSpPr>
+          <p:cNvPr id="10" name="Text 8"/>
+          <p:cNvSpPr/>
+          <p:nvPr/>
+        </p:nvSpPr>
+        <p:spPr>
+          <a:xfrm>
+            <a:off x="1231295" y="3390714"/>
+            <a:ext cx="4422624" cy="218357"/>
+          </a:xfrm>
+          <a:prstGeom prst="rect">
+            <a:avLst/>
+          </a:prstGeom>
+          <a:noFill/>
+          <a:ln/>
+        </p:spPr>
+        <p:txBody>
+          <a:bodyPr wrap="square" lIns="0" tIns="0" rIns="0" bIns="0" rtlCol="0" anchor="t">
+            <a:normAutofit/>
+          </a:bodyPr>
+          <a:lstStyle/>
+          <a:p>
+            <a:pPr algn="l" indent="0" marL="0">
+              <a:lnSpc>
+                <a:spcPts val="1323"/>
+              </a:lnSpc>
+              <a:buNone/>
+            </a:pPr>
+            <a:r>
+              <a:rPr lang="en-US" sz="945" dirty="0">
+                <a:solidFill>
+                  <a:srgbClr val="A3A9B6"/>
+                </a:solidFill>
+                <a:latin typeface="Space Grotesk" pitchFamily="34" charset="0"/>
+                <a:ea typeface="Space Grotesk" pitchFamily="34" charset="-122"/>
+                <a:cs typeface="Space Grotesk" pitchFamily="34" charset="-120"/>
+              </a:rPr>
+              <a:t>squashed into one commit on main:</a:t>
+            </a:r>
+            <a:endParaRPr lang="en-US" sz="945" dirty="0"/>
+          </a:p>
+        </p:txBody>
+      </p:sp>
+      <p:sp>
+        <p:nvSpPr>
+          <p:cNvPr id="11" name="Text 9"/>
+          <p:cNvSpPr/>
+          <p:nvPr/>
+        </p:nvSpPr>
+        <p:spPr>
+          <a:xfrm>
+            <a:off x="1231295" y="3621770"/>
+            <a:ext cx="4422624" cy="234459"/>
+          </a:xfrm>
+          <a:prstGeom prst="rect">
+            <a:avLst/>
+          </a:prstGeom>
+          <a:noFill/>
+          <a:ln/>
+        </p:spPr>
+        <p:txBody>
+          <a:bodyPr wrap="square" lIns="0" tIns="0" rIns="0" bIns="0" rtlCol="0" anchor="t">
+            <a:normAutofit/>
+          </a:bodyPr>
+          <a:lstStyle/>
+          <a:p>
+            <a:pPr algn="l" indent="0" marL="0">
+              <a:lnSpc>
+                <a:spcPts val="1456"/>
+              </a:lnSpc>
+              <a:buNone/>
+            </a:pPr>
+            <a:r>
+              <a:rPr lang="en-US" sz="1040" b="1" dirty="0">
+                <a:solidFill>
+                  <a:srgbClr val="FF8A5C"/>
+                </a:solidFill>
+                <a:latin typeface="JetBrains Mono" pitchFamily="49" charset="0"/>
+                <a:ea typeface="JetBrains Mono" pitchFamily="49" charset="-122"/>
+                <a:cs typeface="JetBrains Mono" pitchFamily="49" charset="-120"/>
+              </a:rPr>
+              <a:t>feat(reports): export to CSV</a:t>
+            </a:r>
+            <a:endParaRPr lang="en-US" sz="1040" dirty="0"/>
+          </a:p>
+        </p:txBody>
+      </p:sp>
+      <p:sp>
+        <p:nvSpPr>
+          <p:cNvPr id="12" name="Text 10"/>
+          <p:cNvSpPr/>
+          <p:nvPr/>
+        </p:nvSpPr>
+        <p:spPr>
+          <a:xfrm>
+            <a:off x="1028095" y="4084830"/>
+            <a:ext cx="4841216" cy="720082"/>
+          </a:xfrm>
+          <a:prstGeom prst="rect">
+            <a:avLst/>
+          </a:prstGeom>
+          <a:noFill/>
+          <a:ln/>
+        </p:spPr>
+        <p:txBody>
+          <a:bodyPr wrap="square" lIns="0" tIns="0" rIns="0" bIns="0" rtlCol="0" anchor="t">
+            <a:normAutofit/>
+          </a:bodyPr>
+          <a:lstStyle/>
+          <a:p>
+            <a:pPr algn="l" indent="0" marL="0">
+              <a:lnSpc>
+                <a:spcPts val="1880"/>
+              </a:lnSpc>
+              <a:buNone/>
+            </a:pPr>
+            <a:r>
+              <a:rPr lang="en-US" sz="1343" dirty="0">
+                <a:solidFill>
+                  <a:srgbClr val="1B1E26"/>
+                </a:solidFill>
+                <a:latin typeface="Space Grotesk" pitchFamily="34" charset="0"/>
+                <a:ea typeface="Space Grotesk" pitchFamily="34" charset="-122"/>
+                <a:cs typeface="Space Grotesk" pitchFamily="34" charset="-120"/>
+              </a:rPr>
+              <a:t>Messy branch commits are fine. The </a:t>
+            </a:r>
+            <a:r>
+              <a:rPr lang="en-US" sz="1343" b="1" dirty="0">
+                <a:solidFill>
+                  <a:srgbClr val="1B1E26"/>
+                </a:solidFill>
+                <a:latin typeface="Space Grotesk" pitchFamily="34" charset="0"/>
+                <a:ea typeface="Space Grotesk" pitchFamily="34" charset="-122"/>
+                <a:cs typeface="Space Grotesk" pitchFamily="34" charset="-120"/>
+              </a:rPr>
+              <a:t>PR title</a:t>
+            </a:r>
+            <a:r>
+              <a:rPr lang="en-US" sz="1343" dirty="0">
+                <a:solidFill>
+                  <a:srgbClr val="1B1E26"/>
+                </a:solidFill>
+                <a:latin typeface="Space Grotesk" pitchFamily="34" charset="0"/>
+                <a:ea typeface="Space Grotesk" pitchFamily="34" charset="-122"/>
+                <a:cs typeface="Space Grotesk" pitchFamily="34" charset="-120"/>
+              </a:rPr>
+              <a:t> becomes the single commit Release Please reads.</a:t>
+            </a:r>
+            <a:endParaRPr lang="en-US" sz="1343" dirty="0"/>
+          </a:p>
+        </p:txBody>
+      </p:sp>
+      <p:sp>
+        <p:nvSpPr>
+          <p:cNvPr id="13" name="Shape 11"/>
+          <p:cNvSpPr/>
+          <p:nvPr/>
+        </p:nvSpPr>
+        <p:spPr>
+          <a:xfrm>
+            <a:off x="6254750" y="1569734"/>
+            <a:ext cx="5118100" cy="3418719"/>
+          </a:xfrm>
+          <a:prstGeom prst="roundRect">
+            <a:avLst>
+              <a:gd name="adj" fmla="val 2786"/>
             </a:avLst>
           </a:prstGeom>
           <a:solidFill>
@@ -4216,23 +5589,452 @@
           </a:ln>
         </p:spPr>
       </p:sp>
+      <p:sp>
+        <p:nvSpPr>
+          <p:cNvPr id="14" name="Text 12"/>
+          <p:cNvSpPr/>
+          <p:nvPr/>
+        </p:nvSpPr>
+        <p:spPr>
+          <a:xfrm>
+            <a:off x="6463695" y="1778682"/>
+            <a:ext cx="4841216" cy="308882"/>
+          </a:xfrm>
+          <a:prstGeom prst="rect">
+            <a:avLst/>
+          </a:prstGeom>
+          <a:noFill/>
+          <a:ln/>
+        </p:spPr>
+        <p:txBody>
+          <a:bodyPr wrap="square" lIns="0" tIns="0" rIns="0" bIns="0" rtlCol="0" anchor="t">
+            <a:normAutofit/>
+          </a:bodyPr>
+          <a:lstStyle/>
+          <a:p>
+            <a:pPr algn="l" indent="0" marL="0">
+              <a:lnSpc>
+                <a:spcPts val="1973"/>
+              </a:lnSpc>
+              <a:buNone/>
+            </a:pPr>
+            <a:r>
+              <a:rPr lang="en-US" sz="1644" b="1" dirty="0">
+                <a:solidFill>
+                  <a:srgbClr val="1B1E26"/>
+                </a:solidFill>
+                <a:latin typeface="Space Grotesk" pitchFamily="34" charset="0"/>
+                <a:ea typeface="Space Grotesk" pitchFamily="34" charset="-122"/>
+                <a:cs typeface="Space Grotesk" pitchFamily="34" charset="-120"/>
+              </a:rPr>
+              <a:t>Merge commit or rebase</a:t>
+            </a:r>
+            <a:endParaRPr lang="en-US" sz="1644" dirty="0"/>
+          </a:p>
+        </p:txBody>
+      </p:sp>
+      <p:sp>
+        <p:nvSpPr>
+          <p:cNvPr id="15" name="Text 13"/>
+          <p:cNvSpPr/>
+          <p:nvPr/>
+        </p:nvSpPr>
+        <p:spPr>
+          <a:xfrm>
+            <a:off x="6463695" y="2163763"/>
+            <a:ext cx="4841216" cy="256910"/>
+          </a:xfrm>
+          <a:prstGeom prst="rect">
+            <a:avLst/>
+          </a:prstGeom>
+          <a:noFill/>
+          <a:ln/>
+        </p:spPr>
+        <p:txBody>
+          <a:bodyPr wrap="square" lIns="0" tIns="0" rIns="0" bIns="0" rtlCol="0" anchor="t">
+            <a:normAutofit/>
+          </a:bodyPr>
+          <a:lstStyle/>
+          <a:p>
+            <a:pPr algn="l" indent="0" marL="0">
+              <a:lnSpc>
+                <a:spcPts val="1586"/>
+              </a:lnSpc>
+              <a:buNone/>
+            </a:pPr>
+            <a:r>
+              <a:rPr lang="en-US" sz="1133" b="1" dirty="0">
+                <a:solidFill>
+                  <a:srgbClr val="5D6270"/>
+                </a:solidFill>
+                <a:latin typeface="Space Grotesk" pitchFamily="34" charset="0"/>
+                <a:ea typeface="Space Grotesk" pitchFamily="34" charset="-122"/>
+                <a:cs typeface="Space Grotesk" pitchFamily="34" charset="-120"/>
+              </a:rPr>
+              <a:t>Every commit matters</a:t>
+            </a:r>
+            <a:endParaRPr lang="en-US" sz="1133" dirty="0"/>
+          </a:p>
+        </p:txBody>
+      </p:sp>
+      <p:sp>
+        <p:nvSpPr>
+          <p:cNvPr id="16" name="Shape 14"/>
+          <p:cNvSpPr/>
+          <p:nvPr/>
+        </p:nvSpPr>
+        <p:spPr>
+          <a:xfrm>
+            <a:off x="6463695" y="2496877"/>
+            <a:ext cx="4700210" cy="1486354"/>
+          </a:xfrm>
+          <a:prstGeom prst="roundRect">
+            <a:avLst>
+              <a:gd name="adj" fmla="val 5127"/>
+            </a:avLst>
+          </a:prstGeom>
+          <a:solidFill>
+            <a:srgbClr val="15181F"/>
+          </a:solidFill>
+          <a:ln/>
+        </p:spPr>
+      </p:sp>
+      <p:sp>
+        <p:nvSpPr>
+          <p:cNvPr id="17" name="Text 15"/>
+          <p:cNvSpPr/>
+          <p:nvPr/>
+        </p:nvSpPr>
+        <p:spPr>
+          <a:xfrm>
+            <a:off x="6666895" y="2649277"/>
+            <a:ext cx="4422624" cy="218357"/>
+          </a:xfrm>
+          <a:prstGeom prst="rect">
+            <a:avLst/>
+          </a:prstGeom>
+          <a:noFill/>
+          <a:ln/>
+        </p:spPr>
+        <p:txBody>
+          <a:bodyPr wrap="square" lIns="0" tIns="0" rIns="0" bIns="0" rtlCol="0" anchor="t">
+            <a:normAutofit/>
+          </a:bodyPr>
+          <a:lstStyle/>
+          <a:p>
+            <a:pPr algn="l" indent="0" marL="0">
+              <a:lnSpc>
+                <a:spcPts val="1323"/>
+              </a:lnSpc>
+              <a:buNone/>
+            </a:pPr>
+            <a:r>
+              <a:rPr lang="en-US" sz="945" dirty="0">
+                <a:solidFill>
+                  <a:srgbClr val="A3A9B6"/>
+                </a:solidFill>
+                <a:latin typeface="Space Grotesk" pitchFamily="34" charset="0"/>
+                <a:ea typeface="Space Grotesk" pitchFamily="34" charset="-122"/>
+                <a:cs typeface="Space Grotesk" pitchFamily="34" charset="-120"/>
+              </a:rPr>
+              <a:t>every branch commit lands on main:</a:t>
+            </a:r>
+            <a:endParaRPr lang="en-US" sz="945" dirty="0"/>
+          </a:p>
+        </p:txBody>
+      </p:sp>
+      <p:sp>
+        <p:nvSpPr>
+          <p:cNvPr id="18" name="Text 16"/>
+          <p:cNvSpPr/>
+          <p:nvPr/>
+        </p:nvSpPr>
+        <p:spPr>
+          <a:xfrm>
+            <a:off x="6666895" y="2880333"/>
+            <a:ext cx="4422624" cy="234421"/>
+          </a:xfrm>
+          <a:prstGeom prst="rect">
+            <a:avLst/>
+          </a:prstGeom>
+          <a:noFill/>
+          <a:ln/>
+        </p:spPr>
+        <p:txBody>
+          <a:bodyPr wrap="square" lIns="0" tIns="0" rIns="0" bIns="0" rtlCol="0" anchor="t">
+            <a:normAutofit/>
+          </a:bodyPr>
+          <a:lstStyle/>
+          <a:p>
+            <a:pPr algn="l" indent="0" marL="0">
+              <a:lnSpc>
+                <a:spcPts val="1456"/>
+              </a:lnSpc>
+              <a:buNone/>
+            </a:pPr>
+            <a:r>
+              <a:rPr lang="en-US" sz="1040" b="1" dirty="0">
+                <a:solidFill>
+                  <a:srgbClr val="7FB0FF"/>
+                </a:solidFill>
+                <a:latin typeface="JetBrains Mono" pitchFamily="49" charset="0"/>
+                <a:ea typeface="JetBrains Mono" pitchFamily="49" charset="-122"/>
+                <a:cs typeface="JetBrains Mono" pitchFamily="49" charset="-120"/>
+              </a:rPr>
+              <a:t>feat(reports): export to CSV</a:t>
+            </a:r>
+            <a:endParaRPr lang="en-US" sz="1040" dirty="0"/>
+          </a:p>
+        </p:txBody>
+      </p:sp>
+      <p:sp>
+        <p:nvSpPr>
+          <p:cNvPr id="19" name="Text 17"/>
+          <p:cNvSpPr/>
+          <p:nvPr/>
+        </p:nvSpPr>
+        <p:spPr>
+          <a:xfrm>
+            <a:off x="6666895" y="3127449"/>
+            <a:ext cx="4422624" cy="234459"/>
+          </a:xfrm>
+          <a:prstGeom prst="rect">
+            <a:avLst/>
+          </a:prstGeom>
+          <a:noFill/>
+          <a:ln/>
+        </p:spPr>
+        <p:txBody>
+          <a:bodyPr wrap="square" lIns="0" tIns="0" rIns="0" bIns="0" rtlCol="0" anchor="t">
+            <a:normAutofit/>
+          </a:bodyPr>
+          <a:lstStyle/>
+          <a:p>
+            <a:pPr algn="l" indent="0" marL="0">
+              <a:lnSpc>
+                <a:spcPts val="1456"/>
+              </a:lnSpc>
+              <a:buNone/>
+            </a:pPr>
+            <a:r>
+              <a:rPr lang="en-US" sz="1040" dirty="0">
+                <a:solidFill>
+                  <a:srgbClr val="E6E2D8"/>
+                </a:solidFill>
+                <a:latin typeface="JetBrains Mono" pitchFamily="49" charset="0"/>
+                <a:ea typeface="JetBrains Mono" pitchFamily="49" charset="-122"/>
+                <a:cs typeface="JetBrains Mono" pitchFamily="49" charset="-120"/>
+              </a:rPr>
+              <a:t>wip </a:t>
+            </a:r>
+            <a:r>
+              <a:rPr lang="en-US" sz="1040" dirty="0">
+                <a:solidFill>
+                  <a:srgbClr val="FFD166"/>
+                </a:solidFill>
+                <a:latin typeface="JetBrains Mono" pitchFamily="49" charset="0"/>
+                <a:ea typeface="JetBrains Mono" pitchFamily="49" charset="-122"/>
+                <a:cs typeface="JetBrains Mono" pitchFamily="49" charset="-120"/>
+              </a:rPr>
+              <a:t>(skipped)</a:t>
+            </a:r>
+            <a:endParaRPr lang="en-US" sz="1040" dirty="0"/>
+          </a:p>
+        </p:txBody>
+      </p:sp>
+      <p:sp>
+        <p:nvSpPr>
+          <p:cNvPr id="20" name="Text 18"/>
+          <p:cNvSpPr/>
+          <p:nvPr/>
+        </p:nvSpPr>
+        <p:spPr>
+          <a:xfrm>
+            <a:off x="6666895" y="3374610"/>
+            <a:ext cx="4422624" cy="234459"/>
+          </a:xfrm>
+          <a:prstGeom prst="rect">
+            <a:avLst/>
+          </a:prstGeom>
+          <a:noFill/>
+          <a:ln/>
+        </p:spPr>
+        <p:txBody>
+          <a:bodyPr wrap="square" lIns="0" tIns="0" rIns="0" bIns="0" rtlCol="0" anchor="t">
+            <a:normAutofit/>
+          </a:bodyPr>
+          <a:lstStyle/>
+          <a:p>
+            <a:pPr algn="l" indent="0" marL="0">
+              <a:lnSpc>
+                <a:spcPts val="1456"/>
+              </a:lnSpc>
+              <a:buNone/>
+            </a:pPr>
+            <a:r>
+              <a:rPr lang="en-US" sz="1040" dirty="0">
+                <a:solidFill>
+                  <a:srgbClr val="E6E2D8"/>
+                </a:solidFill>
+                <a:latin typeface="JetBrains Mono" pitchFamily="49" charset="0"/>
+                <a:ea typeface="JetBrains Mono" pitchFamily="49" charset="-122"/>
+                <a:cs typeface="JetBrains Mono" pitchFamily="49" charset="-120"/>
+              </a:rPr>
+              <a:t>fix typo </a:t>
+            </a:r>
+            <a:r>
+              <a:rPr lang="en-US" sz="1040" dirty="0">
+                <a:solidFill>
+                  <a:srgbClr val="FFD166"/>
+                </a:solidFill>
+                <a:latin typeface="JetBrains Mono" pitchFamily="49" charset="0"/>
+                <a:ea typeface="JetBrains Mono" pitchFamily="49" charset="-122"/>
+                <a:cs typeface="JetBrains Mono" pitchFamily="49" charset="-120"/>
+              </a:rPr>
+              <a:t>(skipped)</a:t>
+            </a:r>
+            <a:endParaRPr lang="en-US" sz="1040" dirty="0"/>
+          </a:p>
+        </p:txBody>
+      </p:sp>
+      <p:sp>
+        <p:nvSpPr>
+          <p:cNvPr id="21" name="Text 19"/>
+          <p:cNvSpPr/>
+          <p:nvPr/>
+        </p:nvSpPr>
+        <p:spPr>
+          <a:xfrm>
+            <a:off x="6666895" y="3621770"/>
+            <a:ext cx="4422624" cy="234459"/>
+          </a:xfrm>
+          <a:prstGeom prst="rect">
+            <a:avLst/>
+          </a:prstGeom>
+          <a:noFill/>
+          <a:ln/>
+        </p:spPr>
+        <p:txBody>
+          <a:bodyPr wrap="square" lIns="0" tIns="0" rIns="0" bIns="0" rtlCol="0" anchor="t">
+            <a:normAutofit/>
+          </a:bodyPr>
+          <a:lstStyle/>
+          <a:p>
+            <a:pPr algn="l" indent="0" marL="0">
+              <a:lnSpc>
+                <a:spcPts val="1456"/>
+              </a:lnSpc>
+              <a:buNone/>
+            </a:pPr>
+            <a:r>
+              <a:rPr lang="en-US" sz="1040" dirty="0">
+                <a:solidFill>
+                  <a:srgbClr val="E6E2D8"/>
+                </a:solidFill>
+                <a:latin typeface="JetBrains Mono" pitchFamily="49" charset="0"/>
+                <a:ea typeface="JetBrains Mono" pitchFamily="49" charset="-122"/>
+                <a:cs typeface="JetBrains Mono" pitchFamily="49" charset="-120"/>
+              </a:rPr>
+              <a:t>try again </a:t>
+            </a:r>
+            <a:r>
+              <a:rPr lang="en-US" sz="1040" dirty="0">
+                <a:solidFill>
+                  <a:srgbClr val="FFD166"/>
+                </a:solidFill>
+                <a:latin typeface="JetBrains Mono" pitchFamily="49" charset="0"/>
+                <a:ea typeface="JetBrains Mono" pitchFamily="49" charset="-122"/>
+                <a:cs typeface="JetBrains Mono" pitchFamily="49" charset="-120"/>
+              </a:rPr>
+              <a:t>(skipped)</a:t>
+            </a:r>
+            <a:endParaRPr lang="en-US" sz="1040" dirty="0"/>
+          </a:p>
+        </p:txBody>
+      </p:sp>
+      <p:sp>
+        <p:nvSpPr>
+          <p:cNvPr id="22" name="Text 20"/>
+          <p:cNvSpPr/>
+          <p:nvPr/>
+        </p:nvSpPr>
+        <p:spPr>
+          <a:xfrm>
+            <a:off x="6463695" y="4084830"/>
+            <a:ext cx="4841216" cy="720082"/>
+          </a:xfrm>
+          <a:prstGeom prst="rect">
+            <a:avLst/>
+          </a:prstGeom>
+          <a:noFill/>
+          <a:ln/>
+        </p:spPr>
+        <p:txBody>
+          <a:bodyPr wrap="square" lIns="0" tIns="0" rIns="0" bIns="0" rtlCol="0" anchor="t">
+            <a:normAutofit/>
+          </a:bodyPr>
+          <a:lstStyle/>
+          <a:p>
+            <a:pPr algn="l" indent="0" marL="0">
+              <a:lnSpc>
+                <a:spcPts val="1605"/>
+              </a:lnSpc>
+              <a:buNone/>
+            </a:pPr>
+            <a:r>
+              <a:rPr lang="en-US" sz="1146" dirty="0">
+                <a:solidFill>
+                  <a:srgbClr val="1B1E26"/>
+                </a:solidFill>
+                <a:latin typeface="Space Grotesk" pitchFamily="34" charset="0"/>
+                <a:ea typeface="Space Grotesk" pitchFamily="34" charset="-122"/>
+                <a:cs typeface="Space Grotesk" pitchFamily="34" charset="-120"/>
+              </a:rPr>
+              <a:t>Each commit must follow the format. Ones that do not are ignored, so real changes can quietly miss the changelog.</a:t>
+            </a:r>
+            <a:endParaRPr lang="en-US" sz="1146" dirty="0"/>
+          </a:p>
+        </p:txBody>
+      </p:sp>
+      <p:sp>
+        <p:nvSpPr>
+          <p:cNvPr id="23" name="Shape 21"/>
+          <p:cNvSpPr/>
+          <p:nvPr/>
+        </p:nvSpPr>
+        <p:spPr>
+          <a:xfrm>
+            <a:off x="812800" y="5248808"/>
+            <a:ext cx="10566400" cy="796396"/>
+          </a:xfrm>
+          <a:prstGeom prst="roundRect">
+            <a:avLst>
+              <a:gd name="adj" fmla="val 12757"/>
+            </a:avLst>
+          </a:prstGeom>
+          <a:solidFill>
+            <a:srgbClr val="15181F"/>
+          </a:solidFill>
+          <a:ln/>
+        </p:spPr>
+      </p:sp>
       <p:pic>
         <p:nvPicPr>
-          <p:cNvPr id="8" name="Image 1" descr="Verified">    </p:cNvPr>
+          <p:cNvPr id="24" name="Image 0" descr="Settings">    </p:cNvPr>
           <p:cNvPicPr>
             <a:picLocks noChangeAspect="1"/>
           </p:cNvPicPr>
           <p:nvPr/>
         </p:nvPicPr>
         <p:blipFill>
-          <a:blip r:embed="rId2"/>
-          <a:srcRect l="0" r="0" t="0" b="0"/>
+          <a:blip r:embed="rId1"/>
+          <a:srcRect l="0" r="0" t="-51" b="-51"/>
           <a:stretch/>
         </p:blipFill>
         <p:spPr>
           <a:xfrm>
-            <a:off x="4651829" y="1962038"/>
-            <a:ext cx="355600" cy="355600"/>
+            <a:off x="1066800" y="5507304"/>
+            <a:ext cx="222023" cy="279400"/>
           </a:xfrm>
           <a:prstGeom prst="rect">
             <a:avLst/>
@@ -4241,101 +6043,146 @@
       </p:pic>
       <p:sp>
         <p:nvSpPr>
-          <p:cNvPr id="9" name="Text 5"/>
-          <p:cNvSpPr/>
-          <p:nvPr/>
-        </p:nvSpPr>
-        <p:spPr>
-          <a:xfrm>
-            <a:off x="4651829" y="2419238"/>
-            <a:ext cx="2974993" cy="358397"/>
-          </a:xfrm>
-          <a:prstGeom prst="rect">
-            <a:avLst/>
-          </a:prstGeom>
-          <a:noFill/>
-          <a:ln/>
-        </p:spPr>
-        <p:txBody>
-          <a:bodyPr wrap="square" lIns="0" tIns="0" rIns="0" bIns="0" rtlCol="0" anchor="t">
-            <a:normAutofit/>
-          </a:bodyPr>
-          <a:lstStyle/>
-          <a:p>
-            <a:pPr algn="l" indent="0" marL="0">
-              <a:lnSpc>
-                <a:spcPts val="2280"/>
-              </a:lnSpc>
-              <a:buNone/>
-            </a:pPr>
-            <a:r>
-              <a:rPr lang="en-US" sz="1900" b="1" dirty="0">
-                <a:solidFill>
-                  <a:srgbClr val="1B1E26"/>
+          <p:cNvPr id="25" name="Text 22"/>
+          <p:cNvSpPr/>
+          <p:nvPr/>
+        </p:nvSpPr>
+        <p:spPr>
+          <a:xfrm>
+            <a:off x="1441223" y="5360727"/>
+            <a:ext cx="9974496" cy="597958"/>
+          </a:xfrm>
+          <a:prstGeom prst="rect">
+            <a:avLst/>
+          </a:prstGeom>
+          <a:noFill/>
+          <a:ln/>
+        </p:spPr>
+        <p:txBody>
+          <a:bodyPr wrap="square" lIns="0" tIns="0" rIns="0" bIns="0" rtlCol="0" anchor="t">
+            <a:normAutofit/>
+          </a:bodyPr>
+          <a:lstStyle/>
+          <a:p>
+            <a:pPr algn="l" indent="0" marL="0">
+              <a:lnSpc>
+                <a:spcPts val="1960"/>
+              </a:lnSpc>
+              <a:buNone/>
+            </a:pPr>
+            <a:r>
+              <a:rPr lang="en-US" sz="1400" b="1" dirty="0">
+                <a:solidFill>
+                  <a:srgbClr val="F6F3EC"/>
                 </a:solidFill>
                 <a:latin typeface="Space Grotesk" pitchFamily="34" charset="0"/>
                 <a:ea typeface="Space Grotesk" pitchFamily="34" charset="-122"/>
                 <a:cs typeface="Space Grotesk" pitchFamily="34" charset="-120"/>
               </a:rPr>
-              <a:t>Lint PR titles</a:t>
-            </a:r>
-            <a:endParaRPr lang="en-US" sz="1900" dirty="0"/>
-          </a:p>
-        </p:txBody>
-      </p:sp>
-      <p:sp>
-        <p:nvSpPr>
-          <p:cNvPr id="10" name="Text 6"/>
-          <p:cNvSpPr/>
-          <p:nvPr/>
-        </p:nvSpPr>
-        <p:spPr>
-          <a:xfrm>
-            <a:off x="4651829" y="2853835"/>
-            <a:ext cx="2974993" cy="1170517"/>
-          </a:xfrm>
-          <a:prstGeom prst="rect">
-            <a:avLst/>
-          </a:prstGeom>
-          <a:noFill/>
-          <a:ln/>
-        </p:spPr>
-        <p:txBody>
-          <a:bodyPr wrap="square" lIns="0" tIns="0" rIns="0" bIns="0" rtlCol="0" anchor="t">
-            <a:normAutofit/>
-          </a:bodyPr>
-          <a:lstStyle/>
-          <a:p>
-            <a:pPr algn="l" indent="0" marL="0">
-              <a:lnSpc>
-                <a:spcPts val="1960"/>
-              </a:lnSpc>
-              <a:buNone/>
-            </a:pPr>
+              <a:t>Repo setting:</a:t>
+            </a:r>
             <a:r>
               <a:rPr lang="en-US" sz="1400" dirty="0">
                 <a:solidFill>
-                  <a:srgbClr val="5D6270"/>
+                  <a:srgbClr val="F6F3EC"/>
                 </a:solidFill>
                 <a:latin typeface="Space Grotesk" pitchFamily="34" charset="0"/>
                 <a:ea typeface="Space Grotesk" pitchFamily="34" charset="-122"/>
                 <a:cs typeface="Space Grotesk" pitchFamily="34" charset="-120"/>
               </a:rPr>
-              <a:t>A required check, such as action-semantic-pull-request, blocks titles that skip the format.</a:t>
+              <a:t> make squash merges default to the PR title. Otherwise a one-commit PR uses that commit's message instead.</a:t>
             </a:r>
             <a:endParaRPr lang="en-US" sz="1400" dirty="0"/>
           </a:p>
         </p:txBody>
       </p:sp>
-      <p:sp>
-        <p:nvSpPr>
-          <p:cNvPr id="11" name="Shape 7"/>
-          <p:cNvSpPr/>
-          <p:nvPr/>
-        </p:nvSpPr>
-        <p:spPr>
-          <a:xfrm>
-            <a:off x="7965017" y="1702290"/>
+    </p:spTree>
+  </p:cSld>
+  <p:clrMapOvr>
+    <a:masterClrMapping/>
+  </p:clrMapOvr>
+</p:sld>
+</file>
+
+<file path=ppt/slides/slide14.xml><?xml version="1.0" encoding="utf-8"?>
+<p:sld xmlns:a="http://schemas.openxmlformats.org/drawingml/2006/main" xmlns:r="http://schemas.openxmlformats.org/officeDocument/2006/relationships" xmlns:p="http://schemas.openxmlformats.org/presentationml/2006/main">
+  <p:cSld name="Slide 14">
+    <p:bg>
+      <p:bgPr>
+        <a:solidFill>
+          <a:srgbClr val="F6F3EC"/>
+        </a:solidFill>
+      </p:bgPr>
+    </p:bg>
+    <p:spTree>
+      <p:nvGrpSpPr>
+        <p:cNvPr id="1" name=""/>
+        <p:cNvGrpSpPr/>
+        <p:nvPr/>
+      </p:nvGrpSpPr>
+      <p:grpSpPr>
+        <a:xfrm>
+          <a:off x="0" y="0"/>
+          <a:ext cx="0" cy="0"/>
+          <a:chOff x="0" y="0"/>
+          <a:chExt cx="0" cy="0"/>
+        </a:xfrm>
+      </p:grpSpPr>
+      <p:sp>
+        <p:nvSpPr>
+          <p:cNvPr id="2" name="Text 0"/>
+          <p:cNvSpPr/>
+          <p:nvPr>
+            <p:ph type="title"/>
+          </p:nvPr>
+        </p:nvSpPr>
+        <p:spPr>
+          <a:xfrm>
+            <a:off x="812800" y="812800"/>
+            <a:ext cx="10883392" cy="603741"/>
+          </a:xfrm>
+          <a:prstGeom prst="rect">
+            <a:avLst/>
+          </a:prstGeom>
+          <a:noFill/>
+          <a:ln/>
+        </p:spPr>
+        <p:txBody>
+          <a:bodyPr wrap="square" lIns="0" tIns="0" rIns="0" bIns="0" rtlCol="0" anchor="t">
+            <a:normAutofit/>
+          </a:bodyPr>
+          <a:lstStyle/>
+          <a:p>
+            <a:pPr algn="l" indent="0" marL="0">
+              <a:lnSpc>
+                <a:spcPts val="3960"/>
+              </a:lnSpc>
+              <a:buNone/>
+            </a:pPr>
+            <a:r>
+              <a:rPr lang="en-US" sz="3600" b="1" i="0" spc="-50" kern="0" dirty="0">
+                <a:solidFill>
+                  <a:srgbClr val="1B1E26"/>
+                </a:solidFill>
+                <a:latin typeface="Space Grotesk" pitchFamily="34" charset="0"/>
+                <a:ea typeface="Space Grotesk" pitchFamily="34" charset="-122"/>
+                <a:cs typeface="Space Grotesk" pitchFamily="34" charset="-120"/>
+              </a:rPr>
+              <a:t>Keep it honest: three guardrails</a:t>
+            </a:r>
+            <a:endParaRPr lang="en-US" sz="3600" dirty="0"/>
+          </a:p>
+        </p:txBody>
+      </p:sp>
+      <p:sp>
+        <p:nvSpPr>
+          <p:cNvPr id="3" name="Shape 1"/>
+          <p:cNvSpPr/>
+          <p:nvPr/>
+        </p:nvSpPr>
+        <p:spPr>
+          <a:xfrm>
+            <a:off x="819150" y="1702296"/>
             <a:ext cx="3407833" cy="2556404"/>
           </a:xfrm>
           <a:prstGeom prst="roundRect">
@@ -4356,6 +6203,282 @@
       </p:sp>
       <p:pic>
         <p:nvPicPr>
+          <p:cNvPr id="4" name="Image 0" descr="Check">    </p:cNvPr>
+          <p:cNvPicPr>
+            <a:picLocks noChangeAspect="1"/>
+          </p:cNvPicPr>
+          <p:nvPr/>
+        </p:nvPicPr>
+        <p:blipFill>
+          <a:blip r:embed="rId1"/>
+          <a:srcRect l="0" r="0" t="0" b="0"/>
+          <a:stretch/>
+        </p:blipFill>
+        <p:spPr>
+          <a:xfrm>
+            <a:off x="1078895" y="1962038"/>
+            <a:ext cx="355600" cy="355600"/>
+          </a:xfrm>
+          <a:prstGeom prst="rect">
+            <a:avLst/>
+          </a:prstGeom>
+        </p:spPr>
+      </p:pic>
+      <p:sp>
+        <p:nvSpPr>
+          <p:cNvPr id="5" name="Text 2"/>
+          <p:cNvSpPr/>
+          <p:nvPr/>
+        </p:nvSpPr>
+        <p:spPr>
+          <a:xfrm>
+            <a:off x="1078895" y="2419238"/>
+            <a:ext cx="2974993" cy="358397"/>
+          </a:xfrm>
+          <a:prstGeom prst="rect">
+            <a:avLst/>
+          </a:prstGeom>
+          <a:noFill/>
+          <a:ln/>
+        </p:spPr>
+        <p:txBody>
+          <a:bodyPr wrap="square" lIns="0" tIns="0" rIns="0" bIns="0" rtlCol="0" anchor="t">
+            <a:normAutofit/>
+          </a:bodyPr>
+          <a:lstStyle/>
+          <a:p>
+            <a:pPr algn="l" indent="0" marL="0">
+              <a:lnSpc>
+                <a:spcPts val="2280"/>
+              </a:lnSpc>
+              <a:buNone/>
+            </a:pPr>
+            <a:r>
+              <a:rPr lang="en-US" sz="1900" b="1" dirty="0">
+                <a:solidFill>
+                  <a:srgbClr val="1B1E26"/>
+                </a:solidFill>
+                <a:latin typeface="Space Grotesk" pitchFamily="34" charset="0"/>
+                <a:ea typeface="Space Grotesk" pitchFamily="34" charset="-122"/>
+                <a:cs typeface="Space Grotesk" pitchFamily="34" charset="-120"/>
+              </a:rPr>
+              <a:t>Squash merge</a:t>
+            </a:r>
+            <a:endParaRPr lang="en-US" sz="1900" dirty="0"/>
+          </a:p>
+        </p:txBody>
+      </p:sp>
+      <p:sp>
+        <p:nvSpPr>
+          <p:cNvPr id="6" name="Text 3"/>
+          <p:cNvSpPr/>
+          <p:nvPr/>
+        </p:nvSpPr>
+        <p:spPr>
+          <a:xfrm>
+            <a:off x="1078895" y="2853835"/>
+            <a:ext cx="2974993" cy="1170517"/>
+          </a:xfrm>
+          <a:prstGeom prst="rect">
+            <a:avLst/>
+          </a:prstGeom>
+          <a:noFill/>
+          <a:ln/>
+        </p:spPr>
+        <p:txBody>
+          <a:bodyPr wrap="square" lIns="0" tIns="0" rIns="0" bIns="0" rtlCol="0" anchor="t">
+            <a:normAutofit/>
+          </a:bodyPr>
+          <a:lstStyle/>
+          <a:p>
+            <a:pPr algn="l" indent="0" marL="0">
+              <a:lnSpc>
+                <a:spcPts val="1960"/>
+              </a:lnSpc>
+              <a:buNone/>
+            </a:pPr>
+            <a:r>
+              <a:rPr lang="en-US" sz="1400" dirty="0">
+                <a:solidFill>
+                  <a:srgbClr val="5D6270"/>
+                </a:solidFill>
+                <a:latin typeface="Space Grotesk" pitchFamily="34" charset="0"/>
+                <a:ea typeface="Space Grotesk" pitchFamily="34" charset="-122"/>
+                <a:cs typeface="Space Grotesk" pitchFamily="34" charset="-120"/>
+              </a:rPr>
+              <a:t>Use the PR title as the commit message. One clean commit per PR, so only titles need to be right.</a:t>
+            </a:r>
+            <a:endParaRPr lang="en-US" sz="1400" dirty="0"/>
+          </a:p>
+        </p:txBody>
+      </p:sp>
+      <p:sp>
+        <p:nvSpPr>
+          <p:cNvPr id="7" name="Shape 4"/>
+          <p:cNvSpPr/>
+          <p:nvPr/>
+        </p:nvSpPr>
+        <p:spPr>
+          <a:xfrm>
+            <a:off x="4392083" y="1702296"/>
+            <a:ext cx="3407833" cy="2556404"/>
+          </a:xfrm>
+          <a:prstGeom prst="roundRect">
+            <a:avLst>
+              <a:gd name="adj" fmla="val 4720"/>
+            </a:avLst>
+          </a:prstGeom>
+          <a:solidFill>
+            <a:srgbClr val="FFFDF8"/>
+          </a:solidFill>
+          <a:ln w="12700">
+            <a:solidFill>
+              <a:srgbClr val="E2DDD2"/>
+            </a:solidFill>
+            <a:prstDash val="solid"/>
+          </a:ln>
+        </p:spPr>
+      </p:sp>
+      <p:pic>
+        <p:nvPicPr>
+          <p:cNvPr id="8" name="Image 1" descr="Verified">    </p:cNvPr>
+          <p:cNvPicPr>
+            <a:picLocks noChangeAspect="1"/>
+          </p:cNvPicPr>
+          <p:nvPr/>
+        </p:nvPicPr>
+        <p:blipFill>
+          <a:blip r:embed="rId2"/>
+          <a:srcRect l="0" r="0" t="0" b="0"/>
+          <a:stretch/>
+        </p:blipFill>
+        <p:spPr>
+          <a:xfrm>
+            <a:off x="4651829" y="1962038"/>
+            <a:ext cx="355600" cy="355600"/>
+          </a:xfrm>
+          <a:prstGeom prst="rect">
+            <a:avLst/>
+          </a:prstGeom>
+        </p:spPr>
+      </p:pic>
+      <p:sp>
+        <p:nvSpPr>
+          <p:cNvPr id="9" name="Text 5"/>
+          <p:cNvSpPr/>
+          <p:nvPr/>
+        </p:nvSpPr>
+        <p:spPr>
+          <a:xfrm>
+            <a:off x="4651829" y="2419238"/>
+            <a:ext cx="2974993" cy="358397"/>
+          </a:xfrm>
+          <a:prstGeom prst="rect">
+            <a:avLst/>
+          </a:prstGeom>
+          <a:noFill/>
+          <a:ln/>
+        </p:spPr>
+        <p:txBody>
+          <a:bodyPr wrap="square" lIns="0" tIns="0" rIns="0" bIns="0" rtlCol="0" anchor="t">
+            <a:normAutofit/>
+          </a:bodyPr>
+          <a:lstStyle/>
+          <a:p>
+            <a:pPr algn="l" indent="0" marL="0">
+              <a:lnSpc>
+                <a:spcPts val="2280"/>
+              </a:lnSpc>
+              <a:buNone/>
+            </a:pPr>
+            <a:r>
+              <a:rPr lang="en-US" sz="1900" b="1" dirty="0">
+                <a:solidFill>
+                  <a:srgbClr val="1B1E26"/>
+                </a:solidFill>
+                <a:latin typeface="Space Grotesk" pitchFamily="34" charset="0"/>
+                <a:ea typeface="Space Grotesk" pitchFamily="34" charset="-122"/>
+                <a:cs typeface="Space Grotesk" pitchFamily="34" charset="-120"/>
+              </a:rPr>
+              <a:t>Lint PR titles</a:t>
+            </a:r>
+            <a:endParaRPr lang="en-US" sz="1900" dirty="0"/>
+          </a:p>
+        </p:txBody>
+      </p:sp>
+      <p:sp>
+        <p:nvSpPr>
+          <p:cNvPr id="10" name="Text 6"/>
+          <p:cNvSpPr/>
+          <p:nvPr/>
+        </p:nvSpPr>
+        <p:spPr>
+          <a:xfrm>
+            <a:off x="4651829" y="2853835"/>
+            <a:ext cx="2974993" cy="1170517"/>
+          </a:xfrm>
+          <a:prstGeom prst="rect">
+            <a:avLst/>
+          </a:prstGeom>
+          <a:noFill/>
+          <a:ln/>
+        </p:spPr>
+        <p:txBody>
+          <a:bodyPr wrap="square" lIns="0" tIns="0" rIns="0" bIns="0" rtlCol="0" anchor="t">
+            <a:normAutofit/>
+          </a:bodyPr>
+          <a:lstStyle/>
+          <a:p>
+            <a:pPr algn="l" indent="0" marL="0">
+              <a:lnSpc>
+                <a:spcPts val="1960"/>
+              </a:lnSpc>
+              <a:buNone/>
+            </a:pPr>
+            <a:r>
+              <a:rPr lang="en-US" sz="1400" dirty="0">
+                <a:solidFill>
+                  <a:srgbClr val="5D6270"/>
+                </a:solidFill>
+                <a:latin typeface="Space Grotesk" pitchFamily="34" charset="0"/>
+                <a:ea typeface="Space Grotesk" pitchFamily="34" charset="-122"/>
+                <a:cs typeface="Space Grotesk" pitchFamily="34" charset="-120"/>
+              </a:rPr>
+              <a:t>A required check, such as action-semantic-pull-request, blocks titles that skip the format.</a:t>
+            </a:r>
+            <a:endParaRPr lang="en-US" sz="1400" dirty="0"/>
+          </a:p>
+        </p:txBody>
+      </p:sp>
+      <p:sp>
+        <p:nvSpPr>
+          <p:cNvPr id="11" name="Shape 7"/>
+          <p:cNvSpPr/>
+          <p:nvPr/>
+        </p:nvSpPr>
+        <p:spPr>
+          <a:xfrm>
+            <a:off x="7965017" y="1702296"/>
+            <a:ext cx="3407833" cy="2556404"/>
+          </a:xfrm>
+          <a:prstGeom prst="roundRect">
+            <a:avLst>
+              <a:gd name="adj" fmla="val 4720"/>
+            </a:avLst>
+          </a:prstGeom>
+          <a:solidFill>
+            <a:srgbClr val="FFFDF8"/>
+          </a:solidFill>
+          <a:ln w="12700">
+            <a:solidFill>
+              <a:srgbClr val="E2DDD2"/>
+            </a:solidFill>
+            <a:prstDash val="solid"/>
+          </a:ln>
+        </p:spPr>
+      </p:sp>
+      <p:pic>
+        <p:nvPicPr>
           <p:cNvPr id="12" name="Image 2" descr="Code">    </p:cNvPr>
           <p:cNvPicPr>
             <a:picLocks noChangeAspect="1"/>
@@ -4573,9 +6696,9 @@
 </p:sld>
 </file>
 
-<file path=ppt/slides/slide13.xml><?xml version="1.0" encoding="utf-8"?>
+<file path=ppt/slides/slide15.xml><?xml version="1.0" encoding="utf-8"?>
 <p:sld xmlns:a="http://schemas.openxmlformats.org/drawingml/2006/main" xmlns:r="http://schemas.openxmlformats.org/officeDocument/2006/relationships" xmlns:p="http://schemas.openxmlformats.org/presentationml/2006/main">
-  <p:cSld name="Slide 13">
+  <p:cSld name="Slide 15">
     <p:bg>
       <p:bgPr>
         <a:solidFill>
@@ -8361,6 +10484,1518 @@
 <file path=ppt/slides/slide7.xml><?xml version="1.0" encoding="utf-8"?>
 <p:sld xmlns:a="http://schemas.openxmlformats.org/drawingml/2006/main" xmlns:r="http://schemas.openxmlformats.org/officeDocument/2006/relationships" xmlns:p="http://schemas.openxmlformats.org/presentationml/2006/main">
   <p:cSld name="Slide 7">
+    <p:bg>
+      <p:bgPr>
+        <a:solidFill>
+          <a:srgbClr val="ECE7DC"/>
+        </a:solidFill>
+      </p:bgPr>
+    </p:bg>
+    <p:spTree>
+      <p:nvGrpSpPr>
+        <p:cNvPr id="1" name=""/>
+        <p:cNvGrpSpPr/>
+        <p:nvPr/>
+      </p:nvGrpSpPr>
+      <p:grpSpPr>
+        <a:xfrm>
+          <a:off x="0" y="0"/>
+          <a:ext cx="0" cy="0"/>
+          <a:chOff x="0" y="0"/>
+          <a:chExt cx="0" cy="0"/>
+        </a:xfrm>
+      </p:grpSpPr>
+      <p:sp>
+        <p:nvSpPr>
+          <p:cNvPr id="2" name="Text 0"/>
+          <p:cNvSpPr/>
+          <p:nvPr>
+            <p:ph type="title"/>
+          </p:nvPr>
+        </p:nvSpPr>
+        <p:spPr>
+          <a:xfrm>
+            <a:off x="812800" y="812800"/>
+            <a:ext cx="10883392" cy="540052"/>
+          </a:xfrm>
+          <a:prstGeom prst="rect">
+            <a:avLst/>
+          </a:prstGeom>
+          <a:noFill/>
+          <a:ln/>
+        </p:spPr>
+        <p:txBody>
+          <a:bodyPr wrap="square" lIns="0" tIns="0" rIns="0" bIns="0" rtlCol="0" anchor="t">
+            <a:normAutofit/>
+          </a:bodyPr>
+          <a:lstStyle/>
+          <a:p>
+            <a:pPr algn="l" indent="0" marL="0">
+              <a:lnSpc>
+                <a:spcPts val="3539"/>
+              </a:lnSpc>
+              <a:buNone/>
+            </a:pPr>
+            <a:r>
+              <a:rPr lang="en-US" sz="3218" b="1" i="0" spc="-50" kern="0" dirty="0">
+                <a:solidFill>
+                  <a:srgbClr val="1B1E26"/>
+                </a:solidFill>
+                <a:latin typeface="Space Grotesk" pitchFamily="34" charset="0"/>
+                <a:ea typeface="Space Grotesk" pitchFamily="34" charset="-122"/>
+                <a:cs typeface="Space Grotesk" pitchFamily="34" charset="-120"/>
+              </a:rPr>
+              <a:t>Chores: real work that does not ship</a:t>
+            </a:r>
+            <a:endParaRPr lang="en-US" sz="3218" dirty="0"/>
+          </a:p>
+        </p:txBody>
+      </p:sp>
+      <p:sp>
+        <p:nvSpPr>
+          <p:cNvPr id="3" name="Shape 1"/>
+          <p:cNvSpPr/>
+          <p:nvPr/>
+        </p:nvSpPr>
+        <p:spPr>
+          <a:xfrm>
+            <a:off x="812800" y="1606854"/>
+            <a:ext cx="5179181" cy="3576789"/>
+          </a:xfrm>
+          <a:prstGeom prst="roundRect">
+            <a:avLst>
+              <a:gd name="adj" fmla="val 3551"/>
+            </a:avLst>
+          </a:prstGeom>
+          <a:solidFill>
+            <a:srgbClr val="15181F"/>
+          </a:solidFill>
+          <a:ln/>
+        </p:spPr>
+      </p:sp>
+      <p:sp>
+        <p:nvSpPr>
+          <p:cNvPr id="4" name="Text 2"/>
+          <p:cNvSpPr/>
+          <p:nvPr/>
+        </p:nvSpPr>
+        <p:spPr>
+          <a:xfrm>
+            <a:off x="1092200" y="1886254"/>
+            <a:ext cx="4758993" cy="597883"/>
+          </a:xfrm>
+          <a:prstGeom prst="rect">
+            <a:avLst/>
+          </a:prstGeom>
+          <a:noFill/>
+          <a:ln/>
+        </p:spPr>
+        <p:txBody>
+          <a:bodyPr wrap="square" lIns="0" tIns="0" rIns="0" bIns="0" rtlCol="0" anchor="t">
+            <a:normAutofit/>
+          </a:bodyPr>
+          <a:lstStyle/>
+          <a:p>
+            <a:pPr algn="l" indent="0" marL="0">
+              <a:lnSpc>
+                <a:spcPts val="3920"/>
+              </a:lnSpc>
+              <a:buNone/>
+            </a:pPr>
+            <a:r>
+              <a:rPr lang="en-US" sz="2800" b="1" dirty="0">
+                <a:solidFill>
+                  <a:srgbClr val="FF8A5C"/>
+                </a:solidFill>
+                <a:latin typeface="JetBrains Mono" pitchFamily="49" charset="0"/>
+                <a:ea typeface="JetBrains Mono" pitchFamily="49" charset="-122"/>
+                <a:cs typeface="JetBrains Mono" pitchFamily="49" charset="-120"/>
+              </a:rPr>
+              <a:t>chore:</a:t>
+            </a:r>
+            <a:endParaRPr lang="en-US" sz="2800" dirty="0"/>
+          </a:p>
+        </p:txBody>
+      </p:sp>
+      <p:sp>
+        <p:nvSpPr>
+          <p:cNvPr id="5" name="Text 3"/>
+          <p:cNvSpPr/>
+          <p:nvPr/>
+        </p:nvSpPr>
+        <p:spPr>
+          <a:xfrm>
+            <a:off x="1092200" y="2573037"/>
+            <a:ext cx="4758993" cy="638780"/>
+          </a:xfrm>
+          <a:prstGeom prst="rect">
+            <a:avLst/>
+          </a:prstGeom>
+          <a:noFill/>
+          <a:ln/>
+        </p:spPr>
+        <p:txBody>
+          <a:bodyPr wrap="square" lIns="0" tIns="0" rIns="0" bIns="0" rtlCol="0" anchor="t">
+            <a:normAutofit/>
+          </a:bodyPr>
+          <a:lstStyle/>
+          <a:p>
+            <a:pPr algn="l" indent="0" marL="0">
+              <a:lnSpc>
+                <a:spcPts val="2100"/>
+              </a:lnSpc>
+              <a:buNone/>
+            </a:pPr>
+            <a:r>
+              <a:rPr lang="en-US" sz="1500" dirty="0">
+                <a:solidFill>
+                  <a:srgbClr val="F6F3EC"/>
+                </a:solidFill>
+                <a:latin typeface="Space Grotesk" pitchFamily="34" charset="0"/>
+                <a:ea typeface="Space Grotesk" pitchFamily="34" charset="-122"/>
+                <a:cs typeface="Space Grotesk" pitchFamily="34" charset="-120"/>
+              </a:rPr>
+              <a:t>Housekeeping. Keeps the project healthy, but users get nothing new.</a:t>
+            </a:r>
+            <a:endParaRPr lang="en-US" sz="1500" dirty="0"/>
+          </a:p>
+        </p:txBody>
+      </p:sp>
+      <p:sp>
+        <p:nvSpPr>
+          <p:cNvPr id="6" name="Text 4"/>
+          <p:cNvSpPr/>
+          <p:nvPr/>
+        </p:nvSpPr>
+        <p:spPr>
+          <a:xfrm>
+            <a:off x="1092200" y="3300716"/>
+            <a:ext cx="4758993" cy="879702"/>
+          </a:xfrm>
+          <a:prstGeom prst="rect">
+            <a:avLst/>
+          </a:prstGeom>
+          <a:noFill/>
+          <a:ln/>
+        </p:spPr>
+        <p:txBody>
+          <a:bodyPr wrap="square" lIns="0" tIns="0" rIns="0" bIns="0" rtlCol="0" anchor="t">
+            <a:normAutofit/>
+          </a:bodyPr>
+          <a:lstStyle/>
+          <a:p>
+            <a:pPr algn="l" indent="0" marL="0">
+              <a:lnSpc>
+                <a:spcPts val="1950"/>
+              </a:lnSpc>
+              <a:buNone/>
+            </a:pPr>
+            <a:r>
+              <a:rPr lang="en-US" sz="1300" dirty="0">
+                <a:solidFill>
+                  <a:srgbClr val="E6E2D8"/>
+                </a:solidFill>
+                <a:latin typeface="JetBrains Mono" pitchFamily="49" charset="0"/>
+                <a:ea typeface="JetBrains Mono" pitchFamily="49" charset="-122"/>
+                <a:cs typeface="JetBrains Mono" pitchFamily="49" charset="-120"/>
+              </a:rPr>
+              <a:t>chore(deps): upgrade axios to 1.7</a:t>
+            </a:r>
+            <a:endParaRPr lang="en-US" sz="1300" dirty="0"/>
+          </a:p>
+          <a:p>
+            <a:pPr algn="l" indent="0" marL="0">
+              <a:lnSpc>
+                <a:spcPts val="1950"/>
+              </a:lnSpc>
+              <a:buNone/>
+            </a:pPr>
+            <a:r>
+              <a:rPr lang="en-US" sz="1300" dirty="0">
+                <a:solidFill>
+                  <a:srgbClr val="E6E2D8"/>
+                </a:solidFill>
+                <a:latin typeface="JetBrains Mono" pitchFamily="49" charset="0"/>
+                <a:ea typeface="JetBrains Mono" pitchFamily="49" charset="-122"/>
+                <a:cs typeface="JetBrains Mono" pitchFamily="49" charset="-120"/>
+              </a:rPr>
+              <a:t>chore: update .gitignore</a:t>
+            </a:r>
+            <a:endParaRPr lang="en-US" sz="1300" dirty="0"/>
+          </a:p>
+          <a:p>
+            <a:pPr algn="l" indent="0" marL="0">
+              <a:lnSpc>
+                <a:spcPts val="1950"/>
+              </a:lnSpc>
+              <a:buNone/>
+            </a:pPr>
+            <a:r>
+              <a:rPr lang="en-US" sz="1300" dirty="0">
+                <a:solidFill>
+                  <a:srgbClr val="E6E2D8"/>
+                </a:solidFill>
+                <a:latin typeface="JetBrains Mono" pitchFamily="49" charset="0"/>
+                <a:ea typeface="JetBrains Mono" pitchFamily="49" charset="-122"/>
+                <a:cs typeface="JetBrains Mono" pitchFamily="49" charset="-120"/>
+              </a:rPr>
+              <a:t>chore(main): release 2.5.0</a:t>
+            </a:r>
+            <a:endParaRPr lang="en-US" sz="1300" dirty="0"/>
+          </a:p>
+        </p:txBody>
+      </p:sp>
+      <p:sp>
+        <p:nvSpPr>
+          <p:cNvPr id="7" name="Text 5"/>
+          <p:cNvSpPr/>
+          <p:nvPr/>
+        </p:nvSpPr>
+        <p:spPr>
+          <a:xfrm>
+            <a:off x="1092200" y="4269318"/>
+            <a:ext cx="4758993" cy="556986"/>
+          </a:xfrm>
+          <a:prstGeom prst="rect">
+            <a:avLst/>
+          </a:prstGeom>
+          <a:noFill/>
+          <a:ln/>
+        </p:spPr>
+        <p:txBody>
+          <a:bodyPr wrap="square" lIns="0" tIns="0" rIns="0" bIns="0" rtlCol="0" anchor="t">
+            <a:normAutofit/>
+          </a:bodyPr>
+          <a:lstStyle/>
+          <a:p>
+            <a:pPr algn="l" indent="0" marL="0">
+              <a:lnSpc>
+                <a:spcPts val="1820"/>
+              </a:lnSpc>
+              <a:buNone/>
+            </a:pPr>
+            <a:r>
+              <a:rPr lang="en-US" sz="1300" b="1" dirty="0">
+                <a:solidFill>
+                  <a:srgbClr val="F6F3EC"/>
+                </a:solidFill>
+                <a:latin typeface="Space Grotesk" pitchFamily="34" charset="0"/>
+                <a:ea typeface="Space Grotesk" pitchFamily="34" charset="-122"/>
+                <a:cs typeface="Space Grotesk" pitchFamily="34" charset="-120"/>
+              </a:rPr>
+              <a:t>Robot reads:</a:t>
+            </a:r>
+            <a:r>
+              <a:rPr lang="en-US" sz="1300" dirty="0">
+                <a:solidFill>
+                  <a:srgbClr val="A3A9B6"/>
+                </a:solidFill>
+                <a:latin typeface="Space Grotesk" pitchFamily="34" charset="0"/>
+                <a:ea typeface="Space Grotesk" pitchFamily="34" charset="-122"/>
+                <a:cs typeface="Space Grotesk" pitchFamily="34" charset="-120"/>
+              </a:rPr>
+              <a:t> no version bump, and hidden from the changelog by default.</a:t>
+            </a:r>
+            <a:endParaRPr lang="en-US" sz="1300" dirty="0"/>
+          </a:p>
+        </p:txBody>
+      </p:sp>
+      <p:sp>
+        <p:nvSpPr>
+          <p:cNvPr id="8" name="Text 6"/>
+          <p:cNvSpPr/>
+          <p:nvPr/>
+        </p:nvSpPr>
+        <p:spPr>
+          <a:xfrm>
+            <a:off x="6296781" y="1606854"/>
+            <a:ext cx="5234892" cy="279211"/>
+          </a:xfrm>
+          <a:prstGeom prst="rect">
+            <a:avLst/>
+          </a:prstGeom>
+          <a:noFill/>
+          <a:ln/>
+        </p:spPr>
+        <p:txBody>
+          <a:bodyPr wrap="square" lIns="0" tIns="0" rIns="0" bIns="0" rtlCol="0" anchor="t">
+            <a:normAutofit/>
+          </a:bodyPr>
+          <a:lstStyle/>
+          <a:p>
+            <a:pPr algn="l" indent="0" marL="0">
+              <a:lnSpc>
+                <a:spcPts val="1758"/>
+              </a:lnSpc>
+              <a:buNone/>
+            </a:pPr>
+            <a:r>
+              <a:rPr lang="en-US" sz="1256" b="1" dirty="0">
+                <a:solidFill>
+                  <a:srgbClr val="5D6270"/>
+                </a:solidFill>
+                <a:latin typeface="Space Grotesk" pitchFamily="34" charset="0"/>
+                <a:ea typeface="Space Grotesk" pitchFamily="34" charset="-122"/>
+                <a:cs typeface="Space Grotesk" pitchFamily="34" charset="-120"/>
+              </a:rPr>
+              <a:t>Its housekeeping cousins</a:t>
+            </a:r>
+            <a:endParaRPr lang="en-US" sz="1256" dirty="0"/>
+          </a:p>
+        </p:txBody>
+      </p:sp>
+      <p:graphicFrame>
+        <p:nvGraphicFramePr>
+          <p:cNvPr id="9" name="Table 0"/>
+          <p:cNvGraphicFramePr>
+            <a:graphicFrameLocks noGrp="1"/>
+          </p:cNvGraphicFramePr>
+          <p:nvPr>
+            <p:extLst>
+              <p:ext uri="{D42A27DB-BD31-4B8C-83A1-F6EECF244321}">
+                <p14:modId xmlns:p14="http://schemas.microsoft.com/office/powerpoint/2010/main" val="1579011935"/>
+              </p:ext>
+            </p:extLst>
+          </p:nvPr>
+        </p:nvGraphicFramePr>
+        <p:xfrm>
+          <a:off x="6308876" y="1974360"/>
+          <a:ext cx="5070324" cy="3209283"/>
+        </p:xfrm>
+        <a:graphic>
+          <a:graphicData uri="http://schemas.openxmlformats.org/drawingml/2006/table">
+            <a:tbl>
+              <a:tblPr/>
+              <a:tblGrid>
+                <a:gridCol w="1521097"/>
+                <a:gridCol w="3549227"/>
+              </a:tblGrid>
+              <a:tr h="458447">
+                <a:tc>
+                  <a:txBody>
+                    <a:bodyPr/>
+                    <a:lstStyle/>
+                    <a:p>
+                      <a:pPr indent="0" marL="0">
+                        <a:lnSpc>
+                          <a:spcPts val="1838"/>
+                        </a:lnSpc>
+                        <a:buNone/>
+                      </a:pPr>
+                      <a:r>
+                        <a:rPr lang="en-US" sz="1313" b="1" dirty="0">
+                          <a:solidFill>
+                            <a:srgbClr val="FF8A5C"/>
+                          </a:solidFill>
+                          <a:latin typeface="Space Grotesk" pitchFamily="34" charset="0"/>
+                          <a:ea typeface="Space Grotesk" pitchFamily="34" charset="-122"/>
+                          <a:cs typeface="Space Grotesk" pitchFamily="34" charset="-120"/>
+                        </a:rPr>
+                        <a:t>Type</a:t>
+                      </a:r>
+                      <a:endParaRPr lang="en-US" sz="1313" dirty="0">
+                        <a:latin typeface="Space Grotesk" charset="0"/>
+                        <a:ea typeface="Space Grotesk" charset="0"/>
+                        <a:cs typeface="Space Grotesk" charset="0"/>
+                      </a:endParaRPr>
+                    </a:p>
+                  </a:txBody>
+                  <a:tcPr marL="152400" marR="152400" marT="88900" marB="88900" anchor="t">
+                    <a:lnL w="12700" cap="flat" cmpd="sng" algn="ctr">
+                      <a:solidFill>
+                        <a:srgbClr val="BCB9B0"/>
+                      </a:solidFill>
+                      <a:prstDash val="solid"/>
+                      <a:round/>
+                      <a:headEnd type="none" w="med" len="med"/>
+                      <a:tailEnd type="none" w="med" len="med"/>
+                    </a:lnL>
+                    <a:lnR w="12700" cap="flat" cmpd="sng" algn="ctr">
+                      <a:solidFill>
+                        <a:srgbClr val="15171C"/>
+                      </a:solidFill>
+                      <a:prstDash val="solid"/>
+                      <a:round/>
+                      <a:headEnd type="none" w="med" len="med"/>
+                      <a:tailEnd type="none" w="med" len="med"/>
+                    </a:lnR>
+                    <a:lnT w="12700" cap="flat" cmpd="sng" algn="ctr">
+                      <a:solidFill>
+                        <a:srgbClr val="BCB9B0"/>
+                      </a:solidFill>
+                      <a:prstDash val="solid"/>
+                      <a:round/>
+                      <a:headEnd type="none" w="med" len="med"/>
+                      <a:tailEnd type="none" w="med" len="med"/>
+                    </a:lnT>
+                    <a:lnB w="12700" cap="flat" cmpd="sng" algn="ctr">
+                      <a:solidFill>
+                        <a:srgbClr val="15171C"/>
+                      </a:solidFill>
+                      <a:prstDash val="solid"/>
+                      <a:round/>
+                      <a:headEnd type="none" w="med" len="med"/>
+                      <a:tailEnd type="none" w="med" len="med"/>
+                    </a:lnB>
+                    <a:solidFill>
+                      <a:srgbClr val="15181F"/>
+                    </a:solidFill>
+                  </a:tcPr>
+                </a:tc>
+                <a:tc>
+                  <a:txBody>
+                    <a:bodyPr/>
+                    <a:lstStyle/>
+                    <a:p>
+                      <a:pPr indent="0" marL="0">
+                        <a:lnSpc>
+                          <a:spcPts val="1838"/>
+                        </a:lnSpc>
+                        <a:buNone/>
+                      </a:pPr>
+                      <a:r>
+                        <a:rPr lang="en-US" sz="1313" b="1" dirty="0">
+                          <a:solidFill>
+                            <a:srgbClr val="F6F3EC"/>
+                          </a:solidFill>
+                          <a:latin typeface="Space Grotesk" pitchFamily="34" charset="0"/>
+                          <a:ea typeface="Space Grotesk" pitchFamily="34" charset="-122"/>
+                          <a:cs typeface="Space Grotesk" pitchFamily="34" charset="-120"/>
+                        </a:rPr>
+                        <a:t>Use it for</a:t>
+                      </a:r>
+                      <a:endParaRPr lang="en-US" sz="1313" dirty="0">
+                        <a:latin typeface="Space Grotesk" charset="0"/>
+                        <a:ea typeface="Space Grotesk" charset="0"/>
+                        <a:cs typeface="Space Grotesk" charset="0"/>
+                      </a:endParaRPr>
+                    </a:p>
+                  </a:txBody>
+                  <a:tcPr marL="152400" marR="152400" marT="88900" marB="88900" anchor="t">
+                    <a:lnL w="12700" cap="flat" cmpd="sng" algn="ctr">
+                      <a:solidFill>
+                        <a:srgbClr val="15171C"/>
+                      </a:solidFill>
+                      <a:prstDash val="solid"/>
+                      <a:round/>
+                      <a:headEnd type="none" w="med" len="med"/>
+                      <a:tailEnd type="none" w="med" len="med"/>
+                    </a:lnL>
+                    <a:lnR w="12700" cap="flat" cmpd="sng" algn="ctr">
+                      <a:solidFill>
+                        <a:srgbClr val="15171C"/>
+                      </a:solidFill>
+                      <a:prstDash val="solid"/>
+                      <a:round/>
+                      <a:headEnd type="none" w="med" len="med"/>
+                      <a:tailEnd type="none" w="med" len="med"/>
+                    </a:lnR>
+                    <a:lnT w="12700" cap="flat" cmpd="sng" algn="ctr">
+                      <a:solidFill>
+                        <a:srgbClr val="BCB9B0"/>
+                      </a:solidFill>
+                      <a:prstDash val="solid"/>
+                      <a:round/>
+                      <a:headEnd type="none" w="med" len="med"/>
+                      <a:tailEnd type="none" w="med" len="med"/>
+                    </a:lnT>
+                    <a:lnB w="12700" cap="flat" cmpd="sng" algn="ctr">
+                      <a:solidFill>
+                        <a:srgbClr val="15171C"/>
+                      </a:solidFill>
+                      <a:prstDash val="solid"/>
+                      <a:round/>
+                      <a:headEnd type="none" w="med" len="med"/>
+                      <a:tailEnd type="none" w="med" len="med"/>
+                    </a:lnB>
+                    <a:solidFill>
+                      <a:srgbClr val="15181F"/>
+                    </a:solidFill>
+                  </a:tcPr>
+                </a:tc>
+              </a:tr>
+              <a:tr h="458447">
+                <a:tc>
+                  <a:txBody>
+                    <a:bodyPr/>
+                    <a:lstStyle/>
+                    <a:p>
+                      <a:pPr indent="0" marL="0">
+                        <a:lnSpc>
+                          <a:spcPts val="1838"/>
+                        </a:lnSpc>
+                        <a:buNone/>
+                      </a:pPr>
+                      <a:r>
+                        <a:rPr lang="en-US" sz="1313" dirty="0">
+                          <a:solidFill>
+                            <a:srgbClr val="1B1E26"/>
+                          </a:solidFill>
+                          <a:latin typeface="Space Grotesk" pitchFamily="34" charset="0"/>
+                          <a:ea typeface="Space Grotesk" pitchFamily="34" charset="-122"/>
+                          <a:cs typeface="Space Grotesk" pitchFamily="34" charset="-120"/>
+                        </a:rPr>
+                        <a:t>docs</a:t>
+                      </a:r>
+                      <a:endParaRPr lang="en-US" sz="1313" dirty="0">
+                        <a:latin typeface="Space Grotesk" charset="0"/>
+                        <a:ea typeface="Space Grotesk" charset="0"/>
+                        <a:cs typeface="Space Grotesk" charset="0"/>
+                      </a:endParaRPr>
+                    </a:p>
+                  </a:txBody>
+                  <a:tcPr marL="152400" marR="152400" marT="88900" marB="88900" anchor="t">
+                    <a:lnL w="12700" cap="flat" cmpd="sng" algn="ctr">
+                      <a:solidFill>
+                        <a:srgbClr val="BCB9B0"/>
+                      </a:solidFill>
+                      <a:prstDash val="solid"/>
+                      <a:round/>
+                      <a:headEnd type="none" w="med" len="med"/>
+                      <a:tailEnd type="none" w="med" len="med"/>
+                    </a:lnL>
+                    <a:lnR w="12700" cap="flat" cmpd="sng" algn="ctr">
+                      <a:solidFill>
+                        <a:srgbClr val="CBCAC6"/>
+                      </a:solidFill>
+                      <a:prstDash val="solid"/>
+                      <a:round/>
+                      <a:headEnd type="none" w="med" len="med"/>
+                      <a:tailEnd type="none" w="med" len="med"/>
+                    </a:lnR>
+                    <a:lnT w="12700" cap="flat" cmpd="sng" algn="ctr">
+                      <a:solidFill>
+                        <a:srgbClr val="15171C"/>
+                      </a:solidFill>
+                      <a:prstDash val="solid"/>
+                      <a:round/>
+                      <a:headEnd type="none" w="med" len="med"/>
+                      <a:tailEnd type="none" w="med" len="med"/>
+                    </a:lnT>
+                    <a:lnB w="12700" cap="flat" cmpd="sng" algn="ctr">
+                      <a:solidFill>
+                        <a:srgbClr val="CBCAC6"/>
+                      </a:solidFill>
+                      <a:prstDash val="solid"/>
+                      <a:round/>
+                      <a:headEnd type="none" w="med" len="med"/>
+                      <a:tailEnd type="none" w="med" len="med"/>
+                    </a:lnB>
+                    <a:solidFill>
+                      <a:srgbClr val="FFFDF8"/>
+                    </a:solidFill>
+                  </a:tcPr>
+                </a:tc>
+                <a:tc>
+                  <a:txBody>
+                    <a:bodyPr/>
+                    <a:lstStyle/>
+                    <a:p>
+                      <a:pPr indent="0" marL="0">
+                        <a:lnSpc>
+                          <a:spcPts val="1838"/>
+                        </a:lnSpc>
+                        <a:buNone/>
+                      </a:pPr>
+                      <a:r>
+                        <a:rPr lang="en-US" sz="1313" dirty="0">
+                          <a:solidFill>
+                            <a:srgbClr val="1B1E26"/>
+                          </a:solidFill>
+                          <a:latin typeface="Space Grotesk" pitchFamily="34" charset="0"/>
+                          <a:ea typeface="Space Grotesk" pitchFamily="34" charset="-122"/>
+                          <a:cs typeface="Space Grotesk" pitchFamily="34" charset="-120"/>
+                        </a:rPr>
+                        <a:t>Documentation only</a:t>
+                      </a:r>
+                      <a:endParaRPr lang="en-US" sz="1313" dirty="0">
+                        <a:latin typeface="Space Grotesk" charset="0"/>
+                        <a:ea typeface="Space Grotesk" charset="0"/>
+                        <a:cs typeface="Space Grotesk" charset="0"/>
+                      </a:endParaRPr>
+                    </a:p>
+                  </a:txBody>
+                  <a:tcPr marL="152400" marR="152400" marT="88900" marB="88900" anchor="t">
+                    <a:lnL w="12700" cap="flat" cmpd="sng" algn="ctr">
+                      <a:solidFill>
+                        <a:srgbClr val="CBCAC6"/>
+                      </a:solidFill>
+                      <a:prstDash val="solid"/>
+                      <a:round/>
+                      <a:headEnd type="none" w="med" len="med"/>
+                      <a:tailEnd type="none" w="med" len="med"/>
+                    </a:lnL>
+                    <a:lnR w="12700" cap="flat" cmpd="sng" algn="ctr">
+                      <a:solidFill>
+                        <a:srgbClr val="CBCAC6"/>
+                      </a:solidFill>
+                      <a:prstDash val="solid"/>
+                      <a:round/>
+                      <a:headEnd type="none" w="med" len="med"/>
+                      <a:tailEnd type="none" w="med" len="med"/>
+                    </a:lnR>
+                    <a:lnT w="12700" cap="flat" cmpd="sng" algn="ctr">
+                      <a:solidFill>
+                        <a:srgbClr val="15171C"/>
+                      </a:solidFill>
+                      <a:prstDash val="solid"/>
+                      <a:round/>
+                      <a:headEnd type="none" w="med" len="med"/>
+                      <a:tailEnd type="none" w="med" len="med"/>
+                    </a:lnT>
+                    <a:lnB w="12700" cap="flat" cmpd="sng" algn="ctr">
+                      <a:solidFill>
+                        <a:srgbClr val="CBCAC6"/>
+                      </a:solidFill>
+                      <a:prstDash val="solid"/>
+                      <a:round/>
+                      <a:headEnd type="none" w="med" len="med"/>
+                      <a:tailEnd type="none" w="med" len="med"/>
+                    </a:lnB>
+                    <a:solidFill>
+                      <a:srgbClr val="FFFDF8"/>
+                    </a:solidFill>
+                  </a:tcPr>
+                </a:tc>
+              </a:tr>
+              <a:tr h="458447">
+                <a:tc>
+                  <a:txBody>
+                    <a:bodyPr/>
+                    <a:lstStyle/>
+                    <a:p>
+                      <a:pPr indent="0" marL="0">
+                        <a:lnSpc>
+                          <a:spcPts val="1838"/>
+                        </a:lnSpc>
+                        <a:buNone/>
+                      </a:pPr>
+                      <a:r>
+                        <a:rPr lang="en-US" sz="1313" dirty="0">
+                          <a:solidFill>
+                            <a:srgbClr val="1B1E26"/>
+                          </a:solidFill>
+                          <a:latin typeface="Space Grotesk" pitchFamily="34" charset="0"/>
+                          <a:ea typeface="Space Grotesk" pitchFamily="34" charset="-122"/>
+                          <a:cs typeface="Space Grotesk" pitchFamily="34" charset="-120"/>
+                        </a:rPr>
+                        <a:t>refactor</a:t>
+                      </a:r>
+                      <a:endParaRPr lang="en-US" sz="1313" dirty="0">
+                        <a:latin typeface="Space Grotesk" charset="0"/>
+                        <a:ea typeface="Space Grotesk" charset="0"/>
+                        <a:cs typeface="Space Grotesk" charset="0"/>
+                      </a:endParaRPr>
+                    </a:p>
+                  </a:txBody>
+                  <a:tcPr marL="152400" marR="152400" marT="88900" marB="88900" anchor="t">
+                    <a:lnL w="12700" cap="flat" cmpd="sng" algn="ctr">
+                      <a:solidFill>
+                        <a:srgbClr val="BCB9B0"/>
+                      </a:solidFill>
+                      <a:prstDash val="solid"/>
+                      <a:round/>
+                      <a:headEnd type="none" w="med" len="med"/>
+                      <a:tailEnd type="none" w="med" len="med"/>
+                    </a:lnL>
+                    <a:lnR w="12700" cap="flat" cmpd="sng" algn="ctr">
+                      <a:solidFill>
+                        <a:srgbClr val="BCB9B0"/>
+                      </a:solidFill>
+                      <a:prstDash val="solid"/>
+                      <a:round/>
+                      <a:headEnd type="none" w="med" len="med"/>
+                      <a:tailEnd type="none" w="med" len="med"/>
+                    </a:lnR>
+                    <a:lnT w="12700" cap="flat" cmpd="sng" algn="ctr">
+                      <a:solidFill>
+                        <a:srgbClr val="CBCAC6"/>
+                      </a:solidFill>
+                      <a:prstDash val="solid"/>
+                      <a:round/>
+                      <a:headEnd type="none" w="med" len="med"/>
+                      <a:tailEnd type="none" w="med" len="med"/>
+                    </a:lnT>
+                    <a:lnB w="12700" cap="flat" cmpd="sng" algn="ctr">
+                      <a:solidFill>
+                        <a:srgbClr val="BCB9B0"/>
+                      </a:solidFill>
+                      <a:prstDash val="solid"/>
+                      <a:round/>
+                      <a:headEnd type="none" w="med" len="med"/>
+                      <a:tailEnd type="none" w="med" len="med"/>
+                    </a:lnB>
+                  </a:tcPr>
+                </a:tc>
+                <a:tc>
+                  <a:txBody>
+                    <a:bodyPr/>
+                    <a:lstStyle/>
+                    <a:p>
+                      <a:pPr indent="0" marL="0">
+                        <a:lnSpc>
+                          <a:spcPts val="1838"/>
+                        </a:lnSpc>
+                        <a:buNone/>
+                      </a:pPr>
+                      <a:r>
+                        <a:rPr lang="en-US" sz="1313" dirty="0">
+                          <a:solidFill>
+                            <a:srgbClr val="1B1E26"/>
+                          </a:solidFill>
+                          <a:latin typeface="Space Grotesk" pitchFamily="34" charset="0"/>
+                          <a:ea typeface="Space Grotesk" pitchFamily="34" charset="-122"/>
+                          <a:cs typeface="Space Grotesk" pitchFamily="34" charset="-120"/>
+                        </a:rPr>
+                        <a:t>Restructure code, same behavior</a:t>
+                      </a:r>
+                      <a:endParaRPr lang="en-US" sz="1313" dirty="0">
+                        <a:latin typeface="Space Grotesk" charset="0"/>
+                        <a:ea typeface="Space Grotesk" charset="0"/>
+                        <a:cs typeface="Space Grotesk" charset="0"/>
+                      </a:endParaRPr>
+                    </a:p>
+                  </a:txBody>
+                  <a:tcPr marL="152400" marR="152400" marT="88900" marB="88900" anchor="t">
+                    <a:lnL w="12700" cap="flat" cmpd="sng" algn="ctr">
+                      <a:solidFill>
+                        <a:srgbClr val="BCB9B0"/>
+                      </a:solidFill>
+                      <a:prstDash val="solid"/>
+                      <a:round/>
+                      <a:headEnd type="none" w="med" len="med"/>
+                      <a:tailEnd type="none" w="med" len="med"/>
+                    </a:lnL>
+                    <a:lnR w="12700" cap="flat" cmpd="sng" algn="ctr">
+                      <a:solidFill>
+                        <a:srgbClr val="BCB9B0"/>
+                      </a:solidFill>
+                      <a:prstDash val="solid"/>
+                      <a:round/>
+                      <a:headEnd type="none" w="med" len="med"/>
+                      <a:tailEnd type="none" w="med" len="med"/>
+                    </a:lnR>
+                    <a:lnT w="12700" cap="flat" cmpd="sng" algn="ctr">
+                      <a:solidFill>
+                        <a:srgbClr val="CBCAC6"/>
+                      </a:solidFill>
+                      <a:prstDash val="solid"/>
+                      <a:round/>
+                      <a:headEnd type="none" w="med" len="med"/>
+                      <a:tailEnd type="none" w="med" len="med"/>
+                    </a:lnT>
+                    <a:lnB w="12700" cap="flat" cmpd="sng" algn="ctr">
+                      <a:solidFill>
+                        <a:srgbClr val="BCB9B0"/>
+                      </a:solidFill>
+                      <a:prstDash val="solid"/>
+                      <a:round/>
+                      <a:headEnd type="none" w="med" len="med"/>
+                      <a:tailEnd type="none" w="med" len="med"/>
+                    </a:lnB>
+                  </a:tcPr>
+                </a:tc>
+              </a:tr>
+              <a:tr h="458485">
+                <a:tc>
+                  <a:txBody>
+                    <a:bodyPr/>
+                    <a:lstStyle/>
+                    <a:p>
+                      <a:pPr indent="0" marL="0">
+                        <a:lnSpc>
+                          <a:spcPts val="1838"/>
+                        </a:lnSpc>
+                        <a:buNone/>
+                      </a:pPr>
+                      <a:r>
+                        <a:rPr lang="en-US" sz="1313" dirty="0">
+                          <a:solidFill>
+                            <a:srgbClr val="1B1E26"/>
+                          </a:solidFill>
+                          <a:latin typeface="Space Grotesk" pitchFamily="34" charset="0"/>
+                          <a:ea typeface="Space Grotesk" pitchFamily="34" charset="-122"/>
+                          <a:cs typeface="Space Grotesk" pitchFamily="34" charset="-120"/>
+                        </a:rPr>
+                        <a:t>test</a:t>
+                      </a:r>
+                      <a:endParaRPr lang="en-US" sz="1313" dirty="0">
+                        <a:latin typeface="Space Grotesk" charset="0"/>
+                        <a:ea typeface="Space Grotesk" charset="0"/>
+                        <a:cs typeface="Space Grotesk" charset="0"/>
+                      </a:endParaRPr>
+                    </a:p>
+                  </a:txBody>
+                  <a:tcPr marL="152400" marR="152400" marT="88900" marB="88900" anchor="t">
+                    <a:lnL w="12700" cap="flat" cmpd="sng" algn="ctr">
+                      <a:solidFill>
+                        <a:srgbClr val="BCB9B0"/>
+                      </a:solidFill>
+                      <a:prstDash val="solid"/>
+                      <a:round/>
+                      <a:headEnd type="none" w="med" len="med"/>
+                      <a:tailEnd type="none" w="med" len="med"/>
+                    </a:lnL>
+                    <a:lnR w="12700" cap="flat" cmpd="sng" algn="ctr">
+                      <a:solidFill>
+                        <a:srgbClr val="CBCAC6"/>
+                      </a:solidFill>
+                      <a:prstDash val="solid"/>
+                      <a:round/>
+                      <a:headEnd type="none" w="med" len="med"/>
+                      <a:tailEnd type="none" w="med" len="med"/>
+                    </a:lnR>
+                    <a:lnT w="12700" cap="flat" cmpd="sng" algn="ctr">
+                      <a:solidFill>
+                        <a:srgbClr val="BCB9B0"/>
+                      </a:solidFill>
+                      <a:prstDash val="solid"/>
+                      <a:round/>
+                      <a:headEnd type="none" w="med" len="med"/>
+                      <a:tailEnd type="none" w="med" len="med"/>
+                    </a:lnT>
+                    <a:lnB w="12700" cap="flat" cmpd="sng" algn="ctr">
+                      <a:solidFill>
+                        <a:srgbClr val="CBCAC6"/>
+                      </a:solidFill>
+                      <a:prstDash val="solid"/>
+                      <a:round/>
+                      <a:headEnd type="none" w="med" len="med"/>
+                      <a:tailEnd type="none" w="med" len="med"/>
+                    </a:lnB>
+                    <a:solidFill>
+                      <a:srgbClr val="FFFDF8"/>
+                    </a:solidFill>
+                  </a:tcPr>
+                </a:tc>
+                <a:tc>
+                  <a:txBody>
+                    <a:bodyPr/>
+                    <a:lstStyle/>
+                    <a:p>
+                      <a:pPr indent="0" marL="0">
+                        <a:lnSpc>
+                          <a:spcPts val="1838"/>
+                        </a:lnSpc>
+                        <a:buNone/>
+                      </a:pPr>
+                      <a:r>
+                        <a:rPr lang="en-US" sz="1313" dirty="0">
+                          <a:solidFill>
+                            <a:srgbClr val="1B1E26"/>
+                          </a:solidFill>
+                          <a:latin typeface="Space Grotesk" pitchFamily="34" charset="0"/>
+                          <a:ea typeface="Space Grotesk" pitchFamily="34" charset="-122"/>
+                          <a:cs typeface="Space Grotesk" pitchFamily="34" charset="-120"/>
+                        </a:rPr>
+                        <a:t>Add or fix tests</a:t>
+                      </a:r>
+                      <a:endParaRPr lang="en-US" sz="1313" dirty="0">
+                        <a:latin typeface="Space Grotesk" charset="0"/>
+                        <a:ea typeface="Space Grotesk" charset="0"/>
+                        <a:cs typeface="Space Grotesk" charset="0"/>
+                      </a:endParaRPr>
+                    </a:p>
+                  </a:txBody>
+                  <a:tcPr marL="152400" marR="152400" marT="88900" marB="88900" anchor="t">
+                    <a:lnL w="12700" cap="flat" cmpd="sng" algn="ctr">
+                      <a:solidFill>
+                        <a:srgbClr val="CBCAC6"/>
+                      </a:solidFill>
+                      <a:prstDash val="solid"/>
+                      <a:round/>
+                      <a:headEnd type="none" w="med" len="med"/>
+                      <a:tailEnd type="none" w="med" len="med"/>
+                    </a:lnL>
+                    <a:lnR w="12700" cap="flat" cmpd="sng" algn="ctr">
+                      <a:solidFill>
+                        <a:srgbClr val="CBCAC6"/>
+                      </a:solidFill>
+                      <a:prstDash val="solid"/>
+                      <a:round/>
+                      <a:headEnd type="none" w="med" len="med"/>
+                      <a:tailEnd type="none" w="med" len="med"/>
+                    </a:lnR>
+                    <a:lnT w="12700" cap="flat" cmpd="sng" algn="ctr">
+                      <a:solidFill>
+                        <a:srgbClr val="BCB9B0"/>
+                      </a:solidFill>
+                      <a:prstDash val="solid"/>
+                      <a:round/>
+                      <a:headEnd type="none" w="med" len="med"/>
+                      <a:tailEnd type="none" w="med" len="med"/>
+                    </a:lnT>
+                    <a:lnB w="12700" cap="flat" cmpd="sng" algn="ctr">
+                      <a:solidFill>
+                        <a:srgbClr val="CBCAC6"/>
+                      </a:solidFill>
+                      <a:prstDash val="solid"/>
+                      <a:round/>
+                      <a:headEnd type="none" w="med" len="med"/>
+                      <a:tailEnd type="none" w="med" len="med"/>
+                    </a:lnB>
+                    <a:solidFill>
+                      <a:srgbClr val="FFFDF8"/>
+                    </a:solidFill>
+                  </a:tcPr>
+                </a:tc>
+              </a:tr>
+              <a:tr h="458485">
+                <a:tc>
+                  <a:txBody>
+                    <a:bodyPr/>
+                    <a:lstStyle/>
+                    <a:p>
+                      <a:pPr indent="0" marL="0">
+                        <a:lnSpc>
+                          <a:spcPts val="1838"/>
+                        </a:lnSpc>
+                        <a:buNone/>
+                      </a:pPr>
+                      <a:r>
+                        <a:rPr lang="en-US" sz="1313" dirty="0">
+                          <a:solidFill>
+                            <a:srgbClr val="1B1E26"/>
+                          </a:solidFill>
+                          <a:latin typeface="Space Grotesk" pitchFamily="34" charset="0"/>
+                          <a:ea typeface="Space Grotesk" pitchFamily="34" charset="-122"/>
+                          <a:cs typeface="Space Grotesk" pitchFamily="34" charset="-120"/>
+                        </a:rPr>
+                        <a:t>ci</a:t>
+                      </a:r>
+                      <a:endParaRPr lang="en-US" sz="1313" dirty="0">
+                        <a:latin typeface="Space Grotesk" charset="0"/>
+                        <a:ea typeface="Space Grotesk" charset="0"/>
+                        <a:cs typeface="Space Grotesk" charset="0"/>
+                      </a:endParaRPr>
+                    </a:p>
+                  </a:txBody>
+                  <a:tcPr marL="152400" marR="152400" marT="88900" marB="88900" anchor="t">
+                    <a:lnL w="12700" cap="flat" cmpd="sng" algn="ctr">
+                      <a:solidFill>
+                        <a:srgbClr val="BCB9B0"/>
+                      </a:solidFill>
+                      <a:prstDash val="solid"/>
+                      <a:round/>
+                      <a:headEnd type="none" w="med" len="med"/>
+                      <a:tailEnd type="none" w="med" len="med"/>
+                    </a:lnL>
+                    <a:lnR w="12700" cap="flat" cmpd="sng" algn="ctr">
+                      <a:solidFill>
+                        <a:srgbClr val="BCB9B0"/>
+                      </a:solidFill>
+                      <a:prstDash val="solid"/>
+                      <a:round/>
+                      <a:headEnd type="none" w="med" len="med"/>
+                      <a:tailEnd type="none" w="med" len="med"/>
+                    </a:lnR>
+                    <a:lnT w="12700" cap="flat" cmpd="sng" algn="ctr">
+                      <a:solidFill>
+                        <a:srgbClr val="CBCAC6"/>
+                      </a:solidFill>
+                      <a:prstDash val="solid"/>
+                      <a:round/>
+                      <a:headEnd type="none" w="med" len="med"/>
+                      <a:tailEnd type="none" w="med" len="med"/>
+                    </a:lnT>
+                    <a:lnB w="12700" cap="flat" cmpd="sng" algn="ctr">
+                      <a:solidFill>
+                        <a:srgbClr val="BCB9B0"/>
+                      </a:solidFill>
+                      <a:prstDash val="solid"/>
+                      <a:round/>
+                      <a:headEnd type="none" w="med" len="med"/>
+                      <a:tailEnd type="none" w="med" len="med"/>
+                    </a:lnB>
+                  </a:tcPr>
+                </a:tc>
+                <a:tc>
+                  <a:txBody>
+                    <a:bodyPr/>
+                    <a:lstStyle/>
+                    <a:p>
+                      <a:pPr indent="0" marL="0">
+                        <a:lnSpc>
+                          <a:spcPts val="1838"/>
+                        </a:lnSpc>
+                        <a:buNone/>
+                      </a:pPr>
+                      <a:r>
+                        <a:rPr lang="en-US" sz="1313" dirty="0">
+                          <a:solidFill>
+                            <a:srgbClr val="1B1E26"/>
+                          </a:solidFill>
+                          <a:latin typeface="Space Grotesk" pitchFamily="34" charset="0"/>
+                          <a:ea typeface="Space Grotesk" pitchFamily="34" charset="-122"/>
+                          <a:cs typeface="Space Grotesk" pitchFamily="34" charset="-120"/>
+                        </a:rPr>
+                        <a:t>Pipeline and workflow changes</a:t>
+                      </a:r>
+                      <a:endParaRPr lang="en-US" sz="1313" dirty="0">
+                        <a:latin typeface="Space Grotesk" charset="0"/>
+                        <a:ea typeface="Space Grotesk" charset="0"/>
+                        <a:cs typeface="Space Grotesk" charset="0"/>
+                      </a:endParaRPr>
+                    </a:p>
+                  </a:txBody>
+                  <a:tcPr marL="152400" marR="152400" marT="88900" marB="88900" anchor="t">
+                    <a:lnL w="12700" cap="flat" cmpd="sng" algn="ctr">
+                      <a:solidFill>
+                        <a:srgbClr val="BCB9B0"/>
+                      </a:solidFill>
+                      <a:prstDash val="solid"/>
+                      <a:round/>
+                      <a:headEnd type="none" w="med" len="med"/>
+                      <a:tailEnd type="none" w="med" len="med"/>
+                    </a:lnL>
+                    <a:lnR w="12700" cap="flat" cmpd="sng" algn="ctr">
+                      <a:solidFill>
+                        <a:srgbClr val="BCB9B0"/>
+                      </a:solidFill>
+                      <a:prstDash val="solid"/>
+                      <a:round/>
+                      <a:headEnd type="none" w="med" len="med"/>
+                      <a:tailEnd type="none" w="med" len="med"/>
+                    </a:lnR>
+                    <a:lnT w="12700" cap="flat" cmpd="sng" algn="ctr">
+                      <a:solidFill>
+                        <a:srgbClr val="CBCAC6"/>
+                      </a:solidFill>
+                      <a:prstDash val="solid"/>
+                      <a:round/>
+                      <a:headEnd type="none" w="med" len="med"/>
+                      <a:tailEnd type="none" w="med" len="med"/>
+                    </a:lnT>
+                    <a:lnB w="12700" cap="flat" cmpd="sng" algn="ctr">
+                      <a:solidFill>
+                        <a:srgbClr val="BCB9B0"/>
+                      </a:solidFill>
+                      <a:prstDash val="solid"/>
+                      <a:round/>
+                      <a:headEnd type="none" w="med" len="med"/>
+                      <a:tailEnd type="none" w="med" len="med"/>
+                    </a:lnB>
+                  </a:tcPr>
+                </a:tc>
+              </a:tr>
+              <a:tr h="458485">
+                <a:tc>
+                  <a:txBody>
+                    <a:bodyPr/>
+                    <a:lstStyle/>
+                    <a:p>
+                      <a:pPr indent="0" marL="0">
+                        <a:lnSpc>
+                          <a:spcPts val="1838"/>
+                        </a:lnSpc>
+                        <a:buNone/>
+                      </a:pPr>
+                      <a:r>
+                        <a:rPr lang="en-US" sz="1313" dirty="0">
+                          <a:solidFill>
+                            <a:srgbClr val="1B1E26"/>
+                          </a:solidFill>
+                          <a:latin typeface="Space Grotesk" pitchFamily="34" charset="0"/>
+                          <a:ea typeface="Space Grotesk" pitchFamily="34" charset="-122"/>
+                          <a:cs typeface="Space Grotesk" pitchFamily="34" charset="-120"/>
+                        </a:rPr>
+                        <a:t>build</a:t>
+                      </a:r>
+                      <a:endParaRPr lang="en-US" sz="1313" dirty="0">
+                        <a:latin typeface="Space Grotesk" charset="0"/>
+                        <a:ea typeface="Space Grotesk" charset="0"/>
+                        <a:cs typeface="Space Grotesk" charset="0"/>
+                      </a:endParaRPr>
+                    </a:p>
+                  </a:txBody>
+                  <a:tcPr marL="152400" marR="152400" marT="88900" marB="88900" anchor="t">
+                    <a:lnL w="12700" cap="flat" cmpd="sng" algn="ctr">
+                      <a:solidFill>
+                        <a:srgbClr val="BCB9B0"/>
+                      </a:solidFill>
+                      <a:prstDash val="solid"/>
+                      <a:round/>
+                      <a:headEnd type="none" w="med" len="med"/>
+                      <a:tailEnd type="none" w="med" len="med"/>
+                    </a:lnL>
+                    <a:lnR w="12700" cap="flat" cmpd="sng" algn="ctr">
+                      <a:solidFill>
+                        <a:srgbClr val="CBCAC6"/>
+                      </a:solidFill>
+                      <a:prstDash val="solid"/>
+                      <a:round/>
+                      <a:headEnd type="none" w="med" len="med"/>
+                      <a:tailEnd type="none" w="med" len="med"/>
+                    </a:lnR>
+                    <a:lnT w="12700" cap="flat" cmpd="sng" algn="ctr">
+                      <a:solidFill>
+                        <a:srgbClr val="BCB9B0"/>
+                      </a:solidFill>
+                      <a:prstDash val="solid"/>
+                      <a:round/>
+                      <a:headEnd type="none" w="med" len="med"/>
+                      <a:tailEnd type="none" w="med" len="med"/>
+                    </a:lnT>
+                    <a:lnB w="12700" cap="flat" cmpd="sng" algn="ctr">
+                      <a:solidFill>
+                        <a:srgbClr val="CBCAC6"/>
+                      </a:solidFill>
+                      <a:prstDash val="solid"/>
+                      <a:round/>
+                      <a:headEnd type="none" w="med" len="med"/>
+                      <a:tailEnd type="none" w="med" len="med"/>
+                    </a:lnB>
+                    <a:solidFill>
+                      <a:srgbClr val="FFFDF8"/>
+                    </a:solidFill>
+                  </a:tcPr>
+                </a:tc>
+                <a:tc>
+                  <a:txBody>
+                    <a:bodyPr/>
+                    <a:lstStyle/>
+                    <a:p>
+                      <a:pPr indent="0" marL="0">
+                        <a:lnSpc>
+                          <a:spcPts val="1838"/>
+                        </a:lnSpc>
+                        <a:buNone/>
+                      </a:pPr>
+                      <a:r>
+                        <a:rPr lang="en-US" sz="1313" dirty="0">
+                          <a:solidFill>
+                            <a:srgbClr val="1B1E26"/>
+                          </a:solidFill>
+                          <a:latin typeface="Space Grotesk" pitchFamily="34" charset="0"/>
+                          <a:ea typeface="Space Grotesk" pitchFamily="34" charset="-122"/>
+                          <a:cs typeface="Space Grotesk" pitchFamily="34" charset="-120"/>
+                        </a:rPr>
+                        <a:t>Build tools and packaging</a:t>
+                      </a:r>
+                      <a:endParaRPr lang="en-US" sz="1313" dirty="0">
+                        <a:latin typeface="Space Grotesk" charset="0"/>
+                        <a:ea typeface="Space Grotesk" charset="0"/>
+                        <a:cs typeface="Space Grotesk" charset="0"/>
+                      </a:endParaRPr>
+                    </a:p>
+                  </a:txBody>
+                  <a:tcPr marL="152400" marR="152400" marT="88900" marB="88900" anchor="t">
+                    <a:lnL w="12700" cap="flat" cmpd="sng" algn="ctr">
+                      <a:solidFill>
+                        <a:srgbClr val="CBCAC6"/>
+                      </a:solidFill>
+                      <a:prstDash val="solid"/>
+                      <a:round/>
+                      <a:headEnd type="none" w="med" len="med"/>
+                      <a:tailEnd type="none" w="med" len="med"/>
+                    </a:lnL>
+                    <a:lnR w="12700" cap="flat" cmpd="sng" algn="ctr">
+                      <a:solidFill>
+                        <a:srgbClr val="CBCAC6"/>
+                      </a:solidFill>
+                      <a:prstDash val="solid"/>
+                      <a:round/>
+                      <a:headEnd type="none" w="med" len="med"/>
+                      <a:tailEnd type="none" w="med" len="med"/>
+                    </a:lnR>
+                    <a:lnT w="12700" cap="flat" cmpd="sng" algn="ctr">
+                      <a:solidFill>
+                        <a:srgbClr val="BCB9B0"/>
+                      </a:solidFill>
+                      <a:prstDash val="solid"/>
+                      <a:round/>
+                      <a:headEnd type="none" w="med" len="med"/>
+                      <a:tailEnd type="none" w="med" len="med"/>
+                    </a:lnT>
+                    <a:lnB w="12700" cap="flat" cmpd="sng" algn="ctr">
+                      <a:solidFill>
+                        <a:srgbClr val="CBCAC6"/>
+                      </a:solidFill>
+                      <a:prstDash val="solid"/>
+                      <a:round/>
+                      <a:headEnd type="none" w="med" len="med"/>
+                      <a:tailEnd type="none" w="med" len="med"/>
+                    </a:lnB>
+                    <a:solidFill>
+                      <a:srgbClr val="FFFDF8"/>
+                    </a:solidFill>
+                  </a:tcPr>
+                </a:tc>
+              </a:tr>
+              <a:tr h="458485">
+                <a:tc>
+                  <a:txBody>
+                    <a:bodyPr/>
+                    <a:lstStyle/>
+                    <a:p>
+                      <a:pPr indent="0" marL="0">
+                        <a:lnSpc>
+                          <a:spcPts val="1838"/>
+                        </a:lnSpc>
+                        <a:buNone/>
+                      </a:pPr>
+                      <a:r>
+                        <a:rPr lang="en-US" sz="1313" dirty="0">
+                          <a:solidFill>
+                            <a:srgbClr val="1B1E26"/>
+                          </a:solidFill>
+                          <a:latin typeface="Space Grotesk" pitchFamily="34" charset="0"/>
+                          <a:ea typeface="Space Grotesk" pitchFamily="34" charset="-122"/>
+                          <a:cs typeface="Space Grotesk" pitchFamily="34" charset="-120"/>
+                        </a:rPr>
+                        <a:t>style</a:t>
+                      </a:r>
+                      <a:endParaRPr lang="en-US" sz="1313" dirty="0">
+                        <a:latin typeface="Space Grotesk" charset="0"/>
+                        <a:ea typeface="Space Grotesk" charset="0"/>
+                        <a:cs typeface="Space Grotesk" charset="0"/>
+                      </a:endParaRPr>
+                    </a:p>
+                  </a:txBody>
+                  <a:tcPr marL="152400" marR="152400" marT="88900" marB="88900" anchor="t">
+                    <a:lnL w="12700" cap="flat" cmpd="sng" algn="ctr">
+                      <a:solidFill>
+                        <a:srgbClr val="BCB9B0"/>
+                      </a:solidFill>
+                      <a:prstDash val="solid"/>
+                      <a:round/>
+                      <a:headEnd type="none" w="med" len="med"/>
+                      <a:tailEnd type="none" w="med" len="med"/>
+                    </a:lnL>
+                    <a:lnR w="12700" cap="flat" cmpd="sng" algn="ctr">
+                      <a:solidFill>
+                        <a:srgbClr val="BCB9B0"/>
+                      </a:solidFill>
+                      <a:prstDash val="solid"/>
+                      <a:round/>
+                      <a:headEnd type="none" w="med" len="med"/>
+                      <a:tailEnd type="none" w="med" len="med"/>
+                    </a:lnR>
+                    <a:lnT w="12700" cap="flat" cmpd="sng" algn="ctr">
+                      <a:solidFill>
+                        <a:srgbClr val="CBCAC6"/>
+                      </a:solidFill>
+                      <a:prstDash val="solid"/>
+                      <a:round/>
+                      <a:headEnd type="none" w="med" len="med"/>
+                      <a:tailEnd type="none" w="med" len="med"/>
+                    </a:lnT>
+                    <a:lnB w="12700" cap="flat" cmpd="sng" algn="ctr">
+                      <a:solidFill>
+                        <a:srgbClr val="BCB9B0"/>
+                      </a:solidFill>
+                      <a:prstDash val="solid"/>
+                      <a:round/>
+                      <a:headEnd type="none" w="med" len="med"/>
+                      <a:tailEnd type="none" w="med" len="med"/>
+                    </a:lnB>
+                  </a:tcPr>
+                </a:tc>
+                <a:tc>
+                  <a:txBody>
+                    <a:bodyPr/>
+                    <a:lstStyle/>
+                    <a:p>
+                      <a:pPr indent="0" marL="0">
+                        <a:lnSpc>
+                          <a:spcPts val="1838"/>
+                        </a:lnSpc>
+                        <a:buNone/>
+                      </a:pPr>
+                      <a:r>
+                        <a:rPr lang="en-US" sz="1313" dirty="0">
+                          <a:solidFill>
+                            <a:srgbClr val="1B1E26"/>
+                          </a:solidFill>
+                          <a:latin typeface="Space Grotesk" pitchFamily="34" charset="0"/>
+                          <a:ea typeface="Space Grotesk" pitchFamily="34" charset="-122"/>
+                          <a:cs typeface="Space Grotesk" pitchFamily="34" charset="-120"/>
+                        </a:rPr>
+                        <a:t>Formatting and whitespace</a:t>
+                      </a:r>
+                      <a:endParaRPr lang="en-US" sz="1313" dirty="0">
+                        <a:latin typeface="Space Grotesk" charset="0"/>
+                        <a:ea typeface="Space Grotesk" charset="0"/>
+                        <a:cs typeface="Space Grotesk" charset="0"/>
+                      </a:endParaRPr>
+                    </a:p>
+                  </a:txBody>
+                  <a:tcPr marL="152400" marR="152400" marT="88900" marB="88900" anchor="t">
+                    <a:lnL w="12700" cap="flat" cmpd="sng" algn="ctr">
+                      <a:solidFill>
+                        <a:srgbClr val="BCB9B0"/>
+                      </a:solidFill>
+                      <a:prstDash val="solid"/>
+                      <a:round/>
+                      <a:headEnd type="none" w="med" len="med"/>
+                      <a:tailEnd type="none" w="med" len="med"/>
+                    </a:lnL>
+                    <a:lnR w="12700" cap="flat" cmpd="sng" algn="ctr">
+                      <a:solidFill>
+                        <a:srgbClr val="BCB9B0"/>
+                      </a:solidFill>
+                      <a:prstDash val="solid"/>
+                      <a:round/>
+                      <a:headEnd type="none" w="med" len="med"/>
+                      <a:tailEnd type="none" w="med" len="med"/>
+                    </a:lnR>
+                    <a:lnT w="12700" cap="flat" cmpd="sng" algn="ctr">
+                      <a:solidFill>
+                        <a:srgbClr val="CBCAC6"/>
+                      </a:solidFill>
+                      <a:prstDash val="solid"/>
+                      <a:round/>
+                      <a:headEnd type="none" w="med" len="med"/>
+                      <a:tailEnd type="none" w="med" len="med"/>
+                    </a:lnT>
+                    <a:lnB w="12700" cap="flat" cmpd="sng" algn="ctr">
+                      <a:solidFill>
+                        <a:srgbClr val="BCB9B0"/>
+                      </a:solidFill>
+                      <a:prstDash val="solid"/>
+                      <a:round/>
+                      <a:headEnd type="none" w="med" len="med"/>
+                      <a:tailEnd type="none" w="med" len="med"/>
+                    </a:lnB>
+                  </a:tcPr>
+                </a:tc>
+              </a:tr>
+            </a:tbl>
+          </a:graphicData>
+        </a:graphic>
+      </p:graphicFrame>
+      <p:sp>
+        <p:nvSpPr>
+          <p:cNvPr id="10" name="Text 7"/>
+          <p:cNvSpPr/>
+          <p:nvPr/>
+        </p:nvSpPr>
+        <p:spPr>
+          <a:xfrm>
+            <a:off x="812800" y="5463043"/>
+            <a:ext cx="10883392" cy="607559"/>
+          </a:xfrm>
+          <a:prstGeom prst="rect">
+            <a:avLst/>
+          </a:prstGeom>
+          <a:noFill/>
+          <a:ln/>
+        </p:spPr>
+        <p:txBody>
+          <a:bodyPr wrap="square" lIns="0" tIns="0" rIns="0" bIns="0" rtlCol="0" anchor="t">
+            <a:normAutofit/>
+          </a:bodyPr>
+          <a:lstStyle/>
+          <a:p>
+            <a:pPr algn="l" indent="0" marL="0">
+              <a:lnSpc>
+                <a:spcPts val="2009"/>
+              </a:lnSpc>
+              <a:buNone/>
+            </a:pPr>
+            <a:r>
+              <a:rPr lang="en-US" sz="1435" b="1" dirty="0">
+                <a:solidFill>
+                  <a:srgbClr val="1B1E26"/>
+                </a:solidFill>
+                <a:latin typeface="Space Grotesk" pitchFamily="34" charset="0"/>
+                <a:ea typeface="Space Grotesk" pitchFamily="34" charset="-122"/>
+                <a:cs typeface="Space Grotesk" pitchFamily="34" charset="-120"/>
+              </a:rPr>
+              <a:t>Rule of thumb:</a:t>
+            </a:r>
+            <a:r>
+              <a:rPr lang="en-US" sz="1435" dirty="0">
+                <a:solidFill>
+                  <a:srgbClr val="1B1E26"/>
+                </a:solidFill>
+                <a:latin typeface="Space Grotesk" pitchFamily="34" charset="0"/>
+                <a:ea typeface="Space Grotesk" pitchFamily="34" charset="-122"/>
+                <a:cs typeface="Space Grotesk" pitchFamily="34" charset="-120"/>
+              </a:rPr>
+              <a:t> if users would notice, it is </a:t>
+            </a:r>
+            <a:r>
+              <a:rPr lang="en-US" sz="1435" b="1" dirty="0">
+                <a:solidFill>
+                  <a:srgbClr val="1B1E26"/>
+                </a:solidFill>
+                <a:latin typeface="Space Grotesk" pitchFamily="34" charset="0"/>
+                <a:ea typeface="Space Grotesk" pitchFamily="34" charset="-122"/>
+                <a:cs typeface="Space Grotesk" pitchFamily="34" charset="-120"/>
+              </a:rPr>
+              <a:t>fix</a:t>
+            </a:r>
+            <a:r>
+              <a:rPr lang="en-US" sz="1435" dirty="0">
+                <a:solidFill>
+                  <a:srgbClr val="1B1E26"/>
+                </a:solidFill>
+                <a:latin typeface="Space Grotesk" pitchFamily="34" charset="0"/>
+                <a:ea typeface="Space Grotesk" pitchFamily="34" charset="-122"/>
+                <a:cs typeface="Space Grotesk" pitchFamily="34" charset="-120"/>
+              </a:rPr>
+              <a:t> or </a:t>
+            </a:r>
+            <a:r>
+              <a:rPr lang="en-US" sz="1435" b="1" dirty="0">
+                <a:solidFill>
+                  <a:srgbClr val="1B1E26"/>
+                </a:solidFill>
+                <a:latin typeface="Space Grotesk" pitchFamily="34" charset="0"/>
+                <a:ea typeface="Space Grotesk" pitchFamily="34" charset="-122"/>
+                <a:cs typeface="Space Grotesk" pitchFamily="34" charset="-120"/>
+              </a:rPr>
+              <a:t>feat</a:t>
+            </a:r>
+            <a:r>
+              <a:rPr lang="en-US" sz="1435" dirty="0">
+                <a:solidFill>
+                  <a:srgbClr val="1B1E26"/>
+                </a:solidFill>
+                <a:latin typeface="Space Grotesk" pitchFamily="34" charset="0"/>
+                <a:ea typeface="Space Grotesk" pitchFamily="34" charset="-122"/>
+                <a:cs typeface="Space Grotesk" pitchFamily="34" charset="-120"/>
+              </a:rPr>
+              <a:t>. If only the team would notice, it is a </a:t>
+            </a:r>
+            <a:r>
+              <a:rPr lang="en-US" sz="1435" b="1" dirty="0">
+                <a:solidFill>
+                  <a:srgbClr val="1B1E26"/>
+                </a:solidFill>
+                <a:latin typeface="Space Grotesk" pitchFamily="34" charset="0"/>
+                <a:ea typeface="Space Grotesk" pitchFamily="34" charset="-122"/>
+                <a:cs typeface="Space Grotesk" pitchFamily="34" charset="-120"/>
+              </a:rPr>
+              <a:t>chore</a:t>
+            </a:r>
+            <a:r>
+              <a:rPr lang="en-US" sz="1435" dirty="0">
+                <a:solidFill>
+                  <a:srgbClr val="1B1E26"/>
+                </a:solidFill>
+                <a:latin typeface="Space Grotesk" pitchFamily="34" charset="0"/>
+                <a:ea typeface="Space Grotesk" pitchFamily="34" charset="-122"/>
+                <a:cs typeface="Space Grotesk" pitchFamily="34" charset="-120"/>
+              </a:rPr>
+              <a:t> or one of its cousins.</a:t>
+            </a:r>
+            <a:endParaRPr lang="en-US" sz="1435" dirty="0"/>
+          </a:p>
+        </p:txBody>
+      </p:sp>
+    </p:spTree>
+  </p:cSld>
+  <p:clrMapOvr>
+    <a:masterClrMapping/>
+  </p:clrMapOvr>
+</p:sld>
+</file>
+
+<file path=ppt/slides/slide8.xml><?xml version="1.0" encoding="utf-8"?>
+<p:sld xmlns:a="http://schemas.openxmlformats.org/drawingml/2006/main" xmlns:r="http://schemas.openxmlformats.org/officeDocument/2006/relationships" xmlns:p="http://schemas.openxmlformats.org/presentationml/2006/main">
+  <p:cSld name="Slide 8">
     <p:bg>
       <p:bgPr>
         <a:solidFill>
@@ -9356,9 +12991,9 @@
 </p:sld>
 </file>
 
-<file path=ppt/slides/slide8.xml><?xml version="1.0" encoding="utf-8"?>
+<file path=ppt/slides/slide9.xml><?xml version="1.0" encoding="utf-8"?>
 <p:sld xmlns:a="http://schemas.openxmlformats.org/drawingml/2006/main" xmlns:r="http://schemas.openxmlformats.org/officeDocument/2006/relationships" xmlns:p="http://schemas.openxmlformats.org/presentationml/2006/main">
-  <p:cSld name="Slide 8">
+  <p:cSld name="Slide 9">
     <p:bg>
       <p:bgPr>
         <a:solidFill>
@@ -9478,7 +13113,7 @@
         </p:nvSpPr>
         <p:spPr>
           <a:xfrm>
-            <a:off x="812800" y="3987840"/>
+            <a:off x="812800" y="3987837"/>
             <a:ext cx="8502650" cy="892931"/>
           </a:xfrm>
           <a:prstGeom prst="rect">
@@ -9511,905 +13146,6 @@
               <a:t>A GitHub Action from Google that reads your commits and does the release paperwork for you.</a:t>
             </a:r>
             <a:endParaRPr lang="en-US" sz="2200" dirty="0"/>
-          </a:p>
-        </p:txBody>
-      </p:sp>
-    </p:spTree>
-  </p:cSld>
-  <p:clrMapOvr>
-    <a:masterClrMapping/>
-  </p:clrMapOvr>
-</p:sld>
-</file>
-
-<file path=ppt/slides/slide9.xml><?xml version="1.0" encoding="utf-8"?>
-<p:sld xmlns:a="http://schemas.openxmlformats.org/drawingml/2006/main" xmlns:r="http://schemas.openxmlformats.org/officeDocument/2006/relationships" xmlns:p="http://schemas.openxmlformats.org/presentationml/2006/main">
-  <p:cSld name="Slide 9">
-    <p:bg>
-      <p:bgPr>
-        <a:solidFill>
-          <a:srgbClr val="F6F3EC"/>
-        </a:solidFill>
-      </p:bgPr>
-    </p:bg>
-    <p:spTree>
-      <p:nvGrpSpPr>
-        <p:cNvPr id="1" name=""/>
-        <p:cNvGrpSpPr/>
-        <p:nvPr/>
-      </p:nvGrpSpPr>
-      <p:grpSpPr>
-        <a:xfrm>
-          <a:off x="0" y="0"/>
-          <a:ext cx="0" cy="0"/>
-          <a:chOff x="0" y="0"/>
-          <a:chExt cx="0" cy="0"/>
-        </a:xfrm>
-      </p:grpSpPr>
-      <p:sp>
-        <p:nvSpPr>
-          <p:cNvPr id="2" name="Text 0"/>
-          <p:cNvSpPr/>
-          <p:nvPr>
-            <p:ph type="title"/>
-          </p:nvPr>
-        </p:nvSpPr>
-        <p:spPr>
-          <a:xfrm>
-            <a:off x="812800" y="812800"/>
-            <a:ext cx="11379200" cy="603741"/>
-          </a:xfrm>
-          <a:prstGeom prst="rect">
-            <a:avLst/>
-          </a:prstGeom>
-          <a:noFill/>
-          <a:ln/>
-        </p:spPr>
-        <p:txBody>
-          <a:bodyPr wrap="square" lIns="0" tIns="0" rIns="0" bIns="0" rtlCol="0" anchor="t">
-            <a:normAutofit/>
-          </a:bodyPr>
-          <a:lstStyle/>
-          <a:p>
-            <a:pPr algn="l" indent="0" marL="0">
-              <a:lnSpc>
-                <a:spcPts val="3960"/>
-              </a:lnSpc>
-              <a:buNone/>
-            </a:pPr>
-            <a:r>
-              <a:rPr lang="en-US" sz="3600" b="1" i="0" spc="-50" kern="0" dirty="0">
-                <a:solidFill>
-                  <a:srgbClr val="1B1E26"/>
-                </a:solidFill>
-                <a:latin typeface="Space Grotesk" pitchFamily="34" charset="0"/>
-                <a:ea typeface="Space Grotesk" pitchFamily="34" charset="-122"/>
-                <a:cs typeface="Space Grotesk" pitchFamily="34" charset="-120"/>
-              </a:rPr>
-              <a:t>How it works: one PR that grows with you</a:t>
-            </a:r>
-            <a:endParaRPr lang="en-US" sz="3600" dirty="0"/>
-          </a:p>
-        </p:txBody>
-      </p:sp>
-      <p:sp>
-        <p:nvSpPr>
-          <p:cNvPr id="3" name="Shape 1"/>
-          <p:cNvSpPr/>
-          <p:nvPr/>
-        </p:nvSpPr>
-        <p:spPr>
-          <a:xfrm>
-            <a:off x="819150" y="2017030"/>
-            <a:ext cx="2253948" cy="2453973"/>
-          </a:xfrm>
-          <a:prstGeom prst="roundRect">
-            <a:avLst>
-              <a:gd name="adj" fmla="val 5353"/>
-            </a:avLst>
-          </a:prstGeom>
-          <a:solidFill>
-            <a:srgbClr val="FFFDF8"/>
-          </a:solidFill>
-          <a:ln w="12700">
-            <a:solidFill>
-              <a:srgbClr val="E2DDD2"/>
-            </a:solidFill>
-            <a:prstDash val="solid"/>
-          </a:ln>
-        </p:spPr>
-      </p:sp>
-      <p:sp>
-        <p:nvSpPr>
-          <p:cNvPr id="4" name="Text 2"/>
-          <p:cNvSpPr/>
-          <p:nvPr/>
-        </p:nvSpPr>
-        <p:spPr>
-          <a:xfrm>
-            <a:off x="1028095" y="2225979"/>
-            <a:ext cx="1891139" cy="434332"/>
-          </a:xfrm>
-          <a:prstGeom prst="rect">
-            <a:avLst/>
-          </a:prstGeom>
-          <a:noFill/>
-          <a:ln/>
-        </p:spPr>
-        <p:txBody>
-          <a:bodyPr wrap="square" lIns="0" tIns="0" rIns="0" bIns="0" rtlCol="0" anchor="t">
-            <a:normAutofit/>
-          </a:bodyPr>
-          <a:lstStyle/>
-          <a:p>
-            <a:pPr algn="l" indent="0" marL="0">
-              <a:lnSpc>
-                <a:spcPts val="2800"/>
-              </a:lnSpc>
-              <a:buNone/>
-            </a:pPr>
-            <a:r>
-              <a:rPr lang="en-US" sz="2000" b="1" dirty="0">
-                <a:solidFill>
-                  <a:srgbClr val="B8441B"/>
-                </a:solidFill>
-                <a:latin typeface="JetBrains Mono" pitchFamily="49" charset="0"/>
-                <a:ea typeface="JetBrains Mono" pitchFamily="49" charset="-122"/>
-                <a:cs typeface="JetBrains Mono" pitchFamily="49" charset="-120"/>
-              </a:rPr>
-              <a:t>01</a:t>
-            </a:r>
-            <a:endParaRPr lang="en-US" sz="2000" dirty="0"/>
-          </a:p>
-        </p:txBody>
-      </p:sp>
-      <p:sp>
-        <p:nvSpPr>
-          <p:cNvPr id="5" name="Text 3"/>
-          <p:cNvSpPr/>
-          <p:nvPr/>
-        </p:nvSpPr>
-        <p:spPr>
-          <a:xfrm>
-            <a:off x="1028095" y="2736509"/>
-            <a:ext cx="1891139" cy="621242"/>
-          </a:xfrm>
-          <a:prstGeom prst="rect">
-            <a:avLst/>
-          </a:prstGeom>
-          <a:noFill/>
-          <a:ln/>
-        </p:spPr>
-        <p:txBody>
-          <a:bodyPr wrap="square" lIns="0" tIns="0" rIns="0" bIns="0" rtlCol="0" anchor="t">
-            <a:normAutofit/>
-          </a:bodyPr>
-          <a:lstStyle/>
-          <a:p>
-            <a:pPr algn="l" indent="0" marL="0">
-              <a:lnSpc>
-                <a:spcPts val="2040"/>
-              </a:lnSpc>
-              <a:buNone/>
-            </a:pPr>
-            <a:r>
-              <a:rPr lang="en-US" sz="1700" b="1" dirty="0">
-                <a:solidFill>
-                  <a:srgbClr val="1B1E26"/>
-                </a:solidFill>
-                <a:latin typeface="Space Grotesk" pitchFamily="34" charset="0"/>
-                <a:ea typeface="Space Grotesk" pitchFamily="34" charset="-122"/>
-                <a:cs typeface="Space Grotesk" pitchFamily="34" charset="-120"/>
-              </a:rPr>
-              <a:t>You merge to main</a:t>
-            </a:r>
-            <a:endParaRPr lang="en-US" sz="1700" dirty="0"/>
-          </a:p>
-        </p:txBody>
-      </p:sp>
-      <p:sp>
-        <p:nvSpPr>
-          <p:cNvPr id="6" name="Text 4"/>
-          <p:cNvSpPr/>
-          <p:nvPr/>
-        </p:nvSpPr>
-        <p:spPr>
-          <a:xfrm>
-            <a:off x="1028095" y="3433955"/>
-            <a:ext cx="1891139" cy="853508"/>
-          </a:xfrm>
-          <a:prstGeom prst="rect">
-            <a:avLst/>
-          </a:prstGeom>
-          <a:noFill/>
-          <a:ln/>
-        </p:spPr>
-        <p:txBody>
-          <a:bodyPr wrap="square" lIns="0" tIns="0" rIns="0" bIns="0" rtlCol="0" anchor="t">
-            <a:normAutofit/>
-          </a:bodyPr>
-          <a:lstStyle/>
-          <a:p>
-            <a:pPr algn="l" indent="0" marL="0">
-              <a:lnSpc>
-                <a:spcPts val="1890"/>
-              </a:lnSpc>
-              <a:buNone/>
-            </a:pPr>
-            <a:r>
-              <a:rPr lang="en-US" sz="1400" dirty="0">
-                <a:solidFill>
-                  <a:srgbClr val="5D6270"/>
-                </a:solidFill>
-                <a:latin typeface="Space Grotesk" pitchFamily="34" charset="0"/>
-                <a:ea typeface="Space Grotesk" pitchFamily="34" charset="-122"/>
-                <a:cs typeface="Space Grotesk" pitchFamily="34" charset="-120"/>
-              </a:rPr>
-              <a:t>Normal PRs, with conventional commit messages.</a:t>
-            </a:r>
-            <a:endParaRPr lang="en-US" sz="1400" dirty="0"/>
-          </a:p>
-        </p:txBody>
-      </p:sp>
-      <p:pic>
-        <p:nvPicPr>
-          <p:cNvPr id="7" name="Image 0" descr="arrow-right">    </p:cNvPr>
-          <p:cNvPicPr>
-            <a:picLocks noChangeAspect="1"/>
-          </p:cNvPicPr>
-          <p:nvPr/>
-        </p:nvPicPr>
-        <p:blipFill>
-          <a:blip r:embed="rId1"/>
-          <a:srcRect l="0" r="0" t="0" b="0"/>
-          <a:stretch/>
-        </p:blipFill>
-        <p:spPr>
-          <a:xfrm>
-            <a:off x="3181048" y="3155119"/>
-            <a:ext cx="304800" cy="177800"/>
-          </a:xfrm>
-          <a:prstGeom prst="rect">
-            <a:avLst/>
-          </a:prstGeom>
-        </p:spPr>
-      </p:pic>
-      <p:sp>
-        <p:nvSpPr>
-          <p:cNvPr id="8" name="Shape 5"/>
-          <p:cNvSpPr/>
-          <p:nvPr/>
-        </p:nvSpPr>
-        <p:spPr>
-          <a:xfrm>
-            <a:off x="3593798" y="1878998"/>
-            <a:ext cx="2253948" cy="2730009"/>
-          </a:xfrm>
-          <a:prstGeom prst="roundRect">
-            <a:avLst>
-              <a:gd name="adj" fmla="val 5353"/>
-            </a:avLst>
-          </a:prstGeom>
-          <a:solidFill>
-            <a:srgbClr val="FFFDF8"/>
-          </a:solidFill>
-          <a:ln w="12700">
-            <a:solidFill>
-              <a:srgbClr val="E2DDD2"/>
-            </a:solidFill>
-            <a:prstDash val="solid"/>
-          </a:ln>
-        </p:spPr>
-      </p:sp>
-      <p:sp>
-        <p:nvSpPr>
-          <p:cNvPr id="9" name="Text 6"/>
-          <p:cNvSpPr/>
-          <p:nvPr/>
-        </p:nvSpPr>
-        <p:spPr>
-          <a:xfrm>
-            <a:off x="3802743" y="2087941"/>
-            <a:ext cx="1891139" cy="434332"/>
-          </a:xfrm>
-          <a:prstGeom prst="rect">
-            <a:avLst/>
-          </a:prstGeom>
-          <a:noFill/>
-          <a:ln/>
-        </p:spPr>
-        <p:txBody>
-          <a:bodyPr wrap="square" lIns="0" tIns="0" rIns="0" bIns="0" rtlCol="0" anchor="t">
-            <a:normAutofit/>
-          </a:bodyPr>
-          <a:lstStyle/>
-          <a:p>
-            <a:pPr algn="l" indent="0" marL="0">
-              <a:lnSpc>
-                <a:spcPts val="2800"/>
-              </a:lnSpc>
-              <a:buNone/>
-            </a:pPr>
-            <a:r>
-              <a:rPr lang="en-US" sz="2000" b="1" dirty="0">
-                <a:solidFill>
-                  <a:srgbClr val="B8441B"/>
-                </a:solidFill>
-                <a:latin typeface="JetBrains Mono" pitchFamily="49" charset="0"/>
-                <a:ea typeface="JetBrains Mono" pitchFamily="49" charset="-122"/>
-                <a:cs typeface="JetBrains Mono" pitchFamily="49" charset="-120"/>
-              </a:rPr>
-              <a:t>02</a:t>
-            </a:r>
-            <a:endParaRPr lang="en-US" sz="2000" dirty="0"/>
-          </a:p>
-        </p:txBody>
-      </p:sp>
-      <p:sp>
-        <p:nvSpPr>
-          <p:cNvPr id="10" name="Text 7"/>
-          <p:cNvSpPr/>
-          <p:nvPr/>
-        </p:nvSpPr>
-        <p:spPr>
-          <a:xfrm>
-            <a:off x="3802743" y="2598477"/>
-            <a:ext cx="1891139" cy="621242"/>
-          </a:xfrm>
-          <a:prstGeom prst="rect">
-            <a:avLst/>
-          </a:prstGeom>
-          <a:noFill/>
-          <a:ln/>
-        </p:spPr>
-        <p:txBody>
-          <a:bodyPr wrap="square" lIns="0" tIns="0" rIns="0" bIns="0" rtlCol="0" anchor="t">
-            <a:normAutofit/>
-          </a:bodyPr>
-          <a:lstStyle/>
-          <a:p>
-            <a:pPr algn="l" indent="0" marL="0">
-              <a:lnSpc>
-                <a:spcPts val="2040"/>
-              </a:lnSpc>
-              <a:buNone/>
-            </a:pPr>
-            <a:r>
-              <a:rPr lang="en-US" sz="1700" b="1" dirty="0">
-                <a:solidFill>
-                  <a:srgbClr val="1B1E26"/>
-                </a:solidFill>
-                <a:latin typeface="Space Grotesk" pitchFamily="34" charset="0"/>
-                <a:ea typeface="Space Grotesk" pitchFamily="34" charset="-122"/>
-                <a:cs typeface="Space Grotesk" pitchFamily="34" charset="-120"/>
-              </a:rPr>
-              <a:t>A release PR appears</a:t>
-            </a:r>
-            <a:endParaRPr lang="en-US" sz="1700" dirty="0"/>
-          </a:p>
-        </p:txBody>
-      </p:sp>
-      <p:sp>
-        <p:nvSpPr>
-          <p:cNvPr id="11" name="Text 8"/>
-          <p:cNvSpPr/>
-          <p:nvPr/>
-        </p:nvSpPr>
-        <p:spPr>
-          <a:xfrm>
-            <a:off x="3802743" y="3295917"/>
-            <a:ext cx="1891139" cy="1129544"/>
-          </a:xfrm>
-          <a:prstGeom prst="rect">
-            <a:avLst/>
-          </a:prstGeom>
-          <a:noFill/>
-          <a:ln/>
-        </p:spPr>
-        <p:txBody>
-          <a:bodyPr wrap="square" lIns="0" tIns="0" rIns="0" bIns="0" rtlCol="0" anchor="t">
-            <a:normAutofit/>
-          </a:bodyPr>
-          <a:lstStyle/>
-          <a:p>
-            <a:pPr algn="l" indent="0" marL="0">
-              <a:lnSpc>
-                <a:spcPts val="1890"/>
-              </a:lnSpc>
-              <a:buNone/>
-            </a:pPr>
-            <a:r>
-              <a:rPr lang="en-US" sz="1400" dirty="0">
-                <a:solidFill>
-                  <a:srgbClr val="5D6270"/>
-                </a:solidFill>
-                <a:latin typeface="Space Grotesk" pitchFamily="34" charset="0"/>
-                <a:ea typeface="Space Grotesk" pitchFamily="34" charset="-122"/>
-                <a:cs typeface="Space Grotesk" pitchFamily="34" charset="-120"/>
-              </a:rPr>
-              <a:t>Next version and changelog. It updates on every merge.</a:t>
-            </a:r>
-            <a:endParaRPr lang="en-US" sz="1400" dirty="0"/>
-          </a:p>
-        </p:txBody>
-      </p:sp>
-      <p:pic>
-        <p:nvPicPr>
-          <p:cNvPr id="12" name="Image 1" descr="arrow-right">    </p:cNvPr>
-          <p:cNvPicPr>
-            <a:picLocks noChangeAspect="1"/>
-          </p:cNvPicPr>
-          <p:nvPr/>
-        </p:nvPicPr>
-        <p:blipFill>
-          <a:blip r:embed="rId2"/>
-          <a:srcRect l="0" r="0" t="0" b="0"/>
-          <a:stretch/>
-        </p:blipFill>
-        <p:spPr>
-          <a:xfrm>
-            <a:off x="5955695" y="3155119"/>
-            <a:ext cx="304800" cy="177800"/>
-          </a:xfrm>
-          <a:prstGeom prst="rect">
-            <a:avLst/>
-          </a:prstGeom>
-        </p:spPr>
-      </p:pic>
-      <p:sp>
-        <p:nvSpPr>
-          <p:cNvPr id="13" name="Shape 9"/>
-          <p:cNvSpPr/>
-          <p:nvPr/>
-        </p:nvSpPr>
-        <p:spPr>
-          <a:xfrm>
-            <a:off x="6368445" y="1878998"/>
-            <a:ext cx="2253948" cy="2730009"/>
-          </a:xfrm>
-          <a:prstGeom prst="roundRect">
-            <a:avLst>
-              <a:gd name="adj" fmla="val 5353"/>
-            </a:avLst>
-          </a:prstGeom>
-          <a:solidFill>
-            <a:srgbClr val="FFFDF8"/>
-          </a:solidFill>
-          <a:ln w="12700">
-            <a:solidFill>
-              <a:srgbClr val="E2DDD2"/>
-            </a:solidFill>
-            <a:prstDash val="solid"/>
-          </a:ln>
-        </p:spPr>
-      </p:sp>
-      <p:sp>
-        <p:nvSpPr>
-          <p:cNvPr id="14" name="Text 10"/>
-          <p:cNvSpPr/>
-          <p:nvPr/>
-        </p:nvSpPr>
-        <p:spPr>
-          <a:xfrm>
-            <a:off x="6577391" y="2087941"/>
-            <a:ext cx="1891139" cy="434332"/>
-          </a:xfrm>
-          <a:prstGeom prst="rect">
-            <a:avLst/>
-          </a:prstGeom>
-          <a:noFill/>
-          <a:ln/>
-        </p:spPr>
-        <p:txBody>
-          <a:bodyPr wrap="square" lIns="0" tIns="0" rIns="0" bIns="0" rtlCol="0" anchor="t">
-            <a:normAutofit/>
-          </a:bodyPr>
-          <a:lstStyle/>
-          <a:p>
-            <a:pPr algn="l" indent="0" marL="0">
-              <a:lnSpc>
-                <a:spcPts val="2800"/>
-              </a:lnSpc>
-              <a:buNone/>
-            </a:pPr>
-            <a:r>
-              <a:rPr lang="en-US" sz="2000" b="1" dirty="0">
-                <a:solidFill>
-                  <a:srgbClr val="B8441B"/>
-                </a:solidFill>
-                <a:latin typeface="JetBrains Mono" pitchFamily="49" charset="0"/>
-                <a:ea typeface="JetBrains Mono" pitchFamily="49" charset="-122"/>
-                <a:cs typeface="JetBrains Mono" pitchFamily="49" charset="-120"/>
-              </a:rPr>
-              <a:t>03</a:t>
-            </a:r>
-            <a:endParaRPr lang="en-US" sz="2000" dirty="0"/>
-          </a:p>
-        </p:txBody>
-      </p:sp>
-      <p:sp>
-        <p:nvSpPr>
-          <p:cNvPr id="15" name="Text 11"/>
-          <p:cNvSpPr/>
-          <p:nvPr/>
-        </p:nvSpPr>
-        <p:spPr>
-          <a:xfrm>
-            <a:off x="6577391" y="2598477"/>
-            <a:ext cx="1891139" cy="621242"/>
-          </a:xfrm>
-          <a:prstGeom prst="rect">
-            <a:avLst/>
-          </a:prstGeom>
-          <a:noFill/>
-          <a:ln/>
-        </p:spPr>
-        <p:txBody>
-          <a:bodyPr wrap="square" lIns="0" tIns="0" rIns="0" bIns="0" rtlCol="0" anchor="t">
-            <a:normAutofit/>
-          </a:bodyPr>
-          <a:lstStyle/>
-          <a:p>
-            <a:pPr algn="l" indent="0" marL="0">
-              <a:lnSpc>
-                <a:spcPts val="2040"/>
-              </a:lnSpc>
-              <a:buNone/>
-            </a:pPr>
-            <a:r>
-              <a:rPr lang="en-US" sz="1700" b="1" dirty="0">
-                <a:solidFill>
-                  <a:srgbClr val="1B1E26"/>
-                </a:solidFill>
-                <a:latin typeface="Space Grotesk" pitchFamily="34" charset="0"/>
-                <a:ea typeface="Space Grotesk" pitchFamily="34" charset="-122"/>
-                <a:cs typeface="Space Grotesk" pitchFamily="34" charset="-120"/>
-              </a:rPr>
-              <a:t>You merge the release PR</a:t>
-            </a:r>
-            <a:endParaRPr lang="en-US" sz="1700" dirty="0"/>
-          </a:p>
-        </p:txBody>
-      </p:sp>
-      <p:sp>
-        <p:nvSpPr>
-          <p:cNvPr id="16" name="Text 12"/>
-          <p:cNvSpPr/>
-          <p:nvPr/>
-        </p:nvSpPr>
-        <p:spPr>
-          <a:xfrm>
-            <a:off x="6577391" y="3295917"/>
-            <a:ext cx="1891139" cy="1129544"/>
-          </a:xfrm>
-          <a:prstGeom prst="rect">
-            <a:avLst/>
-          </a:prstGeom>
-          <a:noFill/>
-          <a:ln/>
-        </p:spPr>
-        <p:txBody>
-          <a:bodyPr wrap="square" lIns="0" tIns="0" rIns="0" bIns="0" rtlCol="0" anchor="t">
-            <a:normAutofit/>
-          </a:bodyPr>
-          <a:lstStyle/>
-          <a:p>
-            <a:pPr algn="l" indent="0" marL="0">
-              <a:lnSpc>
-                <a:spcPts val="1890"/>
-              </a:lnSpc>
-              <a:buNone/>
-            </a:pPr>
-            <a:r>
-              <a:rPr lang="en-US" sz="1400" dirty="0">
-                <a:solidFill>
-                  <a:srgbClr val="5D6270"/>
-                </a:solidFill>
-                <a:latin typeface="Space Grotesk" pitchFamily="34" charset="0"/>
-                <a:ea typeface="Space Grotesk" pitchFamily="34" charset="-122"/>
-                <a:cs typeface="Space Grotesk" pitchFamily="34" charset="-120"/>
-              </a:rPr>
-              <a:t>Whenever you are ready to ship. That is the only button.</a:t>
-            </a:r>
-            <a:endParaRPr lang="en-US" sz="1400" dirty="0"/>
-          </a:p>
-        </p:txBody>
-      </p:sp>
-      <p:pic>
-        <p:nvPicPr>
-          <p:cNvPr id="17" name="Image 2" descr="arrow-right">    </p:cNvPr>
-          <p:cNvPicPr>
-            <a:picLocks noChangeAspect="1"/>
-          </p:cNvPicPr>
-          <p:nvPr/>
-        </p:nvPicPr>
-        <p:blipFill>
-          <a:blip r:embed="rId3"/>
-          <a:srcRect l="0" r="0" t="0" b="0"/>
-          <a:stretch/>
-        </p:blipFill>
-        <p:spPr>
-          <a:xfrm>
-            <a:off x="8730343" y="3155119"/>
-            <a:ext cx="304800" cy="177800"/>
-          </a:xfrm>
-          <a:prstGeom prst="rect">
-            <a:avLst/>
-          </a:prstGeom>
-        </p:spPr>
-      </p:pic>
-      <p:sp>
-        <p:nvSpPr>
-          <p:cNvPr id="18" name="Shape 13"/>
-          <p:cNvSpPr/>
-          <p:nvPr/>
-        </p:nvSpPr>
-        <p:spPr>
-          <a:xfrm>
-            <a:off x="9136743" y="1746740"/>
-            <a:ext cx="2242457" cy="2994554"/>
-          </a:xfrm>
-          <a:prstGeom prst="roundRect">
-            <a:avLst>
-              <a:gd name="adj" fmla="val 5663"/>
-            </a:avLst>
-          </a:prstGeom>
-          <a:solidFill>
-            <a:srgbClr val="15181F"/>
-          </a:solidFill>
-          <a:ln/>
-        </p:spPr>
-      </p:sp>
-      <p:sp>
-        <p:nvSpPr>
-          <p:cNvPr id="19" name="Text 14"/>
-          <p:cNvSpPr/>
-          <p:nvPr/>
-        </p:nvSpPr>
-        <p:spPr>
-          <a:xfrm>
-            <a:off x="9339943" y="1949940"/>
-            <a:ext cx="1891139" cy="434332"/>
-          </a:xfrm>
-          <a:prstGeom prst="rect">
-            <a:avLst/>
-          </a:prstGeom>
-          <a:noFill/>
-          <a:ln/>
-        </p:spPr>
-        <p:txBody>
-          <a:bodyPr wrap="square" lIns="0" tIns="0" rIns="0" bIns="0" rtlCol="0" anchor="t">
-            <a:normAutofit/>
-          </a:bodyPr>
-          <a:lstStyle/>
-          <a:p>
-            <a:pPr algn="l" indent="0" marL="0">
-              <a:lnSpc>
-                <a:spcPts val="2800"/>
-              </a:lnSpc>
-              <a:buNone/>
-            </a:pPr>
-            <a:r>
-              <a:rPr lang="en-US" sz="2000" b="1" dirty="0">
-                <a:solidFill>
-                  <a:srgbClr val="FF8A5C"/>
-                </a:solidFill>
-                <a:latin typeface="JetBrains Mono" pitchFamily="49" charset="0"/>
-                <a:ea typeface="JetBrains Mono" pitchFamily="49" charset="-122"/>
-                <a:cs typeface="JetBrains Mono" pitchFamily="49" charset="-120"/>
-              </a:rPr>
-              <a:t>04</a:t>
-            </a:r>
-            <a:endParaRPr lang="en-US" sz="2000" dirty="0"/>
-          </a:p>
-        </p:txBody>
-      </p:sp>
-      <p:sp>
-        <p:nvSpPr>
-          <p:cNvPr id="20" name="Text 15"/>
-          <p:cNvSpPr/>
-          <p:nvPr/>
-        </p:nvSpPr>
-        <p:spPr>
-          <a:xfrm>
-            <a:off x="9339943" y="2460476"/>
-            <a:ext cx="1891139" cy="621242"/>
-          </a:xfrm>
-          <a:prstGeom prst="rect">
-            <a:avLst/>
-          </a:prstGeom>
-          <a:noFill/>
-          <a:ln/>
-        </p:spPr>
-        <p:txBody>
-          <a:bodyPr wrap="square" lIns="0" tIns="0" rIns="0" bIns="0" rtlCol="0" anchor="t">
-            <a:normAutofit/>
-          </a:bodyPr>
-          <a:lstStyle/>
-          <a:p>
-            <a:pPr algn="l" indent="0" marL="0">
-              <a:lnSpc>
-                <a:spcPts val="2040"/>
-              </a:lnSpc>
-              <a:buNone/>
-            </a:pPr>
-            <a:r>
-              <a:rPr lang="en-US" sz="1700" b="1" dirty="0">
-                <a:solidFill>
-                  <a:srgbClr val="F6F3EC"/>
-                </a:solidFill>
-                <a:latin typeface="Space Grotesk" pitchFamily="34" charset="0"/>
-                <a:ea typeface="Space Grotesk" pitchFamily="34" charset="-122"/>
-                <a:cs typeface="Space Grotesk" pitchFamily="34" charset="-120"/>
-              </a:rPr>
-              <a:t>The release is created</a:t>
-            </a:r>
-            <a:endParaRPr lang="en-US" sz="1700" dirty="0"/>
-          </a:p>
-        </p:txBody>
-      </p:sp>
-      <p:sp>
-        <p:nvSpPr>
-          <p:cNvPr id="21" name="Text 16"/>
-          <p:cNvSpPr/>
-          <p:nvPr/>
-        </p:nvSpPr>
-        <p:spPr>
-          <a:xfrm>
-            <a:off x="9339943" y="3157916"/>
-            <a:ext cx="1891139" cy="1405580"/>
-          </a:xfrm>
-          <a:prstGeom prst="rect">
-            <a:avLst/>
-          </a:prstGeom>
-          <a:noFill/>
-          <a:ln/>
-        </p:spPr>
-        <p:txBody>
-          <a:bodyPr wrap="square" lIns="0" tIns="0" rIns="0" bIns="0" rtlCol="0" anchor="t">
-            <a:normAutofit/>
-          </a:bodyPr>
-          <a:lstStyle/>
-          <a:p>
-            <a:pPr algn="l" indent="0" marL="0">
-              <a:lnSpc>
-                <a:spcPts val="1890"/>
-              </a:lnSpc>
-              <a:buNone/>
-            </a:pPr>
-            <a:r>
-              <a:rPr lang="en-US" sz="1400" dirty="0">
-                <a:solidFill>
-                  <a:srgbClr val="A3A9B6"/>
-                </a:solidFill>
-                <a:latin typeface="Space Grotesk" pitchFamily="34" charset="0"/>
-                <a:ea typeface="Space Grotesk" pitchFamily="34" charset="-122"/>
-                <a:cs typeface="Space Grotesk" pitchFamily="34" charset="-120"/>
-              </a:rPr>
-              <a:t>Git tag plus GitHub Release with notes. Publish jobs can run next.</a:t>
-            </a:r>
-            <a:endParaRPr lang="en-US" sz="1400" dirty="0"/>
-          </a:p>
-        </p:txBody>
-      </p:sp>
-      <p:sp>
-        <p:nvSpPr>
-          <p:cNvPr id="22" name="Text 17"/>
-          <p:cNvSpPr/>
-          <p:nvPr/>
-        </p:nvSpPr>
-        <p:spPr>
-          <a:xfrm>
-            <a:off x="812800" y="5096898"/>
-            <a:ext cx="10883392" cy="380282"/>
-          </a:xfrm>
-          <a:prstGeom prst="rect">
-            <a:avLst/>
-          </a:prstGeom>
-          <a:noFill/>
-          <a:ln/>
-        </p:spPr>
-        <p:txBody>
-          <a:bodyPr wrap="square" lIns="0" tIns="0" rIns="0" bIns="0" rtlCol="0" anchor="t">
-            <a:normAutofit/>
-          </a:bodyPr>
-          <a:lstStyle/>
-          <a:p>
-            <a:pPr algn="l" indent="0" marL="0">
-              <a:lnSpc>
-                <a:spcPts val="2430"/>
-              </a:lnSpc>
-              <a:buNone/>
-            </a:pPr>
-            <a:r>
-              <a:rPr lang="en-US" sz="1800" b="1" dirty="0">
-                <a:solidFill>
-                  <a:srgbClr val="1B1E26"/>
-                </a:solidFill>
-                <a:latin typeface="Space Grotesk" pitchFamily="34" charset="0"/>
-                <a:ea typeface="Space Grotesk" pitchFamily="34" charset="-122"/>
-                <a:cs typeface="Space Grotesk" pitchFamily="34" charset="-120"/>
-              </a:rPr>
-              <a:t>You</a:t>
-            </a:r>
-            <a:r>
-              <a:rPr lang="en-US" sz="1800" dirty="0">
-                <a:solidFill>
-                  <a:srgbClr val="1B1E26"/>
-                </a:solidFill>
-                <a:latin typeface="Space Grotesk" pitchFamily="34" charset="0"/>
-                <a:ea typeface="Space Grotesk" pitchFamily="34" charset="-122"/>
-                <a:cs typeface="Space Grotesk" pitchFamily="34" charset="-120"/>
-              </a:rPr>
-              <a:t> decide </a:t>
-            </a:r>
-            <a:r>
-              <a:rPr lang="en-US" sz="1800" i="1" dirty="0">
-                <a:solidFill>
-                  <a:srgbClr val="1B1E26"/>
-                </a:solidFill>
-                <a:latin typeface="Space Grotesk" pitchFamily="34" charset="0"/>
-                <a:ea typeface="Space Grotesk" pitchFamily="34" charset="-122"/>
-                <a:cs typeface="Space Grotesk" pitchFamily="34" charset="-120"/>
-              </a:rPr>
-              <a:t>when</a:t>
-            </a:r>
-            <a:r>
-              <a:rPr lang="en-US" sz="1800" dirty="0">
-                <a:solidFill>
-                  <a:srgbClr val="1B1E26"/>
-                </a:solidFill>
-                <a:latin typeface="Space Grotesk" pitchFamily="34" charset="0"/>
-                <a:ea typeface="Space Grotesk" pitchFamily="34" charset="-122"/>
-                <a:cs typeface="Space Grotesk" pitchFamily="34" charset="-120"/>
-              </a:rPr>
-              <a:t> to release. </a:t>
-            </a:r>
-            <a:r>
-              <a:rPr lang="en-US" sz="1800" b="1" dirty="0">
-                <a:solidFill>
-                  <a:srgbClr val="1B1E26"/>
-                </a:solidFill>
-                <a:latin typeface="Space Grotesk" pitchFamily="34" charset="0"/>
-                <a:ea typeface="Space Grotesk" pitchFamily="34" charset="-122"/>
-                <a:cs typeface="Space Grotesk" pitchFamily="34" charset="-120"/>
-              </a:rPr>
-              <a:t>Release Please</a:t>
-            </a:r>
-            <a:r>
-              <a:rPr lang="en-US" sz="1800" dirty="0">
-                <a:solidFill>
-                  <a:srgbClr val="1B1E26"/>
-                </a:solidFill>
-                <a:latin typeface="Space Grotesk" pitchFamily="34" charset="0"/>
-                <a:ea typeface="Space Grotesk" pitchFamily="34" charset="-122"/>
-                <a:cs typeface="Space Grotesk" pitchFamily="34" charset="-120"/>
-              </a:rPr>
-              <a:t> decides </a:t>
-            </a:r>
-            <a:r>
-              <a:rPr lang="en-US" sz="1800" i="1" dirty="0">
-                <a:solidFill>
-                  <a:srgbClr val="1B1E26"/>
-                </a:solidFill>
-                <a:latin typeface="Space Grotesk" pitchFamily="34" charset="0"/>
-                <a:ea typeface="Space Grotesk" pitchFamily="34" charset="-122"/>
-                <a:cs typeface="Space Grotesk" pitchFamily="34" charset="-120"/>
-              </a:rPr>
-              <a:t>what</a:t>
-            </a:r>
-            <a:r>
-              <a:rPr lang="en-US" sz="1800" dirty="0">
-                <a:solidFill>
-                  <a:srgbClr val="1B1E26"/>
-                </a:solidFill>
-                <a:latin typeface="Space Grotesk" pitchFamily="34" charset="0"/>
-                <a:ea typeface="Space Grotesk" pitchFamily="34" charset="-122"/>
-                <a:cs typeface="Space Grotesk" pitchFamily="34" charset="-120"/>
-              </a:rPr>
-              <a:t> the version is.</a:t>
-            </a:r>
-            <a:endParaRPr lang="en-US" sz="1800" dirty="0"/>
           </a:p>
         </p:txBody>
       </p:sp>
@@ -10450,10 +13186,10 @@
         <a:srgbClr val="8A6400"/>
       </a:accent4>
       <a:accent5>
-        <a:srgbClr val="E8592A"/>
+        <a:srgbClr val="7FB0FF"/>
       </a:accent5>
       <a:accent6>
-        <a:srgbClr val="5D6270"/>
+        <a:srgbClr val="E8592A"/>
       </a:accent6>
       <a:hlink>
         <a:srgbClr val="0563C1"/>

--- a/docs/Conventional_Commits_and_Release_Please.pptx
+++ b/docs/Conventional_Commits_and_Release_Please.pptx
@@ -20,22 +20,26 @@
     <p:sldId id="268" r:id="rId14"/>
     <p:sldId id="269" r:id="rId15"/>
     <p:sldId id="270" r:id="rId16"/>
+    <p:sldId id="271" r:id="rId17"/>
+    <p:sldId id="272" r:id="rId18"/>
+    <p:sldId id="273" r:id="rId19"/>
+    <p:sldId id="274" r:id="rId20"/>
   </p:sldIdLst>
   <p:notesMasterIdLst>
-    <p:notesMasterId r:id="rId17"/>
+    <p:notesMasterId r:id="rId21"/>
   </p:notesMasterIdLst>
   <p:sldSz cx="12192000" cy="6858000"/>
   <p:notesSz cx="6858000" cy="12192000"/>
   <p:embeddedFontLst>
     <p:embeddedFont>
       <p:font typeface="Space Grotesk" pitchFamily="34" charset="0"/>
-      <p:regular r:id="rId22"/>
-      <p:bold r:id="rId23"/>
+      <p:regular r:id="rId26"/>
+      <p:bold r:id="rId27"/>
     </p:embeddedFont>
     <p:embeddedFont>
       <p:font typeface="JetBrains Mono" panose="02000009000000000000" pitchFamily="49" charset="0"/>
-      <p:regular r:id="rId24"/>
-      <p:bold r:id="rId25"/>
+      <p:regular r:id="rId28"/>
+      <p:bold r:id="rId29"/>
     </p:embeddedFont>
   </p:embeddedFontLst>
   <p:defaultTextStyle>
@@ -616,7 +620,7 @@
           <a:p>
             <a:r>
               <a:rPr lang="en-US" dirty="0"/>
-              <a:t>The key mental model: Release Please keeps one open pull request that always represents "the next release." Every time something merges to main, it recalculates the version and rewrites the changelog in that PR. Nothing is published until a person merges it. After merging, it creates the tag and the GitHub Release, and the workflow can trigger follow-up steps like publishing a package or deploying.</a:t>
+              <a:t>Run this as a quick quiz: show the left column first and ask the room which ones pass. The top row is the only fully correct one. The middle group would technically parse, but our linter rejects them for style. The bottom group breaks the spec itself, so Release Please would skip them or miss a breaking change. A lowercase breaking change footer is the dangerous one: the commit would ship as a minor or patch release even though it breaks users. If we lint PR titles with action-semantic-pull-request, its defaults check the type and overall shape; set its subjectPattern option to also enforce the lowercase start.</a:t>
             </a:r>
             <a:endParaRPr lang="en-US" dirty="0"/>
           </a:p>
@@ -704,7 +708,7 @@
           <a:p>
             <a:r>
               <a:rPr lang="en-US" dirty="0"/>
-              <a:t>Point out that the changelog on the left is the same text as our commit messages from the before and after slide. Nobody wrote release notes by hand. If a message is wrong, you can fix it before merging the release PR.</a:t>
+              <a:t>Now that our commits carry meaning, we need something to read them. Release Please is an open source GitHub Action maintained by Google. It never pushes a release on its own. It proposes one, and a human approves it.</a:t>
             </a:r>
             <a:endParaRPr lang="en-US" dirty="0"/>
           </a:p>
@@ -792,7 +796,7 @@
           <a:p>
             <a:r>
               <a:rPr lang="en-US" dirty="0"/>
-              <a:t>This is the minimal setup for a single-package repo. Swap release-type for your language: simple just uses a version.txt file and works for anything. For repos with multiple packages, Release Please supports a release-please-config.json and a .release-please-manifest.json. Check the action's README for current inputs and outputs before adopting, since the action evolves.</a:t>
+              <a:t>The key mental model: Release Please keeps one open pull request that always represents "the next release." Every time something merges to main, it recalculates the version and rewrites the changelog in that PR. Nothing is published until a person merges it. After merging, it creates the tag and the GitHub Release, and the workflow can trigger follow-up steps like publishing a package or deploying.</a:t>
             </a:r>
             <a:endParaRPr lang="en-US" dirty="0"/>
           </a:p>
@@ -880,7 +884,7 @@
           <a:p>
             <a:r>
               <a:rPr lang="en-US" dirty="0"/>
-              <a:t>Release Please only ever reads commits on the main branch. It never looks at PR titles directly. Squash merging is what connects the two: GitHub turns the whole PR into one commit, and with the right setting that commit's message is the PR title. That is why we lint PR titles instead of every commit. With merge commits or rebase merges, every branch commit lands on main as-is, so every single one has to follow the convention, and anything that does not is silently skipped. The setting to change is under the repo's Settings, General, Pull Requests: allow squash merging, and set the default commit message to Pull request title. Without it, GitHub's default uses the commit message when a PR has only one commit, which bypasses the title check.</a:t>
+              <a:t>Point out that the changelog on the left is the same text as our commit messages from the before and after slide. Nobody wrote release notes by hand. If a message is wrong, you can fix it before merging the release PR.</a:t>
             </a:r>
             <a:endParaRPr lang="en-US" dirty="0"/>
           </a:p>
@@ -968,7 +972,7 @@
           <a:p>
             <a:r>
               <a:rPr lang="en-US" dirty="0"/>
-              <a:t>The convention only works if it is followed, so automate the enforcement. Squash merging is the biggest win: contributors can commit however they like on their branch, and only the PR title has to follow the format. The gotcha at the bottom trips up almost every team the first time: GitHub deliberately does not trigger workflows from events created by the default token, so your tests will not run on the release PR unless you use a separate token.</a:t>
+              <a:t>This is the minimal setup for a single-package repo. Swap release-type for your language: simple just uses a version.txt file and works for anything. For repos with multiple packages, Release Please supports a release-please-config.json and a .release-please-manifest.json. Check the action's README for current inputs and outputs before adopting, since the action evolves.</a:t>
             </a:r>
             <a:endParaRPr lang="en-US" dirty="0"/>
           </a:p>
@@ -1056,7 +1060,7 @@
           <a:p>
             <a:r>
               <a:rPr lang="en-US" dirty="0"/>
-              <a:t>Close by repeating the three habits. Then open it up for questions. Good follow-ups: which repo should pilot this first, and who will add the PR title check.</a:t>
+              <a:t>When one repo holds more than one releasable thing, Release Please runs in manifest mode. Each folder listed in release-please-config.json becomes its own component with its own version, CHANGELOG.md, tag, and GitHub Release. The python release type updates the version in pyproject.toml; simple uses a version.txt file, which works for anything, like Terraform. Current versions live in .release-please-manifest.json, here ml-pipeline 1.4.0 and infra 0.3.1. The config shown is simplified: in a real setup, also give each package a component name and set include-component-in-tag to true so tags look like ml-pipeline-v1.4.1. Files at the root, like README.md, belong to no component.</a:t>
             </a:r>
             <a:endParaRPr lang="en-US" dirty="0"/>
           </a:p>
@@ -1080,6 +1084,358 @@
             <a:fld id="{F7021451-1387-4CA6-816F-3879F97B5CBC}" type="slidenum">
               <a:rPr lang="en-US"/>
               <a:t>15</a:t>
+            </a:fld>
+            <a:endParaRPr lang="en-US"/>
+          </a:p>
+        </p:txBody>
+      </p:sp>
+    </p:spTree>
+    <p:extLst>
+      <p:ext uri="{BB962C8B-B14F-4D97-AF65-F5344CB8AC3E}">
+        <p14:creationId xmlns:p14="http://schemas.microsoft.com/office/powerpoint/2010/main" val="1024086991"/>
+      </p:ext>
+    </p:extLst>
+  </p:cSld>
+  <p:clrMapOvr>
+    <a:masterClrMapping/>
+  </p:clrMapOvr>
+</p:notes>
+</file>
+
+<file path=ppt/notesSlides/notesSlide16.xml><?xml version="1.0" encoding="utf-8"?>
+<p:notes xmlns:a="http://schemas.openxmlformats.org/drawingml/2006/main" xmlns:r="http://schemas.openxmlformats.org/officeDocument/2006/relationships" xmlns:p="http://schemas.openxmlformats.org/presentationml/2006/main">
+  <p:cSld>
+    <p:spTree>
+      <p:nvGrpSpPr>
+        <p:cNvPr id="1" name=""/>
+        <p:cNvGrpSpPr/>
+        <p:nvPr/>
+      </p:nvGrpSpPr>
+      <p:grpSpPr>
+        <a:xfrm>
+          <a:off x="0" y="0"/>
+          <a:ext cx="0" cy="0"/>
+          <a:chOff x="0" y="0"/>
+          <a:chExt cx="0" cy="0"/>
+        </a:xfrm>
+      </p:grpSpPr>
+      <p:sp>
+        <p:nvSpPr>
+          <p:cNvPr id="2" name="Slide Image Placeholder 1"/>
+          <p:cNvSpPr>
+            <a:spLocks noGrp="1" noRot="1" noChangeAspect="1"/>
+          </p:cNvSpPr>
+          <p:nvPr>
+            <p:ph type="sldImg"/>
+          </p:nvPr>
+        </p:nvSpPr>
+        <p:spPr/>
+      </p:sp>
+      <p:sp>
+        <p:nvSpPr>
+          <p:cNvPr id="3" name="Notes Placeholder 2"/>
+          <p:cNvSpPr>
+            <a:spLocks noGrp="1"/>
+          </p:cNvSpPr>
+          <p:nvPr>
+            <p:ph type="body" idx="1"/>
+          </p:nvPr>
+        </p:nvSpPr>
+        <p:spPr/>
+        <p:txBody>
+          <a:bodyPr/>
+          <a:lstStyle/>
+          <a:p>
+            <a:r>
+              <a:rPr lang="en-US" dirty="0"/>
+              <a:t>Walk through each column. Python only: the commit touches files under ml-pipeline, so only that component gets a release PR entry. fix means a patch, 1.4.0 to 1.4.1, with its own changelog line and tag. Not Python: the same thing happens for infra; feat means a minor bump, 0.3.1 to 0.4.0, and ml-pipeline is untouched. Both: one commit that touches both folders counts for both components; each gets the bump, each changelog gets the line, and a single merge of the combined release PR creates two tags and two GitHub Releases. Set separate-pull-requests to true if you want to release them independently. Two gotchas: the scope does not do the routing, the file paths do, so fix(ml-pipeline) that only changes the README releases nothing. And the release PR recalculates after every merge, taking the biggest bump per component: if a fix and then a feat both land in ml-pipeline before you merge the release PR, it ships 1.5.0, not 1.4.1.</a:t>
+            </a:r>
+            <a:endParaRPr lang="en-US" dirty="0"/>
+          </a:p>
+        </p:txBody>
+      </p:sp>
+      <p:sp>
+        <p:nvSpPr>
+          <p:cNvPr id="4" name="Slide Number Placeholder 3"/>
+          <p:cNvSpPr>
+            <a:spLocks noGrp="1"/>
+          </p:cNvSpPr>
+          <p:nvPr>
+            <p:ph type="sldNum" sz="quarter" idx="10"/>
+          </p:nvPr>
+        </p:nvSpPr>
+        <p:spPr/>
+        <p:txBody>
+          <a:bodyPr/>
+          <a:lstStyle/>
+          <a:p>
+            <a:fld id="{F7021451-1387-4CA6-816F-3879F97B5CBC}" type="slidenum">
+              <a:rPr lang="en-US"/>
+              <a:t>16</a:t>
+            </a:fld>
+            <a:endParaRPr lang="en-US"/>
+          </a:p>
+        </p:txBody>
+      </p:sp>
+    </p:spTree>
+    <p:extLst>
+      <p:ext uri="{BB962C8B-B14F-4D97-AF65-F5344CB8AC3E}">
+        <p14:creationId xmlns:p14="http://schemas.microsoft.com/office/powerpoint/2010/main" val="1024086991"/>
+      </p:ext>
+    </p:extLst>
+  </p:cSld>
+  <p:clrMapOvr>
+    <a:masterClrMapping/>
+  </p:clrMapOvr>
+</p:notes>
+</file>
+
+<file path=ppt/notesSlides/notesSlide17.xml><?xml version="1.0" encoding="utf-8"?>
+<p:notes xmlns:a="http://schemas.openxmlformats.org/drawingml/2006/main" xmlns:r="http://schemas.openxmlformats.org/officeDocument/2006/relationships" xmlns:p="http://schemas.openxmlformats.org/presentationml/2006/main">
+  <p:cSld>
+    <p:spTree>
+      <p:nvGrpSpPr>
+        <p:cNvPr id="1" name=""/>
+        <p:cNvGrpSpPr/>
+        <p:nvPr/>
+      </p:nvGrpSpPr>
+      <p:grpSpPr>
+        <a:xfrm>
+          <a:off x="0" y="0"/>
+          <a:ext cx="0" cy="0"/>
+          <a:chOff x="0" y="0"/>
+          <a:chExt cx="0" cy="0"/>
+        </a:xfrm>
+      </p:grpSpPr>
+      <p:sp>
+        <p:nvSpPr>
+          <p:cNvPr id="2" name="Slide Image Placeholder 1"/>
+          <p:cNvSpPr>
+            <a:spLocks noGrp="1" noRot="1" noChangeAspect="1"/>
+          </p:cNvSpPr>
+          <p:nvPr>
+            <p:ph type="sldImg"/>
+          </p:nvPr>
+        </p:nvSpPr>
+        <p:spPr/>
+      </p:sp>
+      <p:sp>
+        <p:nvSpPr>
+          <p:cNvPr id="3" name="Notes Placeholder 2"/>
+          <p:cNvSpPr>
+            <a:spLocks noGrp="1"/>
+          </p:cNvSpPr>
+          <p:nvPr>
+            <p:ph type="body" idx="1"/>
+          </p:nvPr>
+        </p:nvSpPr>
+        <p:spPr/>
+        <p:txBody>
+          <a:bodyPr/>
+          <a:lstStyle/>
+          <a:p>
+            <a:r>
+              <a:rPr lang="en-US" dirty="0"/>
+              <a:t>Release Please only ever reads commits on the main branch. It never looks at PR titles directly. Squash merging is what connects the two: GitHub turns the whole PR into one commit, and with the right setting that commit's message is the PR title. That is why we lint PR titles instead of every commit. With merge commits or rebase merges, every branch commit lands on main as-is, so every single one has to follow the convention, and anything that does not is silently skipped. The setting to change is under the repo's Settings, General, Pull Requests: allow squash merging, and set the default commit message to Pull request title. Without it, GitHub's default uses the commit message when a PR has only one commit, which bypasses the title check.</a:t>
+            </a:r>
+            <a:endParaRPr lang="en-US" dirty="0"/>
+          </a:p>
+        </p:txBody>
+      </p:sp>
+      <p:sp>
+        <p:nvSpPr>
+          <p:cNvPr id="4" name="Slide Number Placeholder 3"/>
+          <p:cNvSpPr>
+            <a:spLocks noGrp="1"/>
+          </p:cNvSpPr>
+          <p:nvPr>
+            <p:ph type="sldNum" sz="quarter" idx="10"/>
+          </p:nvPr>
+        </p:nvSpPr>
+        <p:spPr/>
+        <p:txBody>
+          <a:bodyPr/>
+          <a:lstStyle/>
+          <a:p>
+            <a:fld id="{F7021451-1387-4CA6-816F-3879F97B5CBC}" type="slidenum">
+              <a:rPr lang="en-US"/>
+              <a:t>17</a:t>
+            </a:fld>
+            <a:endParaRPr lang="en-US"/>
+          </a:p>
+        </p:txBody>
+      </p:sp>
+    </p:spTree>
+    <p:extLst>
+      <p:ext uri="{BB962C8B-B14F-4D97-AF65-F5344CB8AC3E}">
+        <p14:creationId xmlns:p14="http://schemas.microsoft.com/office/powerpoint/2010/main" val="1024086991"/>
+      </p:ext>
+    </p:extLst>
+  </p:cSld>
+  <p:clrMapOvr>
+    <a:masterClrMapping/>
+  </p:clrMapOvr>
+</p:notes>
+</file>
+
+<file path=ppt/notesSlides/notesSlide18.xml><?xml version="1.0" encoding="utf-8"?>
+<p:notes xmlns:a="http://schemas.openxmlformats.org/drawingml/2006/main" xmlns:r="http://schemas.openxmlformats.org/officeDocument/2006/relationships" xmlns:p="http://schemas.openxmlformats.org/presentationml/2006/main">
+  <p:cSld>
+    <p:spTree>
+      <p:nvGrpSpPr>
+        <p:cNvPr id="1" name=""/>
+        <p:cNvGrpSpPr/>
+        <p:nvPr/>
+      </p:nvGrpSpPr>
+      <p:grpSpPr>
+        <a:xfrm>
+          <a:off x="0" y="0"/>
+          <a:ext cx="0" cy="0"/>
+          <a:chOff x="0" y="0"/>
+          <a:chExt cx="0" cy="0"/>
+        </a:xfrm>
+      </p:grpSpPr>
+      <p:sp>
+        <p:nvSpPr>
+          <p:cNvPr id="2" name="Slide Image Placeholder 1"/>
+          <p:cNvSpPr>
+            <a:spLocks noGrp="1" noRot="1" noChangeAspect="1"/>
+          </p:cNvSpPr>
+          <p:nvPr>
+            <p:ph type="sldImg"/>
+          </p:nvPr>
+        </p:nvSpPr>
+        <p:spPr/>
+      </p:sp>
+      <p:sp>
+        <p:nvSpPr>
+          <p:cNvPr id="3" name="Notes Placeholder 2"/>
+          <p:cNvSpPr>
+            <a:spLocks noGrp="1"/>
+          </p:cNvSpPr>
+          <p:nvPr>
+            <p:ph type="body" idx="1"/>
+          </p:nvPr>
+        </p:nvSpPr>
+        <p:spPr/>
+        <p:txBody>
+          <a:bodyPr/>
+          <a:lstStyle/>
+          <a:p>
+            <a:r>
+              <a:rPr lang="en-US" dirty="0"/>
+              <a:t>The convention only works if it is followed, so automate the enforcement. Squash merging is the biggest win: contributors can commit however they like on their branch, and only the PR title has to follow the format. The gotcha at the bottom trips up almost every team the first time: GitHub deliberately does not trigger workflows from events created by the default token, so your tests will not run on the release PR unless you use a separate token.</a:t>
+            </a:r>
+            <a:endParaRPr lang="en-US" dirty="0"/>
+          </a:p>
+        </p:txBody>
+      </p:sp>
+      <p:sp>
+        <p:nvSpPr>
+          <p:cNvPr id="4" name="Slide Number Placeholder 3"/>
+          <p:cNvSpPr>
+            <a:spLocks noGrp="1"/>
+          </p:cNvSpPr>
+          <p:nvPr>
+            <p:ph type="sldNum" sz="quarter" idx="10"/>
+          </p:nvPr>
+        </p:nvSpPr>
+        <p:spPr/>
+        <p:txBody>
+          <a:bodyPr/>
+          <a:lstStyle/>
+          <a:p>
+            <a:fld id="{F7021451-1387-4CA6-816F-3879F97B5CBC}" type="slidenum">
+              <a:rPr lang="en-US"/>
+              <a:t>18</a:t>
+            </a:fld>
+            <a:endParaRPr lang="en-US"/>
+          </a:p>
+        </p:txBody>
+      </p:sp>
+    </p:spTree>
+    <p:extLst>
+      <p:ext uri="{BB962C8B-B14F-4D97-AF65-F5344CB8AC3E}">
+        <p14:creationId xmlns:p14="http://schemas.microsoft.com/office/powerpoint/2010/main" val="1024086991"/>
+      </p:ext>
+    </p:extLst>
+  </p:cSld>
+  <p:clrMapOvr>
+    <a:masterClrMapping/>
+  </p:clrMapOvr>
+</p:notes>
+</file>
+
+<file path=ppt/notesSlides/notesSlide19.xml><?xml version="1.0" encoding="utf-8"?>
+<p:notes xmlns:a="http://schemas.openxmlformats.org/drawingml/2006/main" xmlns:r="http://schemas.openxmlformats.org/officeDocument/2006/relationships" xmlns:p="http://schemas.openxmlformats.org/presentationml/2006/main">
+  <p:cSld>
+    <p:spTree>
+      <p:nvGrpSpPr>
+        <p:cNvPr id="1" name=""/>
+        <p:cNvGrpSpPr/>
+        <p:nvPr/>
+      </p:nvGrpSpPr>
+      <p:grpSpPr>
+        <a:xfrm>
+          <a:off x="0" y="0"/>
+          <a:ext cx="0" cy="0"/>
+          <a:chOff x="0" y="0"/>
+          <a:chExt cx="0" cy="0"/>
+        </a:xfrm>
+      </p:grpSpPr>
+      <p:sp>
+        <p:nvSpPr>
+          <p:cNvPr id="2" name="Slide Image Placeholder 1"/>
+          <p:cNvSpPr>
+            <a:spLocks noGrp="1" noRot="1" noChangeAspect="1"/>
+          </p:cNvSpPr>
+          <p:nvPr>
+            <p:ph type="sldImg"/>
+          </p:nvPr>
+        </p:nvSpPr>
+        <p:spPr/>
+      </p:sp>
+      <p:sp>
+        <p:nvSpPr>
+          <p:cNvPr id="3" name="Notes Placeholder 2"/>
+          <p:cNvSpPr>
+            <a:spLocks noGrp="1"/>
+          </p:cNvSpPr>
+          <p:nvPr>
+            <p:ph type="body" idx="1"/>
+          </p:nvPr>
+        </p:nvSpPr>
+        <p:spPr/>
+        <p:txBody>
+          <a:bodyPr/>
+          <a:lstStyle/>
+          <a:p>
+            <a:r>
+              <a:rPr lang="en-US" dirty="0"/>
+              <a:t>Close by repeating the three habits. Then open it up for questions. Good follow-ups: which repo should pilot this first, and who will add the PR title check.</a:t>
+            </a:r>
+            <a:endParaRPr lang="en-US" dirty="0"/>
+          </a:p>
+        </p:txBody>
+      </p:sp>
+      <p:sp>
+        <p:nvSpPr>
+          <p:cNvPr id="4" name="Slide Number Placeholder 3"/>
+          <p:cNvSpPr>
+            <a:spLocks noGrp="1"/>
+          </p:cNvSpPr>
+          <p:nvPr>
+            <p:ph type="sldNum" sz="quarter" idx="10"/>
+          </p:nvPr>
+        </p:nvSpPr>
+        <p:spPr/>
+        <p:txBody>
+          <a:bodyPr/>
+          <a:lstStyle/>
+          <a:p>
+            <a:fld id="{F7021451-1387-4CA6-816F-3879F97B5CBC}" type="slidenum">
+              <a:rPr lang="en-US"/>
+              <a:t>19</a:t>
             </a:fld>
             <a:endParaRPr lang="en-US"/>
           </a:p>
@@ -1320,7 +1676,7 @@
           <a:p>
             <a:r>
               <a:rPr lang="en-US" dirty="0"/>
-              <a:t>Only the first line is required: type, colon, space, description. The scope in parentheses and the exclamation mark are optional. The body and the BREAKING CHANGE footer are optional too, but the footer is a second way to mark a breaking change and a good place to explain it.</a:t>
+              <a:t>Only the first line is required: type, colon, space, description. The scope in parentheses and the exclamation mark are optional. The grey lines are the body: they explain why the change was needed, here the security risk of tokens in URLs. The last lines are the footer: BREAKING CHANGE tells upgraders what broke and how to fix it, and Refs links the issue. Body and footer are optional, but use them whenever a change breaks something. Note how every part agrees: feat because the service has a new rule, jwt as a short lowercase scope, and the exclamation mark because old clients will break.</a:t>
             </a:r>
             <a:endParaRPr lang="en-US" dirty="0"/>
           </a:p>
@@ -1760,7 +2116,7 @@
           <a:p>
             <a:r>
               <a:rPr lang="en-US" dirty="0"/>
-              <a:t>Now that our commits carry meaning, we need something to read them. Release Please is an open source GitHub Action maintained by Google. It never pushes a release on its own. It proposes one, and a human approves it.</a:t>
+              <a:t>The Conventional Commits spec is looser than most people think. It cares about structure: the colon and space, parentheses for the scope, blank lines between sections, dashes in footer tokens, and an uppercase BREAKING CHANGE. Tools must treat everything else as case-insensitive. The style rules people usually associate with conventional commits, like lowercase and no trailing period, come from commitlint's standard config. We adopt them so history reads consistently. Standard types are feat, fix, docs, chore, refactor, test, ci, build, style, perf, and revert.</a:t>
             </a:r>
             <a:endParaRPr lang="en-US" dirty="0"/>
           </a:p>
@@ -2577,6 +2933,2018 @@
     <p:bg>
       <p:bgPr>
         <a:solidFill>
+          <a:srgbClr val="ECE7DC"/>
+        </a:solidFill>
+      </p:bgPr>
+    </p:bg>
+    <p:spTree>
+      <p:nvGrpSpPr>
+        <p:cNvPr id="1" name=""/>
+        <p:cNvGrpSpPr/>
+        <p:nvPr/>
+      </p:nvGrpSpPr>
+      <p:grpSpPr>
+        <a:xfrm>
+          <a:off x="0" y="0"/>
+          <a:ext cx="0" cy="0"/>
+          <a:chOff x="0" y="0"/>
+          <a:chExt cx="0" cy="0"/>
+        </a:xfrm>
+      </p:grpSpPr>
+      <p:sp>
+        <p:nvSpPr>
+          <p:cNvPr id="2" name="Text 0"/>
+          <p:cNvSpPr/>
+          <p:nvPr>
+            <p:ph type="title"/>
+          </p:nvPr>
+        </p:nvSpPr>
+        <p:spPr>
+          <a:xfrm>
+            <a:off x="812800" y="812800"/>
+            <a:ext cx="10883392" cy="603741"/>
+          </a:xfrm>
+          <a:prstGeom prst="rect">
+            <a:avLst/>
+          </a:prstGeom>
+          <a:noFill/>
+          <a:ln/>
+        </p:spPr>
+        <p:txBody>
+          <a:bodyPr wrap="square" lIns="0" tIns="0" rIns="0" bIns="0" rtlCol="0" anchor="t">
+            <a:normAutofit/>
+          </a:bodyPr>
+          <a:lstStyle/>
+          <a:p>
+            <a:pPr algn="l" indent="0" marL="0">
+              <a:lnSpc>
+                <a:spcPts val="3960"/>
+              </a:lnSpc>
+              <a:buNone/>
+            </a:pPr>
+            <a:r>
+              <a:rPr lang="en-US" sz="3600" b="1" i="0" spc="-50" kern="0" dirty="0">
+                <a:solidFill>
+                  <a:srgbClr val="1B1E26"/>
+                </a:solidFill>
+                <a:latin typeface="Space Grotesk" pitchFamily="34" charset="0"/>
+                <a:ea typeface="Space Grotesk" pitchFamily="34" charset="-122"/>
+                <a:cs typeface="Space Grotesk" pitchFamily="34" charset="-120"/>
+              </a:rPr>
+              <a:t>Quick check: pass or fail?</a:t>
+            </a:r>
+            <a:endParaRPr lang="en-US" sz="3600" dirty="0"/>
+          </a:p>
+        </p:txBody>
+      </p:sp>
+      <p:graphicFrame>
+        <p:nvGraphicFramePr>
+          <p:cNvPr id="3" name="Table 0"/>
+          <p:cNvGraphicFramePr>
+            <a:graphicFrameLocks noGrp="1"/>
+          </p:cNvGraphicFramePr>
+          <p:nvPr>
+            <p:extLst>
+              <p:ext uri="{D42A27DB-BD31-4B8C-83A1-F6EECF244321}">
+                <p14:modId xmlns:p14="http://schemas.microsoft.com/office/powerpoint/2010/main" val="1579011935"/>
+              </p:ext>
+            </p:extLst>
+          </p:nvPr>
+        </p:nvGraphicFramePr>
+        <p:xfrm>
+          <a:off x="824895" y="1682635"/>
+          <a:ext cx="10554305" cy="4012595"/>
+        </p:xfrm>
+        <a:graphic>
+          <a:graphicData uri="http://schemas.openxmlformats.org/drawingml/2006/table">
+            <a:tbl>
+              <a:tblPr/>
+              <a:tblGrid>
+                <a:gridCol w="4854980"/>
+                <a:gridCol w="2110861"/>
+                <a:gridCol w="3588464"/>
+              </a:tblGrid>
+              <a:tr h="501574">
+                <a:tc>
+                  <a:txBody>
+                    <a:bodyPr/>
+                    <a:lstStyle/>
+                    <a:p>
+                      <a:pPr indent="0" marL="0">
+                        <a:lnSpc>
+                          <a:spcPts val="1960"/>
+                        </a:lnSpc>
+                        <a:buNone/>
+                      </a:pPr>
+                      <a:r>
+                        <a:rPr lang="en-US" sz="1400" b="1" dirty="0">
+                          <a:solidFill>
+                            <a:srgbClr val="F6F3EC"/>
+                          </a:solidFill>
+                          <a:latin typeface="JetBrains Mono" pitchFamily="49" charset="0"/>
+                          <a:ea typeface="JetBrains Mono" pitchFamily="49" charset="-122"/>
+                          <a:cs typeface="JetBrains Mono" pitchFamily="49" charset="-120"/>
+                        </a:rPr>
+                        <a:t>Commit</a:t>
+                      </a:r>
+                      <a:endParaRPr lang="en-US" sz="1400" dirty="0">
+                        <a:latin typeface="JetBrains Mono" charset="0"/>
+                        <a:ea typeface="JetBrains Mono" charset="0"/>
+                        <a:cs typeface="JetBrains Mono" charset="0"/>
+                      </a:endParaRPr>
+                    </a:p>
+                  </a:txBody>
+                  <a:tcPr marL="152400" marR="152400" marT="101600" marB="101600" anchor="t">
+                    <a:lnL w="12700" cap="flat" cmpd="sng" algn="ctr">
+                      <a:solidFill>
+                        <a:srgbClr val="BCB9B0"/>
+                      </a:solidFill>
+                      <a:prstDash val="solid"/>
+                      <a:round/>
+                      <a:headEnd type="none" w="med" len="med"/>
+                      <a:tailEnd type="none" w="med" len="med"/>
+                    </a:lnL>
+                    <a:lnR w="12700" cap="flat" cmpd="sng" algn="ctr">
+                      <a:solidFill>
+                        <a:srgbClr val="15171C"/>
+                      </a:solidFill>
+                      <a:prstDash val="solid"/>
+                      <a:round/>
+                      <a:headEnd type="none" w="med" len="med"/>
+                      <a:tailEnd type="none" w="med" len="med"/>
+                    </a:lnR>
+                    <a:lnT w="12700" cap="flat" cmpd="sng" algn="ctr">
+                      <a:solidFill>
+                        <a:srgbClr val="BCB9B0"/>
+                      </a:solidFill>
+                      <a:prstDash val="solid"/>
+                      <a:round/>
+                      <a:headEnd type="none" w="med" len="med"/>
+                      <a:tailEnd type="none" w="med" len="med"/>
+                    </a:lnT>
+                    <a:lnB w="12700" cap="flat" cmpd="sng" algn="ctr">
+                      <a:solidFill>
+                        <a:srgbClr val="15171C"/>
+                      </a:solidFill>
+                      <a:prstDash val="solid"/>
+                      <a:round/>
+                      <a:headEnd type="none" w="med" len="med"/>
+                      <a:tailEnd type="none" w="med" len="med"/>
+                    </a:lnB>
+                    <a:solidFill>
+                      <a:srgbClr val="15181F"/>
+                    </a:solidFill>
+                  </a:tcPr>
+                </a:tc>
+                <a:tc>
+                  <a:txBody>
+                    <a:bodyPr/>
+                    <a:lstStyle/>
+                    <a:p>
+                      <a:pPr indent="0" marL="0">
+                        <a:lnSpc>
+                          <a:spcPts val="1960"/>
+                        </a:lnSpc>
+                        <a:buNone/>
+                      </a:pPr>
+                      <a:r>
+                        <a:rPr lang="en-US" sz="1400" b="1" dirty="0">
+                          <a:solidFill>
+                            <a:srgbClr val="F6F3EC"/>
+                          </a:solidFill>
+                          <a:latin typeface="JetBrains Mono" pitchFamily="49" charset="0"/>
+                          <a:ea typeface="JetBrains Mono" pitchFamily="49" charset="-122"/>
+                          <a:cs typeface="JetBrains Mono" pitchFamily="49" charset="-120"/>
+                        </a:rPr>
+                        <a:t>Result</a:t>
+                      </a:r>
+                      <a:endParaRPr lang="en-US" sz="1400" dirty="0">
+                        <a:latin typeface="JetBrains Mono" charset="0"/>
+                        <a:ea typeface="JetBrains Mono" charset="0"/>
+                        <a:cs typeface="JetBrains Mono" charset="0"/>
+                      </a:endParaRPr>
+                    </a:p>
+                  </a:txBody>
+                  <a:tcPr marL="152400" marR="152400" marT="101600" marB="101600" anchor="t">
+                    <a:lnL w="12700" cap="flat" cmpd="sng" algn="ctr">
+                      <a:solidFill>
+                        <a:srgbClr val="15171C"/>
+                      </a:solidFill>
+                      <a:prstDash val="solid"/>
+                      <a:round/>
+                      <a:headEnd type="none" w="med" len="med"/>
+                      <a:tailEnd type="none" w="med" len="med"/>
+                    </a:lnL>
+                    <a:lnR w="12700" cap="flat" cmpd="sng" algn="ctr">
+                      <a:solidFill>
+                        <a:srgbClr val="15171C"/>
+                      </a:solidFill>
+                      <a:prstDash val="solid"/>
+                      <a:round/>
+                      <a:headEnd type="none" w="med" len="med"/>
+                      <a:tailEnd type="none" w="med" len="med"/>
+                    </a:lnR>
+                    <a:lnT w="12700" cap="flat" cmpd="sng" algn="ctr">
+                      <a:solidFill>
+                        <a:srgbClr val="BCB9B0"/>
+                      </a:solidFill>
+                      <a:prstDash val="solid"/>
+                      <a:round/>
+                      <a:headEnd type="none" w="med" len="med"/>
+                      <a:tailEnd type="none" w="med" len="med"/>
+                    </a:lnT>
+                    <a:lnB w="12700" cap="flat" cmpd="sng" algn="ctr">
+                      <a:solidFill>
+                        <a:srgbClr val="15171C"/>
+                      </a:solidFill>
+                      <a:prstDash val="solid"/>
+                      <a:round/>
+                      <a:headEnd type="none" w="med" len="med"/>
+                      <a:tailEnd type="none" w="med" len="med"/>
+                    </a:lnB>
+                    <a:solidFill>
+                      <a:srgbClr val="15181F"/>
+                    </a:solidFill>
+                  </a:tcPr>
+                </a:tc>
+                <a:tc>
+                  <a:txBody>
+                    <a:bodyPr/>
+                    <a:lstStyle/>
+                    <a:p>
+                      <a:pPr indent="0" marL="0">
+                        <a:lnSpc>
+                          <a:spcPts val="1960"/>
+                        </a:lnSpc>
+                        <a:buNone/>
+                      </a:pPr>
+                      <a:r>
+                        <a:rPr lang="en-US" sz="1400" b="1" dirty="0">
+                          <a:solidFill>
+                            <a:srgbClr val="F6F3EC"/>
+                          </a:solidFill>
+                          <a:latin typeface="JetBrains Mono" pitchFamily="49" charset="0"/>
+                          <a:ea typeface="JetBrains Mono" pitchFamily="49" charset="-122"/>
+                          <a:cs typeface="JetBrains Mono" pitchFamily="49" charset="-120"/>
+                        </a:rPr>
+                        <a:t>Why</a:t>
+                      </a:r>
+                      <a:endParaRPr lang="en-US" sz="1400" dirty="0">
+                        <a:latin typeface="JetBrains Mono" charset="0"/>
+                        <a:ea typeface="JetBrains Mono" charset="0"/>
+                        <a:cs typeface="JetBrains Mono" charset="0"/>
+                      </a:endParaRPr>
+                    </a:p>
+                  </a:txBody>
+                  <a:tcPr marL="152400" marR="152400" marT="101600" marB="101600" anchor="t">
+                    <a:lnL w="12700" cap="flat" cmpd="sng" algn="ctr">
+                      <a:solidFill>
+                        <a:srgbClr val="15171C"/>
+                      </a:solidFill>
+                      <a:prstDash val="solid"/>
+                      <a:round/>
+                      <a:headEnd type="none" w="med" len="med"/>
+                      <a:tailEnd type="none" w="med" len="med"/>
+                    </a:lnL>
+                    <a:lnR w="12700" cap="flat" cmpd="sng" algn="ctr">
+                      <a:solidFill>
+                        <a:srgbClr val="15171C"/>
+                      </a:solidFill>
+                      <a:prstDash val="solid"/>
+                      <a:round/>
+                      <a:headEnd type="none" w="med" len="med"/>
+                      <a:tailEnd type="none" w="med" len="med"/>
+                    </a:lnR>
+                    <a:lnT w="12700" cap="flat" cmpd="sng" algn="ctr">
+                      <a:solidFill>
+                        <a:srgbClr val="BCB9B0"/>
+                      </a:solidFill>
+                      <a:prstDash val="solid"/>
+                      <a:round/>
+                      <a:headEnd type="none" w="med" len="med"/>
+                      <a:tailEnd type="none" w="med" len="med"/>
+                    </a:lnT>
+                    <a:lnB w="12700" cap="flat" cmpd="sng" algn="ctr">
+                      <a:solidFill>
+                        <a:srgbClr val="15171C"/>
+                      </a:solidFill>
+                      <a:prstDash val="solid"/>
+                      <a:round/>
+                      <a:headEnd type="none" w="med" len="med"/>
+                      <a:tailEnd type="none" w="med" len="med"/>
+                    </a:lnB>
+                    <a:solidFill>
+                      <a:srgbClr val="15181F"/>
+                    </a:solidFill>
+                  </a:tcPr>
+                </a:tc>
+              </a:tr>
+              <a:tr h="501574">
+                <a:tc>
+                  <a:txBody>
+                    <a:bodyPr/>
+                    <a:lstStyle/>
+                    <a:p>
+                      <a:pPr indent="0" marL="0">
+                        <a:lnSpc>
+                          <a:spcPts val="1960"/>
+                        </a:lnSpc>
+                        <a:buNone/>
+                      </a:pPr>
+                      <a:r>
+                        <a:rPr lang="en-US" sz="1400" dirty="0">
+                          <a:solidFill>
+                            <a:srgbClr val="1B1E26"/>
+                          </a:solidFill>
+                          <a:latin typeface="JetBrains Mono" pitchFamily="49" charset="0"/>
+                          <a:ea typeface="JetBrains Mono" pitchFamily="49" charset="-122"/>
+                          <a:cs typeface="JetBrains Mono" pitchFamily="49" charset="-120"/>
+                        </a:rPr>
+                        <a:t>feat(auth)!: add SSO login</a:t>
+                      </a:r>
+                      <a:endParaRPr lang="en-US" sz="1400" dirty="0">
+                        <a:latin typeface="JetBrains Mono" charset="0"/>
+                        <a:ea typeface="JetBrains Mono" charset="0"/>
+                        <a:cs typeface="JetBrains Mono" charset="0"/>
+                      </a:endParaRPr>
+                    </a:p>
+                  </a:txBody>
+                  <a:tcPr marL="152400" marR="152400" marT="101600" marB="101600" anchor="t">
+                    <a:lnL w="12700" cap="flat" cmpd="sng" algn="ctr">
+                      <a:solidFill>
+                        <a:srgbClr val="BCB9B0"/>
+                      </a:solidFill>
+                      <a:prstDash val="solid"/>
+                      <a:round/>
+                      <a:headEnd type="none" w="med" len="med"/>
+                      <a:tailEnd type="none" w="med" len="med"/>
+                    </a:lnL>
+                    <a:lnR w="12700" cap="flat" cmpd="sng" algn="ctr">
+                      <a:solidFill>
+                        <a:srgbClr val="CBCAC6"/>
+                      </a:solidFill>
+                      <a:prstDash val="solid"/>
+                      <a:round/>
+                      <a:headEnd type="none" w="med" len="med"/>
+                      <a:tailEnd type="none" w="med" len="med"/>
+                    </a:lnR>
+                    <a:lnT w="12700" cap="flat" cmpd="sng" algn="ctr">
+                      <a:solidFill>
+                        <a:srgbClr val="15171C"/>
+                      </a:solidFill>
+                      <a:prstDash val="solid"/>
+                      <a:round/>
+                      <a:headEnd type="none" w="med" len="med"/>
+                      <a:tailEnd type="none" w="med" len="med"/>
+                    </a:lnT>
+                    <a:lnB w="12700" cap="flat" cmpd="sng" algn="ctr">
+                      <a:solidFill>
+                        <a:srgbClr val="CBCAC6"/>
+                      </a:solidFill>
+                      <a:prstDash val="solid"/>
+                      <a:round/>
+                      <a:headEnd type="none" w="med" len="med"/>
+                      <a:tailEnd type="none" w="med" len="med"/>
+                    </a:lnB>
+                    <a:solidFill>
+                      <a:srgbClr val="FFFDF8"/>
+                    </a:solidFill>
+                  </a:tcPr>
+                </a:tc>
+                <a:tc>
+                  <a:txBody>
+                    <a:bodyPr/>
+                    <a:lstStyle/>
+                    <a:p>
+                      <a:pPr indent="0" marL="0">
+                        <a:lnSpc>
+                          <a:spcPts val="1960"/>
+                        </a:lnSpc>
+                        <a:buNone/>
+                      </a:pPr>
+                      <a:r>
+                        <a:rPr lang="en-US" sz="1400" dirty="0">
+                          <a:solidFill>
+                            <a:srgbClr val="2F62B0"/>
+                          </a:solidFill>
+                          <a:latin typeface="JetBrains Mono" pitchFamily="49" charset="0"/>
+                          <a:ea typeface="JetBrains Mono" pitchFamily="49" charset="-122"/>
+                          <a:cs typeface="JetBrains Mono" pitchFamily="49" charset="-120"/>
+                        </a:rPr>
+                        <a:t>Pass</a:t>
+                      </a:r>
+                      <a:endParaRPr lang="en-US" sz="1400" dirty="0">
+                        <a:latin typeface="JetBrains Mono" charset="0"/>
+                        <a:ea typeface="JetBrains Mono" charset="0"/>
+                        <a:cs typeface="JetBrains Mono" charset="0"/>
+                      </a:endParaRPr>
+                    </a:p>
+                  </a:txBody>
+                  <a:tcPr marL="152400" marR="152400" marT="101600" marB="101600" anchor="t">
+                    <a:lnL w="12700" cap="flat" cmpd="sng" algn="ctr">
+                      <a:solidFill>
+                        <a:srgbClr val="CBCAC6"/>
+                      </a:solidFill>
+                      <a:prstDash val="solid"/>
+                      <a:round/>
+                      <a:headEnd type="none" w="med" len="med"/>
+                      <a:tailEnd type="none" w="med" len="med"/>
+                    </a:lnL>
+                    <a:lnR w="12700" cap="flat" cmpd="sng" algn="ctr">
+                      <a:solidFill>
+                        <a:srgbClr val="CBCAC6"/>
+                      </a:solidFill>
+                      <a:prstDash val="solid"/>
+                      <a:round/>
+                      <a:headEnd type="none" w="med" len="med"/>
+                      <a:tailEnd type="none" w="med" len="med"/>
+                    </a:lnR>
+                    <a:lnT w="12700" cap="flat" cmpd="sng" algn="ctr">
+                      <a:solidFill>
+                        <a:srgbClr val="15171C"/>
+                      </a:solidFill>
+                      <a:prstDash val="solid"/>
+                      <a:round/>
+                      <a:headEnd type="none" w="med" len="med"/>
+                      <a:tailEnd type="none" w="med" len="med"/>
+                    </a:lnT>
+                    <a:lnB w="12700" cap="flat" cmpd="sng" algn="ctr">
+                      <a:solidFill>
+                        <a:srgbClr val="CBCAC6"/>
+                      </a:solidFill>
+                      <a:prstDash val="solid"/>
+                      <a:round/>
+                      <a:headEnd type="none" w="med" len="med"/>
+                      <a:tailEnd type="none" w="med" len="med"/>
+                    </a:lnB>
+                    <a:solidFill>
+                      <a:srgbClr val="FFFDF8"/>
+                    </a:solidFill>
+                  </a:tcPr>
+                </a:tc>
+                <a:tc>
+                  <a:txBody>
+                    <a:bodyPr/>
+                    <a:lstStyle/>
+                    <a:p>
+                      <a:pPr indent="0" marL="0">
+                        <a:lnSpc>
+                          <a:spcPts val="1960"/>
+                        </a:lnSpc>
+                        <a:buNone/>
+                      </a:pPr>
+                      <a:r>
+                        <a:rPr lang="en-US" sz="1400" dirty="0">
+                          <a:solidFill>
+                            <a:srgbClr val="1B1E26"/>
+                          </a:solidFill>
+                          <a:latin typeface="JetBrains Mono" pitchFamily="49" charset="0"/>
+                          <a:ea typeface="JetBrains Mono" pitchFamily="49" charset="-122"/>
+                          <a:cs typeface="JetBrains Mono" pitchFamily="49" charset="-120"/>
+                        </a:rPr>
+                        <a:t>Follows every rule</a:t>
+                      </a:r>
+                      <a:endParaRPr lang="en-US" sz="1400" dirty="0">
+                        <a:latin typeface="JetBrains Mono" charset="0"/>
+                        <a:ea typeface="JetBrains Mono" charset="0"/>
+                        <a:cs typeface="JetBrains Mono" charset="0"/>
+                      </a:endParaRPr>
+                    </a:p>
+                  </a:txBody>
+                  <a:tcPr marL="152400" marR="152400" marT="101600" marB="101600" anchor="t">
+                    <a:lnL w="12700" cap="flat" cmpd="sng" algn="ctr">
+                      <a:solidFill>
+                        <a:srgbClr val="CBCAC6"/>
+                      </a:solidFill>
+                      <a:prstDash val="solid"/>
+                      <a:round/>
+                      <a:headEnd type="none" w="med" len="med"/>
+                      <a:tailEnd type="none" w="med" len="med"/>
+                    </a:lnL>
+                    <a:lnR w="12700" cap="flat" cmpd="sng" algn="ctr">
+                      <a:solidFill>
+                        <a:srgbClr val="CBCAC6"/>
+                      </a:solidFill>
+                      <a:prstDash val="solid"/>
+                      <a:round/>
+                      <a:headEnd type="none" w="med" len="med"/>
+                      <a:tailEnd type="none" w="med" len="med"/>
+                    </a:lnR>
+                    <a:lnT w="12700" cap="flat" cmpd="sng" algn="ctr">
+                      <a:solidFill>
+                        <a:srgbClr val="15171C"/>
+                      </a:solidFill>
+                      <a:prstDash val="solid"/>
+                      <a:round/>
+                      <a:headEnd type="none" w="med" len="med"/>
+                      <a:tailEnd type="none" w="med" len="med"/>
+                    </a:lnT>
+                    <a:lnB w="12700" cap="flat" cmpd="sng" algn="ctr">
+                      <a:solidFill>
+                        <a:srgbClr val="CBCAC6"/>
+                      </a:solidFill>
+                      <a:prstDash val="solid"/>
+                      <a:round/>
+                      <a:headEnd type="none" w="med" len="med"/>
+                      <a:tailEnd type="none" w="med" len="med"/>
+                    </a:lnB>
+                    <a:solidFill>
+                      <a:srgbClr val="FFFDF8"/>
+                    </a:solidFill>
+                  </a:tcPr>
+                </a:tc>
+              </a:tr>
+              <a:tr h="501574">
+                <a:tc>
+                  <a:txBody>
+                    <a:bodyPr/>
+                    <a:lstStyle/>
+                    <a:p>
+                      <a:pPr indent="0" marL="0">
+                        <a:lnSpc>
+                          <a:spcPts val="1960"/>
+                        </a:lnSpc>
+                        <a:buNone/>
+                      </a:pPr>
+                      <a:r>
+                        <a:rPr lang="en-US" sz="1400" dirty="0">
+                          <a:solidFill>
+                            <a:srgbClr val="1B1E26"/>
+                          </a:solidFill>
+                          <a:latin typeface="JetBrains Mono" pitchFamily="49" charset="0"/>
+                          <a:ea typeface="JetBrains Mono" pitchFamily="49" charset="-122"/>
+                          <a:cs typeface="JetBrains Mono" pitchFamily="49" charset="-120"/>
+                        </a:rPr>
+                        <a:t>feat(auth): Add SSO login.</a:t>
+                      </a:r>
+                      <a:endParaRPr lang="en-US" sz="1400" dirty="0">
+                        <a:latin typeface="JetBrains Mono" charset="0"/>
+                        <a:ea typeface="JetBrains Mono" charset="0"/>
+                        <a:cs typeface="JetBrains Mono" charset="0"/>
+                      </a:endParaRPr>
+                    </a:p>
+                  </a:txBody>
+                  <a:tcPr marL="152400" marR="152400" marT="101600" marB="101600" anchor="t">
+                    <a:lnL w="12700" cap="flat" cmpd="sng" algn="ctr">
+                      <a:solidFill>
+                        <a:srgbClr val="BCB9B0"/>
+                      </a:solidFill>
+                      <a:prstDash val="solid"/>
+                      <a:round/>
+                      <a:headEnd type="none" w="med" len="med"/>
+                      <a:tailEnd type="none" w="med" len="med"/>
+                    </a:lnL>
+                    <a:lnR w="12700" cap="flat" cmpd="sng" algn="ctr">
+                      <a:solidFill>
+                        <a:srgbClr val="BCB9B0"/>
+                      </a:solidFill>
+                      <a:prstDash val="solid"/>
+                      <a:round/>
+                      <a:headEnd type="none" w="med" len="med"/>
+                      <a:tailEnd type="none" w="med" len="med"/>
+                    </a:lnR>
+                    <a:lnT w="12700" cap="flat" cmpd="sng" algn="ctr">
+                      <a:solidFill>
+                        <a:srgbClr val="CBCAC6"/>
+                      </a:solidFill>
+                      <a:prstDash val="solid"/>
+                      <a:round/>
+                      <a:headEnd type="none" w="med" len="med"/>
+                      <a:tailEnd type="none" w="med" len="med"/>
+                    </a:lnT>
+                    <a:lnB w="12700" cap="flat" cmpd="sng" algn="ctr">
+                      <a:solidFill>
+                        <a:srgbClr val="BCB9B0"/>
+                      </a:solidFill>
+                      <a:prstDash val="solid"/>
+                      <a:round/>
+                      <a:headEnd type="none" w="med" len="med"/>
+                      <a:tailEnd type="none" w="med" len="med"/>
+                    </a:lnB>
+                  </a:tcPr>
+                </a:tc>
+                <a:tc>
+                  <a:txBody>
+                    <a:bodyPr/>
+                    <a:lstStyle/>
+                    <a:p>
+                      <a:pPr indent="0" marL="0">
+                        <a:lnSpc>
+                          <a:spcPts val="1960"/>
+                        </a:lnSpc>
+                        <a:buNone/>
+                      </a:pPr>
+                      <a:r>
+                        <a:rPr lang="en-US" sz="1400" dirty="0">
+                          <a:solidFill>
+                            <a:srgbClr val="8A6400"/>
+                          </a:solidFill>
+                          <a:latin typeface="JetBrains Mono" pitchFamily="49" charset="0"/>
+                          <a:ea typeface="JetBrains Mono" pitchFamily="49" charset="-122"/>
+                          <a:cs typeface="JetBrains Mono" pitchFamily="49" charset="-120"/>
+                        </a:rPr>
+                        <a:t>Lint fails</a:t>
+                      </a:r>
+                      <a:endParaRPr lang="en-US" sz="1400" dirty="0">
+                        <a:latin typeface="JetBrains Mono" charset="0"/>
+                        <a:ea typeface="JetBrains Mono" charset="0"/>
+                        <a:cs typeface="JetBrains Mono" charset="0"/>
+                      </a:endParaRPr>
+                    </a:p>
+                  </a:txBody>
+                  <a:tcPr marL="152400" marR="152400" marT="101600" marB="101600" anchor="t">
+                    <a:lnL w="12700" cap="flat" cmpd="sng" algn="ctr">
+                      <a:solidFill>
+                        <a:srgbClr val="BCB9B0"/>
+                      </a:solidFill>
+                      <a:prstDash val="solid"/>
+                      <a:round/>
+                      <a:headEnd type="none" w="med" len="med"/>
+                      <a:tailEnd type="none" w="med" len="med"/>
+                    </a:lnL>
+                    <a:lnR w="12700" cap="flat" cmpd="sng" algn="ctr">
+                      <a:solidFill>
+                        <a:srgbClr val="BCB9B0"/>
+                      </a:solidFill>
+                      <a:prstDash val="solid"/>
+                      <a:round/>
+                      <a:headEnd type="none" w="med" len="med"/>
+                      <a:tailEnd type="none" w="med" len="med"/>
+                    </a:lnR>
+                    <a:lnT w="12700" cap="flat" cmpd="sng" algn="ctr">
+                      <a:solidFill>
+                        <a:srgbClr val="CBCAC6"/>
+                      </a:solidFill>
+                      <a:prstDash val="solid"/>
+                      <a:round/>
+                      <a:headEnd type="none" w="med" len="med"/>
+                      <a:tailEnd type="none" w="med" len="med"/>
+                    </a:lnT>
+                    <a:lnB w="12700" cap="flat" cmpd="sng" algn="ctr">
+                      <a:solidFill>
+                        <a:srgbClr val="BCB9B0"/>
+                      </a:solidFill>
+                      <a:prstDash val="solid"/>
+                      <a:round/>
+                      <a:headEnd type="none" w="med" len="med"/>
+                      <a:tailEnd type="none" w="med" len="med"/>
+                    </a:lnB>
+                  </a:tcPr>
+                </a:tc>
+                <a:tc>
+                  <a:txBody>
+                    <a:bodyPr/>
+                    <a:lstStyle/>
+                    <a:p>
+                      <a:pPr indent="0" marL="0">
+                        <a:lnSpc>
+                          <a:spcPts val="1960"/>
+                        </a:lnSpc>
+                        <a:buNone/>
+                      </a:pPr>
+                      <a:r>
+                        <a:rPr lang="en-US" sz="1400" dirty="0">
+                          <a:solidFill>
+                            <a:srgbClr val="1B1E26"/>
+                          </a:solidFill>
+                          <a:latin typeface="JetBrains Mono" pitchFamily="49" charset="0"/>
+                          <a:ea typeface="JetBrains Mono" pitchFamily="49" charset="-122"/>
+                          <a:cs typeface="JetBrains Mono" pitchFamily="49" charset="-120"/>
+                        </a:rPr>
+                        <a:t>Capital start, period</a:t>
+                      </a:r>
+                      <a:endParaRPr lang="en-US" sz="1400" dirty="0">
+                        <a:latin typeface="JetBrains Mono" charset="0"/>
+                        <a:ea typeface="JetBrains Mono" charset="0"/>
+                        <a:cs typeface="JetBrains Mono" charset="0"/>
+                      </a:endParaRPr>
+                    </a:p>
+                  </a:txBody>
+                  <a:tcPr marL="152400" marR="152400" marT="101600" marB="101600" anchor="t">
+                    <a:lnL w="12700" cap="flat" cmpd="sng" algn="ctr">
+                      <a:solidFill>
+                        <a:srgbClr val="BCB9B0"/>
+                      </a:solidFill>
+                      <a:prstDash val="solid"/>
+                      <a:round/>
+                      <a:headEnd type="none" w="med" len="med"/>
+                      <a:tailEnd type="none" w="med" len="med"/>
+                    </a:lnL>
+                    <a:lnR w="12700" cap="flat" cmpd="sng" algn="ctr">
+                      <a:solidFill>
+                        <a:srgbClr val="BCB9B0"/>
+                      </a:solidFill>
+                      <a:prstDash val="solid"/>
+                      <a:round/>
+                      <a:headEnd type="none" w="med" len="med"/>
+                      <a:tailEnd type="none" w="med" len="med"/>
+                    </a:lnR>
+                    <a:lnT w="12700" cap="flat" cmpd="sng" algn="ctr">
+                      <a:solidFill>
+                        <a:srgbClr val="CBCAC6"/>
+                      </a:solidFill>
+                      <a:prstDash val="solid"/>
+                      <a:round/>
+                      <a:headEnd type="none" w="med" len="med"/>
+                      <a:tailEnd type="none" w="med" len="med"/>
+                    </a:lnT>
+                    <a:lnB w="12700" cap="flat" cmpd="sng" algn="ctr">
+                      <a:solidFill>
+                        <a:srgbClr val="BCB9B0"/>
+                      </a:solidFill>
+                      <a:prstDash val="solid"/>
+                      <a:round/>
+                      <a:headEnd type="none" w="med" len="med"/>
+                      <a:tailEnd type="none" w="med" len="med"/>
+                    </a:lnB>
+                  </a:tcPr>
+                </a:tc>
+              </a:tr>
+              <a:tr h="501574">
+                <a:tc>
+                  <a:txBody>
+                    <a:bodyPr/>
+                    <a:lstStyle/>
+                    <a:p>
+                      <a:pPr indent="0" marL="0">
+                        <a:lnSpc>
+                          <a:spcPts val="1960"/>
+                        </a:lnSpc>
+                        <a:buNone/>
+                      </a:pPr>
+                      <a:r>
+                        <a:rPr lang="en-US" sz="1400" dirty="0">
+                          <a:solidFill>
+                            <a:srgbClr val="1B1E26"/>
+                          </a:solidFill>
+                          <a:latin typeface="JetBrains Mono" pitchFamily="49" charset="0"/>
+                          <a:ea typeface="JetBrains Mono" pitchFamily="49" charset="-122"/>
+                          <a:cs typeface="JetBrains Mono" pitchFamily="49" charset="-120"/>
+                        </a:rPr>
+                        <a:t>Feat(Auth): add SSO login</a:t>
+                      </a:r>
+                      <a:endParaRPr lang="en-US" sz="1400" dirty="0">
+                        <a:latin typeface="JetBrains Mono" charset="0"/>
+                        <a:ea typeface="JetBrains Mono" charset="0"/>
+                        <a:cs typeface="JetBrains Mono" charset="0"/>
+                      </a:endParaRPr>
+                    </a:p>
+                  </a:txBody>
+                  <a:tcPr marL="152400" marR="152400" marT="101600" marB="101600" anchor="t">
+                    <a:lnL w="12700" cap="flat" cmpd="sng" algn="ctr">
+                      <a:solidFill>
+                        <a:srgbClr val="BCB9B0"/>
+                      </a:solidFill>
+                      <a:prstDash val="solid"/>
+                      <a:round/>
+                      <a:headEnd type="none" w="med" len="med"/>
+                      <a:tailEnd type="none" w="med" len="med"/>
+                    </a:lnL>
+                    <a:lnR w="12700" cap="flat" cmpd="sng" algn="ctr">
+                      <a:solidFill>
+                        <a:srgbClr val="CBCAC6"/>
+                      </a:solidFill>
+                      <a:prstDash val="solid"/>
+                      <a:round/>
+                      <a:headEnd type="none" w="med" len="med"/>
+                      <a:tailEnd type="none" w="med" len="med"/>
+                    </a:lnR>
+                    <a:lnT w="12700" cap="flat" cmpd="sng" algn="ctr">
+                      <a:solidFill>
+                        <a:srgbClr val="BCB9B0"/>
+                      </a:solidFill>
+                      <a:prstDash val="solid"/>
+                      <a:round/>
+                      <a:headEnd type="none" w="med" len="med"/>
+                      <a:tailEnd type="none" w="med" len="med"/>
+                    </a:lnT>
+                    <a:lnB w="12700" cap="flat" cmpd="sng" algn="ctr">
+                      <a:solidFill>
+                        <a:srgbClr val="CBCAC6"/>
+                      </a:solidFill>
+                      <a:prstDash val="solid"/>
+                      <a:round/>
+                      <a:headEnd type="none" w="med" len="med"/>
+                      <a:tailEnd type="none" w="med" len="med"/>
+                    </a:lnB>
+                    <a:solidFill>
+                      <a:srgbClr val="FFFDF8"/>
+                    </a:solidFill>
+                  </a:tcPr>
+                </a:tc>
+                <a:tc>
+                  <a:txBody>
+                    <a:bodyPr/>
+                    <a:lstStyle/>
+                    <a:p>
+                      <a:pPr indent="0" marL="0">
+                        <a:lnSpc>
+                          <a:spcPts val="1960"/>
+                        </a:lnSpc>
+                        <a:buNone/>
+                      </a:pPr>
+                      <a:r>
+                        <a:rPr lang="en-US" sz="1400" dirty="0">
+                          <a:solidFill>
+                            <a:srgbClr val="8A6400"/>
+                          </a:solidFill>
+                          <a:latin typeface="JetBrains Mono" pitchFamily="49" charset="0"/>
+                          <a:ea typeface="JetBrains Mono" pitchFamily="49" charset="-122"/>
+                          <a:cs typeface="JetBrains Mono" pitchFamily="49" charset="-120"/>
+                        </a:rPr>
+                        <a:t>Lint fails</a:t>
+                      </a:r>
+                      <a:endParaRPr lang="en-US" sz="1400" dirty="0">
+                        <a:latin typeface="JetBrains Mono" charset="0"/>
+                        <a:ea typeface="JetBrains Mono" charset="0"/>
+                        <a:cs typeface="JetBrains Mono" charset="0"/>
+                      </a:endParaRPr>
+                    </a:p>
+                  </a:txBody>
+                  <a:tcPr marL="152400" marR="152400" marT="101600" marB="101600" anchor="t">
+                    <a:lnL w="12700" cap="flat" cmpd="sng" algn="ctr">
+                      <a:solidFill>
+                        <a:srgbClr val="CBCAC6"/>
+                      </a:solidFill>
+                      <a:prstDash val="solid"/>
+                      <a:round/>
+                      <a:headEnd type="none" w="med" len="med"/>
+                      <a:tailEnd type="none" w="med" len="med"/>
+                    </a:lnL>
+                    <a:lnR w="12700" cap="flat" cmpd="sng" algn="ctr">
+                      <a:solidFill>
+                        <a:srgbClr val="CBCAC6"/>
+                      </a:solidFill>
+                      <a:prstDash val="solid"/>
+                      <a:round/>
+                      <a:headEnd type="none" w="med" len="med"/>
+                      <a:tailEnd type="none" w="med" len="med"/>
+                    </a:lnR>
+                    <a:lnT w="12700" cap="flat" cmpd="sng" algn="ctr">
+                      <a:solidFill>
+                        <a:srgbClr val="BCB9B0"/>
+                      </a:solidFill>
+                      <a:prstDash val="solid"/>
+                      <a:round/>
+                      <a:headEnd type="none" w="med" len="med"/>
+                      <a:tailEnd type="none" w="med" len="med"/>
+                    </a:lnT>
+                    <a:lnB w="12700" cap="flat" cmpd="sng" algn="ctr">
+                      <a:solidFill>
+                        <a:srgbClr val="CBCAC6"/>
+                      </a:solidFill>
+                      <a:prstDash val="solid"/>
+                      <a:round/>
+                      <a:headEnd type="none" w="med" len="med"/>
+                      <a:tailEnd type="none" w="med" len="med"/>
+                    </a:lnB>
+                    <a:solidFill>
+                      <a:srgbClr val="FFFDF8"/>
+                    </a:solidFill>
+                  </a:tcPr>
+                </a:tc>
+                <a:tc>
+                  <a:txBody>
+                    <a:bodyPr/>
+                    <a:lstStyle/>
+                    <a:p>
+                      <a:pPr indent="0" marL="0">
+                        <a:lnSpc>
+                          <a:spcPts val="1960"/>
+                        </a:lnSpc>
+                        <a:buNone/>
+                      </a:pPr>
+                      <a:r>
+                        <a:rPr lang="en-US" sz="1400" dirty="0">
+                          <a:solidFill>
+                            <a:srgbClr val="1B1E26"/>
+                          </a:solidFill>
+                          <a:latin typeface="JetBrains Mono" pitchFamily="49" charset="0"/>
+                          <a:ea typeface="JetBrains Mono" pitchFamily="49" charset="-122"/>
+                          <a:cs typeface="JetBrains Mono" pitchFamily="49" charset="-120"/>
+                        </a:rPr>
+                        <a:t>Uppercase type, scope</a:t>
+                      </a:r>
+                      <a:endParaRPr lang="en-US" sz="1400" dirty="0">
+                        <a:latin typeface="JetBrains Mono" charset="0"/>
+                        <a:ea typeface="JetBrains Mono" charset="0"/>
+                        <a:cs typeface="JetBrains Mono" charset="0"/>
+                      </a:endParaRPr>
+                    </a:p>
+                  </a:txBody>
+                  <a:tcPr marL="152400" marR="152400" marT="101600" marB="101600" anchor="t">
+                    <a:lnL w="12700" cap="flat" cmpd="sng" algn="ctr">
+                      <a:solidFill>
+                        <a:srgbClr val="CBCAC6"/>
+                      </a:solidFill>
+                      <a:prstDash val="solid"/>
+                      <a:round/>
+                      <a:headEnd type="none" w="med" len="med"/>
+                      <a:tailEnd type="none" w="med" len="med"/>
+                    </a:lnL>
+                    <a:lnR w="12700" cap="flat" cmpd="sng" algn="ctr">
+                      <a:solidFill>
+                        <a:srgbClr val="CBCAC6"/>
+                      </a:solidFill>
+                      <a:prstDash val="solid"/>
+                      <a:round/>
+                      <a:headEnd type="none" w="med" len="med"/>
+                      <a:tailEnd type="none" w="med" len="med"/>
+                    </a:lnR>
+                    <a:lnT w="12700" cap="flat" cmpd="sng" algn="ctr">
+                      <a:solidFill>
+                        <a:srgbClr val="BCB9B0"/>
+                      </a:solidFill>
+                      <a:prstDash val="solid"/>
+                      <a:round/>
+                      <a:headEnd type="none" w="med" len="med"/>
+                      <a:tailEnd type="none" w="med" len="med"/>
+                    </a:lnT>
+                    <a:lnB w="12700" cap="flat" cmpd="sng" algn="ctr">
+                      <a:solidFill>
+                        <a:srgbClr val="CBCAC6"/>
+                      </a:solidFill>
+                      <a:prstDash val="solid"/>
+                      <a:round/>
+                      <a:headEnd type="none" w="med" len="med"/>
+                      <a:tailEnd type="none" w="med" len="med"/>
+                    </a:lnB>
+                    <a:solidFill>
+                      <a:srgbClr val="FFFDF8"/>
+                    </a:solidFill>
+                  </a:tcPr>
+                </a:tc>
+              </a:tr>
+              <a:tr h="501574">
+                <a:tc>
+                  <a:txBody>
+                    <a:bodyPr/>
+                    <a:lstStyle/>
+                    <a:p>
+                      <a:pPr indent="0" marL="0">
+                        <a:lnSpc>
+                          <a:spcPts val="1960"/>
+                        </a:lnSpc>
+                        <a:buNone/>
+                      </a:pPr>
+                      <a:r>
+                        <a:rPr lang="en-US" sz="1400" dirty="0">
+                          <a:solidFill>
+                            <a:srgbClr val="1B1E26"/>
+                          </a:solidFill>
+                          <a:latin typeface="JetBrains Mono" pitchFamily="49" charset="0"/>
+                          <a:ea typeface="JetBrains Mono" pitchFamily="49" charset="-122"/>
+                          <a:cs typeface="JetBrains Mono" pitchFamily="49" charset="-120"/>
+                        </a:rPr>
+                        <a:t>feat(user profile): add avatar</a:t>
+                      </a:r>
+                      <a:endParaRPr lang="en-US" sz="1400" dirty="0">
+                        <a:latin typeface="JetBrains Mono" charset="0"/>
+                        <a:ea typeface="JetBrains Mono" charset="0"/>
+                        <a:cs typeface="JetBrains Mono" charset="0"/>
+                      </a:endParaRPr>
+                    </a:p>
+                  </a:txBody>
+                  <a:tcPr marL="152400" marR="152400" marT="101600" marB="101600" anchor="t">
+                    <a:lnL w="12700" cap="flat" cmpd="sng" algn="ctr">
+                      <a:solidFill>
+                        <a:srgbClr val="BCB9B0"/>
+                      </a:solidFill>
+                      <a:prstDash val="solid"/>
+                      <a:round/>
+                      <a:headEnd type="none" w="med" len="med"/>
+                      <a:tailEnd type="none" w="med" len="med"/>
+                    </a:lnL>
+                    <a:lnR w="12700" cap="flat" cmpd="sng" algn="ctr">
+                      <a:solidFill>
+                        <a:srgbClr val="BCB9B0"/>
+                      </a:solidFill>
+                      <a:prstDash val="solid"/>
+                      <a:round/>
+                      <a:headEnd type="none" w="med" len="med"/>
+                      <a:tailEnd type="none" w="med" len="med"/>
+                    </a:lnR>
+                    <a:lnT w="12700" cap="flat" cmpd="sng" algn="ctr">
+                      <a:solidFill>
+                        <a:srgbClr val="CBCAC6"/>
+                      </a:solidFill>
+                      <a:prstDash val="solid"/>
+                      <a:round/>
+                      <a:headEnd type="none" w="med" len="med"/>
+                      <a:tailEnd type="none" w="med" len="med"/>
+                    </a:lnT>
+                    <a:lnB w="12700" cap="flat" cmpd="sng" algn="ctr">
+                      <a:solidFill>
+                        <a:srgbClr val="BCB9B0"/>
+                      </a:solidFill>
+                      <a:prstDash val="solid"/>
+                      <a:round/>
+                      <a:headEnd type="none" w="med" len="med"/>
+                      <a:tailEnd type="none" w="med" len="med"/>
+                    </a:lnB>
+                  </a:tcPr>
+                </a:tc>
+                <a:tc>
+                  <a:txBody>
+                    <a:bodyPr/>
+                    <a:lstStyle/>
+                    <a:p>
+                      <a:pPr indent="0" marL="0">
+                        <a:lnSpc>
+                          <a:spcPts val="1960"/>
+                        </a:lnSpc>
+                        <a:buNone/>
+                      </a:pPr>
+                      <a:r>
+                        <a:rPr lang="en-US" sz="1400" dirty="0">
+                          <a:solidFill>
+                            <a:srgbClr val="8A6400"/>
+                          </a:solidFill>
+                          <a:latin typeface="JetBrains Mono" pitchFamily="49" charset="0"/>
+                          <a:ea typeface="JetBrains Mono" pitchFamily="49" charset="-122"/>
+                          <a:cs typeface="JetBrains Mono" pitchFamily="49" charset="-120"/>
+                        </a:rPr>
+                        <a:t>Lint fails</a:t>
+                      </a:r>
+                      <a:endParaRPr lang="en-US" sz="1400" dirty="0">
+                        <a:latin typeface="JetBrains Mono" charset="0"/>
+                        <a:ea typeface="JetBrains Mono" charset="0"/>
+                        <a:cs typeface="JetBrains Mono" charset="0"/>
+                      </a:endParaRPr>
+                    </a:p>
+                  </a:txBody>
+                  <a:tcPr marL="152400" marR="152400" marT="101600" marB="101600" anchor="t">
+                    <a:lnL w="12700" cap="flat" cmpd="sng" algn="ctr">
+                      <a:solidFill>
+                        <a:srgbClr val="BCB9B0"/>
+                      </a:solidFill>
+                      <a:prstDash val="solid"/>
+                      <a:round/>
+                      <a:headEnd type="none" w="med" len="med"/>
+                      <a:tailEnd type="none" w="med" len="med"/>
+                    </a:lnL>
+                    <a:lnR w="12700" cap="flat" cmpd="sng" algn="ctr">
+                      <a:solidFill>
+                        <a:srgbClr val="BCB9B0"/>
+                      </a:solidFill>
+                      <a:prstDash val="solid"/>
+                      <a:round/>
+                      <a:headEnd type="none" w="med" len="med"/>
+                      <a:tailEnd type="none" w="med" len="med"/>
+                    </a:lnR>
+                    <a:lnT w="12700" cap="flat" cmpd="sng" algn="ctr">
+                      <a:solidFill>
+                        <a:srgbClr val="CBCAC6"/>
+                      </a:solidFill>
+                      <a:prstDash val="solid"/>
+                      <a:round/>
+                      <a:headEnd type="none" w="med" len="med"/>
+                      <a:tailEnd type="none" w="med" len="med"/>
+                    </a:lnT>
+                    <a:lnB w="12700" cap="flat" cmpd="sng" algn="ctr">
+                      <a:solidFill>
+                        <a:srgbClr val="BCB9B0"/>
+                      </a:solidFill>
+                      <a:prstDash val="solid"/>
+                      <a:round/>
+                      <a:headEnd type="none" w="med" len="med"/>
+                      <a:tailEnd type="none" w="med" len="med"/>
+                    </a:lnB>
+                  </a:tcPr>
+                </a:tc>
+                <a:tc>
+                  <a:txBody>
+                    <a:bodyPr/>
+                    <a:lstStyle/>
+                    <a:p>
+                      <a:pPr indent="0" marL="0">
+                        <a:lnSpc>
+                          <a:spcPts val="1960"/>
+                        </a:lnSpc>
+                        <a:buNone/>
+                      </a:pPr>
+                      <a:r>
+                        <a:rPr lang="en-US" sz="1400" dirty="0">
+                          <a:solidFill>
+                            <a:srgbClr val="1B1E26"/>
+                          </a:solidFill>
+                          <a:latin typeface="JetBrains Mono" pitchFamily="49" charset="0"/>
+                          <a:ea typeface="JetBrains Mono" pitchFamily="49" charset="-122"/>
+                          <a:cs typeface="JetBrains Mono" pitchFamily="49" charset="-120"/>
+                        </a:rPr>
+                        <a:t>Use user-profile</a:t>
+                      </a:r>
+                      <a:endParaRPr lang="en-US" sz="1400" dirty="0">
+                        <a:latin typeface="JetBrains Mono" charset="0"/>
+                        <a:ea typeface="JetBrains Mono" charset="0"/>
+                        <a:cs typeface="JetBrains Mono" charset="0"/>
+                      </a:endParaRPr>
+                    </a:p>
+                  </a:txBody>
+                  <a:tcPr marL="152400" marR="152400" marT="101600" marB="101600" anchor="t">
+                    <a:lnL w="12700" cap="flat" cmpd="sng" algn="ctr">
+                      <a:solidFill>
+                        <a:srgbClr val="BCB9B0"/>
+                      </a:solidFill>
+                      <a:prstDash val="solid"/>
+                      <a:round/>
+                      <a:headEnd type="none" w="med" len="med"/>
+                      <a:tailEnd type="none" w="med" len="med"/>
+                    </a:lnL>
+                    <a:lnR w="12700" cap="flat" cmpd="sng" algn="ctr">
+                      <a:solidFill>
+                        <a:srgbClr val="BCB9B0"/>
+                      </a:solidFill>
+                      <a:prstDash val="solid"/>
+                      <a:round/>
+                      <a:headEnd type="none" w="med" len="med"/>
+                      <a:tailEnd type="none" w="med" len="med"/>
+                    </a:lnR>
+                    <a:lnT w="12700" cap="flat" cmpd="sng" algn="ctr">
+                      <a:solidFill>
+                        <a:srgbClr val="CBCAC6"/>
+                      </a:solidFill>
+                      <a:prstDash val="solid"/>
+                      <a:round/>
+                      <a:headEnd type="none" w="med" len="med"/>
+                      <a:tailEnd type="none" w="med" len="med"/>
+                    </a:lnT>
+                    <a:lnB w="12700" cap="flat" cmpd="sng" algn="ctr">
+                      <a:solidFill>
+                        <a:srgbClr val="BCB9B0"/>
+                      </a:solidFill>
+                      <a:prstDash val="solid"/>
+                      <a:round/>
+                      <a:headEnd type="none" w="med" len="med"/>
+                      <a:tailEnd type="none" w="med" len="med"/>
+                    </a:lnB>
+                  </a:tcPr>
+                </a:tc>
+              </a:tr>
+              <a:tr h="501574">
+                <a:tc>
+                  <a:txBody>
+                    <a:bodyPr/>
+                    <a:lstStyle/>
+                    <a:p>
+                      <a:pPr indent="0" marL="0">
+                        <a:lnSpc>
+                          <a:spcPts val="1960"/>
+                        </a:lnSpc>
+                        <a:buNone/>
+                      </a:pPr>
+                      <a:r>
+                        <a:rPr lang="en-US" sz="1400" dirty="0">
+                          <a:solidFill>
+                            <a:srgbClr val="1B1E26"/>
+                          </a:solidFill>
+                          <a:latin typeface="JetBrains Mono" pitchFamily="49" charset="0"/>
+                          <a:ea typeface="JetBrains Mono" pitchFamily="49" charset="-122"/>
+                          <a:cs typeface="JetBrains Mono" pitchFamily="49" charset="-120"/>
+                        </a:rPr>
+                        <a:t>feat(auth):add SSO login</a:t>
+                      </a:r>
+                      <a:endParaRPr lang="en-US" sz="1400" dirty="0">
+                        <a:latin typeface="JetBrains Mono" charset="0"/>
+                        <a:ea typeface="JetBrains Mono" charset="0"/>
+                        <a:cs typeface="JetBrains Mono" charset="0"/>
+                      </a:endParaRPr>
+                    </a:p>
+                  </a:txBody>
+                  <a:tcPr marL="152400" marR="152400" marT="101600" marB="101600" anchor="t">
+                    <a:lnL w="12700" cap="flat" cmpd="sng" algn="ctr">
+                      <a:solidFill>
+                        <a:srgbClr val="BCB9B0"/>
+                      </a:solidFill>
+                      <a:prstDash val="solid"/>
+                      <a:round/>
+                      <a:headEnd type="none" w="med" len="med"/>
+                      <a:tailEnd type="none" w="med" len="med"/>
+                    </a:lnL>
+                    <a:lnR w="12700" cap="flat" cmpd="sng" algn="ctr">
+                      <a:solidFill>
+                        <a:srgbClr val="CBCAC6"/>
+                      </a:solidFill>
+                      <a:prstDash val="solid"/>
+                      <a:round/>
+                      <a:headEnd type="none" w="med" len="med"/>
+                      <a:tailEnd type="none" w="med" len="med"/>
+                    </a:lnR>
+                    <a:lnT w="12700" cap="flat" cmpd="sng" algn="ctr">
+                      <a:solidFill>
+                        <a:srgbClr val="BCB9B0"/>
+                      </a:solidFill>
+                      <a:prstDash val="solid"/>
+                      <a:round/>
+                      <a:headEnd type="none" w="med" len="med"/>
+                      <a:tailEnd type="none" w="med" len="med"/>
+                    </a:lnT>
+                    <a:lnB w="12700" cap="flat" cmpd="sng" algn="ctr">
+                      <a:solidFill>
+                        <a:srgbClr val="CBCAC6"/>
+                      </a:solidFill>
+                      <a:prstDash val="solid"/>
+                      <a:round/>
+                      <a:headEnd type="none" w="med" len="med"/>
+                      <a:tailEnd type="none" w="med" len="med"/>
+                    </a:lnB>
+                    <a:solidFill>
+                      <a:srgbClr val="FFFDF8"/>
+                    </a:solidFill>
+                  </a:tcPr>
+                </a:tc>
+                <a:tc>
+                  <a:txBody>
+                    <a:bodyPr/>
+                    <a:lstStyle/>
+                    <a:p>
+                      <a:pPr indent="0" marL="0">
+                        <a:lnSpc>
+                          <a:spcPts val="1960"/>
+                        </a:lnSpc>
+                        <a:buNone/>
+                      </a:pPr>
+                      <a:r>
+                        <a:rPr lang="en-US" sz="1400" dirty="0">
+                          <a:solidFill>
+                            <a:srgbClr val="B8441B"/>
+                          </a:solidFill>
+                          <a:latin typeface="JetBrains Mono" pitchFamily="49" charset="0"/>
+                          <a:ea typeface="JetBrains Mono" pitchFamily="49" charset="-122"/>
+                          <a:cs typeface="JetBrains Mono" pitchFamily="49" charset="-120"/>
+                        </a:rPr>
+                        <a:t>Invalid</a:t>
+                      </a:r>
+                      <a:endParaRPr lang="en-US" sz="1400" dirty="0">
+                        <a:latin typeface="JetBrains Mono" charset="0"/>
+                        <a:ea typeface="JetBrains Mono" charset="0"/>
+                        <a:cs typeface="JetBrains Mono" charset="0"/>
+                      </a:endParaRPr>
+                    </a:p>
+                  </a:txBody>
+                  <a:tcPr marL="152400" marR="152400" marT="101600" marB="101600" anchor="t">
+                    <a:lnL w="12700" cap="flat" cmpd="sng" algn="ctr">
+                      <a:solidFill>
+                        <a:srgbClr val="CBCAC6"/>
+                      </a:solidFill>
+                      <a:prstDash val="solid"/>
+                      <a:round/>
+                      <a:headEnd type="none" w="med" len="med"/>
+                      <a:tailEnd type="none" w="med" len="med"/>
+                    </a:lnL>
+                    <a:lnR w="12700" cap="flat" cmpd="sng" algn="ctr">
+                      <a:solidFill>
+                        <a:srgbClr val="CBCAC6"/>
+                      </a:solidFill>
+                      <a:prstDash val="solid"/>
+                      <a:round/>
+                      <a:headEnd type="none" w="med" len="med"/>
+                      <a:tailEnd type="none" w="med" len="med"/>
+                    </a:lnR>
+                    <a:lnT w="12700" cap="flat" cmpd="sng" algn="ctr">
+                      <a:solidFill>
+                        <a:srgbClr val="BCB9B0"/>
+                      </a:solidFill>
+                      <a:prstDash val="solid"/>
+                      <a:round/>
+                      <a:headEnd type="none" w="med" len="med"/>
+                      <a:tailEnd type="none" w="med" len="med"/>
+                    </a:lnT>
+                    <a:lnB w="12700" cap="flat" cmpd="sng" algn="ctr">
+                      <a:solidFill>
+                        <a:srgbClr val="CBCAC6"/>
+                      </a:solidFill>
+                      <a:prstDash val="solid"/>
+                      <a:round/>
+                      <a:headEnd type="none" w="med" len="med"/>
+                      <a:tailEnd type="none" w="med" len="med"/>
+                    </a:lnB>
+                    <a:solidFill>
+                      <a:srgbClr val="FFFDF8"/>
+                    </a:solidFill>
+                  </a:tcPr>
+                </a:tc>
+                <a:tc>
+                  <a:txBody>
+                    <a:bodyPr/>
+                    <a:lstStyle/>
+                    <a:p>
+                      <a:pPr indent="0" marL="0">
+                        <a:lnSpc>
+                          <a:spcPts val="1960"/>
+                        </a:lnSpc>
+                        <a:buNone/>
+                      </a:pPr>
+                      <a:r>
+                        <a:rPr lang="en-US" sz="1400" dirty="0">
+                          <a:solidFill>
+                            <a:srgbClr val="1B1E26"/>
+                          </a:solidFill>
+                          <a:latin typeface="JetBrains Mono" pitchFamily="49" charset="0"/>
+                          <a:ea typeface="JetBrains Mono" pitchFamily="49" charset="-122"/>
+                          <a:cs typeface="JetBrains Mono" pitchFamily="49" charset="-120"/>
+                        </a:rPr>
+                        <a:t>No space after colon</a:t>
+                      </a:r>
+                      <a:endParaRPr lang="en-US" sz="1400" dirty="0">
+                        <a:latin typeface="JetBrains Mono" charset="0"/>
+                        <a:ea typeface="JetBrains Mono" charset="0"/>
+                        <a:cs typeface="JetBrains Mono" charset="0"/>
+                      </a:endParaRPr>
+                    </a:p>
+                  </a:txBody>
+                  <a:tcPr marL="152400" marR="152400" marT="101600" marB="101600" anchor="t">
+                    <a:lnL w="12700" cap="flat" cmpd="sng" algn="ctr">
+                      <a:solidFill>
+                        <a:srgbClr val="CBCAC6"/>
+                      </a:solidFill>
+                      <a:prstDash val="solid"/>
+                      <a:round/>
+                      <a:headEnd type="none" w="med" len="med"/>
+                      <a:tailEnd type="none" w="med" len="med"/>
+                    </a:lnL>
+                    <a:lnR w="12700" cap="flat" cmpd="sng" algn="ctr">
+                      <a:solidFill>
+                        <a:srgbClr val="CBCAC6"/>
+                      </a:solidFill>
+                      <a:prstDash val="solid"/>
+                      <a:round/>
+                      <a:headEnd type="none" w="med" len="med"/>
+                      <a:tailEnd type="none" w="med" len="med"/>
+                    </a:lnR>
+                    <a:lnT w="12700" cap="flat" cmpd="sng" algn="ctr">
+                      <a:solidFill>
+                        <a:srgbClr val="BCB9B0"/>
+                      </a:solidFill>
+                      <a:prstDash val="solid"/>
+                      <a:round/>
+                      <a:headEnd type="none" w="med" len="med"/>
+                      <a:tailEnd type="none" w="med" len="med"/>
+                    </a:lnT>
+                    <a:lnB w="12700" cap="flat" cmpd="sng" algn="ctr">
+                      <a:solidFill>
+                        <a:srgbClr val="CBCAC6"/>
+                      </a:solidFill>
+                      <a:prstDash val="solid"/>
+                      <a:round/>
+                      <a:headEnd type="none" w="med" len="med"/>
+                      <a:tailEnd type="none" w="med" len="med"/>
+                    </a:lnB>
+                    <a:solidFill>
+                      <a:srgbClr val="FFFDF8"/>
+                    </a:solidFill>
+                  </a:tcPr>
+                </a:tc>
+              </a:tr>
+              <a:tr h="501574">
+                <a:tc>
+                  <a:txBody>
+                    <a:bodyPr/>
+                    <a:lstStyle/>
+                    <a:p>
+                      <a:pPr indent="0" marL="0">
+                        <a:lnSpc>
+                          <a:spcPts val="1960"/>
+                        </a:lnSpc>
+                        <a:buNone/>
+                      </a:pPr>
+                      <a:r>
+                        <a:rPr lang="en-US" sz="1400" dirty="0">
+                          <a:solidFill>
+                            <a:srgbClr val="1B1E26"/>
+                          </a:solidFill>
+                          <a:latin typeface="JetBrains Mono" pitchFamily="49" charset="0"/>
+                          <a:ea typeface="JetBrains Mono" pitchFamily="49" charset="-122"/>
+                          <a:cs typeface="JetBrains Mono" pitchFamily="49" charset="-120"/>
+                        </a:rPr>
+                        <a:t>feat (auth): add SSO login</a:t>
+                      </a:r>
+                      <a:endParaRPr lang="en-US" sz="1400" dirty="0">
+                        <a:latin typeface="JetBrains Mono" charset="0"/>
+                        <a:ea typeface="JetBrains Mono" charset="0"/>
+                        <a:cs typeface="JetBrains Mono" charset="0"/>
+                      </a:endParaRPr>
+                    </a:p>
+                  </a:txBody>
+                  <a:tcPr marL="152400" marR="152400" marT="101600" marB="101600" anchor="t">
+                    <a:lnL w="12700" cap="flat" cmpd="sng" algn="ctr">
+                      <a:solidFill>
+                        <a:srgbClr val="BCB9B0"/>
+                      </a:solidFill>
+                      <a:prstDash val="solid"/>
+                      <a:round/>
+                      <a:headEnd type="none" w="med" len="med"/>
+                      <a:tailEnd type="none" w="med" len="med"/>
+                    </a:lnL>
+                    <a:lnR w="12700" cap="flat" cmpd="sng" algn="ctr">
+                      <a:solidFill>
+                        <a:srgbClr val="BCB9B0"/>
+                      </a:solidFill>
+                      <a:prstDash val="solid"/>
+                      <a:round/>
+                      <a:headEnd type="none" w="med" len="med"/>
+                      <a:tailEnd type="none" w="med" len="med"/>
+                    </a:lnR>
+                    <a:lnT w="12700" cap="flat" cmpd="sng" algn="ctr">
+                      <a:solidFill>
+                        <a:srgbClr val="CBCAC6"/>
+                      </a:solidFill>
+                      <a:prstDash val="solid"/>
+                      <a:round/>
+                      <a:headEnd type="none" w="med" len="med"/>
+                      <a:tailEnd type="none" w="med" len="med"/>
+                    </a:lnT>
+                    <a:lnB w="12700" cap="flat" cmpd="sng" algn="ctr">
+                      <a:solidFill>
+                        <a:srgbClr val="BCB9B0"/>
+                      </a:solidFill>
+                      <a:prstDash val="solid"/>
+                      <a:round/>
+                      <a:headEnd type="none" w="med" len="med"/>
+                      <a:tailEnd type="none" w="med" len="med"/>
+                    </a:lnB>
+                  </a:tcPr>
+                </a:tc>
+                <a:tc>
+                  <a:txBody>
+                    <a:bodyPr/>
+                    <a:lstStyle/>
+                    <a:p>
+                      <a:pPr indent="0" marL="0">
+                        <a:lnSpc>
+                          <a:spcPts val="1960"/>
+                        </a:lnSpc>
+                        <a:buNone/>
+                      </a:pPr>
+                      <a:r>
+                        <a:rPr lang="en-US" sz="1400" dirty="0">
+                          <a:solidFill>
+                            <a:srgbClr val="B8441B"/>
+                          </a:solidFill>
+                          <a:latin typeface="JetBrains Mono" pitchFamily="49" charset="0"/>
+                          <a:ea typeface="JetBrains Mono" pitchFamily="49" charset="-122"/>
+                          <a:cs typeface="JetBrains Mono" pitchFamily="49" charset="-120"/>
+                        </a:rPr>
+                        <a:t>Invalid</a:t>
+                      </a:r>
+                      <a:endParaRPr lang="en-US" sz="1400" dirty="0">
+                        <a:latin typeface="JetBrains Mono" charset="0"/>
+                        <a:ea typeface="JetBrains Mono" charset="0"/>
+                        <a:cs typeface="JetBrains Mono" charset="0"/>
+                      </a:endParaRPr>
+                    </a:p>
+                  </a:txBody>
+                  <a:tcPr marL="152400" marR="152400" marT="101600" marB="101600" anchor="t">
+                    <a:lnL w="12700" cap="flat" cmpd="sng" algn="ctr">
+                      <a:solidFill>
+                        <a:srgbClr val="BCB9B0"/>
+                      </a:solidFill>
+                      <a:prstDash val="solid"/>
+                      <a:round/>
+                      <a:headEnd type="none" w="med" len="med"/>
+                      <a:tailEnd type="none" w="med" len="med"/>
+                    </a:lnL>
+                    <a:lnR w="12700" cap="flat" cmpd="sng" algn="ctr">
+                      <a:solidFill>
+                        <a:srgbClr val="BCB9B0"/>
+                      </a:solidFill>
+                      <a:prstDash val="solid"/>
+                      <a:round/>
+                      <a:headEnd type="none" w="med" len="med"/>
+                      <a:tailEnd type="none" w="med" len="med"/>
+                    </a:lnR>
+                    <a:lnT w="12700" cap="flat" cmpd="sng" algn="ctr">
+                      <a:solidFill>
+                        <a:srgbClr val="CBCAC6"/>
+                      </a:solidFill>
+                      <a:prstDash val="solid"/>
+                      <a:round/>
+                      <a:headEnd type="none" w="med" len="med"/>
+                      <a:tailEnd type="none" w="med" len="med"/>
+                    </a:lnT>
+                    <a:lnB w="12700" cap="flat" cmpd="sng" algn="ctr">
+                      <a:solidFill>
+                        <a:srgbClr val="BCB9B0"/>
+                      </a:solidFill>
+                      <a:prstDash val="solid"/>
+                      <a:round/>
+                      <a:headEnd type="none" w="med" len="med"/>
+                      <a:tailEnd type="none" w="med" len="med"/>
+                    </a:lnB>
+                  </a:tcPr>
+                </a:tc>
+                <a:tc>
+                  <a:txBody>
+                    <a:bodyPr/>
+                    <a:lstStyle/>
+                    <a:p>
+                      <a:pPr indent="0" marL="0">
+                        <a:lnSpc>
+                          <a:spcPts val="1960"/>
+                        </a:lnSpc>
+                        <a:buNone/>
+                      </a:pPr>
+                      <a:r>
+                        <a:rPr lang="en-US" sz="1400" dirty="0">
+                          <a:solidFill>
+                            <a:srgbClr val="1B1E26"/>
+                          </a:solidFill>
+                          <a:latin typeface="JetBrains Mono" pitchFamily="49" charset="0"/>
+                          <a:ea typeface="JetBrains Mono" pitchFamily="49" charset="-122"/>
+                          <a:cs typeface="JetBrains Mono" pitchFamily="49" charset="-120"/>
+                        </a:rPr>
+                        <a:t>Space before scope</a:t>
+                      </a:r>
+                      <a:endParaRPr lang="en-US" sz="1400" dirty="0">
+                        <a:latin typeface="JetBrains Mono" charset="0"/>
+                        <a:ea typeface="JetBrains Mono" charset="0"/>
+                        <a:cs typeface="JetBrains Mono" charset="0"/>
+                      </a:endParaRPr>
+                    </a:p>
+                  </a:txBody>
+                  <a:tcPr marL="152400" marR="152400" marT="101600" marB="101600" anchor="t">
+                    <a:lnL w="12700" cap="flat" cmpd="sng" algn="ctr">
+                      <a:solidFill>
+                        <a:srgbClr val="BCB9B0"/>
+                      </a:solidFill>
+                      <a:prstDash val="solid"/>
+                      <a:round/>
+                      <a:headEnd type="none" w="med" len="med"/>
+                      <a:tailEnd type="none" w="med" len="med"/>
+                    </a:lnL>
+                    <a:lnR w="12700" cap="flat" cmpd="sng" algn="ctr">
+                      <a:solidFill>
+                        <a:srgbClr val="BCB9B0"/>
+                      </a:solidFill>
+                      <a:prstDash val="solid"/>
+                      <a:round/>
+                      <a:headEnd type="none" w="med" len="med"/>
+                      <a:tailEnd type="none" w="med" len="med"/>
+                    </a:lnR>
+                    <a:lnT w="12700" cap="flat" cmpd="sng" algn="ctr">
+                      <a:solidFill>
+                        <a:srgbClr val="CBCAC6"/>
+                      </a:solidFill>
+                      <a:prstDash val="solid"/>
+                      <a:round/>
+                      <a:headEnd type="none" w="med" len="med"/>
+                      <a:tailEnd type="none" w="med" len="med"/>
+                    </a:lnT>
+                    <a:lnB w="12700" cap="flat" cmpd="sng" algn="ctr">
+                      <a:solidFill>
+                        <a:srgbClr val="BCB9B0"/>
+                      </a:solidFill>
+                      <a:prstDash val="solid"/>
+                      <a:round/>
+                      <a:headEnd type="none" w="med" len="med"/>
+                      <a:tailEnd type="none" w="med" len="med"/>
+                    </a:lnB>
+                  </a:tcPr>
+                </a:tc>
+              </a:tr>
+              <a:tr h="501574">
+                <a:tc>
+                  <a:txBody>
+                    <a:bodyPr/>
+                    <a:lstStyle/>
+                    <a:p>
+                      <a:pPr indent="0" marL="0">
+                        <a:lnSpc>
+                          <a:spcPts val="1960"/>
+                        </a:lnSpc>
+                        <a:buNone/>
+                      </a:pPr>
+                      <a:r>
+                        <a:rPr lang="en-US" sz="1400" dirty="0">
+                          <a:solidFill>
+                            <a:srgbClr val="1B1E26"/>
+                          </a:solidFill>
+                          <a:latin typeface="JetBrains Mono" pitchFamily="49" charset="0"/>
+                          <a:ea typeface="JetBrains Mono" pitchFamily="49" charset="-122"/>
+                          <a:cs typeface="JetBrains Mono" pitchFamily="49" charset="-120"/>
+                        </a:rPr>
+                        <a:t>breaking change: drop v1</a:t>
+                      </a:r>
+                      <a:endParaRPr lang="en-US" sz="1400" dirty="0">
+                        <a:latin typeface="JetBrains Mono" charset="0"/>
+                        <a:ea typeface="JetBrains Mono" charset="0"/>
+                        <a:cs typeface="JetBrains Mono" charset="0"/>
+                      </a:endParaRPr>
+                    </a:p>
+                  </a:txBody>
+                  <a:tcPr marL="152400" marR="152400" marT="101600" marB="101600" anchor="t">
+                    <a:lnL w="12700" cap="flat" cmpd="sng" algn="ctr">
+                      <a:solidFill>
+                        <a:srgbClr val="BCB9B0"/>
+                      </a:solidFill>
+                      <a:prstDash val="solid"/>
+                      <a:round/>
+                      <a:headEnd type="none" w="med" len="med"/>
+                      <a:tailEnd type="none" w="med" len="med"/>
+                    </a:lnL>
+                    <a:lnR w="12700" cap="flat" cmpd="sng" algn="ctr">
+                      <a:solidFill>
+                        <a:srgbClr val="CBCAC6"/>
+                      </a:solidFill>
+                      <a:prstDash val="solid"/>
+                      <a:round/>
+                      <a:headEnd type="none" w="med" len="med"/>
+                      <a:tailEnd type="none" w="med" len="med"/>
+                    </a:lnR>
+                    <a:lnT w="12700" cap="flat" cmpd="sng" algn="ctr">
+                      <a:solidFill>
+                        <a:srgbClr val="BCB9B0"/>
+                      </a:solidFill>
+                      <a:prstDash val="solid"/>
+                      <a:round/>
+                      <a:headEnd type="none" w="med" len="med"/>
+                      <a:tailEnd type="none" w="med" len="med"/>
+                    </a:lnT>
+                    <a:lnB w="12700" cap="flat" cmpd="sng" algn="ctr">
+                      <a:solidFill>
+                        <a:srgbClr val="CBCAC6"/>
+                      </a:solidFill>
+                      <a:prstDash val="solid"/>
+                      <a:round/>
+                      <a:headEnd type="none" w="med" len="med"/>
+                      <a:tailEnd type="none" w="med" len="med"/>
+                    </a:lnB>
+                    <a:solidFill>
+                      <a:srgbClr val="FFFDF8"/>
+                    </a:solidFill>
+                  </a:tcPr>
+                </a:tc>
+                <a:tc>
+                  <a:txBody>
+                    <a:bodyPr/>
+                    <a:lstStyle/>
+                    <a:p>
+                      <a:pPr indent="0" marL="0">
+                        <a:lnSpc>
+                          <a:spcPts val="1960"/>
+                        </a:lnSpc>
+                        <a:buNone/>
+                      </a:pPr>
+                      <a:r>
+                        <a:rPr lang="en-US" sz="1400" dirty="0">
+                          <a:solidFill>
+                            <a:srgbClr val="B8441B"/>
+                          </a:solidFill>
+                          <a:latin typeface="JetBrains Mono" pitchFamily="49" charset="0"/>
+                          <a:ea typeface="JetBrains Mono" pitchFamily="49" charset="-122"/>
+                          <a:cs typeface="JetBrains Mono" pitchFamily="49" charset="-120"/>
+                        </a:rPr>
+                        <a:t>Invalid</a:t>
+                      </a:r>
+                      <a:endParaRPr lang="en-US" sz="1400" dirty="0">
+                        <a:latin typeface="JetBrains Mono" charset="0"/>
+                        <a:ea typeface="JetBrains Mono" charset="0"/>
+                        <a:cs typeface="JetBrains Mono" charset="0"/>
+                      </a:endParaRPr>
+                    </a:p>
+                  </a:txBody>
+                  <a:tcPr marL="152400" marR="152400" marT="101600" marB="101600" anchor="t">
+                    <a:lnL w="12700" cap="flat" cmpd="sng" algn="ctr">
+                      <a:solidFill>
+                        <a:srgbClr val="CBCAC6"/>
+                      </a:solidFill>
+                      <a:prstDash val="solid"/>
+                      <a:round/>
+                      <a:headEnd type="none" w="med" len="med"/>
+                      <a:tailEnd type="none" w="med" len="med"/>
+                    </a:lnL>
+                    <a:lnR w="12700" cap="flat" cmpd="sng" algn="ctr">
+                      <a:solidFill>
+                        <a:srgbClr val="CBCAC6"/>
+                      </a:solidFill>
+                      <a:prstDash val="solid"/>
+                      <a:round/>
+                      <a:headEnd type="none" w="med" len="med"/>
+                      <a:tailEnd type="none" w="med" len="med"/>
+                    </a:lnR>
+                    <a:lnT w="12700" cap="flat" cmpd="sng" algn="ctr">
+                      <a:solidFill>
+                        <a:srgbClr val="BCB9B0"/>
+                      </a:solidFill>
+                      <a:prstDash val="solid"/>
+                      <a:round/>
+                      <a:headEnd type="none" w="med" len="med"/>
+                      <a:tailEnd type="none" w="med" len="med"/>
+                    </a:lnT>
+                    <a:lnB w="12700" cap="flat" cmpd="sng" algn="ctr">
+                      <a:solidFill>
+                        <a:srgbClr val="CBCAC6"/>
+                      </a:solidFill>
+                      <a:prstDash val="solid"/>
+                      <a:round/>
+                      <a:headEnd type="none" w="med" len="med"/>
+                      <a:tailEnd type="none" w="med" len="med"/>
+                    </a:lnB>
+                    <a:solidFill>
+                      <a:srgbClr val="FFFDF8"/>
+                    </a:solidFill>
+                  </a:tcPr>
+                </a:tc>
+                <a:tc>
+                  <a:txBody>
+                    <a:bodyPr/>
+                    <a:lstStyle/>
+                    <a:p>
+                      <a:pPr indent="0" marL="0">
+                        <a:lnSpc>
+                          <a:spcPts val="1960"/>
+                        </a:lnSpc>
+                        <a:buNone/>
+                      </a:pPr>
+                      <a:r>
+                        <a:rPr lang="en-US" sz="1400" dirty="0">
+                          <a:solidFill>
+                            <a:srgbClr val="1B1E26"/>
+                          </a:solidFill>
+                          <a:latin typeface="JetBrains Mono" pitchFamily="49" charset="0"/>
+                          <a:ea typeface="JetBrains Mono" pitchFamily="49" charset="-122"/>
+                          <a:cs typeface="JetBrains Mono" pitchFamily="49" charset="-120"/>
+                        </a:rPr>
+                        <a:t>Footer must be uppercase</a:t>
+                      </a:r>
+                      <a:endParaRPr lang="en-US" sz="1400" dirty="0">
+                        <a:latin typeface="JetBrains Mono" charset="0"/>
+                        <a:ea typeface="JetBrains Mono" charset="0"/>
+                        <a:cs typeface="JetBrains Mono" charset="0"/>
+                      </a:endParaRPr>
+                    </a:p>
+                  </a:txBody>
+                  <a:tcPr marL="152400" marR="152400" marT="101600" marB="101600" anchor="t">
+                    <a:lnL w="12700" cap="flat" cmpd="sng" algn="ctr">
+                      <a:solidFill>
+                        <a:srgbClr val="CBCAC6"/>
+                      </a:solidFill>
+                      <a:prstDash val="solid"/>
+                      <a:round/>
+                      <a:headEnd type="none" w="med" len="med"/>
+                      <a:tailEnd type="none" w="med" len="med"/>
+                    </a:lnL>
+                    <a:lnR w="12700" cap="flat" cmpd="sng" algn="ctr">
+                      <a:solidFill>
+                        <a:srgbClr val="CBCAC6"/>
+                      </a:solidFill>
+                      <a:prstDash val="solid"/>
+                      <a:round/>
+                      <a:headEnd type="none" w="med" len="med"/>
+                      <a:tailEnd type="none" w="med" len="med"/>
+                    </a:lnR>
+                    <a:lnT w="12700" cap="flat" cmpd="sng" algn="ctr">
+                      <a:solidFill>
+                        <a:srgbClr val="BCB9B0"/>
+                      </a:solidFill>
+                      <a:prstDash val="solid"/>
+                      <a:round/>
+                      <a:headEnd type="none" w="med" len="med"/>
+                      <a:tailEnd type="none" w="med" len="med"/>
+                    </a:lnT>
+                    <a:lnB w="12700" cap="flat" cmpd="sng" algn="ctr">
+                      <a:solidFill>
+                        <a:srgbClr val="CBCAC6"/>
+                      </a:solidFill>
+                      <a:prstDash val="solid"/>
+                      <a:round/>
+                      <a:headEnd type="none" w="med" len="med"/>
+                      <a:tailEnd type="none" w="med" len="med"/>
+                    </a:lnB>
+                    <a:solidFill>
+                      <a:srgbClr val="FFFDF8"/>
+                    </a:solidFill>
+                  </a:tcPr>
+                </a:tc>
+              </a:tr>
+            </a:tbl>
+          </a:graphicData>
+        </a:graphic>
+      </p:graphicFrame>
+      <p:sp>
+        <p:nvSpPr>
+          <p:cNvPr id="4" name="Text 1"/>
+          <p:cNvSpPr/>
+          <p:nvPr/>
+        </p:nvSpPr>
+        <p:spPr>
+          <a:xfrm>
+            <a:off x="812800" y="6206257"/>
+            <a:ext cx="10883392" cy="270744"/>
+          </a:xfrm>
+          <a:prstGeom prst="rect">
+            <a:avLst/>
+          </a:prstGeom>
+          <a:noFill/>
+          <a:ln/>
+        </p:spPr>
+        <p:txBody>
+          <a:bodyPr wrap="square" lIns="0" tIns="0" rIns="0" bIns="0" rtlCol="0" anchor="t">
+            <a:normAutofit/>
+          </a:bodyPr>
+          <a:lstStyle/>
+          <a:p>
+            <a:pPr algn="l" indent="0" marL="0">
+              <a:lnSpc>
+                <a:spcPts val="1680"/>
+              </a:lnSpc>
+              <a:buNone/>
+            </a:pPr>
+            <a:r>
+              <a:rPr lang="en-US" sz="1200" dirty="0">
+                <a:solidFill>
+                  <a:srgbClr val="5D6270"/>
+                </a:solidFill>
+                <a:latin typeface="Space Grotesk" pitchFamily="34" charset="0"/>
+                <a:ea typeface="Space Grotesk" pitchFamily="34" charset="-122"/>
+                <a:cs typeface="Space Grotesk" pitchFamily="34" charset="-120"/>
+              </a:rPr>
+              <a:t>Lint fails = valid to the spec, rejected by commitlint. Invalid = tools cannot parse it.</a:t>
+            </a:r>
+            <a:endParaRPr lang="en-US" sz="1200" dirty="0"/>
+          </a:p>
+        </p:txBody>
+      </p:sp>
+    </p:spTree>
+  </p:cSld>
+  <p:clrMapOvr>
+    <a:masterClrMapping/>
+  </p:clrMapOvr>
+</p:sld>
+</file>
+
+<file path=ppt/slides/slide11.xml><?xml version="1.0" encoding="utf-8"?>
+<p:sld xmlns:a="http://schemas.openxmlformats.org/drawingml/2006/main" xmlns:r="http://schemas.openxmlformats.org/officeDocument/2006/relationships" xmlns:p="http://schemas.openxmlformats.org/presentationml/2006/main">
+  <p:cSld name="Slide 11">
+    <p:bg>
+      <p:bgPr>
+        <a:solidFill>
+          <a:srgbClr val="15181F"/>
+        </a:solidFill>
+      </p:bgPr>
+    </p:bg>
+    <p:spTree>
+      <p:nvGrpSpPr>
+        <p:cNvPr id="1" name=""/>
+        <p:cNvGrpSpPr/>
+        <p:nvPr/>
+      </p:nvGrpSpPr>
+      <p:grpSpPr>
+        <a:xfrm>
+          <a:off x="0" y="0"/>
+          <a:ext cx="0" cy="0"/>
+          <a:chOff x="0" y="0"/>
+          <a:chExt cx="0" cy="0"/>
+        </a:xfrm>
+      </p:grpSpPr>
+      <p:sp>
+        <p:nvSpPr>
+          <p:cNvPr id="2" name="Text 0"/>
+          <p:cNvSpPr/>
+          <p:nvPr/>
+        </p:nvSpPr>
+        <p:spPr>
+          <a:xfrm>
+            <a:off x="812800" y="2002594"/>
+            <a:ext cx="10883392" cy="352501"/>
+          </a:xfrm>
+          <a:prstGeom prst="rect">
+            <a:avLst/>
+          </a:prstGeom>
+          <a:noFill/>
+          <a:ln/>
+        </p:spPr>
+        <p:txBody>
+          <a:bodyPr wrap="square" lIns="0" tIns="0" rIns="0" bIns="0" rtlCol="0" anchor="t">
+            <a:normAutofit/>
+          </a:bodyPr>
+          <a:lstStyle/>
+          <a:p>
+            <a:pPr algn="l" indent="0" marL="0">
+              <a:lnSpc>
+                <a:spcPts val="2240"/>
+              </a:lnSpc>
+              <a:buNone/>
+            </a:pPr>
+            <a:r>
+              <a:rPr lang="en-US" sz="1600" dirty="0">
+                <a:solidFill>
+                  <a:srgbClr val="FF8A5C"/>
+                </a:solidFill>
+                <a:latin typeface="JetBrains Mono" pitchFamily="49" charset="0"/>
+                <a:ea typeface="JetBrains Mono" pitchFamily="49" charset="-122"/>
+                <a:cs typeface="JetBrains Mono" pitchFamily="49" charset="-120"/>
+              </a:rPr>
+              <a:t>part 2</a:t>
+            </a:r>
+            <a:endParaRPr lang="en-US" sz="1600" dirty="0"/>
+          </a:p>
+        </p:txBody>
+      </p:sp>
+      <p:sp>
+        <p:nvSpPr>
+          <p:cNvPr id="3" name="Text 1"/>
+          <p:cNvSpPr/>
+          <p:nvPr>
+            <p:ph type="title"/>
+          </p:nvPr>
+        </p:nvSpPr>
+        <p:spPr>
+          <a:xfrm>
+            <a:off x="812800" y="2583693"/>
+            <a:ext cx="10883392" cy="1175544"/>
+          </a:xfrm>
+          <a:prstGeom prst="rect">
+            <a:avLst/>
+          </a:prstGeom>
+          <a:noFill/>
+          <a:ln/>
+        </p:spPr>
+        <p:txBody>
+          <a:bodyPr wrap="square" lIns="0" tIns="0" rIns="0" bIns="0" rtlCol="0" anchor="t">
+            <a:normAutofit/>
+          </a:bodyPr>
+          <a:lstStyle/>
+          <a:p>
+            <a:pPr algn="l" indent="0" marL="0">
+              <a:lnSpc>
+                <a:spcPts val="7875"/>
+              </a:lnSpc>
+              <a:buNone/>
+            </a:pPr>
+            <a:r>
+              <a:rPr lang="en-US" sz="7500" b="1" i="0" spc="-150" kern="0" dirty="0">
+                <a:solidFill>
+                  <a:srgbClr val="F6F3EC"/>
+                </a:solidFill>
+                <a:latin typeface="Space Grotesk" pitchFamily="34" charset="0"/>
+                <a:ea typeface="Space Grotesk" pitchFamily="34" charset="-122"/>
+                <a:cs typeface="Space Grotesk" pitchFamily="34" charset="-120"/>
+              </a:rPr>
+              <a:t>Release Please</a:t>
+            </a:r>
+            <a:endParaRPr lang="en-US" sz="7500" dirty="0"/>
+          </a:p>
+        </p:txBody>
+      </p:sp>
+      <p:sp>
+        <p:nvSpPr>
+          <p:cNvPr id="4" name="Text 2"/>
+          <p:cNvSpPr/>
+          <p:nvPr/>
+        </p:nvSpPr>
+        <p:spPr>
+          <a:xfrm>
+            <a:off x="812800" y="3987837"/>
+            <a:ext cx="8502650" cy="892931"/>
+          </a:xfrm>
+          <a:prstGeom prst="rect">
+            <a:avLst/>
+          </a:prstGeom>
+          <a:noFill/>
+          <a:ln/>
+        </p:spPr>
+        <p:txBody>
+          <a:bodyPr wrap="square" lIns="0" tIns="0" rIns="0" bIns="0" rtlCol="0" anchor="t">
+            <a:normAutofit/>
+          </a:bodyPr>
+          <a:lstStyle/>
+          <a:p>
+            <a:pPr algn="l" indent="0" marL="0">
+              <a:lnSpc>
+                <a:spcPts val="2970"/>
+              </a:lnSpc>
+              <a:buNone/>
+            </a:pPr>
+            <a:r>
+              <a:rPr lang="en-US" sz="2200" dirty="0">
+                <a:solidFill>
+                  <a:srgbClr val="A3A9B6"/>
+                </a:solidFill>
+                <a:latin typeface="Space Grotesk" pitchFamily="34" charset="0"/>
+                <a:ea typeface="Space Grotesk" pitchFamily="34" charset="-122"/>
+                <a:cs typeface="Space Grotesk" pitchFamily="34" charset="-120"/>
+              </a:rPr>
+              <a:t>A GitHub Action from Google that reads your commits and does the release paperwork for you.</a:t>
+            </a:r>
+            <a:endParaRPr lang="en-US" sz="2200" dirty="0"/>
+          </a:p>
+        </p:txBody>
+      </p:sp>
+    </p:spTree>
+  </p:cSld>
+  <p:clrMapOvr>
+    <a:masterClrMapping/>
+  </p:clrMapOvr>
+</p:sld>
+</file>
+
+<file path=ppt/slides/slide12.xml><?xml version="1.0" encoding="utf-8"?>
+<p:sld xmlns:a="http://schemas.openxmlformats.org/drawingml/2006/main" xmlns:r="http://schemas.openxmlformats.org/officeDocument/2006/relationships" xmlns:p="http://schemas.openxmlformats.org/presentationml/2006/main">
+  <p:cSld name="Slide 12">
+    <p:bg>
+      <p:bgPr>
+        <a:solidFill>
           <a:srgbClr val="F6F3EC"/>
         </a:solidFill>
       </p:bgPr>
@@ -2649,7 +5017,7 @@
         </p:nvSpPr>
         <p:spPr>
           <a:xfrm>
-            <a:off x="819150" y="2017030"/>
+            <a:off x="819150" y="2017037"/>
             <a:ext cx="2253948" cy="2453973"/>
           </a:xfrm>
           <a:prstGeom prst="roundRect">
@@ -3470,9 +5838,9 @@
 </p:sld>
 </file>
 
-<file path=ppt/slides/slide11.xml><?xml version="1.0" encoding="utf-8"?>
+<file path=ppt/slides/slide13.xml><?xml version="1.0" encoding="utf-8"?>
 <p:sld xmlns:a="http://schemas.openxmlformats.org/drawingml/2006/main" xmlns:r="http://schemas.openxmlformats.org/officeDocument/2006/relationships" xmlns:p="http://schemas.openxmlformats.org/presentationml/2006/main">
-  <p:cSld name="Slide 11">
+  <p:cSld name="Slide 13">
     <p:bg>
       <p:bgPr>
         <a:solidFill>
@@ -3919,7 +6287,7 @@
         </p:nvSpPr>
         <p:spPr>
           <a:xfrm>
-            <a:off x="6772011" y="2130537"/>
+            <a:off x="6772011" y="2130543"/>
             <a:ext cx="4745405" cy="577472"/>
           </a:xfrm>
           <a:prstGeom prst="rect">
@@ -4139,9 +6507,9 @@
 </p:sld>
 </file>
 
-<file path=ppt/slides/slide12.xml><?xml version="1.0" encoding="utf-8"?>
+<file path=ppt/slides/slide14.xml><?xml version="1.0" encoding="utf-8"?>
 <p:sld xmlns:a="http://schemas.openxmlformats.org/drawingml/2006/main" xmlns:r="http://schemas.openxmlformats.org/officeDocument/2006/relationships" xmlns:p="http://schemas.openxmlformats.org/presentationml/2006/main">
-  <p:cSld name="Slide 12">
+  <p:cSld name="Slide 14">
     <p:bg>
       <p:bgPr>
         <a:solidFill>
@@ -5058,9 +7426,9 @@
 </p:sld>
 </file>
 
-<file path=ppt/slides/slide13.xml><?xml version="1.0" encoding="utf-8"?>
+<file path=ppt/slides/slide15.xml><?xml version="1.0" encoding="utf-8"?>
 <p:sld xmlns:a="http://schemas.openxmlformats.org/drawingml/2006/main" xmlns:r="http://schemas.openxmlformats.org/officeDocument/2006/relationships" xmlns:p="http://schemas.openxmlformats.org/presentationml/2006/main">
-  <p:cSld name="Slide 13">
+  <p:cSld name="Slide 15">
     <p:bg>
       <p:bgPr>
         <a:solidFill>
@@ -5093,7 +7461,7 @@
         <p:spPr>
           <a:xfrm>
             <a:off x="812800" y="812800"/>
-            <a:ext cx="10883392" cy="521985"/>
+            <a:ext cx="10883392" cy="603741"/>
           </a:xfrm>
           <a:prstGeom prst="rect">
             <a:avLst/>
@@ -5109,12 +7477,12 @@
           <a:p>
             <a:pPr algn="l" indent="0" marL="0">
               <a:lnSpc>
-                <a:spcPts val="3403"/>
-              </a:lnSpc>
-              <a:buNone/>
-            </a:pPr>
-            <a:r>
-              <a:rPr lang="en-US" sz="3094" b="1" i="0" spc="-50" kern="0" dirty="0">
+                <a:spcPts val="3960"/>
+              </a:lnSpc>
+              <a:buNone/>
+            </a:pPr>
+            <a:r>
+              <a:rPr lang="en-US" sz="3600" b="1" i="0" spc="-50" kern="0" dirty="0">
                 <a:solidFill>
                   <a:srgbClr val="1B1E26"/>
                 </a:solidFill>
@@ -5122,49 +7490,22 @@
                 <a:ea typeface="Space Grotesk" pitchFamily="34" charset="-122"/>
                 <a:cs typeface="Space Grotesk" pitchFamily="34" charset="-120"/>
               </a:rPr>
-              <a:t>PR titles vs. commits: what lands on main</a:t>
-            </a:r>
-            <a:endParaRPr lang="en-US" sz="3094" dirty="0"/>
-          </a:p>
-        </p:txBody>
-      </p:sp>
-      <p:sp>
-        <p:nvSpPr>
-          <p:cNvPr id="3" name="Shape 1"/>
-          <p:cNvSpPr/>
-          <p:nvPr/>
-        </p:nvSpPr>
-        <p:spPr>
-          <a:xfrm>
-            <a:off x="819150" y="1569734"/>
-            <a:ext cx="5118100" cy="3418719"/>
-          </a:xfrm>
-          <a:prstGeom prst="roundRect">
-            <a:avLst>
-              <a:gd name="adj" fmla="val 2786"/>
-            </a:avLst>
-          </a:prstGeom>
-          <a:solidFill>
-            <a:srgbClr val="FFFDF8"/>
-          </a:solidFill>
-          <a:ln w="12700">
-            <a:solidFill>
-              <a:srgbClr val="E2DDD2"/>
-            </a:solidFill>
-            <a:prstDash val="solid"/>
-          </a:ln>
-        </p:spPr>
-      </p:sp>
-      <p:sp>
-        <p:nvSpPr>
-          <p:cNvPr id="4" name="Text 2"/>
-          <p:cNvSpPr/>
-          <p:nvPr/>
-        </p:nvSpPr>
-        <p:spPr>
-          <a:xfrm>
-            <a:off x="1028095" y="1778682"/>
-            <a:ext cx="4841216" cy="308882"/>
+              <a:t>One repo, two components</a:t>
+            </a:r>
+            <a:endParaRPr lang="en-US" sz="3600" dirty="0"/>
+          </a:p>
+        </p:txBody>
+      </p:sp>
+      <p:sp>
+        <p:nvSpPr>
+          <p:cNvPr id="3" name="Text 1"/>
+          <p:cNvSpPr/>
+          <p:nvPr/>
+        </p:nvSpPr>
+        <p:spPr>
+          <a:xfrm>
+            <a:off x="812800" y="1695946"/>
+            <a:ext cx="4804309" cy="311679"/>
           </a:xfrm>
           <a:prstGeom prst="rect">
             <a:avLst/>
@@ -5180,46 +7521,502 @@
           <a:p>
             <a:pPr algn="l" indent="0" marL="0">
               <a:lnSpc>
-                <a:spcPts val="1973"/>
-              </a:lnSpc>
-              <a:buNone/>
-            </a:pPr>
-            <a:r>
-              <a:rPr lang="en-US" sz="1644" b="1" dirty="0">
-                <a:solidFill>
-                  <a:srgbClr val="1B1E26"/>
+                <a:spcPts val="1960"/>
+              </a:lnSpc>
+              <a:buNone/>
+            </a:pPr>
+            <a:r>
+              <a:rPr lang="en-US" sz="1400" b="1" dirty="0">
+                <a:solidFill>
+                  <a:srgbClr val="5D6270"/>
                 </a:solidFill>
                 <a:latin typeface="Space Grotesk" pitchFamily="34" charset="0"/>
                 <a:ea typeface="Space Grotesk" pitchFamily="34" charset="-122"/>
                 <a:cs typeface="Space Grotesk" pitchFamily="34" charset="-120"/>
               </a:rPr>
-              <a:t>Squash merge </a:t>
-            </a:r>
-            <a:r>
-              <a:rPr lang="en-US" sz="1644" b="1" dirty="0">
-                <a:solidFill>
-                  <a:srgbClr val="B8441B"/>
+              <a:t>The repo</a:t>
+            </a:r>
+            <a:endParaRPr lang="en-US" sz="1400" dirty="0"/>
+          </a:p>
+        </p:txBody>
+      </p:sp>
+      <p:sp>
+        <p:nvSpPr>
+          <p:cNvPr id="4" name="Shape 2"/>
+          <p:cNvSpPr/>
+          <p:nvPr/>
+        </p:nvSpPr>
+        <p:spPr>
+          <a:xfrm>
+            <a:off x="812800" y="2083823"/>
+            <a:ext cx="4664377" cy="2011589"/>
+          </a:xfrm>
+          <a:prstGeom prst="roundRect">
+            <a:avLst>
+              <a:gd name="adj" fmla="val 6313"/>
+            </a:avLst>
+          </a:prstGeom>
+          <a:solidFill>
+            <a:srgbClr val="15181F"/>
+          </a:solidFill>
+          <a:ln/>
+        </p:spPr>
+      </p:sp>
+      <p:sp>
+        <p:nvSpPr>
+          <p:cNvPr id="5" name="Text 3"/>
+          <p:cNvSpPr/>
+          <p:nvPr/>
+        </p:nvSpPr>
+        <p:spPr>
+          <a:xfrm>
+            <a:off x="1092200" y="2312423"/>
+            <a:ext cx="4228745" cy="375897"/>
+          </a:xfrm>
+          <a:prstGeom prst="rect">
+            <a:avLst/>
+          </a:prstGeom>
+          <a:noFill/>
+          <a:ln/>
+        </p:spPr>
+        <p:txBody>
+          <a:bodyPr wrap="square" lIns="0" tIns="0" rIns="0" bIns="0" rtlCol="0" anchor="t">
+            <a:normAutofit/>
+          </a:bodyPr>
+          <a:lstStyle/>
+          <a:p>
+            <a:pPr algn="l" indent="0" marL="0">
+              <a:lnSpc>
+                <a:spcPts val="2400"/>
+              </a:lnSpc>
+              <a:buNone/>
+            </a:pPr>
+            <a:r>
+              <a:rPr lang="en-US" sz="1600" dirty="0">
+                <a:solidFill>
+                  <a:srgbClr val="F6F3EC"/>
+                </a:solidFill>
+                <a:latin typeface="JetBrains Mono" pitchFamily="49" charset="0"/>
+                <a:ea typeface="JetBrains Mono" pitchFamily="49" charset="-122"/>
+                <a:cs typeface="JetBrains Mono" pitchFamily="49" charset="-120"/>
+              </a:rPr>
+              <a:t>repo/</a:t>
+            </a:r>
+            <a:endParaRPr lang="en-US" sz="1600" dirty="0"/>
+          </a:p>
+        </p:txBody>
+      </p:sp>
+      <p:sp>
+        <p:nvSpPr>
+          <p:cNvPr id="6" name="Text 4"/>
+          <p:cNvSpPr/>
+          <p:nvPr/>
+        </p:nvSpPr>
+        <p:spPr>
+          <a:xfrm>
+            <a:off x="1092200" y="2713720"/>
+            <a:ext cx="4228745" cy="375897"/>
+          </a:xfrm>
+          <a:prstGeom prst="rect">
+            <a:avLst/>
+          </a:prstGeom>
+          <a:noFill/>
+          <a:ln/>
+        </p:spPr>
+        <p:txBody>
+          <a:bodyPr wrap="square" lIns="0" tIns="0" rIns="0" bIns="0" rtlCol="0" anchor="t">
+            <a:normAutofit/>
+          </a:bodyPr>
+          <a:lstStyle/>
+          <a:p>
+            <a:pPr algn="l" indent="0" marL="0">
+              <a:lnSpc>
+                <a:spcPts val="2400"/>
+              </a:lnSpc>
+              <a:buNone/>
+            </a:pPr>
+            <a:r>
+              <a:rPr lang="en-US" sz="1600" dirty="0">
+                <a:solidFill>
+                  <a:srgbClr val="7FB0FF"/>
+                </a:solidFill>
+                <a:latin typeface="JetBrains Mono" pitchFamily="49" charset="0"/>
+                <a:ea typeface="JetBrains Mono" pitchFamily="49" charset="-122"/>
+                <a:cs typeface="JetBrains Mono" pitchFamily="49" charset="-120"/>
+              </a:rPr>
+              <a:t>  ml-pipeline/ </a:t>
+            </a:r>
+            <a:r>
+              <a:rPr lang="en-US" sz="1600" dirty="0">
+                <a:solidFill>
+                  <a:srgbClr val="A3A9B6"/>
+                </a:solidFill>
+                <a:latin typeface="JetBrains Mono" pitchFamily="49" charset="0"/>
+                <a:ea typeface="JetBrains Mono" pitchFamily="49" charset="-122"/>
+                <a:cs typeface="JetBrains Mono" pitchFamily="49" charset="-120"/>
+              </a:rPr>
+              <a:t>Python</a:t>
+            </a:r>
+            <a:endParaRPr lang="en-US" sz="1600" dirty="0"/>
+          </a:p>
+        </p:txBody>
+      </p:sp>
+      <p:sp>
+        <p:nvSpPr>
+          <p:cNvPr id="7" name="Text 5"/>
+          <p:cNvSpPr/>
+          <p:nvPr/>
+        </p:nvSpPr>
+        <p:spPr>
+          <a:xfrm>
+            <a:off x="1092200" y="3115016"/>
+            <a:ext cx="4228745" cy="375897"/>
+          </a:xfrm>
+          <a:prstGeom prst="rect">
+            <a:avLst/>
+          </a:prstGeom>
+          <a:noFill/>
+          <a:ln/>
+        </p:spPr>
+        <p:txBody>
+          <a:bodyPr wrap="square" lIns="0" tIns="0" rIns="0" bIns="0" rtlCol="0" anchor="t">
+            <a:normAutofit/>
+          </a:bodyPr>
+          <a:lstStyle/>
+          <a:p>
+            <a:pPr algn="l" indent="0" marL="0">
+              <a:lnSpc>
+                <a:spcPts val="2400"/>
+              </a:lnSpc>
+              <a:buNone/>
+            </a:pPr>
+            <a:r>
+              <a:rPr lang="en-US" sz="1600" dirty="0">
+                <a:solidFill>
+                  <a:srgbClr val="FF8A5C"/>
+                </a:solidFill>
+                <a:latin typeface="JetBrains Mono" pitchFamily="49" charset="0"/>
+                <a:ea typeface="JetBrains Mono" pitchFamily="49" charset="-122"/>
+                <a:cs typeface="JetBrains Mono" pitchFamily="49" charset="-120"/>
+              </a:rPr>
+              <a:t>  infra/ </a:t>
+            </a:r>
+            <a:r>
+              <a:rPr lang="en-US" sz="1600" dirty="0">
+                <a:solidFill>
+                  <a:srgbClr val="A3A9B6"/>
+                </a:solidFill>
+                <a:latin typeface="JetBrains Mono" pitchFamily="49" charset="0"/>
+                <a:ea typeface="JetBrains Mono" pitchFamily="49" charset="-122"/>
+                <a:cs typeface="JetBrains Mono" pitchFamily="49" charset="-120"/>
+              </a:rPr>
+              <a:t>Terraform</a:t>
+            </a:r>
+            <a:endParaRPr lang="en-US" sz="1600" dirty="0"/>
+          </a:p>
+        </p:txBody>
+      </p:sp>
+      <p:sp>
+        <p:nvSpPr>
+          <p:cNvPr id="8" name="Text 6"/>
+          <p:cNvSpPr/>
+          <p:nvPr/>
+        </p:nvSpPr>
+        <p:spPr>
+          <a:xfrm>
+            <a:off x="1092200" y="3516313"/>
+            <a:ext cx="4228745" cy="375897"/>
+          </a:xfrm>
+          <a:prstGeom prst="rect">
+            <a:avLst/>
+          </a:prstGeom>
+          <a:noFill/>
+          <a:ln/>
+        </p:spPr>
+        <p:txBody>
+          <a:bodyPr wrap="square" lIns="0" tIns="0" rIns="0" bIns="0" rtlCol="0" anchor="t">
+            <a:normAutofit/>
+          </a:bodyPr>
+          <a:lstStyle/>
+          <a:p>
+            <a:pPr algn="l" indent="0" marL="0">
+              <a:lnSpc>
+                <a:spcPts val="2400"/>
+              </a:lnSpc>
+              <a:buNone/>
+            </a:pPr>
+            <a:r>
+              <a:rPr lang="en-US" sz="1600" dirty="0">
+                <a:solidFill>
+                  <a:srgbClr val="8A909C"/>
+                </a:solidFill>
+                <a:latin typeface="JetBrains Mono" pitchFamily="49" charset="0"/>
+                <a:ea typeface="JetBrains Mono" pitchFamily="49" charset="-122"/>
+                <a:cs typeface="JetBrains Mono" pitchFamily="49" charset="-120"/>
+              </a:rPr>
+              <a:t>  README.md </a:t>
+            </a:r>
+            <a:r>
+              <a:rPr lang="en-US" sz="1600" dirty="0">
+                <a:solidFill>
+                  <a:srgbClr val="A3A9B6"/>
+                </a:solidFill>
+                <a:latin typeface="JetBrains Mono" pitchFamily="49" charset="0"/>
+                <a:ea typeface="JetBrains Mono" pitchFamily="49" charset="-122"/>
+                <a:cs typeface="JetBrains Mono" pitchFamily="49" charset="-120"/>
+              </a:rPr>
+              <a:t>neither</a:t>
+            </a:r>
+            <a:endParaRPr lang="en-US" sz="1600" dirty="0"/>
+          </a:p>
+        </p:txBody>
+      </p:sp>
+      <p:sp>
+        <p:nvSpPr>
+          <p:cNvPr id="9" name="Text 7"/>
+          <p:cNvSpPr/>
+          <p:nvPr/>
+        </p:nvSpPr>
+        <p:spPr>
+          <a:xfrm>
+            <a:off x="5781977" y="1695946"/>
+            <a:ext cx="5765139" cy="311679"/>
+          </a:xfrm>
+          <a:prstGeom prst="rect">
+            <a:avLst/>
+          </a:prstGeom>
+          <a:noFill/>
+          <a:ln/>
+        </p:spPr>
+        <p:txBody>
+          <a:bodyPr wrap="square" lIns="0" tIns="0" rIns="0" bIns="0" rtlCol="0" anchor="t">
+            <a:normAutofit/>
+          </a:bodyPr>
+          <a:lstStyle/>
+          <a:p>
+            <a:pPr algn="l" indent="0" marL="0">
+              <a:lnSpc>
+                <a:spcPts val="1960"/>
+              </a:lnSpc>
+              <a:buNone/>
+            </a:pPr>
+            <a:r>
+              <a:rPr lang="en-US" sz="1400" b="1" dirty="0">
+                <a:solidFill>
+                  <a:srgbClr val="5D6270"/>
                 </a:solidFill>
                 <a:latin typeface="Space Grotesk" pitchFamily="34" charset="0"/>
                 <a:ea typeface="Space Grotesk" pitchFamily="34" charset="-122"/>
                 <a:cs typeface="Space Grotesk" pitchFamily="34" charset="-120"/>
               </a:rPr>
-              <a:t>(recommended)</a:t>
-            </a:r>
-            <a:endParaRPr lang="en-US" sz="1644" dirty="0"/>
-          </a:p>
-        </p:txBody>
-      </p:sp>
-      <p:sp>
-        <p:nvSpPr>
-          <p:cNvPr id="5" name="Text 3"/>
-          <p:cNvSpPr/>
-          <p:nvPr/>
-        </p:nvSpPr>
-        <p:spPr>
-          <a:xfrm>
-            <a:off x="1028095" y="2163763"/>
-            <a:ext cx="4841216" cy="256910"/>
+              <a:t>release-please-config.json (simplified)</a:t>
+            </a:r>
+            <a:endParaRPr lang="en-US" sz="1400" dirty="0"/>
+          </a:p>
+        </p:txBody>
+      </p:sp>
+      <p:sp>
+        <p:nvSpPr>
+          <p:cNvPr id="10" name="Text 8"/>
+          <p:cNvSpPr/>
+          <p:nvPr/>
+        </p:nvSpPr>
+        <p:spPr>
+          <a:xfrm>
+            <a:off x="5781977" y="2083823"/>
+            <a:ext cx="5597223" cy="2516981"/>
+          </a:xfrm>
+          <a:prstGeom prst="roundRect">
+            <a:avLst>
+              <a:gd name="adj" fmla="val 5046"/>
+            </a:avLst>
+          </a:prstGeom>
+          <a:solidFill>
+            <a:srgbClr val="15181F"/>
+          </a:solidFill>
+          <a:ln/>
+        </p:spPr>
+        <p:txBody>
+          <a:bodyPr wrap="square" lIns="242203" tIns="191403" rIns="91050" bIns="166003" rtlCol="0" anchor="t">
+            <a:normAutofit/>
+          </a:bodyPr>
+          <a:lstStyle/>
+          <a:p>
+            <a:pPr algn="l" indent="0" marL="0">
+              <a:lnSpc>
+                <a:spcPts val="2015"/>
+              </a:lnSpc>
+              <a:buNone/>
+            </a:pPr>
+            <a:r>
+              <a:rPr lang="en-US" sz="1300" dirty="0">
+                <a:solidFill>
+                  <a:srgbClr val="E6E2D8"/>
+                </a:solidFill>
+                <a:latin typeface="JetBrains Mono" pitchFamily="49" charset="0"/>
+                <a:ea typeface="JetBrains Mono" pitchFamily="49" charset="-122"/>
+                <a:cs typeface="JetBrains Mono" pitchFamily="49" charset="-120"/>
+              </a:rPr>
+              <a:t>{</a:t>
+            </a:r>
+            <a:endParaRPr lang="en-US" sz="1300" dirty="0"/>
+          </a:p>
+          <a:p>
+            <a:pPr algn="l" indent="0" marL="0">
+              <a:lnSpc>
+                <a:spcPts val="2015"/>
+              </a:lnSpc>
+              <a:buNone/>
+            </a:pPr>
+            <a:r>
+              <a:rPr lang="en-US" sz="1300" dirty="0">
+                <a:solidFill>
+                  <a:srgbClr val="E6E2D8"/>
+                </a:solidFill>
+                <a:latin typeface="JetBrains Mono" pitchFamily="49" charset="0"/>
+                <a:ea typeface="JetBrains Mono" pitchFamily="49" charset="-122"/>
+                <a:cs typeface="JetBrains Mono" pitchFamily="49" charset="-120"/>
+              </a:rPr>
+              <a:t>  "packages": {</a:t>
+            </a:r>
+            <a:endParaRPr lang="en-US" sz="1300" dirty="0"/>
+          </a:p>
+          <a:p>
+            <a:pPr algn="l" indent="0" marL="0">
+              <a:lnSpc>
+                <a:spcPts val="2015"/>
+              </a:lnSpc>
+              <a:buNone/>
+            </a:pPr>
+            <a:r>
+              <a:rPr lang="en-US" sz="1300" dirty="0">
+                <a:solidFill>
+                  <a:srgbClr val="E6E2D8"/>
+                </a:solidFill>
+                <a:latin typeface="JetBrains Mono" pitchFamily="49" charset="0"/>
+                <a:ea typeface="JetBrains Mono" pitchFamily="49" charset="-122"/>
+                <a:cs typeface="JetBrains Mono" pitchFamily="49" charset="-120"/>
+              </a:rPr>
+              <a:t>    </a:t>
+            </a:r>
+            <a:r>
+              <a:rPr lang="en-US" sz="1300" dirty="0">
+                <a:solidFill>
+                  <a:srgbClr val="7FB0FF"/>
+                </a:solidFill>
+                <a:latin typeface="JetBrains Mono" pitchFamily="49" charset="0"/>
+                <a:ea typeface="JetBrains Mono" pitchFamily="49" charset="-122"/>
+                <a:cs typeface="JetBrains Mono" pitchFamily="49" charset="-120"/>
+              </a:rPr>
+              <a:t>"ml-pipeline"</a:t>
+            </a:r>
+            <a:r>
+              <a:rPr lang="en-US" sz="1300" dirty="0">
+                <a:solidFill>
+                  <a:srgbClr val="E6E2D8"/>
+                </a:solidFill>
+                <a:latin typeface="JetBrains Mono" pitchFamily="49" charset="0"/>
+                <a:ea typeface="JetBrains Mono" pitchFamily="49" charset="-122"/>
+                <a:cs typeface="JetBrains Mono" pitchFamily="49" charset="-120"/>
+              </a:rPr>
+              <a:t>: { "release-type": "python" },</a:t>
+            </a:r>
+            <a:endParaRPr lang="en-US" sz="1300" dirty="0"/>
+          </a:p>
+          <a:p>
+            <a:pPr algn="l" indent="0" marL="0">
+              <a:lnSpc>
+                <a:spcPts val="2015"/>
+              </a:lnSpc>
+              <a:buNone/>
+            </a:pPr>
+            <a:r>
+              <a:rPr lang="en-US" sz="1300" dirty="0">
+                <a:solidFill>
+                  <a:srgbClr val="E6E2D8"/>
+                </a:solidFill>
+                <a:latin typeface="JetBrains Mono" pitchFamily="49" charset="0"/>
+                <a:ea typeface="JetBrains Mono" pitchFamily="49" charset="-122"/>
+                <a:cs typeface="JetBrains Mono" pitchFamily="49" charset="-120"/>
+              </a:rPr>
+              <a:t>    </a:t>
+            </a:r>
+            <a:r>
+              <a:rPr lang="en-US" sz="1300" dirty="0">
+                <a:solidFill>
+                  <a:srgbClr val="FF8A5C"/>
+                </a:solidFill>
+                <a:latin typeface="JetBrains Mono" pitchFamily="49" charset="0"/>
+                <a:ea typeface="JetBrains Mono" pitchFamily="49" charset="-122"/>
+                <a:cs typeface="JetBrains Mono" pitchFamily="49" charset="-120"/>
+              </a:rPr>
+              <a:t>"infra"</a:t>
+            </a:r>
+            <a:r>
+              <a:rPr lang="en-US" sz="1300" dirty="0">
+                <a:solidFill>
+                  <a:srgbClr val="E6E2D8"/>
+                </a:solidFill>
+                <a:latin typeface="JetBrains Mono" pitchFamily="49" charset="0"/>
+                <a:ea typeface="JetBrains Mono" pitchFamily="49" charset="-122"/>
+                <a:cs typeface="JetBrains Mono" pitchFamily="49" charset="-120"/>
+              </a:rPr>
+              <a:t>: { "release-type": "simple" }</a:t>
+            </a:r>
+            <a:endParaRPr lang="en-US" sz="1300" dirty="0"/>
+          </a:p>
+          <a:p>
+            <a:pPr algn="l" indent="0" marL="0">
+              <a:lnSpc>
+                <a:spcPts val="2015"/>
+              </a:lnSpc>
+              <a:buNone/>
+            </a:pPr>
+            <a:r>
+              <a:rPr lang="en-US" sz="1300" dirty="0">
+                <a:solidFill>
+                  <a:srgbClr val="E6E2D8"/>
+                </a:solidFill>
+                <a:latin typeface="JetBrains Mono" pitchFamily="49" charset="0"/>
+                <a:ea typeface="JetBrains Mono" pitchFamily="49" charset="-122"/>
+                <a:cs typeface="JetBrains Mono" pitchFamily="49" charset="-120"/>
+              </a:rPr>
+              <a:t>  }</a:t>
+            </a:r>
+            <a:endParaRPr lang="en-US" sz="1300" dirty="0"/>
+          </a:p>
+          <a:p>
+            <a:pPr algn="l" indent="0" marL="0">
+              <a:lnSpc>
+                <a:spcPts val="2015"/>
+              </a:lnSpc>
+              <a:buNone/>
+            </a:pPr>
+            <a:r>
+              <a:rPr lang="en-US" sz="1300" dirty="0">
+                <a:solidFill>
+                  <a:srgbClr val="E6E2D8"/>
+                </a:solidFill>
+                <a:latin typeface="JetBrains Mono" pitchFamily="49" charset="0"/>
+                <a:ea typeface="JetBrains Mono" pitchFamily="49" charset="-122"/>
+                <a:cs typeface="JetBrains Mono" pitchFamily="49" charset="-120"/>
+              </a:rPr>
+              <a:t>}</a:t>
+            </a:r>
+            <a:endParaRPr lang="en-US" sz="1300" dirty="0"/>
+          </a:p>
+        </p:txBody>
+      </p:sp>
+      <p:sp>
+        <p:nvSpPr>
+          <p:cNvPr id="11" name="Text 9"/>
+          <p:cNvSpPr/>
+          <p:nvPr/>
+        </p:nvSpPr>
+        <p:spPr>
+          <a:xfrm>
+            <a:off x="812800" y="4905604"/>
+            <a:ext cx="10883392" cy="936701"/>
           </a:xfrm>
           <a:prstGeom prst="rect">
             <a:avLst/>
@@ -5235,298 +8032,34 @@
           <a:p>
             <a:pPr algn="l" indent="0" marL="0">
               <a:lnSpc>
-                <a:spcPts val="1586"/>
-              </a:lnSpc>
-              <a:buNone/>
-            </a:pPr>
-            <a:r>
-              <a:rPr lang="en-US" sz="1133" b="1" dirty="0">
-                <a:solidFill>
-                  <a:srgbClr val="5D6270"/>
+                <a:spcPts val="3120"/>
+              </a:lnSpc>
+              <a:buNone/>
+            </a:pPr>
+            <a:r>
+              <a:rPr lang="en-US" sz="2600" b="1" dirty="0">
+                <a:solidFill>
+                  <a:srgbClr val="1B1E26"/>
                 </a:solidFill>
                 <a:latin typeface="Space Grotesk" pitchFamily="34" charset="0"/>
                 <a:ea typeface="Space Grotesk" pitchFamily="34" charset="-122"/>
                 <a:cs typeface="Space Grotesk" pitchFamily="34" charset="-120"/>
               </a:rPr>
-              <a:t>Only the PR title matters</a:t>
-            </a:r>
-            <a:endParaRPr lang="en-US" sz="1133" dirty="0"/>
-          </a:p>
-        </p:txBody>
-      </p:sp>
-      <p:sp>
-        <p:nvSpPr>
-          <p:cNvPr id="6" name="Shape 4"/>
-          <p:cNvSpPr/>
-          <p:nvPr/>
-        </p:nvSpPr>
-        <p:spPr>
-          <a:xfrm>
-            <a:off x="1028095" y="2496877"/>
-            <a:ext cx="4700210" cy="1486354"/>
-          </a:xfrm>
-          <a:prstGeom prst="roundRect">
-            <a:avLst>
-              <a:gd name="adj" fmla="val 5127"/>
-            </a:avLst>
-          </a:prstGeom>
-          <a:solidFill>
-            <a:srgbClr val="15181F"/>
-          </a:solidFill>
-          <a:ln/>
-        </p:spPr>
-      </p:sp>
-      <p:sp>
-        <p:nvSpPr>
-          <p:cNvPr id="7" name="Text 5"/>
-          <p:cNvSpPr/>
-          <p:nvPr/>
-        </p:nvSpPr>
-        <p:spPr>
-          <a:xfrm>
-            <a:off x="1231295" y="2649277"/>
-            <a:ext cx="4422624" cy="234459"/>
-          </a:xfrm>
-          <a:prstGeom prst="rect">
-            <a:avLst/>
-          </a:prstGeom>
-          <a:noFill/>
-          <a:ln/>
-        </p:spPr>
-        <p:txBody>
-          <a:bodyPr wrap="square" lIns="0" tIns="0" rIns="0" bIns="0" rtlCol="0" anchor="t">
-            <a:normAutofit/>
-          </a:bodyPr>
-          <a:lstStyle/>
-          <a:p>
-            <a:pPr algn="l" indent="0" marL="0">
-              <a:lnSpc>
-                <a:spcPts val="1456"/>
-              </a:lnSpc>
-              <a:buNone/>
-            </a:pPr>
-            <a:r>
-              <a:rPr lang="en-US" sz="1040" strike="sngStrike" dirty="0">
-                <a:solidFill>
-                  <a:srgbClr val="8A909C"/>
-                </a:solidFill>
-                <a:latin typeface="JetBrains Mono" pitchFamily="49" charset="0"/>
-                <a:ea typeface="JetBrains Mono" pitchFamily="49" charset="-122"/>
-                <a:cs typeface="JetBrains Mono" pitchFamily="49" charset="-120"/>
-              </a:rPr>
-              <a:t>wip</a:t>
-            </a:r>
-            <a:endParaRPr lang="en-US" sz="1040" dirty="0"/>
-          </a:p>
-        </p:txBody>
-      </p:sp>
-      <p:sp>
-        <p:nvSpPr>
-          <p:cNvPr id="8" name="Text 6"/>
-          <p:cNvSpPr/>
-          <p:nvPr/>
-        </p:nvSpPr>
-        <p:spPr>
-          <a:xfrm>
-            <a:off x="1231295" y="2896431"/>
-            <a:ext cx="4422624" cy="234421"/>
-          </a:xfrm>
-          <a:prstGeom prst="rect">
-            <a:avLst/>
-          </a:prstGeom>
-          <a:noFill/>
-          <a:ln/>
-        </p:spPr>
-        <p:txBody>
-          <a:bodyPr wrap="square" lIns="0" tIns="0" rIns="0" bIns="0" rtlCol="0" anchor="t">
-            <a:normAutofit/>
-          </a:bodyPr>
-          <a:lstStyle/>
-          <a:p>
-            <a:pPr algn="l" indent="0" marL="0">
-              <a:lnSpc>
-                <a:spcPts val="1456"/>
-              </a:lnSpc>
-              <a:buNone/>
-            </a:pPr>
-            <a:r>
-              <a:rPr lang="en-US" sz="1040" strike="sngStrike" dirty="0">
-                <a:solidFill>
-                  <a:srgbClr val="8A909C"/>
-                </a:solidFill>
-                <a:latin typeface="JetBrains Mono" pitchFamily="49" charset="0"/>
-                <a:ea typeface="JetBrains Mono" pitchFamily="49" charset="-122"/>
-                <a:cs typeface="JetBrains Mono" pitchFamily="49" charset="-120"/>
-              </a:rPr>
-              <a:t>fix typo</a:t>
-            </a:r>
-            <a:endParaRPr lang="en-US" sz="1040" dirty="0"/>
-          </a:p>
-        </p:txBody>
-      </p:sp>
-      <p:sp>
-        <p:nvSpPr>
-          <p:cNvPr id="9" name="Text 7"/>
-          <p:cNvSpPr/>
-          <p:nvPr/>
-        </p:nvSpPr>
-        <p:spPr>
-          <a:xfrm>
-            <a:off x="1231295" y="3143554"/>
-            <a:ext cx="4422624" cy="234459"/>
-          </a:xfrm>
-          <a:prstGeom prst="rect">
-            <a:avLst/>
-          </a:prstGeom>
-          <a:noFill/>
-          <a:ln/>
-        </p:spPr>
-        <p:txBody>
-          <a:bodyPr wrap="square" lIns="0" tIns="0" rIns="0" bIns="0" rtlCol="0" anchor="t">
-            <a:normAutofit/>
-          </a:bodyPr>
-          <a:lstStyle/>
-          <a:p>
-            <a:pPr algn="l" indent="0" marL="0">
-              <a:lnSpc>
-                <a:spcPts val="1456"/>
-              </a:lnSpc>
-              <a:buNone/>
-            </a:pPr>
-            <a:r>
-              <a:rPr lang="en-US" sz="1040" strike="sngStrike" dirty="0">
-                <a:solidFill>
-                  <a:srgbClr val="8A909C"/>
-                </a:solidFill>
-                <a:latin typeface="JetBrains Mono" pitchFamily="49" charset="0"/>
-                <a:ea typeface="JetBrains Mono" pitchFamily="49" charset="-122"/>
-                <a:cs typeface="JetBrains Mono" pitchFamily="49" charset="-120"/>
-              </a:rPr>
-              <a:t>try again</a:t>
-            </a:r>
-            <a:endParaRPr lang="en-US" sz="1040" dirty="0"/>
-          </a:p>
-        </p:txBody>
-      </p:sp>
-      <p:sp>
-        <p:nvSpPr>
-          <p:cNvPr id="10" name="Text 8"/>
-          <p:cNvSpPr/>
-          <p:nvPr/>
-        </p:nvSpPr>
-        <p:spPr>
-          <a:xfrm>
-            <a:off x="1231295" y="3390714"/>
-            <a:ext cx="4422624" cy="218357"/>
-          </a:xfrm>
-          <a:prstGeom prst="rect">
-            <a:avLst/>
-          </a:prstGeom>
-          <a:noFill/>
-          <a:ln/>
-        </p:spPr>
-        <p:txBody>
-          <a:bodyPr wrap="square" lIns="0" tIns="0" rIns="0" bIns="0" rtlCol="0" anchor="t">
-            <a:normAutofit/>
-          </a:bodyPr>
-          <a:lstStyle/>
-          <a:p>
-            <a:pPr algn="l" indent="0" marL="0">
-              <a:lnSpc>
-                <a:spcPts val="1323"/>
-              </a:lnSpc>
-              <a:buNone/>
-            </a:pPr>
-            <a:r>
-              <a:rPr lang="en-US" sz="945" dirty="0">
-                <a:solidFill>
-                  <a:srgbClr val="A3A9B6"/>
+              <a:t>The </a:t>
+            </a:r>
+            <a:r>
+              <a:rPr lang="en-US" sz="2600" b="1" dirty="0">
+                <a:solidFill>
+                  <a:srgbClr val="2F62B0"/>
                 </a:solidFill>
                 <a:latin typeface="Space Grotesk" pitchFamily="34" charset="0"/>
                 <a:ea typeface="Space Grotesk" pitchFamily="34" charset="-122"/>
                 <a:cs typeface="Space Grotesk" pitchFamily="34" charset="-120"/>
               </a:rPr>
-              <a:t>squashed into one commit on main:</a:t>
-            </a:r>
-            <a:endParaRPr lang="en-US" sz="945" dirty="0"/>
-          </a:p>
-        </p:txBody>
-      </p:sp>
-      <p:sp>
-        <p:nvSpPr>
-          <p:cNvPr id="11" name="Text 9"/>
-          <p:cNvSpPr/>
-          <p:nvPr/>
-        </p:nvSpPr>
-        <p:spPr>
-          <a:xfrm>
-            <a:off x="1231295" y="3621770"/>
-            <a:ext cx="4422624" cy="234459"/>
-          </a:xfrm>
-          <a:prstGeom prst="rect">
-            <a:avLst/>
-          </a:prstGeom>
-          <a:noFill/>
-          <a:ln/>
-        </p:spPr>
-        <p:txBody>
-          <a:bodyPr wrap="square" lIns="0" tIns="0" rIns="0" bIns="0" rtlCol="0" anchor="t">
-            <a:normAutofit/>
-          </a:bodyPr>
-          <a:lstStyle/>
-          <a:p>
-            <a:pPr algn="l" indent="0" marL="0">
-              <a:lnSpc>
-                <a:spcPts val="1456"/>
-              </a:lnSpc>
-              <a:buNone/>
-            </a:pPr>
-            <a:r>
-              <a:rPr lang="en-US" sz="1040" b="1" dirty="0">
-                <a:solidFill>
-                  <a:srgbClr val="FF8A5C"/>
-                </a:solidFill>
-                <a:latin typeface="JetBrains Mono" pitchFamily="49" charset="0"/>
-                <a:ea typeface="JetBrains Mono" pitchFamily="49" charset="-122"/>
-                <a:cs typeface="JetBrains Mono" pitchFamily="49" charset="-120"/>
-              </a:rPr>
-              <a:t>feat(reports): export to CSV</a:t>
-            </a:r>
-            <a:endParaRPr lang="en-US" sz="1040" dirty="0"/>
-          </a:p>
-        </p:txBody>
-      </p:sp>
-      <p:sp>
-        <p:nvSpPr>
-          <p:cNvPr id="12" name="Text 10"/>
-          <p:cNvSpPr/>
-          <p:nvPr/>
-        </p:nvSpPr>
-        <p:spPr>
-          <a:xfrm>
-            <a:off x="1028095" y="4084830"/>
-            <a:ext cx="4841216" cy="720082"/>
-          </a:xfrm>
-          <a:prstGeom prst="rect">
-            <a:avLst/>
-          </a:prstGeom>
-          <a:noFill/>
-          <a:ln/>
-        </p:spPr>
-        <p:txBody>
-          <a:bodyPr wrap="square" lIns="0" tIns="0" rIns="0" bIns="0" rtlCol="0" anchor="t">
-            <a:normAutofit/>
-          </a:bodyPr>
-          <a:lstStyle/>
-          <a:p>
-            <a:pPr algn="l" indent="0" marL="0">
-              <a:lnSpc>
-                <a:spcPts val="1880"/>
-              </a:lnSpc>
-              <a:buNone/>
-            </a:pPr>
-            <a:r>
-              <a:rPr lang="en-US" sz="1343" dirty="0">
+              <a:t>file path</a:t>
+            </a:r>
+            <a:r>
+              <a:rPr lang="en-US" sz="2600" b="1" dirty="0">
                 <a:solidFill>
                   <a:srgbClr val="1B1E26"/>
                 </a:solidFill>
@@ -5534,21 +8067,21 @@
                 <a:ea typeface="Space Grotesk" pitchFamily="34" charset="-122"/>
                 <a:cs typeface="Space Grotesk" pitchFamily="34" charset="-120"/>
               </a:rPr>
-              <a:t>Messy branch commits are fine. The </a:t>
-            </a:r>
-            <a:r>
-              <a:rPr lang="en-US" sz="1343" b="1" dirty="0">
-                <a:solidFill>
-                  <a:srgbClr val="1B1E26"/>
+              <a:t> picks the component. The </a:t>
+            </a:r>
+            <a:r>
+              <a:rPr lang="en-US" sz="2600" b="1" dirty="0">
+                <a:solidFill>
+                  <a:srgbClr val="B8441B"/>
                 </a:solidFill>
                 <a:latin typeface="Space Grotesk" pitchFamily="34" charset="0"/>
                 <a:ea typeface="Space Grotesk" pitchFamily="34" charset="-122"/>
                 <a:cs typeface="Space Grotesk" pitchFamily="34" charset="-120"/>
               </a:rPr>
-              <a:t>PR title</a:t>
-            </a:r>
-            <a:r>
-              <a:rPr lang="en-US" sz="1343" dirty="0">
+              <a:t>commit type</a:t>
+            </a:r>
+            <a:r>
+              <a:rPr lang="en-US" sz="2600" b="1" dirty="0">
                 <a:solidFill>
                   <a:srgbClr val="1B1E26"/>
                 </a:solidFill>
@@ -5556,543 +8089,9 @@
                 <a:ea typeface="Space Grotesk" pitchFamily="34" charset="-122"/>
                 <a:cs typeface="Space Grotesk" pitchFamily="34" charset="-120"/>
               </a:rPr>
-              <a:t> becomes the single commit Release Please reads.</a:t>
-            </a:r>
-            <a:endParaRPr lang="en-US" sz="1343" dirty="0"/>
-          </a:p>
-        </p:txBody>
-      </p:sp>
-      <p:sp>
-        <p:nvSpPr>
-          <p:cNvPr id="13" name="Shape 11"/>
-          <p:cNvSpPr/>
-          <p:nvPr/>
-        </p:nvSpPr>
-        <p:spPr>
-          <a:xfrm>
-            <a:off x="6254750" y="1569734"/>
-            <a:ext cx="5118100" cy="3418719"/>
-          </a:xfrm>
-          <a:prstGeom prst="roundRect">
-            <a:avLst>
-              <a:gd name="adj" fmla="val 2786"/>
-            </a:avLst>
-          </a:prstGeom>
-          <a:solidFill>
-            <a:srgbClr val="FFFDF8"/>
-          </a:solidFill>
-          <a:ln w="12700">
-            <a:solidFill>
-              <a:srgbClr val="E2DDD2"/>
-            </a:solidFill>
-            <a:prstDash val="solid"/>
-          </a:ln>
-        </p:spPr>
-      </p:sp>
-      <p:sp>
-        <p:nvSpPr>
-          <p:cNvPr id="14" name="Text 12"/>
-          <p:cNvSpPr/>
-          <p:nvPr/>
-        </p:nvSpPr>
-        <p:spPr>
-          <a:xfrm>
-            <a:off x="6463695" y="1778682"/>
-            <a:ext cx="4841216" cy="308882"/>
-          </a:xfrm>
-          <a:prstGeom prst="rect">
-            <a:avLst/>
-          </a:prstGeom>
-          <a:noFill/>
-          <a:ln/>
-        </p:spPr>
-        <p:txBody>
-          <a:bodyPr wrap="square" lIns="0" tIns="0" rIns="0" bIns="0" rtlCol="0" anchor="t">
-            <a:normAutofit/>
-          </a:bodyPr>
-          <a:lstStyle/>
-          <a:p>
-            <a:pPr algn="l" indent="0" marL="0">
-              <a:lnSpc>
-                <a:spcPts val="1973"/>
-              </a:lnSpc>
-              <a:buNone/>
-            </a:pPr>
-            <a:r>
-              <a:rPr lang="en-US" sz="1644" b="1" dirty="0">
-                <a:solidFill>
-                  <a:srgbClr val="1B1E26"/>
-                </a:solidFill>
-                <a:latin typeface="Space Grotesk" pitchFamily="34" charset="0"/>
-                <a:ea typeface="Space Grotesk" pitchFamily="34" charset="-122"/>
-                <a:cs typeface="Space Grotesk" pitchFamily="34" charset="-120"/>
-              </a:rPr>
-              <a:t>Merge commit or rebase</a:t>
-            </a:r>
-            <a:endParaRPr lang="en-US" sz="1644" dirty="0"/>
-          </a:p>
-        </p:txBody>
-      </p:sp>
-      <p:sp>
-        <p:nvSpPr>
-          <p:cNvPr id="15" name="Text 13"/>
-          <p:cNvSpPr/>
-          <p:nvPr/>
-        </p:nvSpPr>
-        <p:spPr>
-          <a:xfrm>
-            <a:off x="6463695" y="2163763"/>
-            <a:ext cx="4841216" cy="256910"/>
-          </a:xfrm>
-          <a:prstGeom prst="rect">
-            <a:avLst/>
-          </a:prstGeom>
-          <a:noFill/>
-          <a:ln/>
-        </p:spPr>
-        <p:txBody>
-          <a:bodyPr wrap="square" lIns="0" tIns="0" rIns="0" bIns="0" rtlCol="0" anchor="t">
-            <a:normAutofit/>
-          </a:bodyPr>
-          <a:lstStyle/>
-          <a:p>
-            <a:pPr algn="l" indent="0" marL="0">
-              <a:lnSpc>
-                <a:spcPts val="1586"/>
-              </a:lnSpc>
-              <a:buNone/>
-            </a:pPr>
-            <a:r>
-              <a:rPr lang="en-US" sz="1133" b="1" dirty="0">
-                <a:solidFill>
-                  <a:srgbClr val="5D6270"/>
-                </a:solidFill>
-                <a:latin typeface="Space Grotesk" pitchFamily="34" charset="0"/>
-                <a:ea typeface="Space Grotesk" pitchFamily="34" charset="-122"/>
-                <a:cs typeface="Space Grotesk" pitchFamily="34" charset="-120"/>
-              </a:rPr>
-              <a:t>Every commit matters</a:t>
-            </a:r>
-            <a:endParaRPr lang="en-US" sz="1133" dirty="0"/>
-          </a:p>
-        </p:txBody>
-      </p:sp>
-      <p:sp>
-        <p:nvSpPr>
-          <p:cNvPr id="16" name="Shape 14"/>
-          <p:cNvSpPr/>
-          <p:nvPr/>
-        </p:nvSpPr>
-        <p:spPr>
-          <a:xfrm>
-            <a:off x="6463695" y="2496877"/>
-            <a:ext cx="4700210" cy="1486354"/>
-          </a:xfrm>
-          <a:prstGeom prst="roundRect">
-            <a:avLst>
-              <a:gd name="adj" fmla="val 5127"/>
-            </a:avLst>
-          </a:prstGeom>
-          <a:solidFill>
-            <a:srgbClr val="15181F"/>
-          </a:solidFill>
-          <a:ln/>
-        </p:spPr>
-      </p:sp>
-      <p:sp>
-        <p:nvSpPr>
-          <p:cNvPr id="17" name="Text 15"/>
-          <p:cNvSpPr/>
-          <p:nvPr/>
-        </p:nvSpPr>
-        <p:spPr>
-          <a:xfrm>
-            <a:off x="6666895" y="2649277"/>
-            <a:ext cx="4422624" cy="218357"/>
-          </a:xfrm>
-          <a:prstGeom prst="rect">
-            <a:avLst/>
-          </a:prstGeom>
-          <a:noFill/>
-          <a:ln/>
-        </p:spPr>
-        <p:txBody>
-          <a:bodyPr wrap="square" lIns="0" tIns="0" rIns="0" bIns="0" rtlCol="0" anchor="t">
-            <a:normAutofit/>
-          </a:bodyPr>
-          <a:lstStyle/>
-          <a:p>
-            <a:pPr algn="l" indent="0" marL="0">
-              <a:lnSpc>
-                <a:spcPts val="1323"/>
-              </a:lnSpc>
-              <a:buNone/>
-            </a:pPr>
-            <a:r>
-              <a:rPr lang="en-US" sz="945" dirty="0">
-                <a:solidFill>
-                  <a:srgbClr val="A3A9B6"/>
-                </a:solidFill>
-                <a:latin typeface="Space Grotesk" pitchFamily="34" charset="0"/>
-                <a:ea typeface="Space Grotesk" pitchFamily="34" charset="-122"/>
-                <a:cs typeface="Space Grotesk" pitchFamily="34" charset="-120"/>
-              </a:rPr>
-              <a:t>every branch commit lands on main:</a:t>
-            </a:r>
-            <a:endParaRPr lang="en-US" sz="945" dirty="0"/>
-          </a:p>
-        </p:txBody>
-      </p:sp>
-      <p:sp>
-        <p:nvSpPr>
-          <p:cNvPr id="18" name="Text 16"/>
-          <p:cNvSpPr/>
-          <p:nvPr/>
-        </p:nvSpPr>
-        <p:spPr>
-          <a:xfrm>
-            <a:off x="6666895" y="2880333"/>
-            <a:ext cx="4422624" cy="234421"/>
-          </a:xfrm>
-          <a:prstGeom prst="rect">
-            <a:avLst/>
-          </a:prstGeom>
-          <a:noFill/>
-          <a:ln/>
-        </p:spPr>
-        <p:txBody>
-          <a:bodyPr wrap="square" lIns="0" tIns="0" rIns="0" bIns="0" rtlCol="0" anchor="t">
-            <a:normAutofit/>
-          </a:bodyPr>
-          <a:lstStyle/>
-          <a:p>
-            <a:pPr algn="l" indent="0" marL="0">
-              <a:lnSpc>
-                <a:spcPts val="1456"/>
-              </a:lnSpc>
-              <a:buNone/>
-            </a:pPr>
-            <a:r>
-              <a:rPr lang="en-US" sz="1040" b="1" dirty="0">
-                <a:solidFill>
-                  <a:srgbClr val="7FB0FF"/>
-                </a:solidFill>
-                <a:latin typeface="JetBrains Mono" pitchFamily="49" charset="0"/>
-                <a:ea typeface="JetBrains Mono" pitchFamily="49" charset="-122"/>
-                <a:cs typeface="JetBrains Mono" pitchFamily="49" charset="-120"/>
-              </a:rPr>
-              <a:t>feat(reports): export to CSV</a:t>
-            </a:r>
-            <a:endParaRPr lang="en-US" sz="1040" dirty="0"/>
-          </a:p>
-        </p:txBody>
-      </p:sp>
-      <p:sp>
-        <p:nvSpPr>
-          <p:cNvPr id="19" name="Text 17"/>
-          <p:cNvSpPr/>
-          <p:nvPr/>
-        </p:nvSpPr>
-        <p:spPr>
-          <a:xfrm>
-            <a:off x="6666895" y="3127449"/>
-            <a:ext cx="4422624" cy="234459"/>
-          </a:xfrm>
-          <a:prstGeom prst="rect">
-            <a:avLst/>
-          </a:prstGeom>
-          <a:noFill/>
-          <a:ln/>
-        </p:spPr>
-        <p:txBody>
-          <a:bodyPr wrap="square" lIns="0" tIns="0" rIns="0" bIns="0" rtlCol="0" anchor="t">
-            <a:normAutofit/>
-          </a:bodyPr>
-          <a:lstStyle/>
-          <a:p>
-            <a:pPr algn="l" indent="0" marL="0">
-              <a:lnSpc>
-                <a:spcPts val="1456"/>
-              </a:lnSpc>
-              <a:buNone/>
-            </a:pPr>
-            <a:r>
-              <a:rPr lang="en-US" sz="1040" dirty="0">
-                <a:solidFill>
-                  <a:srgbClr val="E6E2D8"/>
-                </a:solidFill>
-                <a:latin typeface="JetBrains Mono" pitchFamily="49" charset="0"/>
-                <a:ea typeface="JetBrains Mono" pitchFamily="49" charset="-122"/>
-                <a:cs typeface="JetBrains Mono" pitchFamily="49" charset="-120"/>
-              </a:rPr>
-              <a:t>wip </a:t>
-            </a:r>
-            <a:r>
-              <a:rPr lang="en-US" sz="1040" dirty="0">
-                <a:solidFill>
-                  <a:srgbClr val="FFD166"/>
-                </a:solidFill>
-                <a:latin typeface="JetBrains Mono" pitchFamily="49" charset="0"/>
-                <a:ea typeface="JetBrains Mono" pitchFamily="49" charset="-122"/>
-                <a:cs typeface="JetBrains Mono" pitchFamily="49" charset="-120"/>
-              </a:rPr>
-              <a:t>(skipped)</a:t>
-            </a:r>
-            <a:endParaRPr lang="en-US" sz="1040" dirty="0"/>
-          </a:p>
-        </p:txBody>
-      </p:sp>
-      <p:sp>
-        <p:nvSpPr>
-          <p:cNvPr id="20" name="Text 18"/>
-          <p:cNvSpPr/>
-          <p:nvPr/>
-        </p:nvSpPr>
-        <p:spPr>
-          <a:xfrm>
-            <a:off x="6666895" y="3374610"/>
-            <a:ext cx="4422624" cy="234459"/>
-          </a:xfrm>
-          <a:prstGeom prst="rect">
-            <a:avLst/>
-          </a:prstGeom>
-          <a:noFill/>
-          <a:ln/>
-        </p:spPr>
-        <p:txBody>
-          <a:bodyPr wrap="square" lIns="0" tIns="0" rIns="0" bIns="0" rtlCol="0" anchor="t">
-            <a:normAutofit/>
-          </a:bodyPr>
-          <a:lstStyle/>
-          <a:p>
-            <a:pPr algn="l" indent="0" marL="0">
-              <a:lnSpc>
-                <a:spcPts val="1456"/>
-              </a:lnSpc>
-              <a:buNone/>
-            </a:pPr>
-            <a:r>
-              <a:rPr lang="en-US" sz="1040" dirty="0">
-                <a:solidFill>
-                  <a:srgbClr val="E6E2D8"/>
-                </a:solidFill>
-                <a:latin typeface="JetBrains Mono" pitchFamily="49" charset="0"/>
-                <a:ea typeface="JetBrains Mono" pitchFamily="49" charset="-122"/>
-                <a:cs typeface="JetBrains Mono" pitchFamily="49" charset="-120"/>
-              </a:rPr>
-              <a:t>fix typo </a:t>
-            </a:r>
-            <a:r>
-              <a:rPr lang="en-US" sz="1040" dirty="0">
-                <a:solidFill>
-                  <a:srgbClr val="FFD166"/>
-                </a:solidFill>
-                <a:latin typeface="JetBrains Mono" pitchFamily="49" charset="0"/>
-                <a:ea typeface="JetBrains Mono" pitchFamily="49" charset="-122"/>
-                <a:cs typeface="JetBrains Mono" pitchFamily="49" charset="-120"/>
-              </a:rPr>
-              <a:t>(skipped)</a:t>
-            </a:r>
-            <a:endParaRPr lang="en-US" sz="1040" dirty="0"/>
-          </a:p>
-        </p:txBody>
-      </p:sp>
-      <p:sp>
-        <p:nvSpPr>
-          <p:cNvPr id="21" name="Text 19"/>
-          <p:cNvSpPr/>
-          <p:nvPr/>
-        </p:nvSpPr>
-        <p:spPr>
-          <a:xfrm>
-            <a:off x="6666895" y="3621770"/>
-            <a:ext cx="4422624" cy="234459"/>
-          </a:xfrm>
-          <a:prstGeom prst="rect">
-            <a:avLst/>
-          </a:prstGeom>
-          <a:noFill/>
-          <a:ln/>
-        </p:spPr>
-        <p:txBody>
-          <a:bodyPr wrap="square" lIns="0" tIns="0" rIns="0" bIns="0" rtlCol="0" anchor="t">
-            <a:normAutofit/>
-          </a:bodyPr>
-          <a:lstStyle/>
-          <a:p>
-            <a:pPr algn="l" indent="0" marL="0">
-              <a:lnSpc>
-                <a:spcPts val="1456"/>
-              </a:lnSpc>
-              <a:buNone/>
-            </a:pPr>
-            <a:r>
-              <a:rPr lang="en-US" sz="1040" dirty="0">
-                <a:solidFill>
-                  <a:srgbClr val="E6E2D8"/>
-                </a:solidFill>
-                <a:latin typeface="JetBrains Mono" pitchFamily="49" charset="0"/>
-                <a:ea typeface="JetBrains Mono" pitchFamily="49" charset="-122"/>
-                <a:cs typeface="JetBrains Mono" pitchFamily="49" charset="-120"/>
-              </a:rPr>
-              <a:t>try again </a:t>
-            </a:r>
-            <a:r>
-              <a:rPr lang="en-US" sz="1040" dirty="0">
-                <a:solidFill>
-                  <a:srgbClr val="FFD166"/>
-                </a:solidFill>
-                <a:latin typeface="JetBrains Mono" pitchFamily="49" charset="0"/>
-                <a:ea typeface="JetBrains Mono" pitchFamily="49" charset="-122"/>
-                <a:cs typeface="JetBrains Mono" pitchFamily="49" charset="-120"/>
-              </a:rPr>
-              <a:t>(skipped)</a:t>
-            </a:r>
-            <a:endParaRPr lang="en-US" sz="1040" dirty="0"/>
-          </a:p>
-        </p:txBody>
-      </p:sp>
-      <p:sp>
-        <p:nvSpPr>
-          <p:cNvPr id="22" name="Text 20"/>
-          <p:cNvSpPr/>
-          <p:nvPr/>
-        </p:nvSpPr>
-        <p:spPr>
-          <a:xfrm>
-            <a:off x="6463695" y="4084830"/>
-            <a:ext cx="4841216" cy="720082"/>
-          </a:xfrm>
-          <a:prstGeom prst="rect">
-            <a:avLst/>
-          </a:prstGeom>
-          <a:noFill/>
-          <a:ln/>
-        </p:spPr>
-        <p:txBody>
-          <a:bodyPr wrap="square" lIns="0" tIns="0" rIns="0" bIns="0" rtlCol="0" anchor="t">
-            <a:normAutofit/>
-          </a:bodyPr>
-          <a:lstStyle/>
-          <a:p>
-            <a:pPr algn="l" indent="0" marL="0">
-              <a:lnSpc>
-                <a:spcPts val="1605"/>
-              </a:lnSpc>
-              <a:buNone/>
-            </a:pPr>
-            <a:r>
-              <a:rPr lang="en-US" sz="1146" dirty="0">
-                <a:solidFill>
-                  <a:srgbClr val="1B1E26"/>
-                </a:solidFill>
-                <a:latin typeface="Space Grotesk" pitchFamily="34" charset="0"/>
-                <a:ea typeface="Space Grotesk" pitchFamily="34" charset="-122"/>
-                <a:cs typeface="Space Grotesk" pitchFamily="34" charset="-120"/>
-              </a:rPr>
-              <a:t>Each commit must follow the format. Ones that do not are ignored, so real changes can quietly miss the changelog.</a:t>
-            </a:r>
-            <a:endParaRPr lang="en-US" sz="1146" dirty="0"/>
-          </a:p>
-        </p:txBody>
-      </p:sp>
-      <p:sp>
-        <p:nvSpPr>
-          <p:cNvPr id="23" name="Shape 21"/>
-          <p:cNvSpPr/>
-          <p:nvPr/>
-        </p:nvSpPr>
-        <p:spPr>
-          <a:xfrm>
-            <a:off x="812800" y="5248808"/>
-            <a:ext cx="10566400" cy="796396"/>
-          </a:xfrm>
-          <a:prstGeom prst="roundRect">
-            <a:avLst>
-              <a:gd name="adj" fmla="val 12757"/>
-            </a:avLst>
-          </a:prstGeom>
-          <a:solidFill>
-            <a:srgbClr val="15181F"/>
-          </a:solidFill>
-          <a:ln/>
-        </p:spPr>
-      </p:sp>
-      <p:pic>
-        <p:nvPicPr>
-          <p:cNvPr id="24" name="Image 0" descr="Settings">    </p:cNvPr>
-          <p:cNvPicPr>
-            <a:picLocks noChangeAspect="1"/>
-          </p:cNvPicPr>
-          <p:nvPr/>
-        </p:nvPicPr>
-        <p:blipFill>
-          <a:blip r:embed="rId1"/>
-          <a:srcRect l="0" r="0" t="-51" b="-51"/>
-          <a:stretch/>
-        </p:blipFill>
-        <p:spPr>
-          <a:xfrm>
-            <a:off x="1066800" y="5507304"/>
-            <a:ext cx="222023" cy="279400"/>
-          </a:xfrm>
-          <a:prstGeom prst="rect">
-            <a:avLst/>
-          </a:prstGeom>
-        </p:spPr>
-      </p:pic>
-      <p:sp>
-        <p:nvSpPr>
-          <p:cNvPr id="25" name="Text 22"/>
-          <p:cNvSpPr/>
-          <p:nvPr/>
-        </p:nvSpPr>
-        <p:spPr>
-          <a:xfrm>
-            <a:off x="1441223" y="5360727"/>
-            <a:ext cx="9974496" cy="597958"/>
-          </a:xfrm>
-          <a:prstGeom prst="rect">
-            <a:avLst/>
-          </a:prstGeom>
-          <a:noFill/>
-          <a:ln/>
-        </p:spPr>
-        <p:txBody>
-          <a:bodyPr wrap="square" lIns="0" tIns="0" rIns="0" bIns="0" rtlCol="0" anchor="t">
-            <a:normAutofit/>
-          </a:bodyPr>
-          <a:lstStyle/>
-          <a:p>
-            <a:pPr algn="l" indent="0" marL="0">
-              <a:lnSpc>
-                <a:spcPts val="1960"/>
-              </a:lnSpc>
-              <a:buNone/>
-            </a:pPr>
-            <a:r>
-              <a:rPr lang="en-US" sz="1400" b="1" dirty="0">
-                <a:solidFill>
-                  <a:srgbClr val="F6F3EC"/>
-                </a:solidFill>
-                <a:latin typeface="Space Grotesk" pitchFamily="34" charset="0"/>
-                <a:ea typeface="Space Grotesk" pitchFamily="34" charset="-122"/>
-                <a:cs typeface="Space Grotesk" pitchFamily="34" charset="-120"/>
-              </a:rPr>
-              <a:t>Repo setting:</a:t>
-            </a:r>
-            <a:r>
-              <a:rPr lang="en-US" sz="1400" dirty="0">
-                <a:solidFill>
-                  <a:srgbClr val="F6F3EC"/>
-                </a:solidFill>
-                <a:latin typeface="Space Grotesk" pitchFamily="34" charset="0"/>
-                <a:ea typeface="Space Grotesk" pitchFamily="34" charset="-122"/>
-                <a:cs typeface="Space Grotesk" pitchFamily="34" charset="-120"/>
-              </a:rPr>
-              <a:t> make squash merges default to the PR title. Otherwise a one-commit PR uses that commit's message instead.</a:t>
-            </a:r>
-            <a:endParaRPr lang="en-US" sz="1400" dirty="0"/>
+              <a:t> picks the bump.</a:t>
+            </a:r>
+            <a:endParaRPr lang="en-US" sz="2600" dirty="0"/>
           </a:p>
         </p:txBody>
       </p:sp>
@@ -6104,9 +8103,1116 @@
 </p:sld>
 </file>
 
-<file path=ppt/slides/slide14.xml><?xml version="1.0" encoding="utf-8"?>
+<file path=ppt/slides/slide16.xml><?xml version="1.0" encoding="utf-8"?>
 <p:sld xmlns:a="http://schemas.openxmlformats.org/drawingml/2006/main" xmlns:r="http://schemas.openxmlformats.org/officeDocument/2006/relationships" xmlns:p="http://schemas.openxmlformats.org/presentationml/2006/main">
-  <p:cSld name="Slide 14">
+  <p:cSld name="Slide 16">
+    <p:bg>
+      <p:bgPr>
+        <a:solidFill>
+          <a:srgbClr val="ECE7DC"/>
+        </a:solidFill>
+      </p:bgPr>
+    </p:bg>
+    <p:spTree>
+      <p:nvGrpSpPr>
+        <p:cNvPr id="1" name=""/>
+        <p:cNvGrpSpPr/>
+        <p:nvPr/>
+      </p:nvGrpSpPr>
+      <p:grpSpPr>
+        <a:xfrm>
+          <a:off x="0" y="0"/>
+          <a:ext cx="0" cy="0"/>
+          <a:chOff x="0" y="0"/>
+          <a:chExt cx="0" cy="0"/>
+        </a:xfrm>
+      </p:grpSpPr>
+      <p:sp>
+        <p:nvSpPr>
+          <p:cNvPr id="2" name="Text 0"/>
+          <p:cNvSpPr/>
+          <p:nvPr>
+            <p:ph type="title"/>
+          </p:nvPr>
+        </p:nvSpPr>
+        <p:spPr>
+          <a:xfrm>
+            <a:off x="812800" y="812800"/>
+            <a:ext cx="10883392" cy="603741"/>
+          </a:xfrm>
+          <a:prstGeom prst="rect">
+            <a:avLst/>
+          </a:prstGeom>
+          <a:noFill/>
+          <a:ln/>
+        </p:spPr>
+        <p:txBody>
+          <a:bodyPr wrap="square" lIns="0" tIns="0" rIns="0" bIns="0" rtlCol="0" anchor="t">
+            <a:normAutofit/>
+          </a:bodyPr>
+          <a:lstStyle/>
+          <a:p>
+            <a:pPr algn="l" indent="0" marL="0">
+              <a:lnSpc>
+                <a:spcPts val="3960"/>
+              </a:lnSpc>
+              <a:buNone/>
+            </a:pPr>
+            <a:r>
+              <a:rPr lang="en-US" sz="3600" b="1" i="0" spc="-50" kern="0" dirty="0">
+                <a:solidFill>
+                  <a:srgbClr val="1B1E26"/>
+                </a:solidFill>
+                <a:latin typeface="Space Grotesk" pitchFamily="34" charset="0"/>
+                <a:ea typeface="Space Grotesk" pitchFamily="34" charset="-122"/>
+                <a:cs typeface="Space Grotesk" pitchFamily="34" charset="-120"/>
+              </a:rPr>
+              <a:t>Three changes, three outcomes</a:t>
+            </a:r>
+            <a:endParaRPr lang="en-US" sz="3600" dirty="0"/>
+          </a:p>
+        </p:txBody>
+      </p:sp>
+      <p:sp>
+        <p:nvSpPr>
+          <p:cNvPr id="3" name="Shape 1"/>
+          <p:cNvSpPr/>
+          <p:nvPr/>
+        </p:nvSpPr>
+        <p:spPr>
+          <a:xfrm>
+            <a:off x="819150" y="1676896"/>
+            <a:ext cx="3415884" cy="3193294"/>
+          </a:xfrm>
+          <a:prstGeom prst="roundRect">
+            <a:avLst>
+              <a:gd name="adj" fmla="val 2983"/>
+            </a:avLst>
+          </a:prstGeom>
+          <a:solidFill>
+            <a:srgbClr val="FFFDF8"/>
+          </a:solidFill>
+          <a:ln w="12700">
+            <a:solidFill>
+              <a:srgbClr val="D6CFC0"/>
+            </a:solidFill>
+            <a:prstDash val="solid"/>
+          </a:ln>
+        </p:spPr>
+      </p:sp>
+      <p:sp>
+        <p:nvSpPr>
+          <p:cNvPr id="4" name="Text 2"/>
+          <p:cNvSpPr/>
+          <p:nvPr/>
+        </p:nvSpPr>
+        <p:spPr>
+          <a:xfrm>
+            <a:off x="1028095" y="1885838"/>
+            <a:ext cx="3087934" cy="375897"/>
+          </a:xfrm>
+          <a:prstGeom prst="rect">
+            <a:avLst/>
+          </a:prstGeom>
+          <a:noFill/>
+          <a:ln/>
+        </p:spPr>
+        <p:txBody>
+          <a:bodyPr wrap="square" lIns="0" tIns="0" rIns="0" bIns="0" rtlCol="0" anchor="t">
+            <a:normAutofit/>
+          </a:bodyPr>
+          <a:lstStyle/>
+          <a:p>
+            <a:pPr algn="l" indent="0" marL="0">
+              <a:lnSpc>
+                <a:spcPts val="2400"/>
+              </a:lnSpc>
+              <a:buNone/>
+            </a:pPr>
+            <a:r>
+              <a:rPr lang="en-US" sz="2000" b="1" dirty="0">
+                <a:solidFill>
+                  <a:srgbClr val="1B1E26"/>
+                </a:solidFill>
+                <a:latin typeface="Space Grotesk" pitchFamily="34" charset="0"/>
+                <a:ea typeface="Space Grotesk" pitchFamily="34" charset="-122"/>
+                <a:cs typeface="Space Grotesk" pitchFamily="34" charset="-120"/>
+              </a:rPr>
+              <a:t>Python only</a:t>
+            </a:r>
+            <a:endParaRPr lang="en-US" sz="2000" dirty="0"/>
+          </a:p>
+        </p:txBody>
+      </p:sp>
+      <p:sp>
+        <p:nvSpPr>
+          <p:cNvPr id="5" name="Text 3"/>
+          <p:cNvSpPr/>
+          <p:nvPr/>
+        </p:nvSpPr>
+        <p:spPr>
+          <a:xfrm>
+            <a:off x="1028095" y="2325241"/>
+            <a:ext cx="3087934" cy="556986"/>
+          </a:xfrm>
+          <a:prstGeom prst="rect">
+            <a:avLst/>
+          </a:prstGeom>
+          <a:noFill/>
+          <a:ln/>
+        </p:spPr>
+        <p:txBody>
+          <a:bodyPr wrap="square" lIns="0" tIns="0" rIns="0" bIns="0" rtlCol="0" anchor="t">
+            <a:normAutofit/>
+          </a:bodyPr>
+          <a:lstStyle/>
+          <a:p>
+            <a:pPr algn="l" indent="0" marL="0">
+              <a:lnSpc>
+                <a:spcPts val="1820"/>
+              </a:lnSpc>
+              <a:buNone/>
+            </a:pPr>
+            <a:r>
+              <a:rPr lang="en-US" sz="1300" dirty="0">
+                <a:solidFill>
+                  <a:srgbClr val="1B1E26"/>
+                </a:solidFill>
+                <a:latin typeface="JetBrains Mono" pitchFamily="49" charset="0"/>
+                <a:ea typeface="JetBrains Mono" pitchFamily="49" charset="-122"/>
+                <a:cs typeface="JetBrains Mono" pitchFamily="49" charset="-120"/>
+              </a:rPr>
+              <a:t>fix(ml-pipeline): handle empty rows</a:t>
+            </a:r>
+            <a:endParaRPr lang="en-US" sz="1300" dirty="0"/>
+          </a:p>
+        </p:txBody>
+      </p:sp>
+      <p:sp>
+        <p:nvSpPr>
+          <p:cNvPr id="6" name="Text 4"/>
+          <p:cNvSpPr/>
+          <p:nvPr/>
+        </p:nvSpPr>
+        <p:spPr>
+          <a:xfrm>
+            <a:off x="1028095" y="2945718"/>
+            <a:ext cx="3087934" cy="270744"/>
+          </a:xfrm>
+          <a:prstGeom prst="rect">
+            <a:avLst/>
+          </a:prstGeom>
+          <a:noFill/>
+          <a:ln/>
+        </p:spPr>
+        <p:txBody>
+          <a:bodyPr wrap="square" lIns="0" tIns="0" rIns="0" bIns="0" rtlCol="0" anchor="t">
+            <a:normAutofit/>
+          </a:bodyPr>
+          <a:lstStyle/>
+          <a:p>
+            <a:pPr algn="l" indent="0" marL="0">
+              <a:lnSpc>
+                <a:spcPts val="1680"/>
+              </a:lnSpc>
+              <a:buNone/>
+            </a:pPr>
+            <a:r>
+              <a:rPr lang="en-US" sz="1200" dirty="0">
+                <a:solidFill>
+                  <a:srgbClr val="5D6270"/>
+                </a:solidFill>
+                <a:latin typeface="Space Grotesk" pitchFamily="34" charset="0"/>
+                <a:ea typeface="Space Grotesk" pitchFamily="34" charset="-122"/>
+                <a:cs typeface="Space Grotesk" pitchFamily="34" charset="-120"/>
+              </a:rPr>
+              <a:t>Files in ml-pipeline/</a:t>
+            </a:r>
+            <a:endParaRPr lang="en-US" sz="1200" dirty="0"/>
+          </a:p>
+        </p:txBody>
+      </p:sp>
+      <p:pic>
+        <p:nvPicPr>
+          <p:cNvPr id="7" name="Image 0" descr="line">    </p:cNvPr>
+          <p:cNvPicPr>
+            <a:picLocks noChangeAspect="1"/>
+          </p:cNvPicPr>
+          <p:nvPr/>
+        </p:nvPicPr>
+        <p:blipFill>
+          <a:blip r:embed="rId1"/>
+          <a:srcRect l="-12" r="-12" t="0" b="0"/>
+          <a:stretch/>
+        </p:blipFill>
+        <p:spPr>
+          <a:xfrm>
+            <a:off x="1028095" y="3279961"/>
+            <a:ext cx="2997994" cy="12700"/>
+          </a:xfrm>
+          <a:prstGeom prst="rect">
+            <a:avLst/>
+          </a:prstGeom>
+        </p:spPr>
+      </p:pic>
+      <p:sp>
+        <p:nvSpPr>
+          <p:cNvPr id="8" name="Text 5"/>
+          <p:cNvSpPr/>
+          <p:nvPr/>
+        </p:nvSpPr>
+        <p:spPr>
+          <a:xfrm>
+            <a:off x="1028095" y="3381561"/>
+            <a:ext cx="3087934" cy="291193"/>
+          </a:xfrm>
+          <a:prstGeom prst="rect">
+            <a:avLst/>
+          </a:prstGeom>
+          <a:noFill/>
+          <a:ln/>
+        </p:spPr>
+        <p:txBody>
+          <a:bodyPr wrap="square" lIns="0" tIns="0" rIns="0" bIns="0" rtlCol="0" anchor="t">
+            <a:normAutofit/>
+          </a:bodyPr>
+          <a:lstStyle/>
+          <a:p>
+            <a:pPr algn="l" indent="0" marL="0">
+              <a:lnSpc>
+                <a:spcPts val="1820"/>
+              </a:lnSpc>
+              <a:buNone/>
+            </a:pPr>
+            <a:r>
+              <a:rPr lang="en-US" sz="1300" b="1" dirty="0">
+                <a:solidFill>
+                  <a:srgbClr val="2F62B0"/>
+                </a:solidFill>
+                <a:latin typeface="JetBrains Mono" pitchFamily="49" charset="0"/>
+                <a:ea typeface="JetBrains Mono" pitchFamily="49" charset="-122"/>
+                <a:cs typeface="JetBrains Mono" pitchFamily="49" charset="-120"/>
+              </a:rPr>
+              <a:t>ml-pipeline 1.4.1</a:t>
+            </a:r>
+            <a:endParaRPr lang="en-US" sz="1300" dirty="0"/>
+          </a:p>
+        </p:txBody>
+      </p:sp>
+      <p:sp>
+        <p:nvSpPr>
+          <p:cNvPr id="9" name="Text 6"/>
+          <p:cNvSpPr/>
+          <p:nvPr/>
+        </p:nvSpPr>
+        <p:spPr>
+          <a:xfrm>
+            <a:off x="1028095" y="3736256"/>
+            <a:ext cx="3087934" cy="291193"/>
+          </a:xfrm>
+          <a:prstGeom prst="rect">
+            <a:avLst/>
+          </a:prstGeom>
+          <a:noFill/>
+          <a:ln/>
+        </p:spPr>
+        <p:txBody>
+          <a:bodyPr wrap="square" lIns="0" tIns="0" rIns="0" bIns="0" rtlCol="0" anchor="t">
+            <a:normAutofit/>
+          </a:bodyPr>
+          <a:lstStyle/>
+          <a:p>
+            <a:pPr algn="l" indent="0" marL="0">
+              <a:lnSpc>
+                <a:spcPts val="1820"/>
+              </a:lnSpc>
+              <a:buNone/>
+            </a:pPr>
+            <a:r>
+              <a:rPr lang="en-US" sz="1300" dirty="0">
+                <a:solidFill>
+                  <a:srgbClr val="5D6270"/>
+                </a:solidFill>
+                <a:latin typeface="JetBrains Mono" pitchFamily="49" charset="0"/>
+                <a:ea typeface="JetBrains Mono" pitchFamily="49" charset="-122"/>
+                <a:cs typeface="JetBrains Mono" pitchFamily="49" charset="-120"/>
+              </a:rPr>
+              <a:t>infra unchanged</a:t>
+            </a:r>
+            <a:endParaRPr lang="en-US" sz="1300" dirty="0"/>
+          </a:p>
+        </p:txBody>
+      </p:sp>
+      <p:sp>
+        <p:nvSpPr>
+          <p:cNvPr id="10" name="Text 7"/>
+          <p:cNvSpPr/>
+          <p:nvPr/>
+        </p:nvSpPr>
+        <p:spPr>
+          <a:xfrm>
+            <a:off x="1028095" y="4090950"/>
+            <a:ext cx="3087934" cy="556986"/>
+          </a:xfrm>
+          <a:prstGeom prst="rect">
+            <a:avLst/>
+          </a:prstGeom>
+          <a:noFill/>
+          <a:ln/>
+        </p:spPr>
+        <p:txBody>
+          <a:bodyPr wrap="square" lIns="0" tIns="0" rIns="0" bIns="0" rtlCol="0" anchor="t">
+            <a:normAutofit/>
+          </a:bodyPr>
+          <a:lstStyle/>
+          <a:p>
+            <a:pPr algn="l" indent="0" marL="0">
+              <a:lnSpc>
+                <a:spcPts val="1820"/>
+              </a:lnSpc>
+              <a:buNone/>
+            </a:pPr>
+            <a:r>
+              <a:rPr lang="en-US" sz="1300" dirty="0">
+                <a:solidFill>
+                  <a:srgbClr val="1B1E26"/>
+                </a:solidFill>
+                <a:latin typeface="Space Grotesk" pitchFamily="34" charset="0"/>
+                <a:ea typeface="Space Grotesk" pitchFamily="34" charset="-122"/>
+                <a:cs typeface="Space Grotesk" pitchFamily="34" charset="-120"/>
+              </a:rPr>
+              <a:t>Patch bump. One tag: ml-pipeline-v1.4.1</a:t>
+            </a:r>
+            <a:endParaRPr lang="en-US" sz="1300" dirty="0"/>
+          </a:p>
+        </p:txBody>
+      </p:sp>
+      <p:sp>
+        <p:nvSpPr>
+          <p:cNvPr id="11" name="Shape 8"/>
+          <p:cNvSpPr/>
+          <p:nvPr/>
+        </p:nvSpPr>
+        <p:spPr>
+          <a:xfrm>
+            <a:off x="4400134" y="1676896"/>
+            <a:ext cx="3415922" cy="3193294"/>
+          </a:xfrm>
+          <a:prstGeom prst="roundRect">
+            <a:avLst>
+              <a:gd name="adj" fmla="val 2983"/>
+            </a:avLst>
+          </a:prstGeom>
+          <a:solidFill>
+            <a:srgbClr val="FFFDF8"/>
+          </a:solidFill>
+          <a:ln w="12700">
+            <a:solidFill>
+              <a:srgbClr val="D6CFC0"/>
+            </a:solidFill>
+            <a:prstDash val="solid"/>
+          </a:ln>
+        </p:spPr>
+      </p:sp>
+      <p:sp>
+        <p:nvSpPr>
+          <p:cNvPr id="12" name="Text 9"/>
+          <p:cNvSpPr/>
+          <p:nvPr/>
+        </p:nvSpPr>
+        <p:spPr>
+          <a:xfrm>
+            <a:off x="4609080" y="1885838"/>
+            <a:ext cx="3087972" cy="375897"/>
+          </a:xfrm>
+          <a:prstGeom prst="rect">
+            <a:avLst/>
+          </a:prstGeom>
+          <a:noFill/>
+          <a:ln/>
+        </p:spPr>
+        <p:txBody>
+          <a:bodyPr wrap="square" lIns="0" tIns="0" rIns="0" bIns="0" rtlCol="0" anchor="t">
+            <a:normAutofit/>
+          </a:bodyPr>
+          <a:lstStyle/>
+          <a:p>
+            <a:pPr algn="l" indent="0" marL="0">
+              <a:lnSpc>
+                <a:spcPts val="2400"/>
+              </a:lnSpc>
+              <a:buNone/>
+            </a:pPr>
+            <a:r>
+              <a:rPr lang="en-US" sz="2000" b="1" dirty="0">
+                <a:solidFill>
+                  <a:srgbClr val="1B1E26"/>
+                </a:solidFill>
+                <a:latin typeface="Space Grotesk" pitchFamily="34" charset="0"/>
+                <a:ea typeface="Space Grotesk" pitchFamily="34" charset="-122"/>
+                <a:cs typeface="Space Grotesk" pitchFamily="34" charset="-120"/>
+              </a:rPr>
+              <a:t>Not Python</a:t>
+            </a:r>
+            <a:endParaRPr lang="en-US" sz="2000" dirty="0"/>
+          </a:p>
+        </p:txBody>
+      </p:sp>
+      <p:sp>
+        <p:nvSpPr>
+          <p:cNvPr id="13" name="Text 10"/>
+          <p:cNvSpPr/>
+          <p:nvPr/>
+        </p:nvSpPr>
+        <p:spPr>
+          <a:xfrm>
+            <a:off x="4609080" y="2325241"/>
+            <a:ext cx="3087972" cy="556986"/>
+          </a:xfrm>
+          <a:prstGeom prst="rect">
+            <a:avLst/>
+          </a:prstGeom>
+          <a:noFill/>
+          <a:ln/>
+        </p:spPr>
+        <p:txBody>
+          <a:bodyPr wrap="square" lIns="0" tIns="0" rIns="0" bIns="0" rtlCol="0" anchor="t">
+            <a:normAutofit/>
+          </a:bodyPr>
+          <a:lstStyle/>
+          <a:p>
+            <a:pPr algn="l" indent="0" marL="0">
+              <a:lnSpc>
+                <a:spcPts val="1820"/>
+              </a:lnSpc>
+              <a:buNone/>
+            </a:pPr>
+            <a:r>
+              <a:rPr lang="en-US" sz="1300" dirty="0">
+                <a:solidFill>
+                  <a:srgbClr val="1B1E26"/>
+                </a:solidFill>
+                <a:latin typeface="JetBrains Mono" pitchFamily="49" charset="0"/>
+                <a:ea typeface="JetBrains Mono" pitchFamily="49" charset="-122"/>
+                <a:cs typeface="JetBrains Mono" pitchFamily="49" charset="-120"/>
+              </a:rPr>
+              <a:t>feat(infra): add staging bucket</a:t>
+            </a:r>
+            <a:endParaRPr lang="en-US" sz="1300" dirty="0"/>
+          </a:p>
+        </p:txBody>
+      </p:sp>
+      <p:sp>
+        <p:nvSpPr>
+          <p:cNvPr id="14" name="Text 11"/>
+          <p:cNvSpPr/>
+          <p:nvPr/>
+        </p:nvSpPr>
+        <p:spPr>
+          <a:xfrm>
+            <a:off x="4609080" y="2945718"/>
+            <a:ext cx="3087972" cy="270744"/>
+          </a:xfrm>
+          <a:prstGeom prst="rect">
+            <a:avLst/>
+          </a:prstGeom>
+          <a:noFill/>
+          <a:ln/>
+        </p:spPr>
+        <p:txBody>
+          <a:bodyPr wrap="square" lIns="0" tIns="0" rIns="0" bIns="0" rtlCol="0" anchor="t">
+            <a:normAutofit/>
+          </a:bodyPr>
+          <a:lstStyle/>
+          <a:p>
+            <a:pPr algn="l" indent="0" marL="0">
+              <a:lnSpc>
+                <a:spcPts val="1680"/>
+              </a:lnSpc>
+              <a:buNone/>
+            </a:pPr>
+            <a:r>
+              <a:rPr lang="en-US" sz="1200" dirty="0">
+                <a:solidFill>
+                  <a:srgbClr val="5D6270"/>
+                </a:solidFill>
+                <a:latin typeface="Space Grotesk" pitchFamily="34" charset="0"/>
+                <a:ea typeface="Space Grotesk" pitchFamily="34" charset="-122"/>
+                <a:cs typeface="Space Grotesk" pitchFamily="34" charset="-120"/>
+              </a:rPr>
+              <a:t>Files in infra/</a:t>
+            </a:r>
+            <a:endParaRPr lang="en-US" sz="1200" dirty="0"/>
+          </a:p>
+        </p:txBody>
+      </p:sp>
+      <p:pic>
+        <p:nvPicPr>
+          <p:cNvPr id="15" name="Image 1" descr="line">    </p:cNvPr>
+          <p:cNvPicPr>
+            <a:picLocks noChangeAspect="1"/>
+          </p:cNvPicPr>
+          <p:nvPr/>
+        </p:nvPicPr>
+        <p:blipFill>
+          <a:blip r:embed="rId2"/>
+          <a:srcRect l="-16" r="-16" t="0" b="0"/>
+          <a:stretch/>
+        </p:blipFill>
+        <p:spPr>
+          <a:xfrm>
+            <a:off x="4609080" y="3279961"/>
+            <a:ext cx="2998032" cy="12700"/>
+          </a:xfrm>
+          <a:prstGeom prst="rect">
+            <a:avLst/>
+          </a:prstGeom>
+        </p:spPr>
+      </p:pic>
+      <p:sp>
+        <p:nvSpPr>
+          <p:cNvPr id="16" name="Text 12"/>
+          <p:cNvSpPr/>
+          <p:nvPr/>
+        </p:nvSpPr>
+        <p:spPr>
+          <a:xfrm>
+            <a:off x="4609080" y="3381561"/>
+            <a:ext cx="3087972" cy="291193"/>
+          </a:xfrm>
+          <a:prstGeom prst="rect">
+            <a:avLst/>
+          </a:prstGeom>
+          <a:noFill/>
+          <a:ln/>
+        </p:spPr>
+        <p:txBody>
+          <a:bodyPr wrap="square" lIns="0" tIns="0" rIns="0" bIns="0" rtlCol="0" anchor="t">
+            <a:normAutofit/>
+          </a:bodyPr>
+          <a:lstStyle/>
+          <a:p>
+            <a:pPr algn="l" indent="0" marL="0">
+              <a:lnSpc>
+                <a:spcPts val="1820"/>
+              </a:lnSpc>
+              <a:buNone/>
+            </a:pPr>
+            <a:r>
+              <a:rPr lang="en-US" sz="1300" dirty="0">
+                <a:solidFill>
+                  <a:srgbClr val="5D6270"/>
+                </a:solidFill>
+                <a:latin typeface="JetBrains Mono" pitchFamily="49" charset="0"/>
+                <a:ea typeface="JetBrains Mono" pitchFamily="49" charset="-122"/>
+                <a:cs typeface="JetBrains Mono" pitchFamily="49" charset="-120"/>
+              </a:rPr>
+              <a:t>ml-pipeline unchanged</a:t>
+            </a:r>
+            <a:endParaRPr lang="en-US" sz="1300" dirty="0"/>
+          </a:p>
+        </p:txBody>
+      </p:sp>
+      <p:sp>
+        <p:nvSpPr>
+          <p:cNvPr id="17" name="Text 13"/>
+          <p:cNvSpPr/>
+          <p:nvPr/>
+        </p:nvSpPr>
+        <p:spPr>
+          <a:xfrm>
+            <a:off x="4609080" y="3736256"/>
+            <a:ext cx="3087972" cy="291193"/>
+          </a:xfrm>
+          <a:prstGeom prst="rect">
+            <a:avLst/>
+          </a:prstGeom>
+          <a:noFill/>
+          <a:ln/>
+        </p:spPr>
+        <p:txBody>
+          <a:bodyPr wrap="square" lIns="0" tIns="0" rIns="0" bIns="0" rtlCol="0" anchor="t">
+            <a:normAutofit/>
+          </a:bodyPr>
+          <a:lstStyle/>
+          <a:p>
+            <a:pPr algn="l" indent="0" marL="0">
+              <a:lnSpc>
+                <a:spcPts val="1820"/>
+              </a:lnSpc>
+              <a:buNone/>
+            </a:pPr>
+            <a:r>
+              <a:rPr lang="en-US" sz="1300" b="1" dirty="0">
+                <a:solidFill>
+                  <a:srgbClr val="B8441B"/>
+                </a:solidFill>
+                <a:latin typeface="JetBrains Mono" pitchFamily="49" charset="0"/>
+                <a:ea typeface="JetBrains Mono" pitchFamily="49" charset="-122"/>
+                <a:cs typeface="JetBrains Mono" pitchFamily="49" charset="-120"/>
+              </a:rPr>
+              <a:t>infra 0.4.0</a:t>
+            </a:r>
+            <a:endParaRPr lang="en-US" sz="1300" dirty="0"/>
+          </a:p>
+        </p:txBody>
+      </p:sp>
+      <p:sp>
+        <p:nvSpPr>
+          <p:cNvPr id="18" name="Text 14"/>
+          <p:cNvSpPr/>
+          <p:nvPr/>
+        </p:nvSpPr>
+        <p:spPr>
+          <a:xfrm>
+            <a:off x="4609080" y="4090950"/>
+            <a:ext cx="3087972" cy="556986"/>
+          </a:xfrm>
+          <a:prstGeom prst="rect">
+            <a:avLst/>
+          </a:prstGeom>
+          <a:noFill/>
+          <a:ln/>
+        </p:spPr>
+        <p:txBody>
+          <a:bodyPr wrap="square" lIns="0" tIns="0" rIns="0" bIns="0" rtlCol="0" anchor="t">
+            <a:normAutofit/>
+          </a:bodyPr>
+          <a:lstStyle/>
+          <a:p>
+            <a:pPr algn="l" indent="0" marL="0">
+              <a:lnSpc>
+                <a:spcPts val="1820"/>
+              </a:lnSpc>
+              <a:buNone/>
+            </a:pPr>
+            <a:r>
+              <a:rPr lang="en-US" sz="1300" dirty="0">
+                <a:solidFill>
+                  <a:srgbClr val="1B1E26"/>
+                </a:solidFill>
+                <a:latin typeface="Space Grotesk" pitchFamily="34" charset="0"/>
+                <a:ea typeface="Space Grotesk" pitchFamily="34" charset="-122"/>
+                <a:cs typeface="Space Grotesk" pitchFamily="34" charset="-120"/>
+              </a:rPr>
+              <a:t>Minor bump. One tag: infra-v0.4.0</a:t>
+            </a:r>
+            <a:endParaRPr lang="en-US" sz="1300" dirty="0"/>
+          </a:p>
+        </p:txBody>
+      </p:sp>
+      <p:sp>
+        <p:nvSpPr>
+          <p:cNvPr id="19" name="Shape 15"/>
+          <p:cNvSpPr/>
+          <p:nvPr/>
+        </p:nvSpPr>
+        <p:spPr>
+          <a:xfrm>
+            <a:off x="7974806" y="1670546"/>
+            <a:ext cx="3404394" cy="3205994"/>
+          </a:xfrm>
+          <a:prstGeom prst="roundRect">
+            <a:avLst>
+              <a:gd name="adj" fmla="val 3169"/>
+            </a:avLst>
+          </a:prstGeom>
+          <a:solidFill>
+            <a:srgbClr val="15181F"/>
+          </a:solidFill>
+          <a:ln/>
+        </p:spPr>
+      </p:sp>
+      <p:sp>
+        <p:nvSpPr>
+          <p:cNvPr id="20" name="Shape 16"/>
+          <p:cNvSpPr/>
+          <p:nvPr/>
+        </p:nvSpPr>
+        <p:spPr>
+          <a:xfrm>
+            <a:off x="7974806" y="1670546"/>
+            <a:ext cx="3404394" cy="3205994"/>
+          </a:xfrm>
+          <a:custGeom>
+            <a:avLst/>
+            <a:gdLst/>
+            <a:ahLst/>
+            <a:cxnLst/>
+            <a:rect l="l" t="t" r="r" b="b"/>
+            <a:pathLst>
+              <a:path w="3404394" h="3205994">
+                <a:moveTo>
+                  <a:pt x="0" y="101600"/>
+                </a:moveTo>
+                <a:lnTo>
+                  <a:pt x="0" y="101600"/>
+                </a:lnTo>
+                <a:arcTo hR="101600" wR="101600" stAng="10800000" swAng="5400000"/>
+                <a:lnTo>
+                  <a:pt x="3302794" y="0"/>
+                </a:lnTo>
+                <a:arcTo hR="101600" wR="101600" stAng="16200000" swAng="5400000"/>
+                <a:lnTo>
+                  <a:pt x="3404394" y="101600"/>
+                </a:lnTo>
+                <a:arcTo hR="38100" wR="101600" stAng="0" swAng="-5400000"/>
+                <a:lnTo>
+                  <a:pt x="101600" y="63500"/>
+                </a:lnTo>
+                <a:arcTo hR="38100" wR="101600" stAng="16200000" swAng="-5400000"/>
+                <a:close/>
+              </a:path>
+            </a:pathLst>
+          </a:custGeom>
+          <a:solidFill>
+            <a:srgbClr val="FFD166"/>
+          </a:solidFill>
+          <a:ln/>
+        </p:spPr>
+      </p:sp>
+      <p:sp>
+        <p:nvSpPr>
+          <p:cNvPr id="21" name="Text 17"/>
+          <p:cNvSpPr/>
+          <p:nvPr/>
+        </p:nvSpPr>
+        <p:spPr>
+          <a:xfrm>
+            <a:off x="8178006" y="1936638"/>
+            <a:ext cx="3087934" cy="375897"/>
+          </a:xfrm>
+          <a:prstGeom prst="rect">
+            <a:avLst/>
+          </a:prstGeom>
+          <a:noFill/>
+          <a:ln/>
+        </p:spPr>
+        <p:txBody>
+          <a:bodyPr wrap="square" lIns="0" tIns="0" rIns="0" bIns="0" rtlCol="0" anchor="t">
+            <a:normAutofit/>
+          </a:bodyPr>
+          <a:lstStyle/>
+          <a:p>
+            <a:pPr algn="l" indent="0" marL="0">
+              <a:lnSpc>
+                <a:spcPts val="2400"/>
+              </a:lnSpc>
+              <a:buNone/>
+            </a:pPr>
+            <a:r>
+              <a:rPr lang="en-US" sz="2000" b="1" dirty="0">
+                <a:solidFill>
+                  <a:srgbClr val="F6F3EC"/>
+                </a:solidFill>
+                <a:latin typeface="Space Grotesk" pitchFamily="34" charset="0"/>
+                <a:ea typeface="Space Grotesk" pitchFamily="34" charset="-122"/>
+                <a:cs typeface="Space Grotesk" pitchFamily="34" charset="-120"/>
+              </a:rPr>
+              <a:t>Both</a:t>
+            </a:r>
+            <a:endParaRPr lang="en-US" sz="2000" dirty="0"/>
+          </a:p>
+        </p:txBody>
+      </p:sp>
+      <p:sp>
+        <p:nvSpPr>
+          <p:cNvPr id="22" name="Text 18"/>
+          <p:cNvSpPr/>
+          <p:nvPr/>
+        </p:nvSpPr>
+        <p:spPr>
+          <a:xfrm>
+            <a:off x="8178006" y="2376041"/>
+            <a:ext cx="3087934" cy="556986"/>
+          </a:xfrm>
+          <a:prstGeom prst="rect">
+            <a:avLst/>
+          </a:prstGeom>
+          <a:noFill/>
+          <a:ln/>
+        </p:spPr>
+        <p:txBody>
+          <a:bodyPr wrap="square" lIns="0" tIns="0" rIns="0" bIns="0" rtlCol="0" anchor="t">
+            <a:normAutofit/>
+          </a:bodyPr>
+          <a:lstStyle/>
+          <a:p>
+            <a:pPr algn="l" indent="0" marL="0">
+              <a:lnSpc>
+                <a:spcPts val="1820"/>
+              </a:lnSpc>
+              <a:buNone/>
+            </a:pPr>
+            <a:r>
+              <a:rPr lang="en-US" sz="1300" dirty="0">
+                <a:solidFill>
+                  <a:srgbClr val="F6F3EC"/>
+                </a:solidFill>
+                <a:latin typeface="JetBrains Mono" pitchFamily="49" charset="0"/>
+                <a:ea typeface="JetBrains Mono" pitchFamily="49" charset="-122"/>
+                <a:cs typeface="JetBrains Mono" pitchFamily="49" charset="-120"/>
+              </a:rPr>
+              <a:t>feat: add model registry support</a:t>
+            </a:r>
+            <a:endParaRPr lang="en-US" sz="1300" dirty="0"/>
+          </a:p>
+        </p:txBody>
+      </p:sp>
+      <p:sp>
+        <p:nvSpPr>
+          <p:cNvPr id="23" name="Text 19"/>
+          <p:cNvSpPr/>
+          <p:nvPr/>
+        </p:nvSpPr>
+        <p:spPr>
+          <a:xfrm>
+            <a:off x="8178006" y="2996518"/>
+            <a:ext cx="3087934" cy="270744"/>
+          </a:xfrm>
+          <a:prstGeom prst="rect">
+            <a:avLst/>
+          </a:prstGeom>
+          <a:noFill/>
+          <a:ln/>
+        </p:spPr>
+        <p:txBody>
+          <a:bodyPr wrap="square" lIns="0" tIns="0" rIns="0" bIns="0" rtlCol="0" anchor="t">
+            <a:normAutofit/>
+          </a:bodyPr>
+          <a:lstStyle/>
+          <a:p>
+            <a:pPr algn="l" indent="0" marL="0">
+              <a:lnSpc>
+                <a:spcPts val="1680"/>
+              </a:lnSpc>
+              <a:buNone/>
+            </a:pPr>
+            <a:r>
+              <a:rPr lang="en-US" sz="1200" dirty="0">
+                <a:solidFill>
+                  <a:srgbClr val="A3A9B6"/>
+                </a:solidFill>
+                <a:latin typeface="Space Grotesk" pitchFamily="34" charset="0"/>
+                <a:ea typeface="Space Grotesk" pitchFamily="34" charset="-122"/>
+                <a:cs typeface="Space Grotesk" pitchFamily="34" charset="-120"/>
+              </a:rPr>
+              <a:t>Files in both folders</a:t>
+            </a:r>
+            <a:endParaRPr lang="en-US" sz="1200" dirty="0"/>
+          </a:p>
+        </p:txBody>
+      </p:sp>
+      <p:pic>
+        <p:nvPicPr>
+          <p:cNvPr id="24" name="Image 2" descr="line">    </p:cNvPr>
+          <p:cNvPicPr>
+            <a:picLocks noChangeAspect="1"/>
+          </p:cNvPicPr>
+          <p:nvPr/>
+        </p:nvPicPr>
+        <p:blipFill>
+          <a:blip r:embed="rId3"/>
+          <a:srcRect l="-12" r="-12" t="0" b="0"/>
+          <a:stretch/>
+        </p:blipFill>
+        <p:spPr>
+          <a:xfrm>
+            <a:off x="8178006" y="3330761"/>
+            <a:ext cx="2997994" cy="12700"/>
+          </a:xfrm>
+          <a:prstGeom prst="rect">
+            <a:avLst/>
+          </a:prstGeom>
+        </p:spPr>
+      </p:pic>
+      <p:sp>
+        <p:nvSpPr>
+          <p:cNvPr id="25" name="Text 20"/>
+          <p:cNvSpPr/>
+          <p:nvPr/>
+        </p:nvSpPr>
+        <p:spPr>
+          <a:xfrm>
+            <a:off x="8178006" y="3432361"/>
+            <a:ext cx="3087934" cy="291193"/>
+          </a:xfrm>
+          <a:prstGeom prst="rect">
+            <a:avLst/>
+          </a:prstGeom>
+          <a:noFill/>
+          <a:ln/>
+        </p:spPr>
+        <p:txBody>
+          <a:bodyPr wrap="square" lIns="0" tIns="0" rIns="0" bIns="0" rtlCol="0" anchor="t">
+            <a:normAutofit/>
+          </a:bodyPr>
+          <a:lstStyle/>
+          <a:p>
+            <a:pPr algn="l" indent="0" marL="0">
+              <a:lnSpc>
+                <a:spcPts val="1820"/>
+              </a:lnSpc>
+              <a:buNone/>
+            </a:pPr>
+            <a:r>
+              <a:rPr lang="en-US" sz="1300" b="1" dirty="0">
+                <a:solidFill>
+                  <a:srgbClr val="7FB0FF"/>
+                </a:solidFill>
+                <a:latin typeface="JetBrains Mono" pitchFamily="49" charset="0"/>
+                <a:ea typeface="JetBrains Mono" pitchFamily="49" charset="-122"/>
+                <a:cs typeface="JetBrains Mono" pitchFamily="49" charset="-120"/>
+              </a:rPr>
+              <a:t>ml-pipeline 1.5.0</a:t>
+            </a:r>
+            <a:endParaRPr lang="en-US" sz="1300" dirty="0"/>
+          </a:p>
+        </p:txBody>
+      </p:sp>
+      <p:sp>
+        <p:nvSpPr>
+          <p:cNvPr id="26" name="Text 21"/>
+          <p:cNvSpPr/>
+          <p:nvPr/>
+        </p:nvSpPr>
+        <p:spPr>
+          <a:xfrm>
+            <a:off x="8178006" y="3787056"/>
+            <a:ext cx="3087934" cy="291193"/>
+          </a:xfrm>
+          <a:prstGeom prst="rect">
+            <a:avLst/>
+          </a:prstGeom>
+          <a:noFill/>
+          <a:ln/>
+        </p:spPr>
+        <p:txBody>
+          <a:bodyPr wrap="square" lIns="0" tIns="0" rIns="0" bIns="0" rtlCol="0" anchor="t">
+            <a:normAutofit/>
+          </a:bodyPr>
+          <a:lstStyle/>
+          <a:p>
+            <a:pPr algn="l" indent="0" marL="0">
+              <a:lnSpc>
+                <a:spcPts val="1820"/>
+              </a:lnSpc>
+              <a:buNone/>
+            </a:pPr>
+            <a:r>
+              <a:rPr lang="en-US" sz="1300" b="1" dirty="0">
+                <a:solidFill>
+                  <a:srgbClr val="FF8A5C"/>
+                </a:solidFill>
+                <a:latin typeface="JetBrains Mono" pitchFamily="49" charset="0"/>
+                <a:ea typeface="JetBrains Mono" pitchFamily="49" charset="-122"/>
+                <a:cs typeface="JetBrains Mono" pitchFamily="49" charset="-120"/>
+              </a:rPr>
+              <a:t>infra 0.4.0</a:t>
+            </a:r>
+            <a:endParaRPr lang="en-US" sz="1300" dirty="0"/>
+          </a:p>
+        </p:txBody>
+      </p:sp>
+      <p:sp>
+        <p:nvSpPr>
+          <p:cNvPr id="27" name="Text 22"/>
+          <p:cNvSpPr/>
+          <p:nvPr/>
+        </p:nvSpPr>
+        <p:spPr>
+          <a:xfrm>
+            <a:off x="8178006" y="4141750"/>
+            <a:ext cx="3087934" cy="556986"/>
+          </a:xfrm>
+          <a:prstGeom prst="rect">
+            <a:avLst/>
+          </a:prstGeom>
+          <a:noFill/>
+          <a:ln/>
+        </p:spPr>
+        <p:txBody>
+          <a:bodyPr wrap="square" lIns="0" tIns="0" rIns="0" bIns="0" rtlCol="0" anchor="t">
+            <a:normAutofit/>
+          </a:bodyPr>
+          <a:lstStyle/>
+          <a:p>
+            <a:pPr algn="l" indent="0" marL="0">
+              <a:lnSpc>
+                <a:spcPts val="1820"/>
+              </a:lnSpc>
+              <a:buNone/>
+            </a:pPr>
+            <a:r>
+              <a:rPr lang="en-US" sz="1300" dirty="0">
+                <a:solidFill>
+                  <a:srgbClr val="F6F3EC"/>
+                </a:solidFill>
+                <a:latin typeface="Space Grotesk" pitchFamily="34" charset="0"/>
+                <a:ea typeface="Space Grotesk" pitchFamily="34" charset="-122"/>
+                <a:cs typeface="Space Grotesk" pitchFamily="34" charset="-120"/>
+              </a:rPr>
+              <a:t>Both bumped, one release PR. Two tags, two releases.</a:t>
+            </a:r>
+            <a:endParaRPr lang="en-US" sz="1300" dirty="0"/>
+          </a:p>
+        </p:txBody>
+      </p:sp>
+      <p:sp>
+        <p:nvSpPr>
+          <p:cNvPr id="28" name="Text 23"/>
+          <p:cNvSpPr/>
+          <p:nvPr/>
+        </p:nvSpPr>
+        <p:spPr>
+          <a:xfrm>
+            <a:off x="812800" y="6206257"/>
+            <a:ext cx="10883392" cy="270744"/>
+          </a:xfrm>
+          <a:prstGeom prst="rect">
+            <a:avLst/>
+          </a:prstGeom>
+          <a:noFill/>
+          <a:ln/>
+        </p:spPr>
+        <p:txBody>
+          <a:bodyPr wrap="square" lIns="0" tIns="0" rIns="0" bIns="0" rtlCol="0" anchor="t">
+            <a:normAutofit/>
+          </a:bodyPr>
+          <a:lstStyle/>
+          <a:p>
+            <a:pPr algn="l" indent="0" marL="0">
+              <a:lnSpc>
+                <a:spcPts val="1680"/>
+              </a:lnSpc>
+              <a:buNone/>
+            </a:pPr>
+            <a:r>
+              <a:rPr lang="en-US" sz="1200" dirty="0">
+                <a:solidFill>
+                  <a:srgbClr val="5D6270"/>
+                </a:solidFill>
+                <a:latin typeface="Space Grotesk" pitchFamily="34" charset="0"/>
+                <a:ea typeface="Space Grotesk" pitchFamily="34" charset="-122"/>
+                <a:cs typeface="Space Grotesk" pitchFamily="34" charset="-120"/>
+              </a:rPr>
+              <a:t>Starting versions: ml-pipeline 1.4.0, infra 0.3.1. Root-only changes like README.md release nothing.</a:t>
+            </a:r>
+            <a:endParaRPr lang="en-US" sz="1200" dirty="0"/>
+          </a:p>
+        </p:txBody>
+      </p:sp>
+    </p:spTree>
+  </p:cSld>
+  <p:clrMapOvr>
+    <a:masterClrMapping/>
+  </p:clrMapOvr>
+</p:sld>
+</file>
+
+<file path=ppt/slides/slide17.xml><?xml version="1.0" encoding="utf-8"?>
+<p:sld xmlns:a="http://schemas.openxmlformats.org/drawingml/2006/main" xmlns:r="http://schemas.openxmlformats.org/officeDocument/2006/relationships" xmlns:p="http://schemas.openxmlformats.org/presentationml/2006/main">
+  <p:cSld name="Slide 17">
     <p:bg>
       <p:bgPr>
         <a:solidFill>
@@ -6139,7 +9245,7 @@
         <p:spPr>
           <a:xfrm>
             <a:off x="812800" y="812800"/>
-            <a:ext cx="10883392" cy="603741"/>
+            <a:ext cx="10883392" cy="521985"/>
           </a:xfrm>
           <a:prstGeom prst="rect">
             <a:avLst/>
@@ -6155,12 +9261,12 @@
           <a:p>
             <a:pPr algn="l" indent="0" marL="0">
               <a:lnSpc>
-                <a:spcPts val="3960"/>
-              </a:lnSpc>
-              <a:buNone/>
-            </a:pPr>
-            <a:r>
-              <a:rPr lang="en-US" sz="3600" b="1" i="0" spc="-50" kern="0" dirty="0">
+                <a:spcPts val="3403"/>
+              </a:lnSpc>
+              <a:buNone/>
+            </a:pPr>
+            <a:r>
+              <a:rPr lang="en-US" sz="3094" b="1" i="0" spc="-50" kern="0" dirty="0">
                 <a:solidFill>
                   <a:srgbClr val="1B1E26"/>
                 </a:solidFill>
@@ -6168,9 +9274,9 @@
                 <a:ea typeface="Space Grotesk" pitchFamily="34" charset="-122"/>
                 <a:cs typeface="Space Grotesk" pitchFamily="34" charset="-120"/>
               </a:rPr>
-              <a:t>Keep it honest: three guardrails</a:t>
-            </a:r>
-            <a:endParaRPr lang="en-US" sz="3600" dirty="0"/>
+              <a:t>PR titles vs. commits: what lands on main</a:t>
+            </a:r>
+            <a:endParaRPr lang="en-US" sz="3094" dirty="0"/>
           </a:p>
         </p:txBody>
       </p:sp>
@@ -6182,12 +9288,12 @@
         </p:nvSpPr>
         <p:spPr>
           <a:xfrm>
-            <a:off x="819150" y="1702296"/>
-            <a:ext cx="3407833" cy="2556404"/>
+            <a:off x="819150" y="1569740"/>
+            <a:ext cx="5118100" cy="3418719"/>
           </a:xfrm>
           <a:prstGeom prst="roundRect">
             <a:avLst>
-              <a:gd name="adj" fmla="val 4720"/>
+              <a:gd name="adj" fmla="val 2786"/>
             </a:avLst>
           </a:prstGeom>
           <a:solidFill>
@@ -6201,39 +9307,16 @@
           </a:ln>
         </p:spPr>
       </p:sp>
-      <p:pic>
-        <p:nvPicPr>
-          <p:cNvPr id="4" name="Image 0" descr="Check">    </p:cNvPr>
-          <p:cNvPicPr>
-            <a:picLocks noChangeAspect="1"/>
-          </p:cNvPicPr>
-          <p:nvPr/>
-        </p:nvPicPr>
-        <p:blipFill>
-          <a:blip r:embed="rId1"/>
-          <a:srcRect l="0" r="0" t="0" b="0"/>
-          <a:stretch/>
-        </p:blipFill>
-        <p:spPr>
-          <a:xfrm>
-            <a:off x="1078895" y="1962038"/>
-            <a:ext cx="355600" cy="355600"/>
-          </a:xfrm>
-          <a:prstGeom prst="rect">
-            <a:avLst/>
-          </a:prstGeom>
-        </p:spPr>
-      </p:pic>
-      <p:sp>
-        <p:nvSpPr>
-          <p:cNvPr id="5" name="Text 2"/>
-          <p:cNvSpPr/>
-          <p:nvPr/>
-        </p:nvSpPr>
-        <p:spPr>
-          <a:xfrm>
-            <a:off x="1078895" y="2419238"/>
-            <a:ext cx="2974993" cy="358397"/>
+      <p:sp>
+        <p:nvSpPr>
+          <p:cNvPr id="4" name="Text 2"/>
+          <p:cNvSpPr/>
+          <p:nvPr/>
+        </p:nvSpPr>
+        <p:spPr>
+          <a:xfrm>
+            <a:off x="1028095" y="1778682"/>
+            <a:ext cx="4841216" cy="308882"/>
           </a:xfrm>
           <a:prstGeom prst="rect">
             <a:avLst/>
@@ -6249,12 +9332,12 @@
           <a:p>
             <a:pPr algn="l" indent="0" marL="0">
               <a:lnSpc>
-                <a:spcPts val="2280"/>
-              </a:lnSpc>
-              <a:buNone/>
-            </a:pPr>
-            <a:r>
-              <a:rPr lang="en-US" sz="1900" b="1" dirty="0">
+                <a:spcPts val="1973"/>
+              </a:lnSpc>
+              <a:buNone/>
+            </a:pPr>
+            <a:r>
+              <a:rPr lang="en-US" sz="1644" b="1" dirty="0">
                 <a:solidFill>
                   <a:srgbClr val="1B1E26"/>
                 </a:solidFill>
@@ -6262,70 +9345,389 @@
                 <a:ea typeface="Space Grotesk" pitchFamily="34" charset="-122"/>
                 <a:cs typeface="Space Grotesk" pitchFamily="34" charset="-120"/>
               </a:rPr>
-              <a:t>Squash merge</a:t>
-            </a:r>
-            <a:endParaRPr lang="en-US" sz="1900" dirty="0"/>
-          </a:p>
-        </p:txBody>
-      </p:sp>
-      <p:sp>
-        <p:nvSpPr>
-          <p:cNvPr id="6" name="Text 3"/>
-          <p:cNvSpPr/>
-          <p:nvPr/>
-        </p:nvSpPr>
-        <p:spPr>
-          <a:xfrm>
-            <a:off x="1078895" y="2853835"/>
-            <a:ext cx="2974993" cy="1170517"/>
-          </a:xfrm>
-          <a:prstGeom prst="rect">
-            <a:avLst/>
-          </a:prstGeom>
-          <a:noFill/>
-          <a:ln/>
-        </p:spPr>
-        <p:txBody>
-          <a:bodyPr wrap="square" lIns="0" tIns="0" rIns="0" bIns="0" rtlCol="0" anchor="t">
-            <a:normAutofit/>
-          </a:bodyPr>
-          <a:lstStyle/>
-          <a:p>
-            <a:pPr algn="l" indent="0" marL="0">
-              <a:lnSpc>
-                <a:spcPts val="1960"/>
-              </a:lnSpc>
-              <a:buNone/>
-            </a:pPr>
-            <a:r>
-              <a:rPr lang="en-US" sz="1400" dirty="0">
-                <a:solidFill>
-                  <a:srgbClr val="5D6270"/>
+              <a:t>Squash merge </a:t>
+            </a:r>
+            <a:r>
+              <a:rPr lang="en-US" sz="1644" b="1" dirty="0">
+                <a:solidFill>
+                  <a:srgbClr val="B8441B"/>
                 </a:solidFill>
                 <a:latin typeface="Space Grotesk" pitchFamily="34" charset="0"/>
                 <a:ea typeface="Space Grotesk" pitchFamily="34" charset="-122"/>
                 <a:cs typeface="Space Grotesk" pitchFamily="34" charset="-120"/>
               </a:rPr>
-              <a:t>Use the PR title as the commit message. One clean commit per PR, so only titles need to be right.</a:t>
-            </a:r>
-            <a:endParaRPr lang="en-US" sz="1400" dirty="0"/>
-          </a:p>
-        </p:txBody>
-      </p:sp>
-      <p:sp>
-        <p:nvSpPr>
-          <p:cNvPr id="7" name="Shape 4"/>
-          <p:cNvSpPr/>
-          <p:nvPr/>
-        </p:nvSpPr>
-        <p:spPr>
-          <a:xfrm>
-            <a:off x="4392083" y="1702296"/>
-            <a:ext cx="3407833" cy="2556404"/>
+              <a:t>(recommended)</a:t>
+            </a:r>
+            <a:endParaRPr lang="en-US" sz="1644" dirty="0"/>
+          </a:p>
+        </p:txBody>
+      </p:sp>
+      <p:sp>
+        <p:nvSpPr>
+          <p:cNvPr id="5" name="Text 3"/>
+          <p:cNvSpPr/>
+          <p:nvPr/>
+        </p:nvSpPr>
+        <p:spPr>
+          <a:xfrm>
+            <a:off x="1028095" y="2163763"/>
+            <a:ext cx="4841216" cy="256910"/>
+          </a:xfrm>
+          <a:prstGeom prst="rect">
+            <a:avLst/>
+          </a:prstGeom>
+          <a:noFill/>
+          <a:ln/>
+        </p:spPr>
+        <p:txBody>
+          <a:bodyPr wrap="square" lIns="0" tIns="0" rIns="0" bIns="0" rtlCol="0" anchor="t">
+            <a:normAutofit/>
+          </a:bodyPr>
+          <a:lstStyle/>
+          <a:p>
+            <a:pPr algn="l" indent="0" marL="0">
+              <a:lnSpc>
+                <a:spcPts val="1586"/>
+              </a:lnSpc>
+              <a:buNone/>
+            </a:pPr>
+            <a:r>
+              <a:rPr lang="en-US" sz="1133" b="1" dirty="0">
+                <a:solidFill>
+                  <a:srgbClr val="5D6270"/>
+                </a:solidFill>
+                <a:latin typeface="Space Grotesk" pitchFamily="34" charset="0"/>
+                <a:ea typeface="Space Grotesk" pitchFamily="34" charset="-122"/>
+                <a:cs typeface="Space Grotesk" pitchFamily="34" charset="-120"/>
+              </a:rPr>
+              <a:t>Only the PR title matters</a:t>
+            </a:r>
+            <a:endParaRPr lang="en-US" sz="1133" dirty="0"/>
+          </a:p>
+        </p:txBody>
+      </p:sp>
+      <p:sp>
+        <p:nvSpPr>
+          <p:cNvPr id="6" name="Shape 4"/>
+          <p:cNvSpPr/>
+          <p:nvPr/>
+        </p:nvSpPr>
+        <p:spPr>
+          <a:xfrm>
+            <a:off x="1028095" y="2496877"/>
+            <a:ext cx="4700210" cy="1486354"/>
           </a:xfrm>
           <a:prstGeom prst="roundRect">
             <a:avLst>
-              <a:gd name="adj" fmla="val 4720"/>
+              <a:gd name="adj" fmla="val 5127"/>
+            </a:avLst>
+          </a:prstGeom>
+          <a:solidFill>
+            <a:srgbClr val="15181F"/>
+          </a:solidFill>
+          <a:ln/>
+        </p:spPr>
+      </p:sp>
+      <p:sp>
+        <p:nvSpPr>
+          <p:cNvPr id="7" name="Text 5"/>
+          <p:cNvSpPr/>
+          <p:nvPr/>
+        </p:nvSpPr>
+        <p:spPr>
+          <a:xfrm>
+            <a:off x="1231295" y="2649277"/>
+            <a:ext cx="4422624" cy="234459"/>
+          </a:xfrm>
+          <a:prstGeom prst="rect">
+            <a:avLst/>
+          </a:prstGeom>
+          <a:noFill/>
+          <a:ln/>
+        </p:spPr>
+        <p:txBody>
+          <a:bodyPr wrap="square" lIns="0" tIns="0" rIns="0" bIns="0" rtlCol="0" anchor="t">
+            <a:normAutofit/>
+          </a:bodyPr>
+          <a:lstStyle/>
+          <a:p>
+            <a:pPr algn="l" indent="0" marL="0">
+              <a:lnSpc>
+                <a:spcPts val="1456"/>
+              </a:lnSpc>
+              <a:buNone/>
+            </a:pPr>
+            <a:r>
+              <a:rPr lang="en-US" sz="1040" strike="sngStrike" dirty="0">
+                <a:solidFill>
+                  <a:srgbClr val="8A909C"/>
+                </a:solidFill>
+                <a:latin typeface="JetBrains Mono" pitchFamily="49" charset="0"/>
+                <a:ea typeface="JetBrains Mono" pitchFamily="49" charset="-122"/>
+                <a:cs typeface="JetBrains Mono" pitchFamily="49" charset="-120"/>
+              </a:rPr>
+              <a:t>wip</a:t>
+            </a:r>
+            <a:endParaRPr lang="en-US" sz="1040" dirty="0"/>
+          </a:p>
+        </p:txBody>
+      </p:sp>
+      <p:sp>
+        <p:nvSpPr>
+          <p:cNvPr id="8" name="Text 6"/>
+          <p:cNvSpPr/>
+          <p:nvPr/>
+        </p:nvSpPr>
+        <p:spPr>
+          <a:xfrm>
+            <a:off x="1231295" y="2896431"/>
+            <a:ext cx="4422624" cy="234421"/>
+          </a:xfrm>
+          <a:prstGeom prst="rect">
+            <a:avLst/>
+          </a:prstGeom>
+          <a:noFill/>
+          <a:ln/>
+        </p:spPr>
+        <p:txBody>
+          <a:bodyPr wrap="square" lIns="0" tIns="0" rIns="0" bIns="0" rtlCol="0" anchor="t">
+            <a:normAutofit/>
+          </a:bodyPr>
+          <a:lstStyle/>
+          <a:p>
+            <a:pPr algn="l" indent="0" marL="0">
+              <a:lnSpc>
+                <a:spcPts val="1456"/>
+              </a:lnSpc>
+              <a:buNone/>
+            </a:pPr>
+            <a:r>
+              <a:rPr lang="en-US" sz="1040" strike="sngStrike" dirty="0">
+                <a:solidFill>
+                  <a:srgbClr val="8A909C"/>
+                </a:solidFill>
+                <a:latin typeface="JetBrains Mono" pitchFamily="49" charset="0"/>
+                <a:ea typeface="JetBrains Mono" pitchFamily="49" charset="-122"/>
+                <a:cs typeface="JetBrains Mono" pitchFamily="49" charset="-120"/>
+              </a:rPr>
+              <a:t>fix typo</a:t>
+            </a:r>
+            <a:endParaRPr lang="en-US" sz="1040" dirty="0"/>
+          </a:p>
+        </p:txBody>
+      </p:sp>
+      <p:sp>
+        <p:nvSpPr>
+          <p:cNvPr id="9" name="Text 7"/>
+          <p:cNvSpPr/>
+          <p:nvPr/>
+        </p:nvSpPr>
+        <p:spPr>
+          <a:xfrm>
+            <a:off x="1231295" y="3143560"/>
+            <a:ext cx="4422624" cy="234459"/>
+          </a:xfrm>
+          <a:prstGeom prst="rect">
+            <a:avLst/>
+          </a:prstGeom>
+          <a:noFill/>
+          <a:ln/>
+        </p:spPr>
+        <p:txBody>
+          <a:bodyPr wrap="square" lIns="0" tIns="0" rIns="0" bIns="0" rtlCol="0" anchor="t">
+            <a:normAutofit/>
+          </a:bodyPr>
+          <a:lstStyle/>
+          <a:p>
+            <a:pPr algn="l" indent="0" marL="0">
+              <a:lnSpc>
+                <a:spcPts val="1456"/>
+              </a:lnSpc>
+              <a:buNone/>
+            </a:pPr>
+            <a:r>
+              <a:rPr lang="en-US" sz="1040" strike="sngStrike" dirty="0">
+                <a:solidFill>
+                  <a:srgbClr val="8A909C"/>
+                </a:solidFill>
+                <a:latin typeface="JetBrains Mono" pitchFamily="49" charset="0"/>
+                <a:ea typeface="JetBrains Mono" pitchFamily="49" charset="-122"/>
+                <a:cs typeface="JetBrains Mono" pitchFamily="49" charset="-120"/>
+              </a:rPr>
+              <a:t>try again</a:t>
+            </a:r>
+            <a:endParaRPr lang="en-US" sz="1040" dirty="0"/>
+          </a:p>
+        </p:txBody>
+      </p:sp>
+      <p:sp>
+        <p:nvSpPr>
+          <p:cNvPr id="10" name="Text 8"/>
+          <p:cNvSpPr/>
+          <p:nvPr/>
+        </p:nvSpPr>
+        <p:spPr>
+          <a:xfrm>
+            <a:off x="1231295" y="3390714"/>
+            <a:ext cx="4422624" cy="218357"/>
+          </a:xfrm>
+          <a:prstGeom prst="rect">
+            <a:avLst/>
+          </a:prstGeom>
+          <a:noFill/>
+          <a:ln/>
+        </p:spPr>
+        <p:txBody>
+          <a:bodyPr wrap="square" lIns="0" tIns="0" rIns="0" bIns="0" rtlCol="0" anchor="t">
+            <a:normAutofit/>
+          </a:bodyPr>
+          <a:lstStyle/>
+          <a:p>
+            <a:pPr algn="l" indent="0" marL="0">
+              <a:lnSpc>
+                <a:spcPts val="1323"/>
+              </a:lnSpc>
+              <a:buNone/>
+            </a:pPr>
+            <a:r>
+              <a:rPr lang="en-US" sz="945" dirty="0">
+                <a:solidFill>
+                  <a:srgbClr val="A3A9B6"/>
+                </a:solidFill>
+                <a:latin typeface="Space Grotesk" pitchFamily="34" charset="0"/>
+                <a:ea typeface="Space Grotesk" pitchFamily="34" charset="-122"/>
+                <a:cs typeface="Space Grotesk" pitchFamily="34" charset="-120"/>
+              </a:rPr>
+              <a:t>squashed into one commit on main:</a:t>
+            </a:r>
+            <a:endParaRPr lang="en-US" sz="945" dirty="0"/>
+          </a:p>
+        </p:txBody>
+      </p:sp>
+      <p:sp>
+        <p:nvSpPr>
+          <p:cNvPr id="11" name="Text 9"/>
+          <p:cNvSpPr/>
+          <p:nvPr/>
+        </p:nvSpPr>
+        <p:spPr>
+          <a:xfrm>
+            <a:off x="1231295" y="3621770"/>
+            <a:ext cx="4422624" cy="234459"/>
+          </a:xfrm>
+          <a:prstGeom prst="rect">
+            <a:avLst/>
+          </a:prstGeom>
+          <a:noFill/>
+          <a:ln/>
+        </p:spPr>
+        <p:txBody>
+          <a:bodyPr wrap="square" lIns="0" tIns="0" rIns="0" bIns="0" rtlCol="0" anchor="t">
+            <a:normAutofit/>
+          </a:bodyPr>
+          <a:lstStyle/>
+          <a:p>
+            <a:pPr algn="l" indent="0" marL="0">
+              <a:lnSpc>
+                <a:spcPts val="1456"/>
+              </a:lnSpc>
+              <a:buNone/>
+            </a:pPr>
+            <a:r>
+              <a:rPr lang="en-US" sz="1040" b="1" dirty="0">
+                <a:solidFill>
+                  <a:srgbClr val="FF8A5C"/>
+                </a:solidFill>
+                <a:latin typeface="JetBrains Mono" pitchFamily="49" charset="0"/>
+                <a:ea typeface="JetBrains Mono" pitchFamily="49" charset="-122"/>
+                <a:cs typeface="JetBrains Mono" pitchFamily="49" charset="-120"/>
+              </a:rPr>
+              <a:t>feat(reports): export to CSV</a:t>
+            </a:r>
+            <a:endParaRPr lang="en-US" sz="1040" dirty="0"/>
+          </a:p>
+        </p:txBody>
+      </p:sp>
+      <p:sp>
+        <p:nvSpPr>
+          <p:cNvPr id="12" name="Text 10"/>
+          <p:cNvSpPr/>
+          <p:nvPr/>
+        </p:nvSpPr>
+        <p:spPr>
+          <a:xfrm>
+            <a:off x="1028095" y="4084824"/>
+            <a:ext cx="4841216" cy="720082"/>
+          </a:xfrm>
+          <a:prstGeom prst="rect">
+            <a:avLst/>
+          </a:prstGeom>
+          <a:noFill/>
+          <a:ln/>
+        </p:spPr>
+        <p:txBody>
+          <a:bodyPr wrap="square" lIns="0" tIns="0" rIns="0" bIns="0" rtlCol="0" anchor="t">
+            <a:normAutofit/>
+          </a:bodyPr>
+          <a:lstStyle/>
+          <a:p>
+            <a:pPr algn="l" indent="0" marL="0">
+              <a:lnSpc>
+                <a:spcPts val="1880"/>
+              </a:lnSpc>
+              <a:buNone/>
+            </a:pPr>
+            <a:r>
+              <a:rPr lang="en-US" sz="1343" dirty="0">
+                <a:solidFill>
+                  <a:srgbClr val="1B1E26"/>
+                </a:solidFill>
+                <a:latin typeface="Space Grotesk" pitchFamily="34" charset="0"/>
+                <a:ea typeface="Space Grotesk" pitchFamily="34" charset="-122"/>
+                <a:cs typeface="Space Grotesk" pitchFamily="34" charset="-120"/>
+              </a:rPr>
+              <a:t>Messy branch commits are fine. The </a:t>
+            </a:r>
+            <a:r>
+              <a:rPr lang="en-US" sz="1343" b="1" dirty="0">
+                <a:solidFill>
+                  <a:srgbClr val="1B1E26"/>
+                </a:solidFill>
+                <a:latin typeface="Space Grotesk" pitchFamily="34" charset="0"/>
+                <a:ea typeface="Space Grotesk" pitchFamily="34" charset="-122"/>
+                <a:cs typeface="Space Grotesk" pitchFamily="34" charset="-120"/>
+              </a:rPr>
+              <a:t>PR title</a:t>
+            </a:r>
+            <a:r>
+              <a:rPr lang="en-US" sz="1343" dirty="0">
+                <a:solidFill>
+                  <a:srgbClr val="1B1E26"/>
+                </a:solidFill>
+                <a:latin typeface="Space Grotesk" pitchFamily="34" charset="0"/>
+                <a:ea typeface="Space Grotesk" pitchFamily="34" charset="-122"/>
+                <a:cs typeface="Space Grotesk" pitchFamily="34" charset="-120"/>
+              </a:rPr>
+              <a:t> becomes the single commit Release Please reads.</a:t>
+            </a:r>
+            <a:endParaRPr lang="en-US" sz="1343" dirty="0"/>
+          </a:p>
+        </p:txBody>
+      </p:sp>
+      <p:sp>
+        <p:nvSpPr>
+          <p:cNvPr id="13" name="Shape 11"/>
+          <p:cNvSpPr/>
+          <p:nvPr/>
+        </p:nvSpPr>
+        <p:spPr>
+          <a:xfrm>
+            <a:off x="6254750" y="1569740"/>
+            <a:ext cx="5118100" cy="3418719"/>
+          </a:xfrm>
+          <a:prstGeom prst="roundRect">
+            <a:avLst>
+              <a:gd name="adj" fmla="val 2786"/>
             </a:avLst>
           </a:prstGeom>
           <a:solidFill>
@@ -6339,23 +9741,452 @@
           </a:ln>
         </p:spPr>
       </p:sp>
+      <p:sp>
+        <p:nvSpPr>
+          <p:cNvPr id="14" name="Text 12"/>
+          <p:cNvSpPr/>
+          <p:nvPr/>
+        </p:nvSpPr>
+        <p:spPr>
+          <a:xfrm>
+            <a:off x="6463695" y="1778682"/>
+            <a:ext cx="4841216" cy="308882"/>
+          </a:xfrm>
+          <a:prstGeom prst="rect">
+            <a:avLst/>
+          </a:prstGeom>
+          <a:noFill/>
+          <a:ln/>
+        </p:spPr>
+        <p:txBody>
+          <a:bodyPr wrap="square" lIns="0" tIns="0" rIns="0" bIns="0" rtlCol="0" anchor="t">
+            <a:normAutofit/>
+          </a:bodyPr>
+          <a:lstStyle/>
+          <a:p>
+            <a:pPr algn="l" indent="0" marL="0">
+              <a:lnSpc>
+                <a:spcPts val="1973"/>
+              </a:lnSpc>
+              <a:buNone/>
+            </a:pPr>
+            <a:r>
+              <a:rPr lang="en-US" sz="1644" b="1" dirty="0">
+                <a:solidFill>
+                  <a:srgbClr val="1B1E26"/>
+                </a:solidFill>
+                <a:latin typeface="Space Grotesk" pitchFamily="34" charset="0"/>
+                <a:ea typeface="Space Grotesk" pitchFamily="34" charset="-122"/>
+                <a:cs typeface="Space Grotesk" pitchFamily="34" charset="-120"/>
+              </a:rPr>
+              <a:t>Merge commit or rebase</a:t>
+            </a:r>
+            <a:endParaRPr lang="en-US" sz="1644" dirty="0"/>
+          </a:p>
+        </p:txBody>
+      </p:sp>
+      <p:sp>
+        <p:nvSpPr>
+          <p:cNvPr id="15" name="Text 13"/>
+          <p:cNvSpPr/>
+          <p:nvPr/>
+        </p:nvSpPr>
+        <p:spPr>
+          <a:xfrm>
+            <a:off x="6463695" y="2163763"/>
+            <a:ext cx="4841216" cy="256910"/>
+          </a:xfrm>
+          <a:prstGeom prst="rect">
+            <a:avLst/>
+          </a:prstGeom>
+          <a:noFill/>
+          <a:ln/>
+        </p:spPr>
+        <p:txBody>
+          <a:bodyPr wrap="square" lIns="0" tIns="0" rIns="0" bIns="0" rtlCol="0" anchor="t">
+            <a:normAutofit/>
+          </a:bodyPr>
+          <a:lstStyle/>
+          <a:p>
+            <a:pPr algn="l" indent="0" marL="0">
+              <a:lnSpc>
+                <a:spcPts val="1586"/>
+              </a:lnSpc>
+              <a:buNone/>
+            </a:pPr>
+            <a:r>
+              <a:rPr lang="en-US" sz="1133" b="1" dirty="0">
+                <a:solidFill>
+                  <a:srgbClr val="5D6270"/>
+                </a:solidFill>
+                <a:latin typeface="Space Grotesk" pitchFamily="34" charset="0"/>
+                <a:ea typeface="Space Grotesk" pitchFamily="34" charset="-122"/>
+                <a:cs typeface="Space Grotesk" pitchFamily="34" charset="-120"/>
+              </a:rPr>
+              <a:t>Every commit matters</a:t>
+            </a:r>
+            <a:endParaRPr lang="en-US" sz="1133" dirty="0"/>
+          </a:p>
+        </p:txBody>
+      </p:sp>
+      <p:sp>
+        <p:nvSpPr>
+          <p:cNvPr id="16" name="Shape 14"/>
+          <p:cNvSpPr/>
+          <p:nvPr/>
+        </p:nvSpPr>
+        <p:spPr>
+          <a:xfrm>
+            <a:off x="6463695" y="2496877"/>
+            <a:ext cx="4700210" cy="1486354"/>
+          </a:xfrm>
+          <a:prstGeom prst="roundRect">
+            <a:avLst>
+              <a:gd name="adj" fmla="val 5127"/>
+            </a:avLst>
+          </a:prstGeom>
+          <a:solidFill>
+            <a:srgbClr val="15181F"/>
+          </a:solidFill>
+          <a:ln/>
+        </p:spPr>
+      </p:sp>
+      <p:sp>
+        <p:nvSpPr>
+          <p:cNvPr id="17" name="Text 15"/>
+          <p:cNvSpPr/>
+          <p:nvPr/>
+        </p:nvSpPr>
+        <p:spPr>
+          <a:xfrm>
+            <a:off x="6666895" y="2649277"/>
+            <a:ext cx="4422624" cy="218357"/>
+          </a:xfrm>
+          <a:prstGeom prst="rect">
+            <a:avLst/>
+          </a:prstGeom>
+          <a:noFill/>
+          <a:ln/>
+        </p:spPr>
+        <p:txBody>
+          <a:bodyPr wrap="square" lIns="0" tIns="0" rIns="0" bIns="0" rtlCol="0" anchor="t">
+            <a:normAutofit/>
+          </a:bodyPr>
+          <a:lstStyle/>
+          <a:p>
+            <a:pPr algn="l" indent="0" marL="0">
+              <a:lnSpc>
+                <a:spcPts val="1323"/>
+              </a:lnSpc>
+              <a:buNone/>
+            </a:pPr>
+            <a:r>
+              <a:rPr lang="en-US" sz="945" dirty="0">
+                <a:solidFill>
+                  <a:srgbClr val="A3A9B6"/>
+                </a:solidFill>
+                <a:latin typeface="Space Grotesk" pitchFamily="34" charset="0"/>
+                <a:ea typeface="Space Grotesk" pitchFamily="34" charset="-122"/>
+                <a:cs typeface="Space Grotesk" pitchFamily="34" charset="-120"/>
+              </a:rPr>
+              <a:t>every branch commit lands on main:</a:t>
+            </a:r>
+            <a:endParaRPr lang="en-US" sz="945" dirty="0"/>
+          </a:p>
+        </p:txBody>
+      </p:sp>
+      <p:sp>
+        <p:nvSpPr>
+          <p:cNvPr id="18" name="Text 16"/>
+          <p:cNvSpPr/>
+          <p:nvPr/>
+        </p:nvSpPr>
+        <p:spPr>
+          <a:xfrm>
+            <a:off x="6666895" y="2880333"/>
+            <a:ext cx="4422624" cy="234421"/>
+          </a:xfrm>
+          <a:prstGeom prst="rect">
+            <a:avLst/>
+          </a:prstGeom>
+          <a:noFill/>
+          <a:ln/>
+        </p:spPr>
+        <p:txBody>
+          <a:bodyPr wrap="square" lIns="0" tIns="0" rIns="0" bIns="0" rtlCol="0" anchor="t">
+            <a:normAutofit/>
+          </a:bodyPr>
+          <a:lstStyle/>
+          <a:p>
+            <a:pPr algn="l" indent="0" marL="0">
+              <a:lnSpc>
+                <a:spcPts val="1456"/>
+              </a:lnSpc>
+              <a:buNone/>
+            </a:pPr>
+            <a:r>
+              <a:rPr lang="en-US" sz="1040" b="1" dirty="0">
+                <a:solidFill>
+                  <a:srgbClr val="7FB0FF"/>
+                </a:solidFill>
+                <a:latin typeface="JetBrains Mono" pitchFamily="49" charset="0"/>
+                <a:ea typeface="JetBrains Mono" pitchFamily="49" charset="-122"/>
+                <a:cs typeface="JetBrains Mono" pitchFamily="49" charset="-120"/>
+              </a:rPr>
+              <a:t>feat(reports): export to CSV</a:t>
+            </a:r>
+            <a:endParaRPr lang="en-US" sz="1040" dirty="0"/>
+          </a:p>
+        </p:txBody>
+      </p:sp>
+      <p:sp>
+        <p:nvSpPr>
+          <p:cNvPr id="19" name="Text 17"/>
+          <p:cNvSpPr/>
+          <p:nvPr/>
+        </p:nvSpPr>
+        <p:spPr>
+          <a:xfrm>
+            <a:off x="6666895" y="3127449"/>
+            <a:ext cx="4422624" cy="234459"/>
+          </a:xfrm>
+          <a:prstGeom prst="rect">
+            <a:avLst/>
+          </a:prstGeom>
+          <a:noFill/>
+          <a:ln/>
+        </p:spPr>
+        <p:txBody>
+          <a:bodyPr wrap="square" lIns="0" tIns="0" rIns="0" bIns="0" rtlCol="0" anchor="t">
+            <a:normAutofit/>
+          </a:bodyPr>
+          <a:lstStyle/>
+          <a:p>
+            <a:pPr algn="l" indent="0" marL="0">
+              <a:lnSpc>
+                <a:spcPts val="1456"/>
+              </a:lnSpc>
+              <a:buNone/>
+            </a:pPr>
+            <a:r>
+              <a:rPr lang="en-US" sz="1040" dirty="0">
+                <a:solidFill>
+                  <a:srgbClr val="E6E2D8"/>
+                </a:solidFill>
+                <a:latin typeface="JetBrains Mono" pitchFamily="49" charset="0"/>
+                <a:ea typeface="JetBrains Mono" pitchFamily="49" charset="-122"/>
+                <a:cs typeface="JetBrains Mono" pitchFamily="49" charset="-120"/>
+              </a:rPr>
+              <a:t>wip </a:t>
+            </a:r>
+            <a:r>
+              <a:rPr lang="en-US" sz="1040" dirty="0">
+                <a:solidFill>
+                  <a:srgbClr val="FFD166"/>
+                </a:solidFill>
+                <a:latin typeface="JetBrains Mono" pitchFamily="49" charset="0"/>
+                <a:ea typeface="JetBrains Mono" pitchFamily="49" charset="-122"/>
+                <a:cs typeface="JetBrains Mono" pitchFamily="49" charset="-120"/>
+              </a:rPr>
+              <a:t>(skipped)</a:t>
+            </a:r>
+            <a:endParaRPr lang="en-US" sz="1040" dirty="0"/>
+          </a:p>
+        </p:txBody>
+      </p:sp>
+      <p:sp>
+        <p:nvSpPr>
+          <p:cNvPr id="20" name="Text 18"/>
+          <p:cNvSpPr/>
+          <p:nvPr/>
+        </p:nvSpPr>
+        <p:spPr>
+          <a:xfrm>
+            <a:off x="6666895" y="3374616"/>
+            <a:ext cx="4422624" cy="234459"/>
+          </a:xfrm>
+          <a:prstGeom prst="rect">
+            <a:avLst/>
+          </a:prstGeom>
+          <a:noFill/>
+          <a:ln/>
+        </p:spPr>
+        <p:txBody>
+          <a:bodyPr wrap="square" lIns="0" tIns="0" rIns="0" bIns="0" rtlCol="0" anchor="t">
+            <a:normAutofit/>
+          </a:bodyPr>
+          <a:lstStyle/>
+          <a:p>
+            <a:pPr algn="l" indent="0" marL="0">
+              <a:lnSpc>
+                <a:spcPts val="1456"/>
+              </a:lnSpc>
+              <a:buNone/>
+            </a:pPr>
+            <a:r>
+              <a:rPr lang="en-US" sz="1040" dirty="0">
+                <a:solidFill>
+                  <a:srgbClr val="E6E2D8"/>
+                </a:solidFill>
+                <a:latin typeface="JetBrains Mono" pitchFamily="49" charset="0"/>
+                <a:ea typeface="JetBrains Mono" pitchFamily="49" charset="-122"/>
+                <a:cs typeface="JetBrains Mono" pitchFamily="49" charset="-120"/>
+              </a:rPr>
+              <a:t>fix typo </a:t>
+            </a:r>
+            <a:r>
+              <a:rPr lang="en-US" sz="1040" dirty="0">
+                <a:solidFill>
+                  <a:srgbClr val="FFD166"/>
+                </a:solidFill>
+                <a:latin typeface="JetBrains Mono" pitchFamily="49" charset="0"/>
+                <a:ea typeface="JetBrains Mono" pitchFamily="49" charset="-122"/>
+                <a:cs typeface="JetBrains Mono" pitchFamily="49" charset="-120"/>
+              </a:rPr>
+              <a:t>(skipped)</a:t>
+            </a:r>
+            <a:endParaRPr lang="en-US" sz="1040" dirty="0"/>
+          </a:p>
+        </p:txBody>
+      </p:sp>
+      <p:sp>
+        <p:nvSpPr>
+          <p:cNvPr id="21" name="Text 19"/>
+          <p:cNvSpPr/>
+          <p:nvPr/>
+        </p:nvSpPr>
+        <p:spPr>
+          <a:xfrm>
+            <a:off x="6666895" y="3621770"/>
+            <a:ext cx="4422624" cy="234459"/>
+          </a:xfrm>
+          <a:prstGeom prst="rect">
+            <a:avLst/>
+          </a:prstGeom>
+          <a:noFill/>
+          <a:ln/>
+        </p:spPr>
+        <p:txBody>
+          <a:bodyPr wrap="square" lIns="0" tIns="0" rIns="0" bIns="0" rtlCol="0" anchor="t">
+            <a:normAutofit/>
+          </a:bodyPr>
+          <a:lstStyle/>
+          <a:p>
+            <a:pPr algn="l" indent="0" marL="0">
+              <a:lnSpc>
+                <a:spcPts val="1456"/>
+              </a:lnSpc>
+              <a:buNone/>
+            </a:pPr>
+            <a:r>
+              <a:rPr lang="en-US" sz="1040" dirty="0">
+                <a:solidFill>
+                  <a:srgbClr val="E6E2D8"/>
+                </a:solidFill>
+                <a:latin typeface="JetBrains Mono" pitchFamily="49" charset="0"/>
+                <a:ea typeface="JetBrains Mono" pitchFamily="49" charset="-122"/>
+                <a:cs typeface="JetBrains Mono" pitchFamily="49" charset="-120"/>
+              </a:rPr>
+              <a:t>try again </a:t>
+            </a:r>
+            <a:r>
+              <a:rPr lang="en-US" sz="1040" dirty="0">
+                <a:solidFill>
+                  <a:srgbClr val="FFD166"/>
+                </a:solidFill>
+                <a:latin typeface="JetBrains Mono" pitchFamily="49" charset="0"/>
+                <a:ea typeface="JetBrains Mono" pitchFamily="49" charset="-122"/>
+                <a:cs typeface="JetBrains Mono" pitchFamily="49" charset="-120"/>
+              </a:rPr>
+              <a:t>(skipped)</a:t>
+            </a:r>
+            <a:endParaRPr lang="en-US" sz="1040" dirty="0"/>
+          </a:p>
+        </p:txBody>
+      </p:sp>
+      <p:sp>
+        <p:nvSpPr>
+          <p:cNvPr id="22" name="Text 20"/>
+          <p:cNvSpPr/>
+          <p:nvPr/>
+        </p:nvSpPr>
+        <p:spPr>
+          <a:xfrm>
+            <a:off x="6463695" y="4084824"/>
+            <a:ext cx="4841216" cy="720082"/>
+          </a:xfrm>
+          <a:prstGeom prst="rect">
+            <a:avLst/>
+          </a:prstGeom>
+          <a:noFill/>
+          <a:ln/>
+        </p:spPr>
+        <p:txBody>
+          <a:bodyPr wrap="square" lIns="0" tIns="0" rIns="0" bIns="0" rtlCol="0" anchor="t">
+            <a:normAutofit/>
+          </a:bodyPr>
+          <a:lstStyle/>
+          <a:p>
+            <a:pPr algn="l" indent="0" marL="0">
+              <a:lnSpc>
+                <a:spcPts val="1605"/>
+              </a:lnSpc>
+              <a:buNone/>
+            </a:pPr>
+            <a:r>
+              <a:rPr lang="en-US" sz="1146" dirty="0">
+                <a:solidFill>
+                  <a:srgbClr val="1B1E26"/>
+                </a:solidFill>
+                <a:latin typeface="Space Grotesk" pitchFamily="34" charset="0"/>
+                <a:ea typeface="Space Grotesk" pitchFamily="34" charset="-122"/>
+                <a:cs typeface="Space Grotesk" pitchFamily="34" charset="-120"/>
+              </a:rPr>
+              <a:t>Each commit must follow the format. Ones that do not are ignored, so real changes can quietly miss the changelog.</a:t>
+            </a:r>
+            <a:endParaRPr lang="en-US" sz="1146" dirty="0"/>
+          </a:p>
+        </p:txBody>
+      </p:sp>
+      <p:sp>
+        <p:nvSpPr>
+          <p:cNvPr id="23" name="Shape 21"/>
+          <p:cNvSpPr/>
+          <p:nvPr/>
+        </p:nvSpPr>
+        <p:spPr>
+          <a:xfrm>
+            <a:off x="812800" y="5248808"/>
+            <a:ext cx="10566400" cy="796396"/>
+          </a:xfrm>
+          <a:prstGeom prst="roundRect">
+            <a:avLst>
+              <a:gd name="adj" fmla="val 12757"/>
+            </a:avLst>
+          </a:prstGeom>
+          <a:solidFill>
+            <a:srgbClr val="15181F"/>
+          </a:solidFill>
+          <a:ln/>
+        </p:spPr>
+      </p:sp>
       <p:pic>
         <p:nvPicPr>
-          <p:cNvPr id="8" name="Image 1" descr="Verified">    </p:cNvPr>
+          <p:cNvPr id="24" name="Image 0" descr="Settings">    </p:cNvPr>
           <p:cNvPicPr>
             <a:picLocks noChangeAspect="1"/>
           </p:cNvPicPr>
           <p:nvPr/>
         </p:nvPicPr>
         <p:blipFill>
-          <a:blip r:embed="rId2"/>
-          <a:srcRect l="0" r="0" t="0" b="0"/>
+          <a:blip r:embed="rId1"/>
+          <a:srcRect l="0" r="0" t="-51" b="-51"/>
           <a:stretch/>
         </p:blipFill>
         <p:spPr>
           <a:xfrm>
-            <a:off x="4651829" y="1962038"/>
-            <a:ext cx="355600" cy="355600"/>
+            <a:off x="1066800" y="5507310"/>
+            <a:ext cx="222023" cy="279400"/>
           </a:xfrm>
           <a:prstGeom prst="rect">
             <a:avLst/>
@@ -6364,14 +10195,14 @@
       </p:pic>
       <p:sp>
         <p:nvSpPr>
-          <p:cNvPr id="9" name="Text 5"/>
-          <p:cNvSpPr/>
-          <p:nvPr/>
-        </p:nvSpPr>
-        <p:spPr>
-          <a:xfrm>
-            <a:off x="4651829" y="2419238"/>
-            <a:ext cx="2974993" cy="358397"/>
+          <p:cNvPr id="25" name="Text 22"/>
+          <p:cNvSpPr/>
+          <p:nvPr/>
+        </p:nvSpPr>
+        <p:spPr>
+          <a:xfrm>
+            <a:off x="1441223" y="5360727"/>
+            <a:ext cx="9974496" cy="597958"/>
           </a:xfrm>
           <a:prstGeom prst="rect">
             <a:avLst/>
@@ -6387,78 +10218,123 @@
           <a:p>
             <a:pPr algn="l" indent="0" marL="0">
               <a:lnSpc>
-                <a:spcPts val="2280"/>
-              </a:lnSpc>
-              <a:buNone/>
-            </a:pPr>
-            <a:r>
-              <a:rPr lang="en-US" sz="1900" b="1" dirty="0">
-                <a:solidFill>
-                  <a:srgbClr val="1B1E26"/>
+                <a:spcPts val="1960"/>
+              </a:lnSpc>
+              <a:buNone/>
+            </a:pPr>
+            <a:r>
+              <a:rPr lang="en-US" sz="1400" b="1" dirty="0">
+                <a:solidFill>
+                  <a:srgbClr val="F6F3EC"/>
                 </a:solidFill>
                 <a:latin typeface="Space Grotesk" pitchFamily="34" charset="0"/>
                 <a:ea typeface="Space Grotesk" pitchFamily="34" charset="-122"/>
                 <a:cs typeface="Space Grotesk" pitchFamily="34" charset="-120"/>
               </a:rPr>
-              <a:t>Lint PR titles</a:t>
-            </a:r>
-            <a:endParaRPr lang="en-US" sz="1900" dirty="0"/>
-          </a:p>
-        </p:txBody>
-      </p:sp>
-      <p:sp>
-        <p:nvSpPr>
-          <p:cNvPr id="10" name="Text 6"/>
-          <p:cNvSpPr/>
-          <p:nvPr/>
-        </p:nvSpPr>
-        <p:spPr>
-          <a:xfrm>
-            <a:off x="4651829" y="2853835"/>
-            <a:ext cx="2974993" cy="1170517"/>
-          </a:xfrm>
-          <a:prstGeom prst="rect">
-            <a:avLst/>
-          </a:prstGeom>
-          <a:noFill/>
-          <a:ln/>
-        </p:spPr>
-        <p:txBody>
-          <a:bodyPr wrap="square" lIns="0" tIns="0" rIns="0" bIns="0" rtlCol="0" anchor="t">
-            <a:normAutofit/>
-          </a:bodyPr>
-          <a:lstStyle/>
-          <a:p>
-            <a:pPr algn="l" indent="0" marL="0">
-              <a:lnSpc>
-                <a:spcPts val="1960"/>
-              </a:lnSpc>
-              <a:buNone/>
-            </a:pPr>
+              <a:t>Repo setting:</a:t>
+            </a:r>
             <a:r>
               <a:rPr lang="en-US" sz="1400" dirty="0">
                 <a:solidFill>
-                  <a:srgbClr val="5D6270"/>
+                  <a:srgbClr val="F6F3EC"/>
                 </a:solidFill>
                 <a:latin typeface="Space Grotesk" pitchFamily="34" charset="0"/>
                 <a:ea typeface="Space Grotesk" pitchFamily="34" charset="-122"/>
                 <a:cs typeface="Space Grotesk" pitchFamily="34" charset="-120"/>
               </a:rPr>
-              <a:t>A required check, such as action-semantic-pull-request, blocks titles that skip the format.</a:t>
+              <a:t> make squash merges default to the PR title. Otherwise a one-commit PR uses that commit's message instead.</a:t>
             </a:r>
             <a:endParaRPr lang="en-US" sz="1400" dirty="0"/>
           </a:p>
         </p:txBody>
       </p:sp>
-      <p:sp>
-        <p:nvSpPr>
-          <p:cNvPr id="11" name="Shape 7"/>
-          <p:cNvSpPr/>
-          <p:nvPr/>
-        </p:nvSpPr>
-        <p:spPr>
-          <a:xfrm>
-            <a:off x="7965017" y="1702296"/>
+    </p:spTree>
+  </p:cSld>
+  <p:clrMapOvr>
+    <a:masterClrMapping/>
+  </p:clrMapOvr>
+</p:sld>
+</file>
+
+<file path=ppt/slides/slide18.xml><?xml version="1.0" encoding="utf-8"?>
+<p:sld xmlns:a="http://schemas.openxmlformats.org/drawingml/2006/main" xmlns:r="http://schemas.openxmlformats.org/officeDocument/2006/relationships" xmlns:p="http://schemas.openxmlformats.org/presentationml/2006/main">
+  <p:cSld name="Slide 18">
+    <p:bg>
+      <p:bgPr>
+        <a:solidFill>
+          <a:srgbClr val="F6F3EC"/>
+        </a:solidFill>
+      </p:bgPr>
+    </p:bg>
+    <p:spTree>
+      <p:nvGrpSpPr>
+        <p:cNvPr id="1" name=""/>
+        <p:cNvGrpSpPr/>
+        <p:nvPr/>
+      </p:nvGrpSpPr>
+      <p:grpSpPr>
+        <a:xfrm>
+          <a:off x="0" y="0"/>
+          <a:ext cx="0" cy="0"/>
+          <a:chOff x="0" y="0"/>
+          <a:chExt cx="0" cy="0"/>
+        </a:xfrm>
+      </p:grpSpPr>
+      <p:sp>
+        <p:nvSpPr>
+          <p:cNvPr id="2" name="Text 0"/>
+          <p:cNvSpPr/>
+          <p:nvPr>
+            <p:ph type="title"/>
+          </p:nvPr>
+        </p:nvSpPr>
+        <p:spPr>
+          <a:xfrm>
+            <a:off x="812800" y="812800"/>
+            <a:ext cx="10883392" cy="603741"/>
+          </a:xfrm>
+          <a:prstGeom prst="rect">
+            <a:avLst/>
+          </a:prstGeom>
+          <a:noFill/>
+          <a:ln/>
+        </p:spPr>
+        <p:txBody>
+          <a:bodyPr wrap="square" lIns="0" tIns="0" rIns="0" bIns="0" rtlCol="0" anchor="t">
+            <a:normAutofit/>
+          </a:bodyPr>
+          <a:lstStyle/>
+          <a:p>
+            <a:pPr algn="l" indent="0" marL="0">
+              <a:lnSpc>
+                <a:spcPts val="3960"/>
+              </a:lnSpc>
+              <a:buNone/>
+            </a:pPr>
+            <a:r>
+              <a:rPr lang="en-US" sz="3600" b="1" i="0" spc="-50" kern="0" dirty="0">
+                <a:solidFill>
+                  <a:srgbClr val="1B1E26"/>
+                </a:solidFill>
+                <a:latin typeface="Space Grotesk" pitchFamily="34" charset="0"/>
+                <a:ea typeface="Space Grotesk" pitchFamily="34" charset="-122"/>
+                <a:cs typeface="Space Grotesk" pitchFamily="34" charset="-120"/>
+              </a:rPr>
+              <a:t>Keep it honest: three guardrails</a:t>
+            </a:r>
+            <a:endParaRPr lang="en-US" sz="3600" dirty="0"/>
+          </a:p>
+        </p:txBody>
+      </p:sp>
+      <p:sp>
+        <p:nvSpPr>
+          <p:cNvPr id="3" name="Shape 1"/>
+          <p:cNvSpPr/>
+          <p:nvPr/>
+        </p:nvSpPr>
+        <p:spPr>
+          <a:xfrm>
+            <a:off x="819150" y="1702296"/>
             <a:ext cx="3407833" cy="2556404"/>
           </a:xfrm>
           <a:prstGeom prst="roundRect">
@@ -6479,6 +10355,282 @@
       </p:sp>
       <p:pic>
         <p:nvPicPr>
+          <p:cNvPr id="4" name="Image 0" descr="Check">    </p:cNvPr>
+          <p:cNvPicPr>
+            <a:picLocks noChangeAspect="1"/>
+          </p:cNvPicPr>
+          <p:nvPr/>
+        </p:nvPicPr>
+        <p:blipFill>
+          <a:blip r:embed="rId1"/>
+          <a:srcRect l="0" r="0" t="0" b="0"/>
+          <a:stretch/>
+        </p:blipFill>
+        <p:spPr>
+          <a:xfrm>
+            <a:off x="1078895" y="1962038"/>
+            <a:ext cx="355600" cy="355600"/>
+          </a:xfrm>
+          <a:prstGeom prst="rect">
+            <a:avLst/>
+          </a:prstGeom>
+        </p:spPr>
+      </p:pic>
+      <p:sp>
+        <p:nvSpPr>
+          <p:cNvPr id="5" name="Text 2"/>
+          <p:cNvSpPr/>
+          <p:nvPr/>
+        </p:nvSpPr>
+        <p:spPr>
+          <a:xfrm>
+            <a:off x="1078895" y="2419238"/>
+            <a:ext cx="2974993" cy="358397"/>
+          </a:xfrm>
+          <a:prstGeom prst="rect">
+            <a:avLst/>
+          </a:prstGeom>
+          <a:noFill/>
+          <a:ln/>
+        </p:spPr>
+        <p:txBody>
+          <a:bodyPr wrap="square" lIns="0" tIns="0" rIns="0" bIns="0" rtlCol="0" anchor="t">
+            <a:normAutofit/>
+          </a:bodyPr>
+          <a:lstStyle/>
+          <a:p>
+            <a:pPr algn="l" indent="0" marL="0">
+              <a:lnSpc>
+                <a:spcPts val="2280"/>
+              </a:lnSpc>
+              <a:buNone/>
+            </a:pPr>
+            <a:r>
+              <a:rPr lang="en-US" sz="1900" b="1" dirty="0">
+                <a:solidFill>
+                  <a:srgbClr val="1B1E26"/>
+                </a:solidFill>
+                <a:latin typeface="Space Grotesk" pitchFamily="34" charset="0"/>
+                <a:ea typeface="Space Grotesk" pitchFamily="34" charset="-122"/>
+                <a:cs typeface="Space Grotesk" pitchFamily="34" charset="-120"/>
+              </a:rPr>
+              <a:t>Squash merge</a:t>
+            </a:r>
+            <a:endParaRPr lang="en-US" sz="1900" dirty="0"/>
+          </a:p>
+        </p:txBody>
+      </p:sp>
+      <p:sp>
+        <p:nvSpPr>
+          <p:cNvPr id="6" name="Text 3"/>
+          <p:cNvSpPr/>
+          <p:nvPr/>
+        </p:nvSpPr>
+        <p:spPr>
+          <a:xfrm>
+            <a:off x="1078895" y="2853841"/>
+            <a:ext cx="2974993" cy="1170517"/>
+          </a:xfrm>
+          <a:prstGeom prst="rect">
+            <a:avLst/>
+          </a:prstGeom>
+          <a:noFill/>
+          <a:ln/>
+        </p:spPr>
+        <p:txBody>
+          <a:bodyPr wrap="square" lIns="0" tIns="0" rIns="0" bIns="0" rtlCol="0" anchor="t">
+            <a:normAutofit/>
+          </a:bodyPr>
+          <a:lstStyle/>
+          <a:p>
+            <a:pPr algn="l" indent="0" marL="0">
+              <a:lnSpc>
+                <a:spcPts val="1960"/>
+              </a:lnSpc>
+              <a:buNone/>
+            </a:pPr>
+            <a:r>
+              <a:rPr lang="en-US" sz="1400" dirty="0">
+                <a:solidFill>
+                  <a:srgbClr val="5D6270"/>
+                </a:solidFill>
+                <a:latin typeface="Space Grotesk" pitchFamily="34" charset="0"/>
+                <a:ea typeface="Space Grotesk" pitchFamily="34" charset="-122"/>
+                <a:cs typeface="Space Grotesk" pitchFamily="34" charset="-120"/>
+              </a:rPr>
+              <a:t>Use the PR title as the commit message. One clean commit per PR, so only titles need to be right.</a:t>
+            </a:r>
+            <a:endParaRPr lang="en-US" sz="1400" dirty="0"/>
+          </a:p>
+        </p:txBody>
+      </p:sp>
+      <p:sp>
+        <p:nvSpPr>
+          <p:cNvPr id="7" name="Shape 4"/>
+          <p:cNvSpPr/>
+          <p:nvPr/>
+        </p:nvSpPr>
+        <p:spPr>
+          <a:xfrm>
+            <a:off x="4392083" y="1702296"/>
+            <a:ext cx="3407833" cy="2556404"/>
+          </a:xfrm>
+          <a:prstGeom prst="roundRect">
+            <a:avLst>
+              <a:gd name="adj" fmla="val 4720"/>
+            </a:avLst>
+          </a:prstGeom>
+          <a:solidFill>
+            <a:srgbClr val="FFFDF8"/>
+          </a:solidFill>
+          <a:ln w="12700">
+            <a:solidFill>
+              <a:srgbClr val="E2DDD2"/>
+            </a:solidFill>
+            <a:prstDash val="solid"/>
+          </a:ln>
+        </p:spPr>
+      </p:sp>
+      <p:pic>
+        <p:nvPicPr>
+          <p:cNvPr id="8" name="Image 1" descr="Verified">    </p:cNvPr>
+          <p:cNvPicPr>
+            <a:picLocks noChangeAspect="1"/>
+          </p:cNvPicPr>
+          <p:nvPr/>
+        </p:nvPicPr>
+        <p:blipFill>
+          <a:blip r:embed="rId2"/>
+          <a:srcRect l="0" r="0" t="0" b="0"/>
+          <a:stretch/>
+        </p:blipFill>
+        <p:spPr>
+          <a:xfrm>
+            <a:off x="4651829" y="1962038"/>
+            <a:ext cx="355600" cy="355600"/>
+          </a:xfrm>
+          <a:prstGeom prst="rect">
+            <a:avLst/>
+          </a:prstGeom>
+        </p:spPr>
+      </p:pic>
+      <p:sp>
+        <p:nvSpPr>
+          <p:cNvPr id="9" name="Text 5"/>
+          <p:cNvSpPr/>
+          <p:nvPr/>
+        </p:nvSpPr>
+        <p:spPr>
+          <a:xfrm>
+            <a:off x="4651829" y="2419238"/>
+            <a:ext cx="2974993" cy="358397"/>
+          </a:xfrm>
+          <a:prstGeom prst="rect">
+            <a:avLst/>
+          </a:prstGeom>
+          <a:noFill/>
+          <a:ln/>
+        </p:spPr>
+        <p:txBody>
+          <a:bodyPr wrap="square" lIns="0" tIns="0" rIns="0" bIns="0" rtlCol="0" anchor="t">
+            <a:normAutofit/>
+          </a:bodyPr>
+          <a:lstStyle/>
+          <a:p>
+            <a:pPr algn="l" indent="0" marL="0">
+              <a:lnSpc>
+                <a:spcPts val="2280"/>
+              </a:lnSpc>
+              <a:buNone/>
+            </a:pPr>
+            <a:r>
+              <a:rPr lang="en-US" sz="1900" b="1" dirty="0">
+                <a:solidFill>
+                  <a:srgbClr val="1B1E26"/>
+                </a:solidFill>
+                <a:latin typeface="Space Grotesk" pitchFamily="34" charset="0"/>
+                <a:ea typeface="Space Grotesk" pitchFamily="34" charset="-122"/>
+                <a:cs typeface="Space Grotesk" pitchFamily="34" charset="-120"/>
+              </a:rPr>
+              <a:t>Lint PR titles</a:t>
+            </a:r>
+            <a:endParaRPr lang="en-US" sz="1900" dirty="0"/>
+          </a:p>
+        </p:txBody>
+      </p:sp>
+      <p:sp>
+        <p:nvSpPr>
+          <p:cNvPr id="10" name="Text 6"/>
+          <p:cNvSpPr/>
+          <p:nvPr/>
+        </p:nvSpPr>
+        <p:spPr>
+          <a:xfrm>
+            <a:off x="4651829" y="2853841"/>
+            <a:ext cx="2974993" cy="1170517"/>
+          </a:xfrm>
+          <a:prstGeom prst="rect">
+            <a:avLst/>
+          </a:prstGeom>
+          <a:noFill/>
+          <a:ln/>
+        </p:spPr>
+        <p:txBody>
+          <a:bodyPr wrap="square" lIns="0" tIns="0" rIns="0" bIns="0" rtlCol="0" anchor="t">
+            <a:normAutofit/>
+          </a:bodyPr>
+          <a:lstStyle/>
+          <a:p>
+            <a:pPr algn="l" indent="0" marL="0">
+              <a:lnSpc>
+                <a:spcPts val="1960"/>
+              </a:lnSpc>
+              <a:buNone/>
+            </a:pPr>
+            <a:r>
+              <a:rPr lang="en-US" sz="1400" dirty="0">
+                <a:solidFill>
+                  <a:srgbClr val="5D6270"/>
+                </a:solidFill>
+                <a:latin typeface="Space Grotesk" pitchFamily="34" charset="0"/>
+                <a:ea typeface="Space Grotesk" pitchFamily="34" charset="-122"/>
+                <a:cs typeface="Space Grotesk" pitchFamily="34" charset="-120"/>
+              </a:rPr>
+              <a:t>A required check, such as action-semantic-pull-request, blocks titles that skip the format.</a:t>
+            </a:r>
+            <a:endParaRPr lang="en-US" sz="1400" dirty="0"/>
+          </a:p>
+        </p:txBody>
+      </p:sp>
+      <p:sp>
+        <p:nvSpPr>
+          <p:cNvPr id="11" name="Shape 7"/>
+          <p:cNvSpPr/>
+          <p:nvPr/>
+        </p:nvSpPr>
+        <p:spPr>
+          <a:xfrm>
+            <a:off x="7965017" y="1702296"/>
+            <a:ext cx="3407833" cy="2556404"/>
+          </a:xfrm>
+          <a:prstGeom prst="roundRect">
+            <a:avLst>
+              <a:gd name="adj" fmla="val 4720"/>
+            </a:avLst>
+          </a:prstGeom>
+          <a:solidFill>
+            <a:srgbClr val="FFFDF8"/>
+          </a:solidFill>
+          <a:ln w="12700">
+            <a:solidFill>
+              <a:srgbClr val="E2DDD2"/>
+            </a:solidFill>
+            <a:prstDash val="solid"/>
+          </a:ln>
+        </p:spPr>
+      </p:sp>
+      <p:pic>
+        <p:nvPicPr>
           <p:cNvPr id="12" name="Image 2" descr="Code">    </p:cNvPr>
           <p:cNvPicPr>
             <a:picLocks noChangeAspect="1"/>
@@ -6552,7 +10704,7 @@
         </p:nvSpPr>
         <p:spPr>
           <a:xfrm>
-            <a:off x="8224762" y="2853835"/>
+            <a:off x="8224762" y="2853841"/>
             <a:ext cx="2974993" cy="884238"/>
           </a:xfrm>
           <a:prstGeom prst="rect">
@@ -6596,7 +10748,7 @@
         </p:nvSpPr>
         <p:spPr>
           <a:xfrm>
-            <a:off x="812800" y="4569848"/>
+            <a:off x="812800" y="4569842"/>
             <a:ext cx="10566400" cy="928158"/>
           </a:xfrm>
           <a:prstGeom prst="roundRect">
@@ -6641,7 +10793,7 @@
         </p:nvSpPr>
         <p:spPr>
           <a:xfrm>
-            <a:off x="1408377" y="4747648"/>
+            <a:off x="1408377" y="4747642"/>
             <a:ext cx="10008328" cy="597958"/>
           </a:xfrm>
           <a:prstGeom prst="rect">
@@ -6696,9 +10848,9 @@
 </p:sld>
 </file>
 
-<file path=ppt/slides/slide15.xml><?xml version="1.0" encoding="utf-8"?>
+<file path=ppt/slides/slide19.xml><?xml version="1.0" encoding="utf-8"?>
 <p:sld xmlns:a="http://schemas.openxmlformats.org/drawingml/2006/main" xmlns:r="http://schemas.openxmlformats.org/officeDocument/2006/relationships" xmlns:p="http://schemas.openxmlformats.org/presentationml/2006/main">
-  <p:cSld name="Slide 15">
+  <p:cSld name="Slide 19">
     <p:bg>
       <p:bgPr>
         <a:solidFill>
@@ -6774,7 +10926,7 @@
         </p:nvSpPr>
         <p:spPr>
           <a:xfrm>
-            <a:off x="812800" y="2201447"/>
+            <a:off x="812800" y="2201453"/>
             <a:ext cx="378596" cy="761471"/>
           </a:xfrm>
           <a:prstGeom prst="rect">
@@ -6906,7 +11058,7 @@
         </p:nvSpPr>
         <p:spPr>
           <a:xfrm>
-            <a:off x="1382297" y="3299017"/>
+            <a:off x="1382297" y="3299011"/>
             <a:ext cx="7987348" cy="495640"/>
           </a:xfrm>
           <a:prstGeom prst="rect">
@@ -6950,7 +11102,7 @@
         </p:nvSpPr>
         <p:spPr>
           <a:xfrm>
-            <a:off x="812800" y="4130793"/>
+            <a:off x="812800" y="4130787"/>
             <a:ext cx="378596" cy="761471"/>
           </a:xfrm>
           <a:prstGeom prst="rect">
@@ -6994,7 +11146,7 @@
         </p:nvSpPr>
         <p:spPr>
           <a:xfrm>
-            <a:off x="1382297" y="4263684"/>
+            <a:off x="1382297" y="4263690"/>
             <a:ext cx="10644006" cy="495640"/>
           </a:xfrm>
           <a:prstGeom prst="rect">
@@ -7038,7 +11190,7 @@
         </p:nvSpPr>
         <p:spPr>
           <a:xfrm>
-            <a:off x="812800" y="5677167"/>
+            <a:off x="812800" y="5677173"/>
             <a:ext cx="10883392" cy="393435"/>
           </a:xfrm>
           <a:prstGeom prst="rect">
@@ -7900,7 +12052,7 @@
         <p:spPr>
           <a:xfrm>
             <a:off x="812800" y="812800"/>
-            <a:ext cx="10883392" cy="603741"/>
+            <a:ext cx="10883392" cy="484792"/>
           </a:xfrm>
           <a:prstGeom prst="rect">
             <a:avLst/>
@@ -7916,12 +12068,12 @@
           <a:p>
             <a:pPr algn="l" indent="0" marL="0">
               <a:lnSpc>
-                <a:spcPts val="3960"/>
-              </a:lnSpc>
-              <a:buNone/>
-            </a:pPr>
-            <a:r>
-              <a:rPr lang="en-US" sz="3600" b="1" i="0" spc="-50" kern="0" dirty="0">
+                <a:spcPts val="3143"/>
+              </a:lnSpc>
+              <a:buNone/>
+            </a:pPr>
+            <a:r>
+              <a:rPr lang="en-US" sz="2858" b="1" i="0" spc="-50" kern="0" dirty="0">
                 <a:solidFill>
                   <a:srgbClr val="1B1E26"/>
                 </a:solidFill>
@@ -7931,7 +12083,7 @@
               </a:rPr>
               <a:t>Anatomy of a conventional commit</a:t>
             </a:r>
-            <a:endParaRPr lang="en-US" sz="3600" dirty="0"/>
+            <a:endParaRPr lang="en-US" sz="2858" dirty="0"/>
           </a:p>
         </p:txBody>
       </p:sp>
@@ -7943,12 +12095,12 @@
         </p:nvSpPr>
         <p:spPr>
           <a:xfrm>
-            <a:off x="812800" y="1695941"/>
-            <a:ext cx="10566400" cy="1957728"/>
+            <a:off x="812800" y="1576992"/>
+            <a:ext cx="10566400" cy="2601913"/>
           </a:xfrm>
           <a:prstGeom prst="roundRect">
             <a:avLst>
-              <a:gd name="adj" fmla="val 6487"/>
+              <a:gd name="adj" fmla="val 4881"/>
             </a:avLst>
           </a:prstGeom>
           <a:solidFill>
@@ -7965,8 +12117,8 @@
         </p:nvSpPr>
         <p:spPr>
           <a:xfrm>
-            <a:off x="1168400" y="2000741"/>
-            <a:ext cx="10150856" cy="516126"/>
+            <a:off x="1168400" y="1830992"/>
+            <a:ext cx="10210800" cy="720309"/>
           </a:xfrm>
           <a:prstGeom prst="rect">
             <a:avLst/>
@@ -7982,12 +12134,12 @@
           <a:p>
             <a:pPr algn="l" indent="0" marL="0">
               <a:lnSpc>
-                <a:spcPts val="3360"/>
-              </a:lnSpc>
-              <a:buNone/>
-            </a:pPr>
-            <a:r>
-              <a:rPr lang="en-US" sz="2400" b="1" dirty="0">
+                <a:spcPts val="2907"/>
+              </a:lnSpc>
+              <a:buNone/>
+            </a:pPr>
+            <a:r>
+              <a:rPr lang="en-US" sz="2076" b="1" dirty="0">
                 <a:solidFill>
                   <a:srgbClr val="FF8A5C"/>
                 </a:solidFill>
@@ -7998,7 +12150,7 @@
               <a:t>feat</a:t>
             </a:r>
             <a:r>
-              <a:rPr lang="en-US" sz="2400" b="1" dirty="0">
+              <a:rPr lang="en-US" sz="2076" b="1" dirty="0">
                 <a:solidFill>
                   <a:srgbClr val="7FB0FF"/>
                 </a:solidFill>
@@ -8006,10 +12158,10 @@
                 <a:ea typeface="JetBrains Mono" pitchFamily="49" charset="-122"/>
                 <a:cs typeface="JetBrains Mono" pitchFamily="49" charset="-120"/>
               </a:rPr>
-              <a:t>(auth)</a:t>
-            </a:r>
-            <a:r>
-              <a:rPr lang="en-US" sz="2400" b="1" dirty="0">
+              <a:t>(jwt)</a:t>
+            </a:r>
+            <a:r>
+              <a:rPr lang="en-US" sz="2076" b="1" dirty="0">
                 <a:solidFill>
                   <a:srgbClr val="FFD166"/>
                 </a:solidFill>
@@ -8020,7 +12172,7 @@
               <a:t>!</a:t>
             </a:r>
             <a:r>
-              <a:rPr lang="en-US" sz="2400" b="1" dirty="0">
+              <a:rPr lang="en-US" sz="2076" b="1" dirty="0">
                 <a:solidFill>
                   <a:srgbClr val="F6F3EC"/>
                 </a:solidFill>
@@ -8028,9 +12180,9 @@
                 <a:ea typeface="JetBrains Mono" pitchFamily="49" charset="-122"/>
                 <a:cs typeface="JetBrains Mono" pitchFamily="49" charset="-120"/>
               </a:rPr>
-              <a:t>: add SSO login</a:t>
-            </a:r>
-            <a:endParaRPr lang="en-US" sz="2400" dirty="0"/>
+              <a:t>: accept tokens only in authorization header</a:t>
+            </a:r>
+            <a:endParaRPr lang="en-US" sz="2076" dirty="0"/>
           </a:p>
         </p:txBody>
       </p:sp>
@@ -8042,8 +12194,8 @@
         </p:nvSpPr>
         <p:spPr>
           <a:xfrm>
-            <a:off x="1168400" y="2593068"/>
-            <a:ext cx="10150856" cy="352501"/>
+            <a:off x="1168400" y="2652902"/>
+            <a:ext cx="10150856" cy="483394"/>
           </a:xfrm>
           <a:prstGeom prst="rect">
             <a:avLst/>
@@ -8059,12 +12211,12 @@
           <a:p>
             <a:pPr algn="l" indent="0" marL="0">
               <a:lnSpc>
-                <a:spcPts val="2240"/>
-              </a:lnSpc>
-              <a:buNone/>
-            </a:pPr>
-            <a:r>
-              <a:rPr lang="en-US" sz="1600" dirty="0">
+                <a:spcPts val="1573"/>
+              </a:lnSpc>
+              <a:buNone/>
+            </a:pPr>
+            <a:r>
+              <a:rPr lang="en-US" sz="1085" dirty="0">
                 <a:solidFill>
                   <a:srgbClr val="A3A9B6"/>
                 </a:solidFill>
@@ -8072,43 +12224,19 @@
                 <a:ea typeface="JetBrains Mono" pitchFamily="49" charset="-122"/>
                 <a:cs typeface="JetBrains Mono" pitchFamily="49" charset="-120"/>
               </a:rPr>
-              <a:t>Users can now sign in with company SSO.</a:t>
-            </a:r>
-            <a:endParaRPr lang="en-US" sz="1600" dirty="0"/>
-          </a:p>
-        </p:txBody>
-      </p:sp>
-      <p:sp>
-        <p:nvSpPr>
-          <p:cNvPr id="6" name="Text 4"/>
-          <p:cNvSpPr/>
-          <p:nvPr/>
-        </p:nvSpPr>
-        <p:spPr>
-          <a:xfrm>
-            <a:off x="1168400" y="3021769"/>
-            <a:ext cx="10150856" cy="352501"/>
-          </a:xfrm>
-          <a:prstGeom prst="rect">
-            <a:avLst/>
-          </a:prstGeom>
-          <a:noFill/>
-          <a:ln/>
-        </p:spPr>
-        <p:txBody>
-          <a:bodyPr wrap="square" lIns="0" tIns="0" rIns="0" bIns="0" rtlCol="0" anchor="t">
-            <a:normAutofit/>
-          </a:bodyPr>
-          <a:lstStyle/>
-          <a:p>
-            <a:pPr algn="l" indent="0" marL="0">
-              <a:lnSpc>
-                <a:spcPts val="2240"/>
-              </a:lnSpc>
-              <a:buNone/>
-            </a:pPr>
-            <a:r>
-              <a:rPr lang="en-US" sz="1600" dirty="0">
+              <a:t>Query-string tokens leak into logs and browser history.</a:t>
+            </a:r>
+            <a:endParaRPr lang="en-US" sz="1085" dirty="0"/>
+          </a:p>
+          <a:p>
+            <a:pPr algn="l" indent="0" marL="0">
+              <a:lnSpc>
+                <a:spcPts val="1573"/>
+              </a:lnSpc>
+              <a:buNone/>
+            </a:pPr>
+            <a:r>
+              <a:rPr lang="en-US" sz="1085" dirty="0">
                 <a:solidFill>
                   <a:srgbClr val="A3A9B6"/>
                 </a:solidFill>
@@ -8116,9 +12244,115 @@
                 <a:ea typeface="JetBrains Mono" pitchFamily="49" charset="-122"/>
                 <a:cs typeface="JetBrains Mono" pitchFamily="49" charset="-120"/>
               </a:rPr>
-              <a:t>BREAKING CHANGE: /login now requires a tenant ID</a:t>
-            </a:r>
-            <a:endParaRPr lang="en-US" sz="1600" dirty="0"/>
+              <a:t>Header-only submission keeps them out of URLs.</a:t>
+            </a:r>
+            <a:endParaRPr lang="en-US" sz="1085" dirty="0"/>
+          </a:p>
+        </p:txBody>
+      </p:sp>
+      <p:sp>
+        <p:nvSpPr>
+          <p:cNvPr id="6" name="Text 4"/>
+          <p:cNvSpPr/>
+          <p:nvPr/>
+        </p:nvSpPr>
+        <p:spPr>
+          <a:xfrm>
+            <a:off x="1168400" y="3237895"/>
+            <a:ext cx="10150856" cy="712410"/>
+          </a:xfrm>
+          <a:prstGeom prst="rect">
+            <a:avLst/>
+          </a:prstGeom>
+          <a:noFill/>
+          <a:ln/>
+        </p:spPr>
+        <p:txBody>
+          <a:bodyPr wrap="square" lIns="0" tIns="0" rIns="0" bIns="0" rtlCol="0" anchor="t">
+            <a:normAutofit/>
+          </a:bodyPr>
+          <a:lstStyle/>
+          <a:p>
+            <a:pPr algn="l" indent="0" marL="0">
+              <a:lnSpc>
+                <a:spcPts val="1567"/>
+              </a:lnSpc>
+              <a:buNone/>
+            </a:pPr>
+            <a:r>
+              <a:rPr lang="en-US" sz="1081" dirty="0">
+                <a:solidFill>
+                  <a:srgbClr val="FFD166"/>
+                </a:solidFill>
+                <a:latin typeface="JetBrains Mono" pitchFamily="49" charset="0"/>
+                <a:ea typeface="JetBrains Mono" pitchFamily="49" charset="-122"/>
+                <a:cs typeface="JetBrains Mono" pitchFamily="49" charset="-120"/>
+              </a:rPr>
+              <a:t>BREAKING CHANGE:</a:t>
+            </a:r>
+            <a:r>
+              <a:rPr lang="en-US" sz="1081" dirty="0">
+                <a:solidFill>
+                  <a:srgbClr val="E6E2D8"/>
+                </a:solidFill>
+                <a:latin typeface="JetBrains Mono" pitchFamily="49" charset="0"/>
+                <a:ea typeface="JetBrains Mono" pitchFamily="49" charset="-122"/>
+                <a:cs typeface="JetBrains Mono" pitchFamily="49" charset="-120"/>
+              </a:rPr>
+              <a:t> tokens sent as ?access_token= now get a 401.</a:t>
+            </a:r>
+            <a:endParaRPr lang="en-US" sz="1081" dirty="0"/>
+          </a:p>
+          <a:p>
+            <a:pPr algn="l" indent="0" marL="0">
+              <a:lnSpc>
+                <a:spcPts val="1567"/>
+              </a:lnSpc>
+              <a:buNone/>
+            </a:pPr>
+            <a:r>
+              <a:rPr lang="en-US" sz="1081" dirty="0">
+                <a:solidFill>
+                  <a:srgbClr val="E6E2D8"/>
+                </a:solidFill>
+                <a:latin typeface="JetBrains Mono" pitchFamily="49" charset="0"/>
+                <a:ea typeface="JetBrains Mono" pitchFamily="49" charset="-122"/>
+                <a:cs typeface="JetBrains Mono" pitchFamily="49" charset="-120"/>
+              </a:rPr>
+              <a:t>Clients must send an Authorization: Bearer header.</a:t>
+            </a:r>
+            <a:endParaRPr lang="en-US" sz="1081" dirty="0"/>
+          </a:p>
+          <a:p>
+            <a:pPr algn="l" indent="0" marL="0">
+              <a:lnSpc>
+                <a:spcPts val="1567"/>
+              </a:lnSpc>
+              <a:buNone/>
+            </a:pPr>
+            <a:r>
+              <a:rPr lang="en-US" sz="1081" dirty="0">
+                <a:solidFill>
+                  <a:srgbClr val="7FB0FF"/>
+                </a:solidFill>
+                <a:latin typeface="JetBrains Mono" pitchFamily="49" charset="0"/>
+                <a:ea typeface="JetBrains Mono" pitchFamily="49" charset="-122"/>
+                <a:cs typeface="JetBrains Mono" pitchFamily="49" charset="-120"/>
+              </a:rPr>
+              <a:t>Refs:</a:t>
+            </a:r>
+            <a:r>
+              <a:rPr lang="en-US" sz="1081" dirty="0">
+                <a:solidFill>
+                  <a:srgbClr val="E6E2D8"/>
+                </a:solidFill>
+                <a:latin typeface="JetBrains Mono" pitchFamily="49" charset="0"/>
+                <a:ea typeface="JetBrains Mono" pitchFamily="49" charset="-122"/>
+                <a:cs typeface="JetBrains Mono" pitchFamily="49" charset="-120"/>
+              </a:rPr>
+              <a:t> #1482</a:t>
+            </a:r>
+            <a:endParaRPr lang="en-US" sz="1081" dirty="0"/>
           </a:p>
         </p:txBody>
       </p:sp>
@@ -8130,12 +12364,12 @@
         </p:nvSpPr>
         <p:spPr>
           <a:xfrm>
-            <a:off x="819150" y="3964820"/>
-            <a:ext cx="2514600" cy="1637657"/>
+            <a:off x="819150" y="4490055"/>
+            <a:ext cx="2514600" cy="1548795"/>
           </a:xfrm>
           <a:prstGeom prst="roundRect">
             <a:avLst>
-              <a:gd name="adj" fmla="val 5816"/>
+              <a:gd name="adj" fmla="val 6150"/>
             </a:avLst>
           </a:prstGeom>
           <a:solidFill>
@@ -8157,7 +12391,7 @@
         </p:nvSpPr>
         <p:spPr>
           <a:xfrm>
-            <a:off x="1028095" y="4173765"/>
+            <a:off x="1028095" y="4699000"/>
             <a:ext cx="2159611" cy="340859"/>
           </a:xfrm>
           <a:prstGeom prst="rect">
@@ -8201,7 +12435,7 @@
         </p:nvSpPr>
         <p:spPr>
           <a:xfrm>
-            <a:off x="1028095" y="4565424"/>
+            <a:off x="1028095" y="5090660"/>
             <a:ext cx="2159611" cy="577472"/>
           </a:xfrm>
           <a:prstGeom prst="rect">
@@ -8245,12 +12479,12 @@
         </p:nvSpPr>
         <p:spPr>
           <a:xfrm>
-            <a:off x="3498850" y="3964820"/>
-            <a:ext cx="2514600" cy="1637657"/>
+            <a:off x="3498850" y="4490055"/>
+            <a:ext cx="2514600" cy="1548795"/>
           </a:xfrm>
           <a:prstGeom prst="roundRect">
             <a:avLst>
-              <a:gd name="adj" fmla="val 5816"/>
+              <a:gd name="adj" fmla="val 6150"/>
             </a:avLst>
           </a:prstGeom>
           <a:solidFill>
@@ -8272,8 +12506,8 @@
         </p:nvSpPr>
         <p:spPr>
           <a:xfrm>
-            <a:off x="3707795" y="4173765"/>
-            <a:ext cx="2159611" cy="340859"/>
+            <a:off x="3707795" y="4699000"/>
+            <a:ext cx="2159611" cy="316328"/>
           </a:xfrm>
           <a:prstGeom prst="rect">
             <a:avLst/>
@@ -8289,12 +12523,12 @@
           <a:p>
             <a:pPr algn="l" indent="0" marL="0">
               <a:lnSpc>
-                <a:spcPts val="2160"/>
-              </a:lnSpc>
-              <a:buNone/>
-            </a:pPr>
-            <a:r>
-              <a:rPr lang="en-US" sz="1800" b="1" dirty="0">
+                <a:spcPts val="2018"/>
+              </a:lnSpc>
+              <a:buNone/>
+            </a:pPr>
+            <a:r>
+              <a:rPr lang="en-US" sz="1682" b="1" dirty="0">
                 <a:solidFill>
                   <a:srgbClr val="2F62B0"/>
                 </a:solidFill>
@@ -8302,9 +12536,9 @@
                 <a:ea typeface="JetBrains Mono" pitchFamily="49" charset="-122"/>
                 <a:cs typeface="JetBrains Mono" pitchFamily="49" charset="-120"/>
               </a:rPr>
-              <a:t>(auth)</a:t>
-            </a:r>
-            <a:endParaRPr lang="en-US" sz="1800" dirty="0"/>
+              <a:t>(jwt)</a:t>
+            </a:r>
+            <a:endParaRPr lang="en-US" sz="1682" dirty="0"/>
           </a:p>
         </p:txBody>
       </p:sp>
@@ -8316,8 +12550,8 @@
         </p:nvSpPr>
         <p:spPr>
           <a:xfrm>
-            <a:off x="3707795" y="4565424"/>
-            <a:ext cx="2159611" cy="853508"/>
+            <a:off x="3707795" y="5066128"/>
+            <a:ext cx="2159611" cy="789176"/>
           </a:xfrm>
           <a:prstGeom prst="rect">
             <a:avLst/>
@@ -8333,12 +12567,12 @@
           <a:p>
             <a:pPr algn="l" indent="0" marL="0">
               <a:lnSpc>
-                <a:spcPts val="1890"/>
-              </a:lnSpc>
-              <a:buNone/>
-            </a:pPr>
-            <a:r>
-              <a:rPr lang="en-US" sz="1400" dirty="0">
+                <a:spcPts val="1760"/>
+              </a:lnSpc>
+              <a:buNone/>
+            </a:pPr>
+            <a:r>
+              <a:rPr lang="en-US" sz="1304" dirty="0">
                 <a:solidFill>
                   <a:srgbClr val="1B1E26"/>
                 </a:solidFill>
@@ -8348,7 +12582,7 @@
               </a:rPr>
               <a:t>Scope. Optional. Which part of the app?</a:t>
             </a:r>
-            <a:endParaRPr lang="en-US" sz="1400" dirty="0"/>
+            <a:endParaRPr lang="en-US" sz="1304" dirty="0"/>
           </a:p>
         </p:txBody>
       </p:sp>
@@ -8360,12 +12594,12 @@
         </p:nvSpPr>
         <p:spPr>
           <a:xfrm>
-            <a:off x="6178550" y="3964820"/>
-            <a:ext cx="2514600" cy="1637657"/>
+            <a:off x="6178550" y="4490055"/>
+            <a:ext cx="2514600" cy="1548795"/>
           </a:xfrm>
           <a:prstGeom prst="roundRect">
             <a:avLst>
-              <a:gd name="adj" fmla="val 5816"/>
+              <a:gd name="adj" fmla="val 6150"/>
             </a:avLst>
           </a:prstGeom>
           <a:solidFill>
@@ -8387,8 +12621,8 @@
         </p:nvSpPr>
         <p:spPr>
           <a:xfrm>
-            <a:off x="6387495" y="4173765"/>
-            <a:ext cx="2159611" cy="340859"/>
+            <a:off x="6387495" y="4699000"/>
+            <a:ext cx="2159611" cy="316328"/>
           </a:xfrm>
           <a:prstGeom prst="rect">
             <a:avLst/>
@@ -8404,12 +12638,12 @@
           <a:p>
             <a:pPr algn="l" indent="0" marL="0">
               <a:lnSpc>
-                <a:spcPts val="2160"/>
-              </a:lnSpc>
-              <a:buNone/>
-            </a:pPr>
-            <a:r>
-              <a:rPr lang="en-US" sz="1800" b="1" dirty="0">
+                <a:spcPts val="2018"/>
+              </a:lnSpc>
+              <a:buNone/>
+            </a:pPr>
+            <a:r>
+              <a:rPr lang="en-US" sz="1682" b="1" dirty="0">
                 <a:solidFill>
                   <a:srgbClr val="8A6400"/>
                 </a:solidFill>
@@ -8419,7 +12653,7 @@
               </a:rPr>
               <a:t>!</a:t>
             </a:r>
-            <a:endParaRPr lang="en-US" sz="1800" dirty="0"/>
+            <a:endParaRPr lang="en-US" sz="1682" dirty="0"/>
           </a:p>
         </p:txBody>
       </p:sp>
@@ -8431,8 +12665,8 @@
         </p:nvSpPr>
         <p:spPr>
           <a:xfrm>
-            <a:off x="6387495" y="4565424"/>
-            <a:ext cx="2159611" cy="853508"/>
+            <a:off x="6387495" y="5066128"/>
+            <a:ext cx="2159611" cy="789176"/>
           </a:xfrm>
           <a:prstGeom prst="rect">
             <a:avLst/>
@@ -8448,12 +12682,12 @@
           <a:p>
             <a:pPr algn="l" indent="0" marL="0">
               <a:lnSpc>
-                <a:spcPts val="1890"/>
-              </a:lnSpc>
-              <a:buNone/>
-            </a:pPr>
-            <a:r>
-              <a:rPr lang="en-US" sz="1400" dirty="0">
+                <a:spcPts val="1760"/>
+              </a:lnSpc>
+              <a:buNone/>
+            </a:pPr>
+            <a:r>
+              <a:rPr lang="en-US" sz="1304" dirty="0">
                 <a:solidFill>
                   <a:srgbClr val="1B1E26"/>
                 </a:solidFill>
@@ -8463,7 +12697,7 @@
               </a:rPr>
               <a:t>Optional. Warns that this breaks something.</a:t>
             </a:r>
-            <a:endParaRPr lang="en-US" sz="1400" dirty="0"/>
+            <a:endParaRPr lang="en-US" sz="1304" dirty="0"/>
           </a:p>
         </p:txBody>
       </p:sp>
@@ -8475,12 +12709,12 @@
         </p:nvSpPr>
         <p:spPr>
           <a:xfrm>
-            <a:off x="8858250" y="3964820"/>
-            <a:ext cx="2514600" cy="1637657"/>
+            <a:off x="8858250" y="4490055"/>
+            <a:ext cx="2514600" cy="1548795"/>
           </a:xfrm>
           <a:prstGeom prst="roundRect">
             <a:avLst>
-              <a:gd name="adj" fmla="val 5816"/>
+              <a:gd name="adj" fmla="val 6150"/>
             </a:avLst>
           </a:prstGeom>
           <a:solidFill>
@@ -8502,8 +12736,8 @@
         </p:nvSpPr>
         <p:spPr>
           <a:xfrm>
-            <a:off x="9067195" y="4173765"/>
-            <a:ext cx="2159611" cy="340859"/>
+            <a:off x="9067195" y="4699000"/>
+            <a:ext cx="2299305" cy="481466"/>
           </a:xfrm>
           <a:prstGeom prst="rect">
             <a:avLst/>
@@ -8519,12 +12753,12 @@
           <a:p>
             <a:pPr algn="l" indent="0" marL="0">
               <a:lnSpc>
-                <a:spcPts val="2160"/>
-              </a:lnSpc>
-              <a:buNone/>
-            </a:pPr>
-            <a:r>
-              <a:rPr lang="en-US" sz="1800" b="1" dirty="0">
+                <a:spcPts val="1910"/>
+              </a:lnSpc>
+              <a:buNone/>
+            </a:pPr>
+            <a:r>
+              <a:rPr lang="en-US" sz="1592" b="1" dirty="0">
                 <a:solidFill>
                   <a:srgbClr val="1B1E26"/>
                 </a:solidFill>
@@ -8532,9 +12766,9 @@
                 <a:ea typeface="JetBrains Mono" pitchFamily="49" charset="-122"/>
                 <a:cs typeface="JetBrains Mono" pitchFamily="49" charset="-120"/>
               </a:rPr>
-              <a:t>: add SSO</a:t>
-            </a:r>
-            <a:endParaRPr lang="en-US" sz="1800" dirty="0"/>
+              <a:t>: accept tokens</a:t>
+            </a:r>
+            <a:endParaRPr lang="en-US" sz="1592" dirty="0"/>
           </a:p>
         </p:txBody>
       </p:sp>
@@ -8546,8 +12780,8 @@
         </p:nvSpPr>
         <p:spPr>
           <a:xfrm>
-            <a:off x="9067195" y="4565424"/>
-            <a:ext cx="2159611" cy="853508"/>
+            <a:off x="9067195" y="5231267"/>
+            <a:ext cx="2159611" cy="624039"/>
           </a:xfrm>
           <a:prstGeom prst="rect">
             <a:avLst/>
@@ -8563,12 +12797,12 @@
           <a:p>
             <a:pPr algn="l" indent="0" marL="0">
               <a:lnSpc>
-                <a:spcPts val="1890"/>
-              </a:lnSpc>
-              <a:buNone/>
-            </a:pPr>
-            <a:r>
-              <a:rPr lang="en-US" sz="1400" dirty="0">
+                <a:spcPts val="1701"/>
+              </a:lnSpc>
+              <a:buNone/>
+            </a:pPr>
+            <a:r>
+              <a:rPr lang="en-US" sz="1260" dirty="0">
                 <a:solidFill>
                   <a:srgbClr val="1B1E26"/>
                 </a:solidFill>
@@ -8578,7 +12812,7 @@
               </a:rPr>
               <a:t>A short summary, written like a command.</a:t>
             </a:r>
-            <a:endParaRPr lang="en-US" sz="1400" dirty="0"/>
+            <a:endParaRPr lang="en-US" sz="1260" dirty="0"/>
           </a:p>
         </p:txBody>
       </p:sp>
@@ -12997,7 +17231,7 @@
     <p:bg>
       <p:bgPr>
         <a:solidFill>
-          <a:srgbClr val="15181F"/>
+          <a:srgbClr val="F6F3EC"/>
         </a:solidFill>
       </p:bgPr>
     </p:bg>
@@ -13019,58 +17253,14 @@
         <p:nvSpPr>
           <p:cNvPr id="2" name="Text 0"/>
           <p:cNvSpPr/>
-          <p:nvPr/>
-        </p:nvSpPr>
-        <p:spPr>
-          <a:xfrm>
-            <a:off x="812800" y="2002594"/>
-            <a:ext cx="10883392" cy="352501"/>
-          </a:xfrm>
-          <a:prstGeom prst="rect">
-            <a:avLst/>
-          </a:prstGeom>
-          <a:noFill/>
-          <a:ln/>
-        </p:spPr>
-        <p:txBody>
-          <a:bodyPr wrap="square" lIns="0" tIns="0" rIns="0" bIns="0" rtlCol="0" anchor="t">
-            <a:normAutofit/>
-          </a:bodyPr>
-          <a:lstStyle/>
-          <a:p>
-            <a:pPr algn="l" indent="0" marL="0">
-              <a:lnSpc>
-                <a:spcPts val="2240"/>
-              </a:lnSpc>
-              <a:buNone/>
-            </a:pPr>
-            <a:r>
-              <a:rPr lang="en-US" sz="1600" dirty="0">
-                <a:solidFill>
-                  <a:srgbClr val="FF8A5C"/>
-                </a:solidFill>
-                <a:latin typeface="JetBrains Mono" pitchFamily="49" charset="0"/>
-                <a:ea typeface="JetBrains Mono" pitchFamily="49" charset="-122"/>
-                <a:cs typeface="JetBrains Mono" pitchFamily="49" charset="-120"/>
-              </a:rPr>
-              <a:t>part 2</a:t>
-            </a:r>
-            <a:endParaRPr lang="en-US" sz="1600" dirty="0"/>
-          </a:p>
-        </p:txBody>
-      </p:sp>
-      <p:sp>
-        <p:nvSpPr>
-          <p:cNvPr id="3" name="Text 1"/>
-          <p:cNvSpPr/>
           <p:nvPr>
             <p:ph type="title"/>
           </p:nvPr>
         </p:nvSpPr>
         <p:spPr>
           <a:xfrm>
-            <a:off x="812800" y="2583693"/>
-            <a:ext cx="10883392" cy="1175544"/>
+            <a:off x="812800" y="812800"/>
+            <a:ext cx="10883392" cy="1182083"/>
           </a:xfrm>
           <a:prstGeom prst="rect">
             <a:avLst/>
@@ -13086,24 +17276,46 @@
           <a:p>
             <a:pPr algn="l" indent="0" marL="0">
               <a:lnSpc>
-                <a:spcPts val="7875"/>
-              </a:lnSpc>
-              <a:buNone/>
-            </a:pPr>
-            <a:r>
-              <a:rPr lang="en-US" sz="7500" b="1" i="0" spc="-150" kern="0" dirty="0">
-                <a:solidFill>
-                  <a:srgbClr val="F6F3EC"/>
+                <a:spcPts val="3960"/>
+              </a:lnSpc>
+              <a:buNone/>
+            </a:pPr>
+            <a:r>
+              <a:rPr lang="en-US" sz="3600" b="1" i="0" spc="-50" kern="0" dirty="0">
+                <a:solidFill>
+                  <a:srgbClr val="1B1E26"/>
                 </a:solidFill>
                 <a:latin typeface="Space Grotesk" pitchFamily="34" charset="0"/>
                 <a:ea typeface="Space Grotesk" pitchFamily="34" charset="-122"/>
                 <a:cs typeface="Space Grotesk" pitchFamily="34" charset="-120"/>
               </a:rPr>
-              <a:t>Release Please</a:t>
-            </a:r>
-            <a:endParaRPr lang="en-US" sz="7500" dirty="0"/>
-          </a:p>
-        </p:txBody>
+              <a:t>Formatting rules: required vs. recommended</a:t>
+            </a:r>
+            <a:endParaRPr lang="en-US" sz="3600" dirty="0"/>
+          </a:p>
+        </p:txBody>
+      </p:sp>
+      <p:sp>
+        <p:nvSpPr>
+          <p:cNvPr id="3" name="Shape 1"/>
+          <p:cNvSpPr/>
+          <p:nvPr/>
+        </p:nvSpPr>
+        <p:spPr>
+          <a:xfrm>
+            <a:off x="812800" y="2248886"/>
+            <a:ext cx="5118705" cy="3368486"/>
+          </a:xfrm>
+          <a:prstGeom prst="roundRect">
+            <a:avLst>
+              <a:gd name="adj" fmla="val 3770"/>
+            </a:avLst>
+          </a:prstGeom>
+          <a:solidFill>
+            <a:srgbClr val="15181F"/>
+          </a:solidFill>
+          <a:ln/>
+        </p:spPr>
       </p:sp>
       <p:sp>
         <p:nvSpPr>
@@ -13113,8 +17325,8 @@
         </p:nvSpPr>
         <p:spPr>
           <a:xfrm>
-            <a:off x="812800" y="3987837"/>
-            <a:ext cx="8502650" cy="892931"/>
+            <a:off x="1066800" y="2502886"/>
+            <a:ext cx="4749026" cy="358397"/>
           </a:xfrm>
           <a:prstGeom prst="rect">
             <a:avLst/>
@@ -13130,22 +17342,439 @@
           <a:p>
             <a:pPr algn="l" indent="0" marL="0">
               <a:lnSpc>
-                <a:spcPts val="2970"/>
-              </a:lnSpc>
-              <a:buNone/>
-            </a:pPr>
-            <a:r>
-              <a:rPr lang="en-US" sz="2200" dirty="0">
-                <a:solidFill>
-                  <a:srgbClr val="A3A9B6"/>
+                <a:spcPts val="2280"/>
+              </a:lnSpc>
+              <a:buNone/>
+            </a:pPr>
+            <a:r>
+              <a:rPr lang="en-US" sz="1900" b="1" dirty="0">
+                <a:solidFill>
+                  <a:srgbClr val="FF8A5C"/>
                 </a:solidFill>
                 <a:latin typeface="Space Grotesk" pitchFamily="34" charset="0"/>
                 <a:ea typeface="Space Grotesk" pitchFamily="34" charset="-122"/>
                 <a:cs typeface="Space Grotesk" pitchFamily="34" charset="-120"/>
               </a:rPr>
-              <a:t>A GitHub Action from Google that reads your commits and does the release paperwork for you.</a:t>
-            </a:r>
-            <a:endParaRPr lang="en-US" sz="2200" dirty="0"/>
+              <a:t>Required by the spec</a:t>
+            </a:r>
+            <a:endParaRPr lang="en-US" sz="1900" dirty="0"/>
+          </a:p>
+        </p:txBody>
+      </p:sp>
+      <p:sp>
+        <p:nvSpPr>
+          <p:cNvPr id="5" name="Text 3"/>
+          <p:cNvSpPr/>
+          <p:nvPr/>
+        </p:nvSpPr>
+        <p:spPr>
+          <a:xfrm>
+            <a:off x="1138682" y="2962883"/>
+            <a:ext cx="4669524" cy="2029354"/>
+          </a:xfrm>
+          <a:prstGeom prst="rect">
+            <a:avLst/>
+          </a:prstGeom>
+          <a:noFill/>
+          <a:ln/>
+        </p:spPr>
+        <p:txBody>
+          <a:bodyPr wrap="square" lIns="0" tIns="0" rIns="0" bIns="0" rtlCol="0" anchor="t">
+            <a:normAutofit/>
+          </a:bodyPr>
+          <a:lstStyle/>
+          <a:p>
+            <a:pPr algn="l" marL="182118" indent="-182118">
+              <a:lnSpc>
+                <a:spcPts val="1960"/>
+              </a:lnSpc>
+              <a:buSzPct val="100000"/>
+              <a:buChar char="•"/>
+            </a:pPr>
+            <a:r>
+              <a:rPr lang="en-US" sz="1400" dirty="0">
+                <a:solidFill>
+                  <a:srgbClr val="E6E2D8"/>
+                </a:solidFill>
+                <a:latin typeface="Space Grotesk" pitchFamily="34" charset="0"/>
+                <a:ea typeface="Space Grotesk" pitchFamily="34" charset="-122"/>
+                <a:cs typeface="Space Grotesk" pitchFamily="34" charset="-120"/>
+              </a:rPr>
+              <a:t>Exactly one space after the colon</a:t>
+            </a:r>
+            <a:endParaRPr lang="en-US" sz="1400" dirty="0"/>
+          </a:p>
+          <a:p>
+            <a:pPr algn="l" marL="182118" indent="-182118">
+              <a:lnSpc>
+                <a:spcPts val="1960"/>
+              </a:lnSpc>
+              <a:buSzPct val="100000"/>
+              <a:buChar char="•"/>
+            </a:pPr>
+            <a:r>
+              <a:rPr lang="en-US" sz="1400" dirty="0">
+                <a:solidFill>
+                  <a:srgbClr val="E6E2D8"/>
+                </a:solidFill>
+                <a:latin typeface="Space Grotesk" pitchFamily="34" charset="0"/>
+                <a:ea typeface="Space Grotesk" pitchFamily="34" charset="-122"/>
+                <a:cs typeface="Space Grotesk" pitchFamily="34" charset="-120"/>
+              </a:rPr>
+              <a:t>Scope in parentheses, ! right before the colon</a:t>
+            </a:r>
+            <a:endParaRPr lang="en-US" sz="1400" dirty="0"/>
+          </a:p>
+          <a:p>
+            <a:pPr algn="l" marL="182118" indent="-182118">
+              <a:lnSpc>
+                <a:spcPts val="1960"/>
+              </a:lnSpc>
+              <a:buSzPct val="100000"/>
+              <a:buChar char="•"/>
+            </a:pPr>
+            <a:r>
+              <a:rPr lang="en-US" sz="1400" dirty="0">
+                <a:solidFill>
+                  <a:srgbClr val="E6E2D8"/>
+                </a:solidFill>
+                <a:latin typeface="Space Grotesk" pitchFamily="34" charset="0"/>
+                <a:ea typeface="Space Grotesk" pitchFamily="34" charset="-122"/>
+                <a:cs typeface="Space Grotesk" pitchFamily="34" charset="-120"/>
+              </a:rPr>
+              <a:t>A blank line before the body and before footers</a:t>
+            </a:r>
+            <a:endParaRPr lang="en-US" sz="1400" dirty="0"/>
+          </a:p>
+          <a:p>
+            <a:pPr algn="l" marL="182118" indent="-182118">
+              <a:lnSpc>
+                <a:spcPts val="1960"/>
+              </a:lnSpc>
+              <a:buSzPct val="100000"/>
+              <a:buChar char="•"/>
+            </a:pPr>
+            <a:r>
+              <a:rPr lang="en-US" sz="1400" dirty="0">
+                <a:solidFill>
+                  <a:srgbClr val="E6E2D8"/>
+                </a:solidFill>
+                <a:latin typeface="Space Grotesk" pitchFamily="34" charset="0"/>
+                <a:ea typeface="Space Grotesk" pitchFamily="34" charset="-122"/>
+                <a:cs typeface="Space Grotesk" pitchFamily="34" charset="-120"/>
+              </a:rPr>
+              <a:t>Footer tokens use dashes: Reviewed-by</a:t>
+            </a:r>
+            <a:endParaRPr lang="en-US" sz="1400" dirty="0"/>
+          </a:p>
+          <a:p>
+            <a:pPr algn="l" marL="182118" indent="-182118">
+              <a:lnSpc>
+                <a:spcPts val="1960"/>
+              </a:lnSpc>
+              <a:buSzPct val="100000"/>
+              <a:buChar char="•"/>
+            </a:pPr>
+            <a:r>
+              <a:rPr lang="en-US" sz="1400" dirty="0">
+                <a:solidFill>
+                  <a:srgbClr val="E6E2D8"/>
+                </a:solidFill>
+                <a:latin typeface="Space Grotesk" pitchFamily="34" charset="0"/>
+                <a:ea typeface="Space Grotesk" pitchFamily="34" charset="-122"/>
+                <a:cs typeface="Space Grotesk" pitchFamily="34" charset="-120"/>
+              </a:rPr>
+              <a:t>BREAKING CHANGE must be uppercase</a:t>
+            </a:r>
+            <a:endParaRPr lang="en-US" sz="1400" dirty="0"/>
+          </a:p>
+        </p:txBody>
+      </p:sp>
+      <p:sp>
+        <p:nvSpPr>
+          <p:cNvPr id="6" name="Text 4"/>
+          <p:cNvSpPr/>
+          <p:nvPr/>
+        </p:nvSpPr>
+        <p:spPr>
+          <a:xfrm>
+            <a:off x="1066800" y="5093835"/>
+            <a:ext cx="4749026" cy="270744"/>
+          </a:xfrm>
+          <a:prstGeom prst="rect">
+            <a:avLst/>
+          </a:prstGeom>
+          <a:noFill/>
+          <a:ln/>
+        </p:spPr>
+        <p:txBody>
+          <a:bodyPr wrap="square" lIns="0" tIns="0" rIns="0" bIns="0" rtlCol="0" anchor="t">
+            <a:normAutofit/>
+          </a:bodyPr>
+          <a:lstStyle/>
+          <a:p>
+            <a:pPr algn="l" indent="0" marL="0">
+              <a:lnSpc>
+                <a:spcPts val="1680"/>
+              </a:lnSpc>
+              <a:buNone/>
+            </a:pPr>
+            <a:r>
+              <a:rPr lang="en-US" sz="1200" dirty="0">
+                <a:solidFill>
+                  <a:srgbClr val="A3A9B6"/>
+                </a:solidFill>
+                <a:latin typeface="Space Grotesk" pitchFamily="34" charset="0"/>
+                <a:ea typeface="Space Grotesk" pitchFamily="34" charset="-122"/>
+                <a:cs typeface="Space Grotesk" pitchFamily="34" charset="-120"/>
+              </a:rPr>
+              <a:t>Everything else is case-insensitive to tools.</a:t>
+            </a:r>
+            <a:endParaRPr lang="en-US" sz="1200" dirty="0"/>
+          </a:p>
+        </p:txBody>
+      </p:sp>
+      <p:sp>
+        <p:nvSpPr>
+          <p:cNvPr id="7" name="Shape 5"/>
+          <p:cNvSpPr/>
+          <p:nvPr/>
+        </p:nvSpPr>
+        <p:spPr>
+          <a:xfrm>
+            <a:off x="6242655" y="2255236"/>
+            <a:ext cx="5130195" cy="3355786"/>
+          </a:xfrm>
+          <a:prstGeom prst="roundRect">
+            <a:avLst>
+              <a:gd name="adj" fmla="val 3595"/>
+            </a:avLst>
+          </a:prstGeom>
+          <a:solidFill>
+            <a:srgbClr val="FFFDF8"/>
+          </a:solidFill>
+          <a:ln w="12700">
+            <a:solidFill>
+              <a:srgbClr val="E2DDD2"/>
+            </a:solidFill>
+            <a:prstDash val="solid"/>
+          </a:ln>
+        </p:spPr>
+      </p:sp>
+      <p:sp>
+        <p:nvSpPr>
+          <p:cNvPr id="8" name="Text 6"/>
+          <p:cNvSpPr/>
+          <p:nvPr/>
+        </p:nvSpPr>
+        <p:spPr>
+          <a:xfrm>
+            <a:off x="6502400" y="2514978"/>
+            <a:ext cx="4749026" cy="358397"/>
+          </a:xfrm>
+          <a:prstGeom prst="rect">
+            <a:avLst/>
+          </a:prstGeom>
+          <a:noFill/>
+          <a:ln/>
+        </p:spPr>
+        <p:txBody>
+          <a:bodyPr wrap="square" lIns="0" tIns="0" rIns="0" bIns="0" rtlCol="0" anchor="t">
+            <a:normAutofit/>
+          </a:bodyPr>
+          <a:lstStyle/>
+          <a:p>
+            <a:pPr algn="l" indent="0" marL="0">
+              <a:lnSpc>
+                <a:spcPts val="2280"/>
+              </a:lnSpc>
+              <a:buNone/>
+            </a:pPr>
+            <a:r>
+              <a:rPr lang="en-US" sz="1900" b="1" dirty="0">
+                <a:solidFill>
+                  <a:srgbClr val="2F62B0"/>
+                </a:solidFill>
+                <a:latin typeface="Space Grotesk" pitchFamily="34" charset="0"/>
+                <a:ea typeface="Space Grotesk" pitchFamily="34" charset="-122"/>
+                <a:cs typeface="Space Grotesk" pitchFamily="34" charset="-120"/>
+              </a:rPr>
+              <a:t>Team conventions (commitlint)</a:t>
+            </a:r>
+            <a:endParaRPr lang="en-US" sz="1900" dirty="0"/>
+          </a:p>
+        </p:txBody>
+      </p:sp>
+      <p:sp>
+        <p:nvSpPr>
+          <p:cNvPr id="9" name="Text 7"/>
+          <p:cNvSpPr/>
+          <p:nvPr/>
+        </p:nvSpPr>
+        <p:spPr>
+          <a:xfrm>
+            <a:off x="6574282" y="2974975"/>
+            <a:ext cx="4669524" cy="2029354"/>
+          </a:xfrm>
+          <a:prstGeom prst="rect">
+            <a:avLst/>
+          </a:prstGeom>
+          <a:noFill/>
+          <a:ln/>
+        </p:spPr>
+        <p:txBody>
+          <a:bodyPr wrap="square" lIns="0" tIns="0" rIns="0" bIns="0" rtlCol="0" anchor="t">
+            <a:normAutofit/>
+          </a:bodyPr>
+          <a:lstStyle/>
+          <a:p>
+            <a:pPr algn="l" marL="182118" indent="-182118">
+              <a:lnSpc>
+                <a:spcPts val="1960"/>
+              </a:lnSpc>
+              <a:buSzPct val="100000"/>
+              <a:buChar char="•"/>
+            </a:pPr>
+            <a:r>
+              <a:rPr lang="en-US" sz="1400" dirty="0">
+                <a:solidFill>
+                  <a:srgbClr val="1B1E26"/>
+                </a:solidFill>
+                <a:latin typeface="Space Grotesk" pitchFamily="34" charset="0"/>
+                <a:ea typeface="Space Grotesk" pitchFamily="34" charset="-122"/>
+                <a:cs typeface="Space Grotesk" pitchFamily="34" charset="-120"/>
+              </a:rPr>
+              <a:t>Lowercase type and scope</a:t>
+            </a:r>
+            <a:endParaRPr lang="en-US" sz="1400" dirty="0"/>
+          </a:p>
+          <a:p>
+            <a:pPr algn="l" marL="182118" indent="-182118">
+              <a:lnSpc>
+                <a:spcPts val="1960"/>
+              </a:lnSpc>
+              <a:buSzPct val="100000"/>
+              <a:buChar char="•"/>
+            </a:pPr>
+            <a:r>
+              <a:rPr lang="en-US" sz="1400" dirty="0">
+                <a:solidFill>
+                  <a:srgbClr val="1B1E26"/>
+                </a:solidFill>
+                <a:latin typeface="Space Grotesk" pitchFamily="34" charset="0"/>
+                <a:ea typeface="Space Grotesk" pitchFamily="34" charset="-122"/>
+                <a:cs typeface="Space Grotesk" pitchFamily="34" charset="-120"/>
+              </a:rPr>
+              <a:t>Multi-word scopes in kebab-case: user-profile</a:t>
+            </a:r>
+            <a:endParaRPr lang="en-US" sz="1400" dirty="0"/>
+          </a:p>
+          <a:p>
+            <a:pPr algn="l" marL="182118" indent="-182118">
+              <a:lnSpc>
+                <a:spcPts val="1960"/>
+              </a:lnSpc>
+              <a:buSzPct val="100000"/>
+              <a:buChar char="•"/>
+            </a:pPr>
+            <a:r>
+              <a:rPr lang="en-US" sz="1400" dirty="0">
+                <a:solidFill>
+                  <a:srgbClr val="1B1E26"/>
+                </a:solidFill>
+                <a:latin typeface="Space Grotesk" pitchFamily="34" charset="0"/>
+                <a:ea typeface="Space Grotesk" pitchFamily="34" charset="-122"/>
+                <a:cs typeface="Space Grotesk" pitchFamily="34" charset="-120"/>
+              </a:rPr>
+              <a:t>Start the description lowercase, in command form: add, not added</a:t>
+            </a:r>
+            <a:endParaRPr lang="en-US" sz="1400" dirty="0"/>
+          </a:p>
+          <a:p>
+            <a:pPr algn="l" marL="182118" indent="-182118">
+              <a:lnSpc>
+                <a:spcPts val="1960"/>
+              </a:lnSpc>
+              <a:buSzPct val="100000"/>
+              <a:buChar char="•"/>
+            </a:pPr>
+            <a:r>
+              <a:rPr lang="en-US" sz="1400" dirty="0">
+                <a:solidFill>
+                  <a:srgbClr val="1B1E26"/>
+                </a:solidFill>
+                <a:latin typeface="Space Grotesk" pitchFamily="34" charset="0"/>
+                <a:ea typeface="Space Grotesk" pitchFamily="34" charset="-122"/>
+                <a:cs typeface="Space Grotesk" pitchFamily="34" charset="-120"/>
+              </a:rPr>
+              <a:t>No period at the end</a:t>
+            </a:r>
+            <a:endParaRPr lang="en-US" sz="1400" dirty="0"/>
+          </a:p>
+          <a:p>
+            <a:pPr algn="l" marL="182118" indent="-182118">
+              <a:lnSpc>
+                <a:spcPts val="1960"/>
+              </a:lnSpc>
+              <a:buSzPct val="100000"/>
+              <a:buChar char="•"/>
+            </a:pPr>
+            <a:r>
+              <a:rPr lang="en-US" sz="1400" dirty="0">
+                <a:solidFill>
+                  <a:srgbClr val="1B1E26"/>
+                </a:solidFill>
+                <a:latin typeface="Space Grotesk" pitchFamily="34" charset="0"/>
+                <a:ea typeface="Space Grotesk" pitchFamily="34" charset="-122"/>
+                <a:cs typeface="Space Grotesk" pitchFamily="34" charset="-120"/>
+              </a:rPr>
+              <a:t>Header 100 characters max, aim for 72</a:t>
+            </a:r>
+            <a:endParaRPr lang="en-US" sz="1400" dirty="0"/>
+          </a:p>
+        </p:txBody>
+      </p:sp>
+      <p:sp>
+        <p:nvSpPr>
+          <p:cNvPr id="10" name="Text 8"/>
+          <p:cNvSpPr/>
+          <p:nvPr/>
+        </p:nvSpPr>
+        <p:spPr>
+          <a:xfrm>
+            <a:off x="6502400" y="5105933"/>
+            <a:ext cx="4749026" cy="270744"/>
+          </a:xfrm>
+          <a:prstGeom prst="rect">
+            <a:avLst/>
+          </a:prstGeom>
+          <a:noFill/>
+          <a:ln/>
+        </p:spPr>
+        <p:txBody>
+          <a:bodyPr wrap="square" lIns="0" tIns="0" rIns="0" bIns="0" rtlCol="0" anchor="t">
+            <a:normAutofit/>
+          </a:bodyPr>
+          <a:lstStyle/>
+          <a:p>
+            <a:pPr algn="l" indent="0" marL="0">
+              <a:lnSpc>
+                <a:spcPts val="1680"/>
+              </a:lnSpc>
+              <a:buNone/>
+            </a:pPr>
+            <a:r>
+              <a:rPr lang="en-US" sz="1200" dirty="0">
+                <a:solidFill>
+                  <a:srgbClr val="5D6270"/>
+                </a:solidFill>
+                <a:latin typeface="Space Grotesk" pitchFamily="34" charset="0"/>
+                <a:ea typeface="Space Grotesk" pitchFamily="34" charset="-122"/>
+                <a:cs typeface="Space Grotesk" pitchFamily="34" charset="-120"/>
+              </a:rPr>
+              <a:t>Acronyms like SSO are fine inside the description.</a:t>
+            </a:r>
+            <a:endParaRPr lang="en-US" sz="1200" dirty="0"/>
           </a:p>
         </p:txBody>
       </p:sp>
@@ -13183,10 +17812,10 @@
         <a:srgbClr val="2F62B0"/>
       </a:accent3>
       <a:accent4>
-        <a:srgbClr val="8A6400"/>
+        <a:srgbClr val="7FB0FF"/>
       </a:accent4>
       <a:accent5>
-        <a:srgbClr val="7FB0FF"/>
+        <a:srgbClr val="8A6400"/>
       </a:accent5>
       <a:accent6>
         <a:srgbClr val="E8592A"/>
